--- a/mon/ngu_van/slide/lop11/Slide_NGUVAN11_Bai2_CauTuVaHinhAnhTrongThoTruTinh_T12-22.pptx
+++ b/mon/ngu_van/slide/lop11/Slide_NGUVAN11_Bai2_CauTuVaHinhAnhTrongThoTruTinh_T12-22.pptx
@@ -36,6 +36,8 @@
     <p:sldId id="284" r:id="rId36"/>
     <p:sldId id="285" r:id="rId37"/>
     <p:sldId id="286" r:id="rId38"/>
+    <p:sldId id="287" r:id="rId39"/>
+    <p:sldId id="288" r:id="rId40"/>
   </p:sldIdLst>
   <p:sldSz cx="12191695" cy="6858000" type="screen4x3"/>
   <p:notesSz cx="6858000" cy="9144000"/>
@@ -602,7 +604,7 @@
           <a:lstStyle/>
           <a:p>
             <a:r>
-              <a:t>Slide ĐỀ BÀI – cho HS suy nghĩ, thảo luận (không chiếu lời giải). </a:t>
+              <a:t>Bấm vào đường link hoặc quét mã QR để mở video (cần Internet). </a:t>
             </a:r>
           </a:p>
         </p:txBody>
@@ -672,7 +674,7 @@
           <a:lstStyle/>
           <a:p>
             <a:r>
-              <a:t>Slide LỜI GIẢI – GV chốt sau khi HS trình bày. </a:t>
+              <a:t>Slide ĐỀ BÀI – cho HS suy nghĩ, thảo luận (không chiếu lời giải). </a:t>
             </a:r>
           </a:p>
         </p:txBody>
@@ -742,7 +744,7 @@
           <a:lstStyle/>
           <a:p>
             <a:r>
-              <a:t>Slide ĐỀ BÀI – cho HS suy nghĩ, thảo luận (không chiếu lời giải). </a:t>
+              <a:t>Slide LỜI GIẢI – GV chốt sau khi HS trình bày. </a:t>
             </a:r>
           </a:p>
         </p:txBody>
@@ -812,7 +814,7 @@
           <a:lstStyle/>
           <a:p>
             <a:r>
-              <a:t>Slide LỜI GIẢI – GV chốt sau khi HS trình bày. </a:t>
+              <a:t>Slide ĐỀ BÀI – cho HS suy nghĩ, thảo luận (không chiếu lời giải). </a:t>
             </a:r>
           </a:p>
         </p:txBody>
@@ -882,7 +884,7 @@
           <a:lstStyle/>
           <a:p>
             <a:r>
-              <a:t>Slide ĐỀ BÀI – cho HS suy nghĩ, thảo luận (không chiếu lời giải). </a:t>
+              <a:t>Slide LỜI GIẢI – GV chốt sau khi HS trình bày. </a:t>
             </a:r>
           </a:p>
         </p:txBody>
@@ -952,7 +954,7 @@
           <a:lstStyle/>
           <a:p>
             <a:r>
-              <a:t>Slide LỜI GIẢI – GV chốt sau khi HS trình bày. </a:t>
+              <a:t>Slide ĐỀ BÀI – cho HS suy nghĩ, thảo luận (không chiếu lời giải). </a:t>
             </a:r>
           </a:p>
         </p:txBody>
@@ -1022,7 +1024,7 @@
           <a:lstStyle/>
           <a:p>
             <a:r>
-              <a:t>Slide ĐỀ BÀI – cho HS suy nghĩ, thảo luận (không chiếu lời giải). </a:t>
+              <a:t>Slide LỜI GIẢI – GV chốt sau khi HS trình bày. </a:t>
             </a:r>
           </a:p>
         </p:txBody>
@@ -1092,7 +1094,7 @@
           <a:lstStyle/>
           <a:p>
             <a:r>
-              <a:t>Slide LỜI GIẢI – GV chốt sau khi HS trình bày. </a:t>
+              <a:t>Bấm vào đường link hoặc quét mã QR để mở video (cần Internet). </a:t>
             </a:r>
           </a:p>
         </p:txBody>
@@ -1398,6 +1400,146 @@
 </file>
 
 <file path=ppt/notesSlides/notesSlide21.xml><?xml version="1.0" encoding="utf-8"?>
+<p:notes xmlns:a="http://schemas.openxmlformats.org/drawingml/2006/main" xmlns:p="http://schemas.openxmlformats.org/presentationml/2006/main" xmlns:r="http://schemas.openxmlformats.org/officeDocument/2006/relationships">
+  <p:cSld>
+    <p:spTree>
+      <p:nvGrpSpPr>
+        <p:cNvPr id="1" name=""/>
+        <p:cNvGrpSpPr/>
+        <p:nvPr/>
+      </p:nvGrpSpPr>
+      <p:grpSpPr>
+        <a:xfrm>
+          <a:off x="0" y="0"/>
+          <a:ext cx="0" cy="0"/>
+          <a:chOff x="0" y="0"/>
+          <a:chExt cx="0" cy="0"/>
+        </a:xfrm>
+      </p:grpSpPr>
+      <p:sp>
+        <p:nvSpPr>
+          <p:cNvPr id="2" name="Slide Image Placeholder 1"/>
+          <p:cNvSpPr>
+            <a:spLocks noGrp="1"/>
+          </p:cNvSpPr>
+          <p:nvPr>
+            <p:ph type="sldImg" idx="2"/>
+          </p:nvPr>
+        </p:nvSpPr>
+        <p:spPr/>
+      </p:sp>
+      <p:sp>
+        <p:nvSpPr>
+          <p:cNvPr id="3" name="Notes Placeholder 2"/>
+          <p:cNvSpPr>
+            <a:spLocks noGrp="1"/>
+          </p:cNvSpPr>
+          <p:nvPr>
+            <p:ph type="body" idx="3" sz="quarter"/>
+          </p:nvPr>
+        </p:nvSpPr>
+        <p:spPr/>
+        <p:txBody>
+          <a:bodyPr/>
+          <a:lstStyle/>
+          <a:p>
+            <a:r>
+              <a:t>Slide LỜI GIẢI – GV chốt sau khi HS trình bày. </a:t>
+            </a:r>
+          </a:p>
+        </p:txBody>
+      </p:sp>
+      <p:sp>
+        <p:nvSpPr>
+          <p:cNvPr id="4" name="Slide Number Placeholder 3"/>
+          <p:cNvSpPr>
+            <a:spLocks noGrp="1"/>
+          </p:cNvSpPr>
+          <p:nvPr>
+            <p:ph type="sldNum" idx="5" sz="quarter"/>
+          </p:nvPr>
+        </p:nvSpPr>
+        <p:spPr/>
+      </p:sp>
+    </p:spTree>
+  </p:cSld>
+  <p:clrMapOvr>
+    <a:masterClrMapping/>
+  </p:clrMapOvr>
+</p:notes>
+</file>
+
+<file path=ppt/notesSlides/notesSlide22.xml><?xml version="1.0" encoding="utf-8"?>
+<p:notes xmlns:a="http://schemas.openxmlformats.org/drawingml/2006/main" xmlns:p="http://schemas.openxmlformats.org/presentationml/2006/main" xmlns:r="http://schemas.openxmlformats.org/officeDocument/2006/relationships">
+  <p:cSld>
+    <p:spTree>
+      <p:nvGrpSpPr>
+        <p:cNvPr id="1" name=""/>
+        <p:cNvGrpSpPr/>
+        <p:nvPr/>
+      </p:nvGrpSpPr>
+      <p:grpSpPr>
+        <a:xfrm>
+          <a:off x="0" y="0"/>
+          <a:ext cx="0" cy="0"/>
+          <a:chOff x="0" y="0"/>
+          <a:chExt cx="0" cy="0"/>
+        </a:xfrm>
+      </p:grpSpPr>
+      <p:sp>
+        <p:nvSpPr>
+          <p:cNvPr id="2" name="Slide Image Placeholder 1"/>
+          <p:cNvSpPr>
+            <a:spLocks noGrp="1"/>
+          </p:cNvSpPr>
+          <p:nvPr>
+            <p:ph type="sldImg" idx="2"/>
+          </p:nvPr>
+        </p:nvSpPr>
+        <p:spPr/>
+      </p:sp>
+      <p:sp>
+        <p:nvSpPr>
+          <p:cNvPr id="3" name="Notes Placeholder 2"/>
+          <p:cNvSpPr>
+            <a:spLocks noGrp="1"/>
+          </p:cNvSpPr>
+          <p:nvPr>
+            <p:ph type="body" idx="3" sz="quarter"/>
+          </p:nvPr>
+        </p:nvSpPr>
+        <p:spPr/>
+        <p:txBody>
+          <a:bodyPr/>
+          <a:lstStyle/>
+          <a:p>
+            <a:r>
+              <a:t>Slide ĐỀ BÀI – cho HS suy nghĩ, thảo luận (không chiếu lời giải). </a:t>
+            </a:r>
+          </a:p>
+        </p:txBody>
+      </p:sp>
+      <p:sp>
+        <p:nvSpPr>
+          <p:cNvPr id="4" name="Slide Number Placeholder 3"/>
+          <p:cNvSpPr>
+            <a:spLocks noGrp="1"/>
+          </p:cNvSpPr>
+          <p:nvPr>
+            <p:ph type="sldNum" idx="5" sz="quarter"/>
+          </p:nvPr>
+        </p:nvSpPr>
+        <p:spPr/>
+      </p:sp>
+    </p:spTree>
+  </p:cSld>
+  <p:clrMapOvr>
+    <a:masterClrMapping/>
+  </p:clrMapOvr>
+</p:notes>
+</file>
+
+<file path=ppt/notesSlides/notesSlide23.xml><?xml version="1.0" encoding="utf-8"?>
 <p:notes xmlns:a="http://schemas.openxmlformats.org/drawingml/2006/main" xmlns:p="http://schemas.openxmlformats.org/presentationml/2006/main" xmlns:r="http://schemas.openxmlformats.org/officeDocument/2006/relationships">
   <p:cSld>
     <p:spTree>
@@ -6333,14 +6475,14 @@
         </p:nvSpPr>
         <p:spPr>
           <a:xfrm>
-            <a:off x="10253167" y="457200"/>
-            <a:ext cx="1389888" cy="457200"/>
+            <a:off x="10408615" y="457200"/>
+            <a:ext cx="1234440" cy="457200"/>
           </a:xfrm>
           <a:prstGeom prst="roundRect">
             <a:avLst/>
           </a:prstGeom>
           <a:solidFill>
-            <a:srgbClr val="1E40AF"/>
+            <a:srgbClr val="991B1B"/>
           </a:solidFill>
           <a:ln>
             <a:noFill/>
@@ -6373,7 +6515,7 @@
                 </a:solidFill>
                 <a:latin typeface="Arial"/>
               </a:rPr>
-              <a:t>ĐỀ BÀI</a:t>
+              <a:t>VIDEO</a:t>
             </a:r>
           </a:p>
         </p:txBody>
@@ -6387,7 +6529,7 @@
         <p:spPr>
           <a:xfrm>
             <a:off x="731520" y="274320"/>
-            <a:ext cx="9582912" cy="868680"/>
+            <a:ext cx="9738360" cy="868680"/>
           </a:xfrm>
           <a:prstGeom prst="rect">
             <a:avLst/>
@@ -6407,7 +6549,7 @@
                 </a:solidFill>
                 <a:latin typeface="Arial"/>
               </a:rPr>
-              <a:t>NHAN ĐỀ, ĐỀ TỪ VÀ KHUNG CẢNH</a:t>
+              <a:t>VIDEO THAM KHẢO</a:t>
             </a:r>
           </a:p>
         </p:txBody>
@@ -6491,16 +6633,40 @@
           </a:p>
         </p:txBody>
       </p:sp>
-      <p:sp>
-        <p:nvSpPr>
-          <p:cNvPr id="7" name="TextBox 6"/>
+      <p:pic>
+        <p:nvPicPr>
+          <p:cNvPr id="7" name="Picture 6" descr="QR_video_zdVP4hMfcmk.png"/>
+          <p:cNvPicPr>
+            <a:picLocks noChangeAspect="1"/>
+          </p:cNvPicPr>
+          <p:nvPr/>
+        </p:nvPicPr>
+        <p:blipFill>
+          <a:blip r:embed="rId2"/>
+          <a:stretch>
+            <a:fillRect/>
+          </a:stretch>
+        </p:blipFill>
+        <p:spPr>
+          <a:xfrm>
+            <a:off x="8412480" y="1554480"/>
+            <a:ext cx="3108960" cy="3108960"/>
+          </a:xfrm>
+          <a:prstGeom prst="rect">
+            <a:avLst/>
+          </a:prstGeom>
+        </p:spPr>
+      </p:pic>
+      <p:sp>
+        <p:nvSpPr>
+          <p:cNvPr id="8" name="TextBox 7"/>
           <p:cNvSpPr txBox="1"/>
           <p:nvPr/>
         </p:nvSpPr>
         <p:spPr>
           <a:xfrm>
-            <a:off x="731520" y="1463040"/>
-            <a:ext cx="10789920" cy="3566160"/>
+            <a:off x="731520" y="1554480"/>
+            <a:ext cx="7498079" cy="4206240"/>
           </a:xfrm>
           <a:prstGeom prst="rect">
             <a:avLst/>
@@ -6525,94 +6691,61 @@
                 </a:solidFill>
                 <a:latin typeface="Calibri"/>
               </a:rPr>
-              <a:t>Cảm nhận về nhan đề Tràng giang? Nhan đề và đề từ liên quan thế nào với nội dung cảm xúc? Khung cảnh được “vẽ” ra có tính chất gì?</a:t>
-            </a:r>
-          </a:p>
-        </p:txBody>
-      </p:sp>
-      <p:sp>
-        <p:nvSpPr>
-          <p:cNvPr id="8" name="Rounded Rectangle 7"/>
-          <p:cNvSpPr/>
-          <p:nvPr/>
-        </p:nvSpPr>
-        <p:spPr>
-          <a:xfrm>
-            <a:off x="731520" y="5120640"/>
-            <a:ext cx="10789920" cy="693420"/>
-          </a:xfrm>
-          <a:prstGeom prst="roundRect">
-            <a:avLst>
-              <a:gd name="adj" fmla="val 8000"/>
-            </a:avLst>
-          </a:prstGeom>
-          <a:solidFill>
-            <a:srgbClr val="EFF4FF"/>
-          </a:solidFill>
-          <a:ln w="19050">
-            <a:solidFill>
-              <a:srgbClr val="1E40AF"/>
-            </a:solidFill>
-          </a:ln>
-          <a:effectLst/>
-        </p:spPr>
-        <p:style>
-          <a:lnRef idx="1">
-            <a:schemeClr val="accent1"/>
-          </a:lnRef>
-          <a:fillRef idx="3">
-            <a:schemeClr val="accent1"/>
-          </a:fillRef>
-          <a:effectRef idx="2">
-            <a:schemeClr val="accent1"/>
-          </a:effectRef>
-          <a:fontRef idx="minor">
-            <a:schemeClr val="lt1"/>
-          </a:fontRef>
-        </p:style>
-        <p:txBody>
-          <a:bodyPr rtlCol="0" anchor="ctr"/>
-          <a:lstStyle/>
-          <a:p>
-            <a:pPr algn="ctr"/>
-          </a:p>
-        </p:txBody>
-      </p:sp>
-      <p:sp>
-        <p:nvSpPr>
-          <p:cNvPr id="9" name="TextBox 8"/>
-          <p:cNvSpPr txBox="1"/>
-          <p:nvPr/>
-        </p:nvSpPr>
-        <p:spPr>
-          <a:xfrm>
-            <a:off x="914400" y="5120640"/>
-            <a:ext cx="10424160" cy="693420"/>
-          </a:xfrm>
-          <a:prstGeom prst="rect">
-            <a:avLst/>
-          </a:prstGeom>
-          <a:noFill/>
-        </p:spPr>
-        <p:txBody>
-          <a:bodyPr wrap="square" anchor="ctr" lIns="45720" rIns="45720">
-            <a:spAutoFit/>
-          </a:bodyPr>
-          <a:lstStyle/>
+              <a:t>🎬 Bài thơ Tràng giang – Huy Cận – Tô Kiều Ngân ngâm</a:t>
+            </a:r>
+          </a:p>
           <a:p>
             <a:pPr algn="l">
               <a:spcAft>
-                <a:spcPts val="400"/>
+                <a:spcPts val="800"/>
               </a:spcAft>
             </a:pPr>
             <a:r>
-              <a:rPr sz="2200" b="1">
-                <a:solidFill>
-                  <a:srgbClr val="1E40AF"/>
+              <a:rPr sz="2000">
+                <a:solidFill>
+                  <a:srgbClr val="64748B"/>
                 </a:solidFill>
                 <a:latin typeface="Calibri"/>
               </a:rPr>
-              <a:t>💡 Đề từ: “Bâng khuâng trời rộng nhớ sông dài”.</a:t>
+              <a:t>Kênh: Lê &amp; H</a:t>
+            </a:r>
+          </a:p>
+          <a:p>
+            <a:pPr algn="l" marL="365760" indent="-365760">
+              <a:spcAft>
+                <a:spcPts val="800"/>
+              </a:spcAft>
+              <a:buClr>
+                <a:srgbClr val="1E40AF"/>
+              </a:buClr>
+              <a:buFont typeface="Arial"/>
+              <a:buChar char="•"/>
+            </a:pPr>
+            <a:r>
+              <a:rPr sz="2000">
+                <a:solidFill>
+                  <a:srgbClr val="1E293B"/>
+                </a:solidFill>
+                <a:latin typeface="Calibri"/>
+              </a:rPr>
+              <a:t>Đọc diễn cảm Tràng giang</a:t>
+            </a:r>
+          </a:p>
+          <a:p>
+            <a:pPr algn="l">
+              <a:spcAft>
+                <a:spcPts val="800"/>
+              </a:spcAft>
+            </a:pPr>
+            <a:r>
+              <a:rPr sz="1600">
+                <a:solidFill>
+                  <a:srgbClr val="64748B"/>
+                </a:solidFill>
+                <a:latin typeface="Calibri"/>
+                <a:hlinkClick r:id="rId3"/>
+              </a:rPr>
+              <a:t>https://www.youtube.com/watch?v=zdVP4hMfcmk</a:t>
             </a:r>
           </a:p>
         </p:txBody>
@@ -6695,14 +6828,14 @@
         </p:nvSpPr>
         <p:spPr>
           <a:xfrm>
-            <a:off x="9942271" y="457200"/>
-            <a:ext cx="1700784" cy="457200"/>
+            <a:off x="10253167" y="457200"/>
+            <a:ext cx="1389888" cy="457200"/>
           </a:xfrm>
           <a:prstGeom prst="roundRect">
             <a:avLst/>
           </a:prstGeom>
           <a:solidFill>
-            <a:srgbClr val="991B1B"/>
+            <a:srgbClr val="1E40AF"/>
           </a:solidFill>
           <a:ln>
             <a:noFill/>
@@ -6735,7 +6868,7 @@
                 </a:solidFill>
                 <a:latin typeface="Arial"/>
               </a:rPr>
-              <a:t>LỜI GIẢI</a:t>
+              <a:t>ĐỀ BÀI</a:t>
             </a:r>
           </a:p>
         </p:txBody>
@@ -6749,7 +6882,7 @@
         <p:spPr>
           <a:xfrm>
             <a:off x="731520" y="274320"/>
-            <a:ext cx="9272016" cy="868680"/>
+            <a:ext cx="9582912" cy="868680"/>
           </a:xfrm>
           <a:prstGeom prst="rect">
             <a:avLst/>
@@ -6862,7 +6995,7 @@
         <p:spPr>
           <a:xfrm>
             <a:off x="731520" y="1463040"/>
-            <a:ext cx="10789920" cy="3474720"/>
+            <a:ext cx="10789920" cy="3566160"/>
           </a:xfrm>
           <a:prstGeom prst="rect">
             <a:avLst/>
@@ -6875,66 +7008,19 @@
           </a:bodyPr>
           <a:lstStyle/>
           <a:p>
-            <a:pPr algn="l" marL="365760" indent="-365760">
+            <a:pPr algn="l">
               <a:spcAft>
                 <a:spcPts val="800"/>
               </a:spcAft>
-              <a:buClr>
-                <a:srgbClr val="1E40AF"/>
-              </a:buClr>
-              <a:buFont typeface="Arial"/>
-              <a:buChar char="•"/>
             </a:pPr>
             <a:r>
-              <a:rPr sz="2300">
+              <a:rPr sz="2600" b="1">
                 <a:solidFill>
                   <a:srgbClr val="1E293B"/>
                 </a:solidFill>
                 <a:latin typeface="Calibri"/>
               </a:rPr>
-              <a:t>“Tràng giang”: âm Hán Việt, vần “ang” vang mở – dòng sông mang tầm vũ trụ.</a:t>
-            </a:r>
-          </a:p>
-          <a:p>
-            <a:pPr algn="l" marL="365760" indent="-365760">
-              <a:spcAft>
-                <a:spcPts val="800"/>
-              </a:spcAft>
-              <a:buClr>
-                <a:srgbClr val="1E40AF"/>
-              </a:buClr>
-              <a:buFont typeface="Arial"/>
-              <a:buChar char="•"/>
-            </a:pPr>
-            <a:r>
-              <a:rPr sz="2300">
-                <a:solidFill>
-                  <a:srgbClr val="1E293B"/>
-                </a:solidFill>
-                <a:latin typeface="Calibri"/>
-              </a:rPr>
-              <a:t>Đề từ gợi cảm xúc chủ đạo: bâng khuâng, nhớ nhung.</a:t>
-            </a:r>
-          </a:p>
-          <a:p>
-            <a:pPr algn="l" marL="365760" indent="-365760">
-              <a:spcAft>
-                <a:spcPts val="800"/>
-              </a:spcAft>
-              <a:buClr>
-                <a:srgbClr val="1E40AF"/>
-              </a:buClr>
-              <a:buFont typeface="Arial"/>
-              <a:buChar char="•"/>
-            </a:pPr>
-            <a:r>
-              <a:rPr sz="2300">
-                <a:solidFill>
-                  <a:srgbClr val="1E293B"/>
-                </a:solidFill>
-                <a:latin typeface="Calibri"/>
-              </a:rPr>
-              <a:t>Khung cảnh: mênh mông, hiu quạnh, vắng lặng, cổ kính.</a:t>
+              <a:t>Cảm nhận về nhan đề Tràng giang? Nhan đề và đề từ liên quan thế nào với nội dung cảm xúc? Khung cảnh được “vẽ” ra có tính chất gì?</a:t>
             </a:r>
           </a:p>
         </p:txBody>
@@ -6947,8 +7033,8 @@
         </p:nvSpPr>
         <p:spPr>
           <a:xfrm>
-            <a:off x="731520" y="5074920"/>
-            <a:ext cx="10789920" cy="731520"/>
+            <a:off x="731520" y="5120640"/>
+            <a:ext cx="10789920" cy="693420"/>
           </a:xfrm>
           <a:prstGeom prst="roundRect">
             <a:avLst>
@@ -6956,11 +7042,11 @@
             </a:avLst>
           </a:prstGeom>
           <a:solidFill>
-            <a:srgbClr val="FEF2F2"/>
+            <a:srgbClr val="EFF4FF"/>
           </a:solidFill>
           <a:ln w="19050">
             <a:solidFill>
-              <a:srgbClr val="991B1B"/>
+              <a:srgbClr val="1E40AF"/>
             </a:solidFill>
           </a:ln>
           <a:effectLst/>
@@ -6995,8 +7081,8 @@
         </p:nvSpPr>
         <p:spPr>
           <a:xfrm>
-            <a:off x="914400" y="5074920"/>
-            <a:ext cx="10424160" cy="731520"/>
+            <a:off x="914400" y="5120640"/>
+            <a:ext cx="10424160" cy="693420"/>
           </a:xfrm>
           <a:prstGeom prst="rect">
             <a:avLst/>
@@ -7015,13 +7101,13 @@
               </a:spcAft>
             </a:pPr>
             <a:r>
-              <a:rPr sz="2400" b="1">
-                <a:solidFill>
-                  <a:srgbClr val="991B1B"/>
+              <a:rPr sz="2200" b="1">
+                <a:solidFill>
+                  <a:srgbClr val="1E40AF"/>
                 </a:solidFill>
                 <a:latin typeface="Calibri"/>
               </a:rPr>
-              <a:t>Nỗi buồn của cái tôi trước không gian vô tận.</a:t>
+              <a:t>💡 Đề từ: “Bâng khuâng trời rộng nhớ sông dài”.</a:t>
             </a:r>
           </a:p>
         </p:txBody>
@@ -7104,14 +7190,14 @@
         </p:nvSpPr>
         <p:spPr>
           <a:xfrm>
-            <a:off x="10253167" y="457200"/>
-            <a:ext cx="1389888" cy="457200"/>
+            <a:off x="9942271" y="457200"/>
+            <a:ext cx="1700784" cy="457200"/>
           </a:xfrm>
           <a:prstGeom prst="roundRect">
             <a:avLst/>
           </a:prstGeom>
           <a:solidFill>
-            <a:srgbClr val="1E40AF"/>
+            <a:srgbClr val="991B1B"/>
           </a:solidFill>
           <a:ln>
             <a:noFill/>
@@ -7144,7 +7230,7 @@
                 </a:solidFill>
                 <a:latin typeface="Arial"/>
               </a:rPr>
-              <a:t>ĐỀ BÀI</a:t>
+              <a:t>LỜI GIẢI</a:t>
             </a:r>
           </a:p>
         </p:txBody>
@@ -7158,7 +7244,7 @@
         <p:spPr>
           <a:xfrm>
             <a:off x="731520" y="274320"/>
-            <a:ext cx="9582912" cy="868680"/>
+            <a:ext cx="9272016" cy="868680"/>
           </a:xfrm>
           <a:prstGeom prst="rect">
             <a:avLst/>
@@ -7178,7 +7264,7 @@
                 </a:solidFill>
                 <a:latin typeface="Arial"/>
               </a:rPr>
-              <a:t>CẤU TỨ VÀ SỰ TƯƠNG PHẢN</a:t>
+              <a:t>NHAN ĐỀ, ĐỀ TỪ VÀ KHUNG CẢNH</a:t>
             </a:r>
           </a:p>
         </p:txBody>
@@ -7271,7 +7357,7 @@
         <p:spPr>
           <a:xfrm>
             <a:off x="731520" y="1463040"/>
-            <a:ext cx="10789920" cy="3566160"/>
+            <a:ext cx="10789920" cy="3474720"/>
           </a:xfrm>
           <a:prstGeom prst="rect">
             <a:avLst/>
@@ -7284,19 +7370,66 @@
           </a:bodyPr>
           <a:lstStyle/>
           <a:p>
-            <a:pPr algn="l">
+            <a:pPr algn="l" marL="365760" indent="-365760">
               <a:spcAft>
                 <a:spcPts val="800"/>
               </a:spcAft>
+              <a:buClr>
+                <a:srgbClr val="1E40AF"/>
+              </a:buClr>
+              <a:buFont typeface="Arial"/>
+              <a:buChar char="•"/>
             </a:pPr>
             <a:r>
-              <a:rPr sz="2600" b="1">
+              <a:rPr sz="2300">
                 <a:solidFill>
                   <a:srgbClr val="1E293B"/>
                 </a:solidFill>
                 <a:latin typeface="Calibri"/>
               </a:rPr>
-              <a:t>Bài thơ được cấu tứ như thế nào? Chỉ ra sự tương phản giữa các hình ảnh trong khổ thứ hai và sự triển khai ở các khổ sau.</a:t>
+              <a:t>“Tràng giang”: âm Hán Việt, vần “ang” vang mở – dòng sông mang tầm vũ trụ.</a:t>
+            </a:r>
+          </a:p>
+          <a:p>
+            <a:pPr algn="l" marL="365760" indent="-365760">
+              <a:spcAft>
+                <a:spcPts val="800"/>
+              </a:spcAft>
+              <a:buClr>
+                <a:srgbClr val="1E40AF"/>
+              </a:buClr>
+              <a:buFont typeface="Arial"/>
+              <a:buChar char="•"/>
+            </a:pPr>
+            <a:r>
+              <a:rPr sz="2300">
+                <a:solidFill>
+                  <a:srgbClr val="1E293B"/>
+                </a:solidFill>
+                <a:latin typeface="Calibri"/>
+              </a:rPr>
+              <a:t>Đề từ gợi cảm xúc chủ đạo: bâng khuâng, nhớ nhung.</a:t>
+            </a:r>
+          </a:p>
+          <a:p>
+            <a:pPr algn="l" marL="365760" indent="-365760">
+              <a:spcAft>
+                <a:spcPts val="800"/>
+              </a:spcAft>
+              <a:buClr>
+                <a:srgbClr val="1E40AF"/>
+              </a:buClr>
+              <a:buFont typeface="Arial"/>
+              <a:buChar char="•"/>
+            </a:pPr>
+            <a:r>
+              <a:rPr sz="2300">
+                <a:solidFill>
+                  <a:srgbClr val="1E293B"/>
+                </a:solidFill>
+                <a:latin typeface="Calibri"/>
+              </a:rPr>
+              <a:t>Khung cảnh: mênh mông, hiu quạnh, vắng lặng, cổ kính.</a:t>
             </a:r>
           </a:p>
         </p:txBody>
@@ -7309,8 +7442,8 @@
         </p:nvSpPr>
         <p:spPr>
           <a:xfrm>
-            <a:off x="731520" y="5120640"/>
-            <a:ext cx="10789920" cy="693420"/>
+            <a:off x="731520" y="5074920"/>
+            <a:ext cx="10789920" cy="731520"/>
           </a:xfrm>
           <a:prstGeom prst="roundRect">
             <a:avLst>
@@ -7318,11 +7451,11 @@
             </a:avLst>
           </a:prstGeom>
           <a:solidFill>
-            <a:srgbClr val="EFF4FF"/>
+            <a:srgbClr val="FEF2F2"/>
           </a:solidFill>
           <a:ln w="19050">
             <a:solidFill>
-              <a:srgbClr val="1E40AF"/>
+              <a:srgbClr val="991B1B"/>
             </a:solidFill>
           </a:ln>
           <a:effectLst/>
@@ -7357,8 +7490,8 @@
         </p:nvSpPr>
         <p:spPr>
           <a:xfrm>
-            <a:off x="914400" y="5120640"/>
-            <a:ext cx="10424160" cy="693420"/>
+            <a:off x="914400" y="5074920"/>
+            <a:ext cx="10424160" cy="731520"/>
           </a:xfrm>
           <a:prstGeom prst="rect">
             <a:avLst/>
@@ -7377,13 +7510,13 @@
               </a:spcAft>
             </a:pPr>
             <a:r>
-              <a:rPr sz="2200" b="1">
-                <a:solidFill>
-                  <a:srgbClr val="1E40AF"/>
+              <a:rPr sz="2400" b="1">
+                <a:solidFill>
+                  <a:srgbClr val="991B1B"/>
                 </a:solidFill>
                 <a:latin typeface="Calibri"/>
               </a:rPr>
-              <a:t>💡 Cái gì nhỏ bé, cái gì rộng lớn?</a:t>
+              <a:t>Nỗi buồn của cái tôi trước không gian vô tận.</a:t>
             </a:r>
           </a:p>
         </p:txBody>
@@ -7466,14 +7599,14 @@
         </p:nvSpPr>
         <p:spPr>
           <a:xfrm>
-            <a:off x="9942271" y="457200"/>
-            <a:ext cx="1700784" cy="457200"/>
+            <a:off x="10253167" y="457200"/>
+            <a:ext cx="1389888" cy="457200"/>
           </a:xfrm>
           <a:prstGeom prst="roundRect">
             <a:avLst/>
           </a:prstGeom>
           <a:solidFill>
-            <a:srgbClr val="991B1B"/>
+            <a:srgbClr val="1E40AF"/>
           </a:solidFill>
           <a:ln>
             <a:noFill/>
@@ -7506,7 +7639,7 @@
                 </a:solidFill>
                 <a:latin typeface="Arial"/>
               </a:rPr>
-              <a:t>LỜI GIẢI</a:t>
+              <a:t>ĐỀ BÀI</a:t>
             </a:r>
           </a:p>
         </p:txBody>
@@ -7520,7 +7653,7 @@
         <p:spPr>
           <a:xfrm>
             <a:off x="731520" y="274320"/>
-            <a:ext cx="9272016" cy="868680"/>
+            <a:ext cx="9582912" cy="868680"/>
           </a:xfrm>
           <a:prstGeom prst="rect">
             <a:avLst/>
@@ -7633,7 +7766,7 @@
         <p:spPr>
           <a:xfrm>
             <a:off x="731520" y="1463040"/>
-            <a:ext cx="10789920" cy="3474720"/>
+            <a:ext cx="10789920" cy="3566160"/>
           </a:xfrm>
           <a:prstGeom prst="rect">
             <a:avLst/>
@@ -7646,66 +7779,19 @@
           </a:bodyPr>
           <a:lstStyle/>
           <a:p>
-            <a:pPr algn="l" marL="365760" indent="-365760">
+            <a:pPr algn="l">
               <a:spcAft>
                 <a:spcPts val="800"/>
               </a:spcAft>
-              <a:buClr>
-                <a:srgbClr val="1E40AF"/>
-              </a:buClr>
-              <a:buFont typeface="Arial"/>
-              <a:buChar char="•"/>
             </a:pPr>
             <a:r>
-              <a:rPr sz="2300">
+              <a:rPr sz="2600" b="1">
                 <a:solidFill>
                   <a:srgbClr val="1E293B"/>
                 </a:solidFill>
                 <a:latin typeface="Calibri"/>
               </a:rPr>
-              <a:t>Cấu tứ: vô hạn của vũ trụ ↔ hữu hạn, nhỏ bé của con người.</a:t>
-            </a:r>
-          </a:p>
-          <a:p>
-            <a:pPr algn="l" marL="365760" indent="-365760">
-              <a:spcAft>
-                <a:spcPts val="800"/>
-              </a:spcAft>
-              <a:buClr>
-                <a:srgbClr val="1E40AF"/>
-              </a:buClr>
-              <a:buFont typeface="Arial"/>
-              <a:buChar char="•"/>
-            </a:pPr>
-            <a:r>
-              <a:rPr sz="2300">
-                <a:solidFill>
-                  <a:srgbClr val="1E293B"/>
-                </a:solidFill>
-                <a:latin typeface="Calibri"/>
-              </a:rPr>
-              <a:t>Khổ 2: “lơ thơ cồn nhỏ” ↔ “sông dài, trời rộng”.</a:t>
-            </a:r>
-          </a:p>
-          <a:p>
-            <a:pPr algn="l" marL="365760" indent="-365760">
-              <a:spcAft>
-                <a:spcPts val="800"/>
-              </a:spcAft>
-              <a:buClr>
-                <a:srgbClr val="1E40AF"/>
-              </a:buClr>
-              <a:buFont typeface="Arial"/>
-              <a:buChar char="•"/>
-            </a:pPr>
-            <a:r>
-              <a:rPr sz="2300">
-                <a:solidFill>
-                  <a:srgbClr val="1E293B"/>
-                </a:solidFill>
-                <a:latin typeface="Calibri"/>
-              </a:rPr>
-              <a:t>Khổ 3: bèo dạt – không đò, không cầu; khổ 4: mây núi bạc – cánh chim nhỏ.</a:t>
+              <a:t>Bài thơ được cấu tứ như thế nào? Chỉ ra sự tương phản giữa các hình ảnh trong khổ thứ hai và sự triển khai ở các khổ sau.</a:t>
             </a:r>
           </a:p>
         </p:txBody>
@@ -7718,8 +7804,8 @@
         </p:nvSpPr>
         <p:spPr>
           <a:xfrm>
-            <a:off x="731520" y="5074920"/>
-            <a:ext cx="10789920" cy="731520"/>
+            <a:off x="731520" y="5120640"/>
+            <a:ext cx="10789920" cy="693420"/>
           </a:xfrm>
           <a:prstGeom prst="roundRect">
             <a:avLst>
@@ -7727,11 +7813,11 @@
             </a:avLst>
           </a:prstGeom>
           <a:solidFill>
-            <a:srgbClr val="FEF2F2"/>
+            <a:srgbClr val="EFF4FF"/>
           </a:solidFill>
           <a:ln w="19050">
             <a:solidFill>
-              <a:srgbClr val="991B1B"/>
+              <a:srgbClr val="1E40AF"/>
             </a:solidFill>
           </a:ln>
           <a:effectLst/>
@@ -7766,8 +7852,8 @@
         </p:nvSpPr>
         <p:spPr>
           <a:xfrm>
-            <a:off x="914400" y="5074920"/>
-            <a:ext cx="10424160" cy="731520"/>
+            <a:off x="914400" y="5120640"/>
+            <a:ext cx="10424160" cy="693420"/>
           </a:xfrm>
           <a:prstGeom prst="rect">
             <a:avLst/>
@@ -7786,13 +7872,13 @@
               </a:spcAft>
             </a:pPr>
             <a:r>
-              <a:rPr sz="2400" b="1">
-                <a:solidFill>
-                  <a:srgbClr val="991B1B"/>
+              <a:rPr sz="2200" b="1">
+                <a:solidFill>
+                  <a:srgbClr val="1E40AF"/>
                 </a:solidFill>
                 <a:latin typeface="Calibri"/>
               </a:rPr>
-              <a:t>Tương phản làm nổi bật nỗi cô đơn.</a:t>
+              <a:t>💡 Cái gì nhỏ bé, cái gì rộng lớn?</a:t>
             </a:r>
           </a:p>
         </p:txBody>
@@ -7875,14 +7961,14 @@
         </p:nvSpPr>
         <p:spPr>
           <a:xfrm>
-            <a:off x="10253167" y="457200"/>
-            <a:ext cx="1389888" cy="457200"/>
+            <a:off x="9942271" y="457200"/>
+            <a:ext cx="1700784" cy="457200"/>
           </a:xfrm>
           <a:prstGeom prst="roundRect">
             <a:avLst/>
           </a:prstGeom>
           <a:solidFill>
-            <a:srgbClr val="1E40AF"/>
+            <a:srgbClr val="991B1B"/>
           </a:solidFill>
           <a:ln>
             <a:noFill/>
@@ -7915,7 +8001,7 @@
                 </a:solidFill>
                 <a:latin typeface="Arial"/>
               </a:rPr>
-              <a:t>ĐỀ BÀI</a:t>
+              <a:t>LỜI GIẢI</a:t>
             </a:r>
           </a:p>
         </p:txBody>
@@ -7929,7 +8015,7 @@
         <p:spPr>
           <a:xfrm>
             <a:off x="731520" y="274320"/>
-            <a:ext cx="9582912" cy="868680"/>
+            <a:ext cx="9272016" cy="868680"/>
           </a:xfrm>
           <a:prstGeom prst="rect">
             <a:avLst/>
@@ -7949,7 +8035,7 @@
                 </a:solidFill>
                 <a:latin typeface="Arial"/>
               </a:rPr>
-              <a:t>NGÔN NGỮ VÀ THI LIỆU</a:t>
+              <a:t>CẤU TỨ VÀ SỰ TƯƠNG PHẢN</a:t>
             </a:r>
           </a:p>
         </p:txBody>
@@ -8042,7 +8128,7 @@
         <p:spPr>
           <a:xfrm>
             <a:off x="731520" y="1463040"/>
-            <a:ext cx="10789920" cy="3566160"/>
+            <a:ext cx="10789920" cy="3474720"/>
           </a:xfrm>
           <a:prstGeom prst="rect">
             <a:avLst/>
@@ -8055,19 +8141,66 @@
           </a:bodyPr>
           <a:lstStyle/>
           <a:p>
-            <a:pPr algn="l">
+            <a:pPr algn="l" marL="365760" indent="-365760">
               <a:spcAft>
                 <a:spcPts val="800"/>
               </a:spcAft>
+              <a:buClr>
+                <a:srgbClr val="1E40AF"/>
+              </a:buClr>
+              <a:buFont typeface="Arial"/>
+              <a:buChar char="•"/>
             </a:pPr>
             <a:r>
-              <a:rPr sz="2600" b="1">
+              <a:rPr sz="2300">
                 <a:solidFill>
                   <a:srgbClr val="1E293B"/>
                 </a:solidFill>
                 <a:latin typeface="Calibri"/>
               </a:rPr>
-              <a:t>Bài thơ có những điểm khác lạ nào trong cách dùng ngôn ngữ? Nêu một số thi liệu truyền thống và ý nghĩa của chúng.</a:t>
+              <a:t>Cấu tứ: vô hạn của vũ trụ ↔ hữu hạn, nhỏ bé của con người.</a:t>
+            </a:r>
+          </a:p>
+          <a:p>
+            <a:pPr algn="l" marL="365760" indent="-365760">
+              <a:spcAft>
+                <a:spcPts val="800"/>
+              </a:spcAft>
+              <a:buClr>
+                <a:srgbClr val="1E40AF"/>
+              </a:buClr>
+              <a:buFont typeface="Arial"/>
+              <a:buChar char="•"/>
+            </a:pPr>
+            <a:r>
+              <a:rPr sz="2300">
+                <a:solidFill>
+                  <a:srgbClr val="1E293B"/>
+                </a:solidFill>
+                <a:latin typeface="Calibri"/>
+              </a:rPr>
+              <a:t>Khổ 2: “lơ thơ cồn nhỏ” ↔ “sông dài, trời rộng”.</a:t>
+            </a:r>
+          </a:p>
+          <a:p>
+            <a:pPr algn="l" marL="365760" indent="-365760">
+              <a:spcAft>
+                <a:spcPts val="800"/>
+              </a:spcAft>
+              <a:buClr>
+                <a:srgbClr val="1E40AF"/>
+              </a:buClr>
+              <a:buFont typeface="Arial"/>
+              <a:buChar char="•"/>
+            </a:pPr>
+            <a:r>
+              <a:rPr sz="2300">
+                <a:solidFill>
+                  <a:srgbClr val="1E293B"/>
+                </a:solidFill>
+                <a:latin typeface="Calibri"/>
+              </a:rPr>
+              <a:t>Khổ 3: bèo dạt – không đò, không cầu; khổ 4: mây núi bạc – cánh chim nhỏ.</a:t>
             </a:r>
           </a:p>
         </p:txBody>
@@ -8080,8 +8213,8 @@
         </p:nvSpPr>
         <p:spPr>
           <a:xfrm>
-            <a:off x="731520" y="5120640"/>
-            <a:ext cx="10789920" cy="693420"/>
+            <a:off x="731520" y="5074920"/>
+            <a:ext cx="10789920" cy="731520"/>
           </a:xfrm>
           <a:prstGeom prst="roundRect">
             <a:avLst>
@@ -8089,11 +8222,11 @@
             </a:avLst>
           </a:prstGeom>
           <a:solidFill>
-            <a:srgbClr val="EFF4FF"/>
+            <a:srgbClr val="FEF2F2"/>
           </a:solidFill>
           <a:ln w="19050">
             <a:solidFill>
-              <a:srgbClr val="1E40AF"/>
+              <a:srgbClr val="991B1B"/>
             </a:solidFill>
           </a:ln>
           <a:effectLst/>
@@ -8128,8 +8261,8 @@
         </p:nvSpPr>
         <p:spPr>
           <a:xfrm>
-            <a:off x="914400" y="5120640"/>
-            <a:ext cx="10424160" cy="693420"/>
+            <a:off x="914400" y="5074920"/>
+            <a:ext cx="10424160" cy="731520"/>
           </a:xfrm>
           <a:prstGeom prst="rect">
             <a:avLst/>
@@ -8148,13 +8281,13 @@
               </a:spcAft>
             </a:pPr>
             <a:r>
-              <a:rPr sz="2200" b="1">
-                <a:solidFill>
-                  <a:srgbClr val="1E40AF"/>
+              <a:rPr sz="2400" b="1">
+                <a:solidFill>
+                  <a:srgbClr val="991B1B"/>
                 </a:solidFill>
                 <a:latin typeface="Calibri"/>
               </a:rPr>
-              <a:t>💡 Chú ý “buồn điệp điệp”, “sâu chót vót”.</a:t>
+              <a:t>Tương phản làm nổi bật nỗi cô đơn.</a:t>
             </a:r>
           </a:p>
         </p:txBody>
@@ -8237,14 +8370,14 @@
         </p:nvSpPr>
         <p:spPr>
           <a:xfrm>
-            <a:off x="9942271" y="457200"/>
-            <a:ext cx="1700784" cy="457200"/>
+            <a:off x="10253167" y="457200"/>
+            <a:ext cx="1389888" cy="457200"/>
           </a:xfrm>
           <a:prstGeom prst="roundRect">
             <a:avLst/>
           </a:prstGeom>
           <a:solidFill>
-            <a:srgbClr val="991B1B"/>
+            <a:srgbClr val="1E40AF"/>
           </a:solidFill>
           <a:ln>
             <a:noFill/>
@@ -8277,7 +8410,7 @@
                 </a:solidFill>
                 <a:latin typeface="Arial"/>
               </a:rPr>
-              <a:t>LỜI GIẢI</a:t>
+              <a:t>ĐỀ BÀI</a:t>
             </a:r>
           </a:p>
         </p:txBody>
@@ -8291,7 +8424,7 @@
         <p:spPr>
           <a:xfrm>
             <a:off x="731520" y="274320"/>
-            <a:ext cx="9272016" cy="868680"/>
+            <a:ext cx="9582912" cy="868680"/>
           </a:xfrm>
           <a:prstGeom prst="rect">
             <a:avLst/>
@@ -8404,7 +8537,7 @@
         <p:spPr>
           <a:xfrm>
             <a:off x="731520" y="1463040"/>
-            <a:ext cx="10789920" cy="3474720"/>
+            <a:ext cx="10789920" cy="3566160"/>
           </a:xfrm>
           <a:prstGeom prst="rect">
             <a:avLst/>
@@ -8417,66 +8550,19 @@
           </a:bodyPr>
           <a:lstStyle/>
           <a:p>
-            <a:pPr algn="l" marL="365760" indent="-365760">
+            <a:pPr algn="l">
               <a:spcAft>
                 <a:spcPts val="800"/>
               </a:spcAft>
-              <a:buClr>
-                <a:srgbClr val="1E40AF"/>
-              </a:buClr>
-              <a:buFont typeface="Arial"/>
-              <a:buChar char="•"/>
             </a:pPr>
             <a:r>
-              <a:rPr sz="2300">
+              <a:rPr sz="2600" b="1">
                 <a:solidFill>
                   <a:srgbClr val="1E293B"/>
                 </a:solidFill>
                 <a:latin typeface="Calibri"/>
               </a:rPr>
-              <a:t>“buồn điệp điệp”, “sâu chót vót”, “củi / một cành khô”, dấu hai chấm “cánh nhỏ: bóng chiều sa”.</a:t>
-            </a:r>
-          </a:p>
-          <a:p>
-            <a:pPr algn="l" marL="365760" indent="-365760">
-              <a:spcAft>
-                <a:spcPts val="800"/>
-              </a:spcAft>
-              <a:buClr>
-                <a:srgbClr val="1E40AF"/>
-              </a:buClr>
-              <a:buFont typeface="Arial"/>
-              <a:buChar char="•"/>
-            </a:pPr>
-            <a:r>
-              <a:rPr sz="2300">
-                <a:solidFill>
-                  <a:srgbClr val="1E293B"/>
-                </a:solidFill>
-                <a:latin typeface="Calibri"/>
-              </a:rPr>
-              <a:t>Thi liệu: tràng giang, thuyền, cánh chim, bóng chiều, khói hoàng hôn.</a:t>
-            </a:r>
-          </a:p>
-          <a:p>
-            <a:pPr algn="l" marL="365760" indent="-365760">
-              <a:spcAft>
-                <a:spcPts val="800"/>
-              </a:spcAft>
-              <a:buClr>
-                <a:srgbClr val="1E40AF"/>
-              </a:buClr>
-              <a:buFont typeface="Arial"/>
-              <a:buChar char="•"/>
-            </a:pPr>
-            <a:r>
-              <a:rPr sz="2300">
-                <a:solidFill>
-                  <a:srgbClr val="1E293B"/>
-                </a:solidFill>
-                <a:latin typeface="Calibri"/>
-              </a:rPr>
-              <a:t>“Không khói hoàng hôn cũng nhớ nhà” – mượn tứ Thôi Hiệu nhưng mới.</a:t>
+              <a:t>Bài thơ có những điểm khác lạ nào trong cách dùng ngôn ngữ? Nêu một số thi liệu truyền thống và ý nghĩa của chúng.</a:t>
             </a:r>
           </a:p>
         </p:txBody>
@@ -8489,8 +8575,8 @@
         </p:nvSpPr>
         <p:spPr>
           <a:xfrm>
-            <a:off x="731520" y="5074920"/>
-            <a:ext cx="10789920" cy="731520"/>
+            <a:off x="731520" y="5120640"/>
+            <a:ext cx="10789920" cy="693420"/>
           </a:xfrm>
           <a:prstGeom prst="roundRect">
             <a:avLst>
@@ -8498,11 +8584,11 @@
             </a:avLst>
           </a:prstGeom>
           <a:solidFill>
-            <a:srgbClr val="FEF2F2"/>
+            <a:srgbClr val="EFF4FF"/>
           </a:solidFill>
           <a:ln w="19050">
             <a:solidFill>
-              <a:srgbClr val="991B1B"/>
+              <a:srgbClr val="1E40AF"/>
             </a:solidFill>
           </a:ln>
           <a:effectLst/>
@@ -8537,8 +8623,8 @@
         </p:nvSpPr>
         <p:spPr>
           <a:xfrm>
-            <a:off x="914400" y="5074920"/>
-            <a:ext cx="10424160" cy="731520"/>
+            <a:off x="914400" y="5120640"/>
+            <a:ext cx="10424160" cy="693420"/>
           </a:xfrm>
           <a:prstGeom prst="rect">
             <a:avLst/>
@@ -8557,13 +8643,13 @@
               </a:spcAft>
             </a:pPr>
             <a:r>
-              <a:rPr sz="2400" b="1">
-                <a:solidFill>
-                  <a:srgbClr val="991B1B"/>
+              <a:rPr sz="2200" b="1">
+                <a:solidFill>
+                  <a:srgbClr val="1E40AF"/>
                 </a:solidFill>
                 <a:latin typeface="Calibri"/>
               </a:rPr>
-              <a:t>Cổ điển mà hiện đại.</a:t>
+              <a:t>💡 Chú ý “buồn điệp điệp”, “sâu chót vót”.</a:t>
             </a:r>
           </a:p>
         </p:txBody>
@@ -8967,7 +9053,7 @@
     <p:bg>
       <p:bgPr>
         <a:solidFill>
-          <a:srgbClr val="F8F9FA"/>
+          <a:srgbClr val="FFFFFF"/>
         </a:solidFill>
         <a:effectLst/>
       </p:bgPr>
@@ -8987,10 +9073,54 @@
         </p:nvSpPr>
         <p:spPr>
           <a:xfrm>
-            <a:off x="548640" y="2926080"/>
-            <a:ext cx="164592" cy="1005840"/>
-          </a:xfrm>
-          <a:prstGeom prst="rect">
+            <a:off x="457200" y="384048"/>
+            <a:ext cx="109728" cy="658368"/>
+          </a:xfrm>
+          <a:prstGeom prst="rect">
+            <a:avLst/>
+          </a:prstGeom>
+          <a:solidFill>
+            <a:srgbClr val="1E40AF"/>
+          </a:solidFill>
+          <a:ln>
+            <a:noFill/>
+          </a:ln>
+          <a:effectLst/>
+        </p:spPr>
+        <p:style>
+          <a:lnRef idx="1">
+            <a:schemeClr val="accent1"/>
+          </a:lnRef>
+          <a:fillRef idx="3">
+            <a:schemeClr val="accent1"/>
+          </a:fillRef>
+          <a:effectRef idx="2">
+            <a:schemeClr val="accent1"/>
+          </a:effectRef>
+          <a:fontRef idx="minor">
+            <a:schemeClr val="lt1"/>
+          </a:fontRef>
+        </p:style>
+        <p:txBody>
+          <a:bodyPr rtlCol="0" anchor="ctr"/>
+          <a:lstStyle/>
+          <a:p>
+            <a:pPr algn="ctr"/>
+          </a:p>
+        </p:txBody>
+      </p:sp>
+      <p:sp>
+        <p:nvSpPr>
+          <p:cNvPr id="3" name="Rounded Rectangle 2"/>
+          <p:cNvSpPr/>
+          <p:nvPr/>
+        </p:nvSpPr>
+        <p:spPr>
+          <a:xfrm>
+            <a:off x="9942271" y="457200"/>
+            <a:ext cx="1700784" cy="457200"/>
+          </a:xfrm>
+          <a:prstGeom prst="roundRect">
             <a:avLst/>
           </a:prstGeom>
           <a:solidFill>
@@ -9016,6 +9146,93 @@
           </a:fontRef>
         </p:style>
         <p:txBody>
+          <a:bodyPr rtlCol="0" anchor="ctr" wrap="none" tIns="0" bIns="0"/>
+          <a:lstStyle/>
+          <a:p>
+            <a:pPr algn="ctr"/>
+            <a:r>
+              <a:rPr sz="1400" b="1">
+                <a:solidFill>
+                  <a:srgbClr val="FFFFFF"/>
+                </a:solidFill>
+                <a:latin typeface="Arial"/>
+              </a:rPr>
+              <a:t>LỜI GIẢI</a:t>
+            </a:r>
+          </a:p>
+        </p:txBody>
+      </p:sp>
+      <p:sp>
+        <p:nvSpPr>
+          <p:cNvPr id="4" name="TextBox 3"/>
+          <p:cNvSpPr txBox="1"/>
+          <p:nvPr/>
+        </p:nvSpPr>
+        <p:spPr>
+          <a:xfrm>
+            <a:off x="731520" y="274320"/>
+            <a:ext cx="9272016" cy="868680"/>
+          </a:xfrm>
+          <a:prstGeom prst="rect">
+            <a:avLst/>
+          </a:prstGeom>
+          <a:noFill/>
+        </p:spPr>
+        <p:txBody>
+          <a:bodyPr wrap="square" anchor="ctr">
+            <a:spAutoFit/>
+          </a:bodyPr>
+          <a:lstStyle/>
+          <a:p>
+            <a:r>
+              <a:rPr sz="3600" b="1">
+                <a:solidFill>
+                  <a:srgbClr val="1E40AF"/>
+                </a:solidFill>
+                <a:latin typeface="Arial"/>
+              </a:rPr>
+              <a:t>NGÔN NGỮ VÀ THI LIỆU</a:t>
+            </a:r>
+          </a:p>
+        </p:txBody>
+      </p:sp>
+      <p:sp>
+        <p:nvSpPr>
+          <p:cNvPr id="5" name="Rectangle 4"/>
+          <p:cNvSpPr/>
+          <p:nvPr/>
+        </p:nvSpPr>
+        <p:spPr>
+          <a:xfrm>
+            <a:off x="457200" y="1207008"/>
+            <a:ext cx="11274552" cy="22000"/>
+          </a:xfrm>
+          <a:prstGeom prst="rect">
+            <a:avLst/>
+          </a:prstGeom>
+          <a:solidFill>
+            <a:srgbClr val="E2E8F0"/>
+          </a:solidFill>
+          <a:ln>
+            <a:noFill/>
+          </a:ln>
+          <a:effectLst/>
+        </p:spPr>
+        <p:style>
+          <a:lnRef idx="1">
+            <a:schemeClr val="accent1"/>
+          </a:lnRef>
+          <a:fillRef idx="3">
+            <a:schemeClr val="accent1"/>
+          </a:fillRef>
+          <a:effectRef idx="2">
+            <a:schemeClr val="accent1"/>
+          </a:effectRef>
+          <a:fontRef idx="minor">
+            <a:schemeClr val="lt1"/>
+          </a:fontRef>
+        </p:style>
+        <p:txBody>
           <a:bodyPr rtlCol="0" anchor="ctr"/>
           <a:lstStyle/>
           <a:p>
@@ -9025,14 +9242,183 @@
       </p:sp>
       <p:sp>
         <p:nvSpPr>
-          <p:cNvPr id="3" name="TextBox 2"/>
+          <p:cNvPr id="6" name="TextBox 5"/>
           <p:cNvSpPr txBox="1"/>
           <p:nvPr/>
         </p:nvSpPr>
         <p:spPr>
           <a:xfrm>
-            <a:off x="914400" y="2743200"/>
-            <a:ext cx="10515600" cy="1371600"/>
+            <a:off x="457200" y="6355080"/>
+            <a:ext cx="11274552" cy="365760"/>
+          </a:xfrm>
+          <a:prstGeom prst="rect">
+            <a:avLst/>
+          </a:prstGeom>
+          <a:noFill/>
+        </p:spPr>
+        <p:txBody>
+          <a:bodyPr wrap="none">
+            <a:spAutoFit/>
+          </a:bodyPr>
+          <a:lstStyle/>
+          <a:p>
+            <a:pPr algn="r"/>
+            <a:r>
+              <a:rPr sz="1200">
+                <a:solidFill>
+                  <a:srgbClr val="64748B"/>
+                </a:solidFill>
+                <a:latin typeface="Calibri"/>
+              </a:rPr>
+              <a:t>Ngữ văn 11 · Bài 2: Cấu Tứ Và Hình Ảnh Trong Thơ Trữ Tình          20</a:t>
+            </a:r>
+          </a:p>
+        </p:txBody>
+      </p:sp>
+      <p:sp>
+        <p:nvSpPr>
+          <p:cNvPr id="7" name="TextBox 6"/>
+          <p:cNvSpPr txBox="1"/>
+          <p:nvPr/>
+        </p:nvSpPr>
+        <p:spPr>
+          <a:xfrm>
+            <a:off x="731520" y="1463040"/>
+            <a:ext cx="10789920" cy="3474720"/>
+          </a:xfrm>
+          <a:prstGeom prst="rect">
+            <a:avLst/>
+          </a:prstGeom>
+          <a:noFill/>
+        </p:spPr>
+        <p:txBody>
+          <a:bodyPr wrap="square" anchor="t" lIns="45720" rIns="45720">
+            <a:spAutoFit/>
+          </a:bodyPr>
+          <a:lstStyle/>
+          <a:p>
+            <a:pPr algn="l" marL="365760" indent="-365760">
+              <a:spcAft>
+                <a:spcPts val="800"/>
+              </a:spcAft>
+              <a:buClr>
+                <a:srgbClr val="1E40AF"/>
+              </a:buClr>
+              <a:buFont typeface="Arial"/>
+              <a:buChar char="•"/>
+            </a:pPr>
+            <a:r>
+              <a:rPr sz="2300">
+                <a:solidFill>
+                  <a:srgbClr val="1E293B"/>
+                </a:solidFill>
+                <a:latin typeface="Calibri"/>
+              </a:rPr>
+              <a:t>“buồn điệp điệp”, “sâu chót vót”, “củi / một cành khô”, dấu hai chấm “cánh nhỏ: bóng chiều sa”.</a:t>
+            </a:r>
+          </a:p>
+          <a:p>
+            <a:pPr algn="l" marL="365760" indent="-365760">
+              <a:spcAft>
+                <a:spcPts val="800"/>
+              </a:spcAft>
+              <a:buClr>
+                <a:srgbClr val="1E40AF"/>
+              </a:buClr>
+              <a:buFont typeface="Arial"/>
+              <a:buChar char="•"/>
+            </a:pPr>
+            <a:r>
+              <a:rPr sz="2300">
+                <a:solidFill>
+                  <a:srgbClr val="1E293B"/>
+                </a:solidFill>
+                <a:latin typeface="Calibri"/>
+              </a:rPr>
+              <a:t>Thi liệu: tràng giang, thuyền, cánh chim, bóng chiều, khói hoàng hôn.</a:t>
+            </a:r>
+          </a:p>
+          <a:p>
+            <a:pPr algn="l" marL="365760" indent="-365760">
+              <a:spcAft>
+                <a:spcPts val="800"/>
+              </a:spcAft>
+              <a:buClr>
+                <a:srgbClr val="1E40AF"/>
+              </a:buClr>
+              <a:buFont typeface="Arial"/>
+              <a:buChar char="•"/>
+            </a:pPr>
+            <a:r>
+              <a:rPr sz="2300">
+                <a:solidFill>
+                  <a:srgbClr val="1E293B"/>
+                </a:solidFill>
+                <a:latin typeface="Calibri"/>
+              </a:rPr>
+              <a:t>“Không khói hoàng hôn cũng nhớ nhà” – mượn tứ Thôi Hiệu nhưng mới.</a:t>
+            </a:r>
+          </a:p>
+        </p:txBody>
+      </p:sp>
+      <p:sp>
+        <p:nvSpPr>
+          <p:cNvPr id="8" name="Rounded Rectangle 7"/>
+          <p:cNvSpPr/>
+          <p:nvPr/>
+        </p:nvSpPr>
+        <p:spPr>
+          <a:xfrm>
+            <a:off x="731520" y="5074920"/>
+            <a:ext cx="10789920" cy="731520"/>
+          </a:xfrm>
+          <a:prstGeom prst="roundRect">
+            <a:avLst>
+              <a:gd name="adj" fmla="val 8000"/>
+            </a:avLst>
+          </a:prstGeom>
+          <a:solidFill>
+            <a:srgbClr val="FEF2F2"/>
+          </a:solidFill>
+          <a:ln w="19050">
+            <a:solidFill>
+              <a:srgbClr val="991B1B"/>
+            </a:solidFill>
+          </a:ln>
+          <a:effectLst/>
+        </p:spPr>
+        <p:style>
+          <a:lnRef idx="1">
+            <a:schemeClr val="accent1"/>
+          </a:lnRef>
+          <a:fillRef idx="3">
+            <a:schemeClr val="accent1"/>
+          </a:fillRef>
+          <a:effectRef idx="2">
+            <a:schemeClr val="accent1"/>
+          </a:effectRef>
+          <a:fontRef idx="minor">
+            <a:schemeClr val="lt1"/>
+          </a:fontRef>
+        </p:style>
+        <p:txBody>
+          <a:bodyPr rtlCol="0" anchor="ctr"/>
+          <a:lstStyle/>
+          <a:p>
+            <a:pPr algn="ctr"/>
+          </a:p>
+        </p:txBody>
+      </p:sp>
+      <p:sp>
+        <p:nvSpPr>
+          <p:cNvPr id="9" name="TextBox 8"/>
+          <p:cNvSpPr txBox="1"/>
+          <p:nvPr/>
+        </p:nvSpPr>
+        <p:spPr>
+          <a:xfrm>
+            <a:off x="914400" y="5074920"/>
+            <a:ext cx="10424160" cy="731520"/>
           </a:xfrm>
           <a:prstGeom prst="rect">
             <a:avLst/>
@@ -9047,17 +9433,17 @@
           <a:p>
             <a:pPr algn="l">
               <a:spcAft>
-                <a:spcPts val="800"/>
+                <a:spcPts val="400"/>
               </a:spcAft>
             </a:pPr>
             <a:r>
-              <a:rPr sz="3600" b="1">
-                <a:solidFill>
-                  <a:srgbClr val="1E40AF"/>
+              <a:rPr sz="2400" b="1">
+                <a:solidFill>
+                  <a:srgbClr val="991B1B"/>
                 </a:solidFill>
                 <a:latin typeface="Calibri"/>
               </a:rPr>
-              <a:t>TIẾT 18: CON ĐƯỜNG MÙA ĐÔNG (Pu-skin)</a:t>
+              <a:t>Cổ điển mà hiện đại.</a:t>
             </a:r>
           </a:p>
         </p:txBody>
@@ -9076,7 +9462,7 @@
     <p:bg>
       <p:bgPr>
         <a:solidFill>
-          <a:srgbClr val="FFFFFF"/>
+          <a:srgbClr val="F8F9FA"/>
         </a:solidFill>
         <a:effectLst/>
       </p:bgPr>
@@ -9096,14 +9482,14 @@
         </p:nvSpPr>
         <p:spPr>
           <a:xfrm>
-            <a:off x="457200" y="384048"/>
-            <a:ext cx="109728" cy="658368"/>
+            <a:off x="548640" y="2926080"/>
+            <a:ext cx="164592" cy="1005840"/>
           </a:xfrm>
           <a:prstGeom prst="rect">
             <a:avLst/>
           </a:prstGeom>
           <a:solidFill>
-            <a:srgbClr val="1E40AF"/>
+            <a:srgbClr val="991B1B"/>
           </a:solidFill>
           <a:ln>
             <a:noFill/>
@@ -9134,67 +9520,14 @@
       </p:sp>
       <p:sp>
         <p:nvSpPr>
-          <p:cNvPr id="3" name="Rounded Rectangle 2"/>
-          <p:cNvSpPr/>
-          <p:nvPr/>
-        </p:nvSpPr>
-        <p:spPr>
-          <a:xfrm>
-            <a:off x="10253167" y="457200"/>
-            <a:ext cx="1389888" cy="457200"/>
-          </a:xfrm>
-          <a:prstGeom prst="roundRect">
-            <a:avLst/>
-          </a:prstGeom>
-          <a:solidFill>
-            <a:srgbClr val="1E40AF"/>
-          </a:solidFill>
-          <a:ln>
-            <a:noFill/>
-          </a:ln>
-          <a:effectLst/>
-        </p:spPr>
-        <p:style>
-          <a:lnRef idx="1">
-            <a:schemeClr val="accent1"/>
-          </a:lnRef>
-          <a:fillRef idx="3">
-            <a:schemeClr val="accent1"/>
-          </a:fillRef>
-          <a:effectRef idx="2">
-            <a:schemeClr val="accent1"/>
-          </a:effectRef>
-          <a:fontRef idx="minor">
-            <a:schemeClr val="lt1"/>
-          </a:fontRef>
-        </p:style>
-        <p:txBody>
-          <a:bodyPr rtlCol="0" anchor="ctr" wrap="none" tIns="0" bIns="0"/>
-          <a:lstStyle/>
-          <a:p>
-            <a:pPr algn="ctr"/>
-            <a:r>
-              <a:rPr sz="1400" b="1">
-                <a:solidFill>
-                  <a:srgbClr val="FFFFFF"/>
-                </a:solidFill>
-                <a:latin typeface="Arial"/>
-              </a:rPr>
-              <a:t>ĐỀ BÀI</a:t>
-            </a:r>
-          </a:p>
-        </p:txBody>
-      </p:sp>
-      <p:sp>
-        <p:nvSpPr>
-          <p:cNvPr id="4" name="TextBox 3"/>
+          <p:cNvPr id="3" name="TextBox 2"/>
           <p:cNvSpPr txBox="1"/>
           <p:nvPr/>
         </p:nvSpPr>
         <p:spPr>
           <a:xfrm>
-            <a:off x="731520" y="274320"/>
-            <a:ext cx="9582912" cy="868680"/>
+            <a:off x="914400" y="2743200"/>
+            <a:ext cx="10515600" cy="1371600"/>
           </a:xfrm>
           <a:prstGeom prst="rect">
             <a:avLst/>
@@ -9202,120 +9535,7 @@
           <a:noFill/>
         </p:spPr>
         <p:txBody>
-          <a:bodyPr wrap="square" anchor="ctr">
-            <a:spAutoFit/>
-          </a:bodyPr>
-          <a:lstStyle/>
-          <a:p>
-            <a:r>
-              <a:rPr sz="3600" b="1">
-                <a:solidFill>
-                  <a:srgbClr val="1E40AF"/>
-                </a:solidFill>
-                <a:latin typeface="Arial"/>
-              </a:rPr>
-              <a:t>NỖI BUỒN VÀ Ý THỨC VƯỢT QUA</a:t>
-            </a:r>
-          </a:p>
-        </p:txBody>
-      </p:sp>
-      <p:sp>
-        <p:nvSpPr>
-          <p:cNvPr id="5" name="Rectangle 4"/>
-          <p:cNvSpPr/>
-          <p:nvPr/>
-        </p:nvSpPr>
-        <p:spPr>
-          <a:xfrm>
-            <a:off x="457200" y="1207008"/>
-            <a:ext cx="11274552" cy="22000"/>
-          </a:xfrm>
-          <a:prstGeom prst="rect">
-            <a:avLst/>
-          </a:prstGeom>
-          <a:solidFill>
-            <a:srgbClr val="E2E8F0"/>
-          </a:solidFill>
-          <a:ln>
-            <a:noFill/>
-          </a:ln>
-          <a:effectLst/>
-        </p:spPr>
-        <p:style>
-          <a:lnRef idx="1">
-            <a:schemeClr val="accent1"/>
-          </a:lnRef>
-          <a:fillRef idx="3">
-            <a:schemeClr val="accent1"/>
-          </a:fillRef>
-          <a:effectRef idx="2">
-            <a:schemeClr val="accent1"/>
-          </a:effectRef>
-          <a:fontRef idx="minor">
-            <a:schemeClr val="lt1"/>
-          </a:fontRef>
-        </p:style>
-        <p:txBody>
-          <a:bodyPr rtlCol="0" anchor="ctr"/>
-          <a:lstStyle/>
-          <a:p>
-            <a:pPr algn="ctr"/>
-          </a:p>
-        </p:txBody>
-      </p:sp>
-      <p:sp>
-        <p:nvSpPr>
-          <p:cNvPr id="6" name="TextBox 5"/>
-          <p:cNvSpPr txBox="1"/>
-          <p:nvPr/>
-        </p:nvSpPr>
-        <p:spPr>
-          <a:xfrm>
-            <a:off x="457200" y="6355080"/>
-            <a:ext cx="11274552" cy="365760"/>
-          </a:xfrm>
-          <a:prstGeom prst="rect">
-            <a:avLst/>
-          </a:prstGeom>
-          <a:noFill/>
-        </p:spPr>
-        <p:txBody>
-          <a:bodyPr wrap="none">
-            <a:spAutoFit/>
-          </a:bodyPr>
-          <a:lstStyle/>
-          <a:p>
-            <a:pPr algn="r"/>
-            <a:r>
-              <a:rPr sz="1200">
-                <a:solidFill>
-                  <a:srgbClr val="64748B"/>
-                </a:solidFill>
-                <a:latin typeface="Calibri"/>
-              </a:rPr>
-              <a:t>Ngữ văn 11 · Bài 2: Cấu Tứ Và Hình Ảnh Trong Thơ Trữ Tình          21</a:t>
-            </a:r>
-          </a:p>
-        </p:txBody>
-      </p:sp>
-      <p:sp>
-        <p:nvSpPr>
-          <p:cNvPr id="7" name="TextBox 6"/>
-          <p:cNvSpPr txBox="1"/>
-          <p:nvPr/>
-        </p:nvSpPr>
-        <p:spPr>
-          <a:xfrm>
-            <a:off x="731520" y="1463040"/>
-            <a:ext cx="10789920" cy="3566160"/>
-          </a:xfrm>
-          <a:prstGeom prst="rect">
-            <a:avLst/>
-          </a:prstGeom>
-          <a:noFill/>
-        </p:spPr>
-        <p:txBody>
-          <a:bodyPr wrap="square" anchor="t" lIns="45720" rIns="45720">
+          <a:bodyPr wrap="square" anchor="ctr" lIns="45720" rIns="45720">
             <a:spAutoFit/>
           </a:bodyPr>
           <a:lstStyle/>
@@ -9326,100 +9546,13 @@
               </a:spcAft>
             </a:pPr>
             <a:r>
-              <a:rPr sz="2600" b="1">
-                <a:solidFill>
-                  <a:srgbClr val="1E293B"/>
+              <a:rPr sz="3600" b="1">
+                <a:solidFill>
+                  <a:srgbClr val="1E40AF"/>
                 </a:solidFill>
                 <a:latin typeface="Calibri"/>
               </a:rPr>
-              <a:t>Những hình ảnh, âm thanh trong bài thơ diễn tả mâu thuẫn giữa nỗi buồn với ý thức vượt qua trở ngại của nhân vật trữ tình như thế nào?</a:t>
-            </a:r>
-          </a:p>
-        </p:txBody>
-      </p:sp>
-      <p:sp>
-        <p:nvSpPr>
-          <p:cNvPr id="8" name="Rounded Rectangle 7"/>
-          <p:cNvSpPr/>
-          <p:nvPr/>
-        </p:nvSpPr>
-        <p:spPr>
-          <a:xfrm>
-            <a:off x="731520" y="5120640"/>
-            <a:ext cx="10789920" cy="693420"/>
-          </a:xfrm>
-          <a:prstGeom prst="roundRect">
-            <a:avLst>
-              <a:gd name="adj" fmla="val 8000"/>
-            </a:avLst>
-          </a:prstGeom>
-          <a:solidFill>
-            <a:srgbClr val="EFF4FF"/>
-          </a:solidFill>
-          <a:ln w="19050">
-            <a:solidFill>
-              <a:srgbClr val="1E40AF"/>
-            </a:solidFill>
-          </a:ln>
-          <a:effectLst/>
-        </p:spPr>
-        <p:style>
-          <a:lnRef idx="1">
-            <a:schemeClr val="accent1"/>
-          </a:lnRef>
-          <a:fillRef idx="3">
-            <a:schemeClr val="accent1"/>
-          </a:fillRef>
-          <a:effectRef idx="2">
-            <a:schemeClr val="accent1"/>
-          </a:effectRef>
-          <a:fontRef idx="minor">
-            <a:schemeClr val="lt1"/>
-          </a:fontRef>
-        </p:style>
-        <p:txBody>
-          <a:bodyPr rtlCol="0" anchor="ctr"/>
-          <a:lstStyle/>
-          <a:p>
-            <a:pPr algn="ctr"/>
-          </a:p>
-        </p:txBody>
-      </p:sp>
-      <p:sp>
-        <p:nvSpPr>
-          <p:cNvPr id="9" name="TextBox 8"/>
-          <p:cNvSpPr txBox="1"/>
-          <p:nvPr/>
-        </p:nvSpPr>
-        <p:spPr>
-          <a:xfrm>
-            <a:off x="914400" y="5120640"/>
-            <a:ext cx="10424160" cy="693420"/>
-          </a:xfrm>
-          <a:prstGeom prst="rect">
-            <a:avLst/>
-          </a:prstGeom>
-          <a:noFill/>
-        </p:spPr>
-        <p:txBody>
-          <a:bodyPr wrap="square" anchor="ctr" lIns="45720" rIns="45720">
-            <a:spAutoFit/>
-          </a:bodyPr>
-          <a:lstStyle/>
-          <a:p>
-            <a:pPr algn="l">
-              <a:spcAft>
-                <a:spcPts val="400"/>
-              </a:spcAft>
-            </a:pPr>
-            <a:r>
-              <a:rPr sz="2200" b="1">
-                <a:solidFill>
-                  <a:srgbClr val="1E40AF"/>
-                </a:solidFill>
-                <a:latin typeface="Calibri"/>
-              </a:rPr>
-              <a:t>💡 Trăng, cột sọc chỉ đường, tiếng lục lạc, kim đồng hồ…</a:t>
+              <a:t>TIẾT 18: CON ĐƯỜNG MÙA ĐÔNG (Pu-skin)</a:t>
             </a:r>
           </a:p>
         </p:txBody>
@@ -9502,8 +9635,8 @@
         </p:nvSpPr>
         <p:spPr>
           <a:xfrm>
-            <a:off x="9942271" y="457200"/>
-            <a:ext cx="1700784" cy="457200"/>
+            <a:off x="10408615" y="457200"/>
+            <a:ext cx="1234440" cy="457200"/>
           </a:xfrm>
           <a:prstGeom prst="roundRect">
             <a:avLst/>
@@ -9542,7 +9675,7 @@
                 </a:solidFill>
                 <a:latin typeface="Arial"/>
               </a:rPr>
-              <a:t>LỜI GIẢI</a:t>
+              <a:t>VIDEO</a:t>
             </a:r>
           </a:p>
         </p:txBody>
@@ -9556,7 +9689,7 @@
         <p:spPr>
           <a:xfrm>
             <a:off x="731520" y="274320"/>
-            <a:ext cx="9272016" cy="868680"/>
+            <a:ext cx="9738360" cy="868680"/>
           </a:xfrm>
           <a:prstGeom prst="rect">
             <a:avLst/>
@@ -9576,7 +9709,7 @@
                 </a:solidFill>
                 <a:latin typeface="Arial"/>
               </a:rPr>
-              <a:t>NỖI BUỒN VÀ Ý THỨC VƯỢT QUA</a:t>
+              <a:t>VIDEO THAM KHẢO</a:t>
             </a:r>
           </a:p>
         </p:txBody>
@@ -9660,16 +9793,40 @@
           </a:p>
         </p:txBody>
       </p:sp>
-      <p:sp>
-        <p:nvSpPr>
-          <p:cNvPr id="7" name="TextBox 6"/>
+      <p:pic>
+        <p:nvPicPr>
+          <p:cNvPr id="7" name="Picture 6" descr="QR_video_n7mqfl4VM3c.png"/>
+          <p:cNvPicPr>
+            <a:picLocks noChangeAspect="1"/>
+          </p:cNvPicPr>
+          <p:nvPr/>
+        </p:nvPicPr>
+        <p:blipFill>
+          <a:blip r:embed="rId2"/>
+          <a:stretch>
+            <a:fillRect/>
+          </a:stretch>
+        </p:blipFill>
+        <p:spPr>
+          <a:xfrm>
+            <a:off x="8412480" y="1554480"/>
+            <a:ext cx="3108960" cy="3108960"/>
+          </a:xfrm>
+          <a:prstGeom prst="rect">
+            <a:avLst/>
+          </a:prstGeom>
+        </p:spPr>
+      </p:pic>
+      <p:sp>
+        <p:nvSpPr>
+          <p:cNvPr id="8" name="TextBox 7"/>
           <p:cNvSpPr txBox="1"/>
           <p:nvPr/>
         </p:nvSpPr>
         <p:spPr>
           <a:xfrm>
-            <a:off x="731520" y="1463040"/>
-            <a:ext cx="10789920" cy="3474720"/>
+            <a:off x="731520" y="1554480"/>
+            <a:ext cx="7498079" cy="4206240"/>
           </a:xfrm>
           <a:prstGeom prst="rect">
             <a:avLst/>
@@ -9681,6 +9838,38 @@
             <a:spAutoFit/>
           </a:bodyPr>
           <a:lstStyle/>
+          <a:p>
+            <a:pPr algn="l">
+              <a:spcAft>
+                <a:spcPts val="800"/>
+              </a:spcAft>
+            </a:pPr>
+            <a:r>
+              <a:rPr sz="2600" b="1">
+                <a:solidFill>
+                  <a:srgbClr val="1E293B"/>
+                </a:solidFill>
+                <a:latin typeface="Calibri"/>
+              </a:rPr>
+              <a:t>🎬 Con đường mùa đông – Pu-skin (đọc thơ)</a:t>
+            </a:r>
+          </a:p>
+          <a:p>
+            <a:pPr algn="l">
+              <a:spcAft>
+                <a:spcPts val="800"/>
+              </a:spcAft>
+            </a:pPr>
+            <a:r>
+              <a:rPr sz="2000">
+                <a:solidFill>
+                  <a:srgbClr val="64748B"/>
+                </a:solidFill>
+                <a:latin typeface="Calibri"/>
+              </a:rPr>
+              <a:t>Kênh: MC Trần Thiện Tùng</a:t>
+            </a:r>
+          </a:p>
           <a:p>
             <a:pPr algn="l" marL="365760" indent="-365760">
               <a:spcAft>
@@ -9693,142 +9882,30 @@
               <a:buChar char="•"/>
             </a:pPr>
             <a:r>
-              <a:rPr sz="2300">
+              <a:rPr sz="2000">
                 <a:solidFill>
                   <a:srgbClr val="1E293B"/>
                 </a:solidFill>
                 <a:latin typeface="Calibri"/>
               </a:rPr>
-              <a:t>Trăng buồn, đường vắng, tiếng lục lạc đơn điệu – nỗi buồn.</a:t>
-            </a:r>
-          </a:p>
-          <a:p>
-            <a:pPr algn="l" marL="365760" indent="-365760">
+              <a:t>Đọc diễn cảm Con đường mùa đông</a:t>
+            </a:r>
+          </a:p>
+          <a:p>
+            <a:pPr algn="l">
               <a:spcAft>
                 <a:spcPts val="800"/>
               </a:spcAft>
-              <a:buClr>
-                <a:srgbClr val="1E40AF"/>
-              </a:buClr>
-              <a:buFont typeface="Arial"/>
-              <a:buChar char="•"/>
             </a:pPr>
             <a:r>
-              <a:rPr sz="2300">
-                <a:solidFill>
-                  <a:srgbClr val="1E293B"/>
+              <a:rPr sz="1600">
+                <a:solidFill>
+                  <a:srgbClr val="64748B"/>
                 </a:solidFill>
                 <a:latin typeface="Calibri"/>
-              </a:rPr>
-              <a:t>Xe tam mã lao nhanh, cột sọc chỉ đường – hành trình tiếp diễn.</a:t>
-            </a:r>
-          </a:p>
-          <a:p>
-            <a:pPr algn="l" marL="365760" indent="-365760">
-              <a:spcAft>
-                <a:spcPts val="800"/>
-              </a:spcAft>
-              <a:buClr>
-                <a:srgbClr val="1E40AF"/>
-              </a:buClr>
-              <a:buFont typeface="Arial"/>
-              <a:buChar char="•"/>
-            </a:pPr>
-            <a:r>
-              <a:rPr sz="2300">
-                <a:solidFill>
-                  <a:srgbClr val="1E293B"/>
-                </a:solidFill>
-                <a:latin typeface="Calibri"/>
-              </a:rPr>
-              <a:t>Tâm tưởng: Nhi-na, lò lửa đỏ – hơi ấm phía trước.</a:t>
-            </a:r>
-          </a:p>
-        </p:txBody>
-      </p:sp>
-      <p:sp>
-        <p:nvSpPr>
-          <p:cNvPr id="8" name="Rounded Rectangle 7"/>
-          <p:cNvSpPr/>
-          <p:nvPr/>
-        </p:nvSpPr>
-        <p:spPr>
-          <a:xfrm>
-            <a:off x="731520" y="5074920"/>
-            <a:ext cx="10789920" cy="731520"/>
-          </a:xfrm>
-          <a:prstGeom prst="roundRect">
-            <a:avLst>
-              <a:gd name="adj" fmla="val 8000"/>
-            </a:avLst>
-          </a:prstGeom>
-          <a:solidFill>
-            <a:srgbClr val="FEF2F2"/>
-          </a:solidFill>
-          <a:ln w="19050">
-            <a:solidFill>
-              <a:srgbClr val="991B1B"/>
-            </a:solidFill>
-          </a:ln>
-          <a:effectLst/>
-        </p:spPr>
-        <p:style>
-          <a:lnRef idx="1">
-            <a:schemeClr val="accent1"/>
-          </a:lnRef>
-          <a:fillRef idx="3">
-            <a:schemeClr val="accent1"/>
-          </a:fillRef>
-          <a:effectRef idx="2">
-            <a:schemeClr val="accent1"/>
-          </a:effectRef>
-          <a:fontRef idx="minor">
-            <a:schemeClr val="lt1"/>
-          </a:fontRef>
-        </p:style>
-        <p:txBody>
-          <a:bodyPr rtlCol="0" anchor="ctr"/>
-          <a:lstStyle/>
-          <a:p>
-            <a:pPr algn="ctr"/>
-          </a:p>
-        </p:txBody>
-      </p:sp>
-      <p:sp>
-        <p:nvSpPr>
-          <p:cNvPr id="9" name="TextBox 8"/>
-          <p:cNvSpPr txBox="1"/>
-          <p:nvPr/>
-        </p:nvSpPr>
-        <p:spPr>
-          <a:xfrm>
-            <a:off x="914400" y="5074920"/>
-            <a:ext cx="10424160" cy="731520"/>
-          </a:xfrm>
-          <a:prstGeom prst="rect">
-            <a:avLst/>
-          </a:prstGeom>
-          <a:noFill/>
-        </p:spPr>
-        <p:txBody>
-          <a:bodyPr wrap="square" anchor="ctr" lIns="45720" rIns="45720">
-            <a:spAutoFit/>
-          </a:bodyPr>
-          <a:lstStyle/>
-          <a:p>
-            <a:pPr algn="l">
-              <a:spcAft>
-                <a:spcPts val="400"/>
-              </a:spcAft>
-            </a:pPr>
-            <a:r>
-              <a:rPr sz="2400" b="1">
-                <a:solidFill>
-                  <a:srgbClr val="991B1B"/>
-                </a:solidFill>
-                <a:latin typeface="Calibri"/>
-              </a:rPr>
-              <a:t>Không chìm trong u buồn, luôn hướng tới niềm vui.</a:t>
+                <a:hlinkClick r:id="rId3"/>
+              </a:rPr>
+              <a:t>https://www.youtube.com/watch?v=n7mqfl4VM3c</a:t>
             </a:r>
           </a:p>
         </p:txBody>
@@ -9847,7 +9924,7 @@
     <p:bg>
       <p:bgPr>
         <a:solidFill>
-          <a:srgbClr val="F8F9FA"/>
+          <a:srgbClr val="FFFFFF"/>
         </a:solidFill>
         <a:effectLst/>
       </p:bgPr>
@@ -9867,14 +9944,14 @@
         </p:nvSpPr>
         <p:spPr>
           <a:xfrm>
-            <a:off x="548640" y="2926080"/>
-            <a:ext cx="164592" cy="1005840"/>
+            <a:off x="457200" y="384048"/>
+            <a:ext cx="109728" cy="658368"/>
           </a:xfrm>
           <a:prstGeom prst="rect">
             <a:avLst/>
           </a:prstGeom>
           <a:solidFill>
-            <a:srgbClr val="991B1B"/>
+            <a:srgbClr val="1E40AF"/>
           </a:solidFill>
           <a:ln>
             <a:noFill/>
@@ -9905,14 +9982,67 @@
       </p:sp>
       <p:sp>
         <p:nvSpPr>
-          <p:cNvPr id="3" name="TextBox 2"/>
+          <p:cNvPr id="3" name="Rounded Rectangle 2"/>
+          <p:cNvSpPr/>
+          <p:nvPr/>
+        </p:nvSpPr>
+        <p:spPr>
+          <a:xfrm>
+            <a:off x="10253167" y="457200"/>
+            <a:ext cx="1389888" cy="457200"/>
+          </a:xfrm>
+          <a:prstGeom prst="roundRect">
+            <a:avLst/>
+          </a:prstGeom>
+          <a:solidFill>
+            <a:srgbClr val="1E40AF"/>
+          </a:solidFill>
+          <a:ln>
+            <a:noFill/>
+          </a:ln>
+          <a:effectLst/>
+        </p:spPr>
+        <p:style>
+          <a:lnRef idx="1">
+            <a:schemeClr val="accent1"/>
+          </a:lnRef>
+          <a:fillRef idx="3">
+            <a:schemeClr val="accent1"/>
+          </a:fillRef>
+          <a:effectRef idx="2">
+            <a:schemeClr val="accent1"/>
+          </a:effectRef>
+          <a:fontRef idx="minor">
+            <a:schemeClr val="lt1"/>
+          </a:fontRef>
+        </p:style>
+        <p:txBody>
+          <a:bodyPr rtlCol="0" anchor="ctr" wrap="none" tIns="0" bIns="0"/>
+          <a:lstStyle/>
+          <a:p>
+            <a:pPr algn="ctr"/>
+            <a:r>
+              <a:rPr sz="1400" b="1">
+                <a:solidFill>
+                  <a:srgbClr val="FFFFFF"/>
+                </a:solidFill>
+                <a:latin typeface="Arial"/>
+              </a:rPr>
+              <a:t>ĐỀ BÀI</a:t>
+            </a:r>
+          </a:p>
+        </p:txBody>
+      </p:sp>
+      <p:sp>
+        <p:nvSpPr>
+          <p:cNvPr id="4" name="TextBox 3"/>
           <p:cNvSpPr txBox="1"/>
           <p:nvPr/>
         </p:nvSpPr>
         <p:spPr>
           <a:xfrm>
-            <a:off x="914400" y="2743200"/>
-            <a:ext cx="10515600" cy="1371600"/>
+            <a:off x="731520" y="274320"/>
+            <a:ext cx="9582912" cy="868680"/>
           </a:xfrm>
           <a:prstGeom prst="rect">
             <a:avLst/>
@@ -9920,7 +10050,120 @@
           <a:noFill/>
         </p:spPr>
         <p:txBody>
-          <a:bodyPr wrap="square" anchor="ctr" lIns="45720" rIns="45720">
+          <a:bodyPr wrap="square" anchor="ctr">
+            <a:spAutoFit/>
+          </a:bodyPr>
+          <a:lstStyle/>
+          <a:p>
+            <a:r>
+              <a:rPr sz="3600" b="1">
+                <a:solidFill>
+                  <a:srgbClr val="1E40AF"/>
+                </a:solidFill>
+                <a:latin typeface="Arial"/>
+              </a:rPr>
+              <a:t>NỖI BUỒN VÀ Ý THỨC VƯỢT QUA</a:t>
+            </a:r>
+          </a:p>
+        </p:txBody>
+      </p:sp>
+      <p:sp>
+        <p:nvSpPr>
+          <p:cNvPr id="5" name="Rectangle 4"/>
+          <p:cNvSpPr/>
+          <p:nvPr/>
+        </p:nvSpPr>
+        <p:spPr>
+          <a:xfrm>
+            <a:off x="457200" y="1207008"/>
+            <a:ext cx="11274552" cy="22000"/>
+          </a:xfrm>
+          <a:prstGeom prst="rect">
+            <a:avLst/>
+          </a:prstGeom>
+          <a:solidFill>
+            <a:srgbClr val="E2E8F0"/>
+          </a:solidFill>
+          <a:ln>
+            <a:noFill/>
+          </a:ln>
+          <a:effectLst/>
+        </p:spPr>
+        <p:style>
+          <a:lnRef idx="1">
+            <a:schemeClr val="accent1"/>
+          </a:lnRef>
+          <a:fillRef idx="3">
+            <a:schemeClr val="accent1"/>
+          </a:fillRef>
+          <a:effectRef idx="2">
+            <a:schemeClr val="accent1"/>
+          </a:effectRef>
+          <a:fontRef idx="minor">
+            <a:schemeClr val="lt1"/>
+          </a:fontRef>
+        </p:style>
+        <p:txBody>
+          <a:bodyPr rtlCol="0" anchor="ctr"/>
+          <a:lstStyle/>
+          <a:p>
+            <a:pPr algn="ctr"/>
+          </a:p>
+        </p:txBody>
+      </p:sp>
+      <p:sp>
+        <p:nvSpPr>
+          <p:cNvPr id="6" name="TextBox 5"/>
+          <p:cNvSpPr txBox="1"/>
+          <p:nvPr/>
+        </p:nvSpPr>
+        <p:spPr>
+          <a:xfrm>
+            <a:off x="457200" y="6355080"/>
+            <a:ext cx="11274552" cy="365760"/>
+          </a:xfrm>
+          <a:prstGeom prst="rect">
+            <a:avLst/>
+          </a:prstGeom>
+          <a:noFill/>
+        </p:spPr>
+        <p:txBody>
+          <a:bodyPr wrap="none">
+            <a:spAutoFit/>
+          </a:bodyPr>
+          <a:lstStyle/>
+          <a:p>
+            <a:pPr algn="r"/>
+            <a:r>
+              <a:rPr sz="1200">
+                <a:solidFill>
+                  <a:srgbClr val="64748B"/>
+                </a:solidFill>
+                <a:latin typeface="Calibri"/>
+              </a:rPr>
+              <a:t>Ngữ văn 11 · Bài 2: Cấu Tứ Và Hình Ảnh Trong Thơ Trữ Tình          23</a:t>
+            </a:r>
+          </a:p>
+        </p:txBody>
+      </p:sp>
+      <p:sp>
+        <p:nvSpPr>
+          <p:cNvPr id="7" name="TextBox 6"/>
+          <p:cNvSpPr txBox="1"/>
+          <p:nvPr/>
+        </p:nvSpPr>
+        <p:spPr>
+          <a:xfrm>
+            <a:off x="731520" y="1463040"/>
+            <a:ext cx="10789920" cy="3566160"/>
+          </a:xfrm>
+          <a:prstGeom prst="rect">
+            <a:avLst/>
+          </a:prstGeom>
+          <a:noFill/>
+        </p:spPr>
+        <p:txBody>
+          <a:bodyPr wrap="square" anchor="t" lIns="45720" rIns="45720">
             <a:spAutoFit/>
           </a:bodyPr>
           <a:lstStyle/>
@@ -9931,13 +10174,100 @@
               </a:spcAft>
             </a:pPr>
             <a:r>
-              <a:rPr sz="3600" b="1">
+              <a:rPr sz="2600" b="1">
+                <a:solidFill>
+                  <a:srgbClr val="1E293B"/>
+                </a:solidFill>
+                <a:latin typeface="Calibri"/>
+              </a:rPr>
+              <a:t>Những hình ảnh, âm thanh trong bài thơ diễn tả mâu thuẫn giữa nỗi buồn với ý thức vượt qua trở ngại của nhân vật trữ tình như thế nào?</a:t>
+            </a:r>
+          </a:p>
+        </p:txBody>
+      </p:sp>
+      <p:sp>
+        <p:nvSpPr>
+          <p:cNvPr id="8" name="Rounded Rectangle 7"/>
+          <p:cNvSpPr/>
+          <p:nvPr/>
+        </p:nvSpPr>
+        <p:spPr>
+          <a:xfrm>
+            <a:off x="731520" y="5120640"/>
+            <a:ext cx="10789920" cy="693420"/>
+          </a:xfrm>
+          <a:prstGeom prst="roundRect">
+            <a:avLst>
+              <a:gd name="adj" fmla="val 8000"/>
+            </a:avLst>
+          </a:prstGeom>
+          <a:solidFill>
+            <a:srgbClr val="EFF4FF"/>
+          </a:solidFill>
+          <a:ln w="19050">
+            <a:solidFill>
+              <a:srgbClr val="1E40AF"/>
+            </a:solidFill>
+          </a:ln>
+          <a:effectLst/>
+        </p:spPr>
+        <p:style>
+          <a:lnRef idx="1">
+            <a:schemeClr val="accent1"/>
+          </a:lnRef>
+          <a:fillRef idx="3">
+            <a:schemeClr val="accent1"/>
+          </a:fillRef>
+          <a:effectRef idx="2">
+            <a:schemeClr val="accent1"/>
+          </a:effectRef>
+          <a:fontRef idx="minor">
+            <a:schemeClr val="lt1"/>
+          </a:fontRef>
+        </p:style>
+        <p:txBody>
+          <a:bodyPr rtlCol="0" anchor="ctr"/>
+          <a:lstStyle/>
+          <a:p>
+            <a:pPr algn="ctr"/>
+          </a:p>
+        </p:txBody>
+      </p:sp>
+      <p:sp>
+        <p:nvSpPr>
+          <p:cNvPr id="9" name="TextBox 8"/>
+          <p:cNvSpPr txBox="1"/>
+          <p:nvPr/>
+        </p:nvSpPr>
+        <p:spPr>
+          <a:xfrm>
+            <a:off x="914400" y="5120640"/>
+            <a:ext cx="10424160" cy="693420"/>
+          </a:xfrm>
+          <a:prstGeom prst="rect">
+            <a:avLst/>
+          </a:prstGeom>
+          <a:noFill/>
+        </p:spPr>
+        <p:txBody>
+          <a:bodyPr wrap="square" anchor="ctr" lIns="45720" rIns="45720">
+            <a:spAutoFit/>
+          </a:bodyPr>
+          <a:lstStyle/>
+          <a:p>
+            <a:pPr algn="l">
+              <a:spcAft>
+                <a:spcPts val="400"/>
+              </a:spcAft>
+            </a:pPr>
+            <a:r>
+              <a:rPr sz="2200" b="1">
                 <a:solidFill>
                   <a:srgbClr val="1E40AF"/>
                 </a:solidFill>
                 <a:latin typeface="Calibri"/>
               </a:rPr>
-              <a:t>TIẾT 19: THỰC HÀNH TIẾNG VIỆT</a:t>
+              <a:t>💡 Trăng, cột sọc chỉ đường, tiếng lục lạc, kim đồng hồ…</a:t>
             </a:r>
           </a:p>
         </p:txBody>
@@ -10020,14 +10350,14 @@
         </p:nvSpPr>
         <p:spPr>
           <a:xfrm>
-            <a:off x="10253167" y="457200"/>
-            <a:ext cx="1389888" cy="457200"/>
+            <a:off x="9942271" y="457200"/>
+            <a:ext cx="1700784" cy="457200"/>
           </a:xfrm>
           <a:prstGeom prst="roundRect">
             <a:avLst/>
           </a:prstGeom>
           <a:solidFill>
-            <a:srgbClr val="1E40AF"/>
+            <a:srgbClr val="991B1B"/>
           </a:solidFill>
           <a:ln>
             <a:noFill/>
@@ -10060,7 +10390,7 @@
                 </a:solidFill>
                 <a:latin typeface="Arial"/>
               </a:rPr>
-              <a:t>ĐỀ BÀI</a:t>
+              <a:t>LỜI GIẢI</a:t>
             </a:r>
           </a:p>
         </p:txBody>
@@ -10074,7 +10404,7 @@
         <p:spPr>
           <a:xfrm>
             <a:off x="731520" y="274320"/>
-            <a:ext cx="9582912" cy="868680"/>
+            <a:ext cx="9272016" cy="868680"/>
           </a:xfrm>
           <a:prstGeom prst="rect">
             <a:avLst/>
@@ -10094,7 +10424,7 @@
                 </a:solidFill>
                 <a:latin typeface="Arial"/>
               </a:rPr>
-              <a:t>PHÁ VỠ QUY TẮC NGÔN NGỮ</a:t>
+              <a:t>NỖI BUỒN VÀ Ý THỨC VƯỢT QUA</a:t>
             </a:r>
           </a:p>
         </p:txBody>
@@ -10187,7 +10517,7 @@
         <p:spPr>
           <a:xfrm>
             <a:off x="731520" y="1463040"/>
-            <a:ext cx="10789920" cy="3566160"/>
+            <a:ext cx="10789920" cy="3474720"/>
           </a:xfrm>
           <a:prstGeom prst="rect">
             <a:avLst/>
@@ -10200,19 +10530,66 @@
           </a:bodyPr>
           <a:lstStyle/>
           <a:p>
-            <a:pPr algn="l">
+            <a:pPr algn="l" marL="365760" indent="-365760">
               <a:spcAft>
                 <a:spcPts val="800"/>
               </a:spcAft>
+              <a:buClr>
+                <a:srgbClr val="1E40AF"/>
+              </a:buClr>
+              <a:buFont typeface="Arial"/>
+              <a:buChar char="•"/>
             </a:pPr>
             <a:r>
-              <a:rPr sz="2600" b="1">
+              <a:rPr sz="2300">
                 <a:solidFill>
                   <a:srgbClr val="1E293B"/>
                 </a:solidFill>
                 <a:latin typeface="Calibri"/>
               </a:rPr>
-              <a:t>Chỉ ra nét độc đáo trong kết hợp từ “buồn điệp điệp” và cụm từ “sâu chót vót” trong Tràng giang.</a:t>
+              <a:t>Trăng buồn, đường vắng, tiếng lục lạc đơn điệu – nỗi buồn.</a:t>
+            </a:r>
+          </a:p>
+          <a:p>
+            <a:pPr algn="l" marL="365760" indent="-365760">
+              <a:spcAft>
+                <a:spcPts val="800"/>
+              </a:spcAft>
+              <a:buClr>
+                <a:srgbClr val="1E40AF"/>
+              </a:buClr>
+              <a:buFont typeface="Arial"/>
+              <a:buChar char="•"/>
+            </a:pPr>
+            <a:r>
+              <a:rPr sz="2300">
+                <a:solidFill>
+                  <a:srgbClr val="1E293B"/>
+                </a:solidFill>
+                <a:latin typeface="Calibri"/>
+              </a:rPr>
+              <a:t>Xe tam mã lao nhanh, cột sọc chỉ đường – hành trình tiếp diễn.</a:t>
+            </a:r>
+          </a:p>
+          <a:p>
+            <a:pPr algn="l" marL="365760" indent="-365760">
+              <a:spcAft>
+                <a:spcPts val="800"/>
+              </a:spcAft>
+              <a:buClr>
+                <a:srgbClr val="1E40AF"/>
+              </a:buClr>
+              <a:buFont typeface="Arial"/>
+              <a:buChar char="•"/>
+            </a:pPr>
+            <a:r>
+              <a:rPr sz="2300">
+                <a:solidFill>
+                  <a:srgbClr val="1E293B"/>
+                </a:solidFill>
+                <a:latin typeface="Calibri"/>
+              </a:rPr>
+              <a:t>Tâm tưởng: Nhi-na, lò lửa đỏ – hơi ấm phía trước.</a:t>
             </a:r>
           </a:p>
         </p:txBody>
@@ -10225,8 +10602,8 @@
         </p:nvSpPr>
         <p:spPr>
           <a:xfrm>
-            <a:off x="731520" y="5120640"/>
-            <a:ext cx="10789920" cy="693420"/>
+            <a:off x="731520" y="5074920"/>
+            <a:ext cx="10789920" cy="731520"/>
           </a:xfrm>
           <a:prstGeom prst="roundRect">
             <a:avLst>
@@ -10234,11 +10611,11 @@
             </a:avLst>
           </a:prstGeom>
           <a:solidFill>
-            <a:srgbClr val="EFF4FF"/>
+            <a:srgbClr val="FEF2F2"/>
           </a:solidFill>
           <a:ln w="19050">
             <a:solidFill>
-              <a:srgbClr val="1E40AF"/>
+              <a:srgbClr val="991B1B"/>
             </a:solidFill>
           </a:ln>
           <a:effectLst/>
@@ -10273,8 +10650,8 @@
         </p:nvSpPr>
         <p:spPr>
           <a:xfrm>
-            <a:off x="914400" y="5120640"/>
-            <a:ext cx="10424160" cy="693420"/>
+            <a:off x="914400" y="5074920"/>
+            <a:ext cx="10424160" cy="731520"/>
           </a:xfrm>
           <a:prstGeom prst="rect">
             <a:avLst/>
@@ -10293,13 +10670,13 @@
               </a:spcAft>
             </a:pPr>
             <a:r>
-              <a:rPr sz="2200" b="1">
-                <a:solidFill>
-                  <a:srgbClr val="1E40AF"/>
+              <a:rPr sz="2400" b="1">
+                <a:solidFill>
+                  <a:srgbClr val="991B1B"/>
                 </a:solidFill>
                 <a:latin typeface="Calibri"/>
               </a:rPr>
-              <a:t>💡 Thông thường “điệp điệp”, “chót vót” đi với từ nào?</a:t>
+              <a:t>Không chìm trong u buồn, luôn hướng tới niềm vui.</a:t>
             </a:r>
           </a:p>
         </p:txBody>
@@ -10313,6 +10690,115 @@
 </file>
 
 <file path=ppt/slides/slide25.xml><?xml version="1.0" encoding="utf-8"?>
+<p:sld xmlns:a="http://schemas.openxmlformats.org/drawingml/2006/main" xmlns:p="http://schemas.openxmlformats.org/presentationml/2006/main" xmlns:r="http://schemas.openxmlformats.org/officeDocument/2006/relationships">
+  <p:cSld>
+    <p:bg>
+      <p:bgPr>
+        <a:solidFill>
+          <a:srgbClr val="F8F9FA"/>
+        </a:solidFill>
+        <a:effectLst/>
+      </p:bgPr>
+    </p:bg>
+    <p:spTree>
+      <p:nvGrpSpPr>
+        <p:cNvPr id="1" name=""/>
+        <p:cNvGrpSpPr/>
+        <p:nvPr/>
+      </p:nvGrpSpPr>
+      <p:grpSpPr/>
+      <p:sp>
+        <p:nvSpPr>
+          <p:cNvPr id="2" name="Rectangle 1"/>
+          <p:cNvSpPr/>
+          <p:nvPr/>
+        </p:nvSpPr>
+        <p:spPr>
+          <a:xfrm>
+            <a:off x="548640" y="2926080"/>
+            <a:ext cx="164592" cy="1005840"/>
+          </a:xfrm>
+          <a:prstGeom prst="rect">
+            <a:avLst/>
+          </a:prstGeom>
+          <a:solidFill>
+            <a:srgbClr val="991B1B"/>
+          </a:solidFill>
+          <a:ln>
+            <a:noFill/>
+          </a:ln>
+          <a:effectLst/>
+        </p:spPr>
+        <p:style>
+          <a:lnRef idx="1">
+            <a:schemeClr val="accent1"/>
+          </a:lnRef>
+          <a:fillRef idx="3">
+            <a:schemeClr val="accent1"/>
+          </a:fillRef>
+          <a:effectRef idx="2">
+            <a:schemeClr val="accent1"/>
+          </a:effectRef>
+          <a:fontRef idx="minor">
+            <a:schemeClr val="lt1"/>
+          </a:fontRef>
+        </p:style>
+        <p:txBody>
+          <a:bodyPr rtlCol="0" anchor="ctr"/>
+          <a:lstStyle/>
+          <a:p>
+            <a:pPr algn="ctr"/>
+          </a:p>
+        </p:txBody>
+      </p:sp>
+      <p:sp>
+        <p:nvSpPr>
+          <p:cNvPr id="3" name="TextBox 2"/>
+          <p:cNvSpPr txBox="1"/>
+          <p:nvPr/>
+        </p:nvSpPr>
+        <p:spPr>
+          <a:xfrm>
+            <a:off x="914400" y="2743200"/>
+            <a:ext cx="10515600" cy="1371600"/>
+          </a:xfrm>
+          <a:prstGeom prst="rect">
+            <a:avLst/>
+          </a:prstGeom>
+          <a:noFill/>
+        </p:spPr>
+        <p:txBody>
+          <a:bodyPr wrap="square" anchor="ctr" lIns="45720" rIns="45720">
+            <a:spAutoFit/>
+          </a:bodyPr>
+          <a:lstStyle/>
+          <a:p>
+            <a:pPr algn="l">
+              <a:spcAft>
+                <a:spcPts val="800"/>
+              </a:spcAft>
+            </a:pPr>
+            <a:r>
+              <a:rPr sz="3600" b="1">
+                <a:solidFill>
+                  <a:srgbClr val="1E40AF"/>
+                </a:solidFill>
+                <a:latin typeface="Calibri"/>
+              </a:rPr>
+              <a:t>TIẾT 19: THỰC HÀNH TIẾNG VIỆT</a:t>
+            </a:r>
+          </a:p>
+        </p:txBody>
+      </p:sp>
+    </p:spTree>
+  </p:cSld>
+  <p:clrMapOvr>
+    <a:masterClrMapping/>
+  </p:clrMapOvr>
+</p:sld>
+</file>
+
+<file path=ppt/slides/slide26.xml><?xml version="1.0" encoding="utf-8"?>
 <p:sld xmlns:a="http://schemas.openxmlformats.org/drawingml/2006/main" xmlns:p="http://schemas.openxmlformats.org/presentationml/2006/main" xmlns:r="http://schemas.openxmlformats.org/officeDocument/2006/relationships">
   <p:cSld>
     <p:bg>
@@ -10382,14 +10868,14 @@
         </p:nvSpPr>
         <p:spPr>
           <a:xfrm>
-            <a:off x="9942271" y="457200"/>
-            <a:ext cx="1700784" cy="457200"/>
+            <a:off x="10253167" y="457200"/>
+            <a:ext cx="1389888" cy="457200"/>
           </a:xfrm>
           <a:prstGeom prst="roundRect">
             <a:avLst/>
           </a:prstGeom>
           <a:solidFill>
-            <a:srgbClr val="991B1B"/>
+            <a:srgbClr val="1E40AF"/>
           </a:solidFill>
           <a:ln>
             <a:noFill/>
@@ -10422,7 +10908,7 @@
                 </a:solidFill>
                 <a:latin typeface="Arial"/>
               </a:rPr>
-              <a:t>LỜI GIẢI</a:t>
+              <a:t>ĐỀ BÀI</a:t>
             </a:r>
           </a:p>
         </p:txBody>
@@ -10436,7 +10922,7 @@
         <p:spPr>
           <a:xfrm>
             <a:off x="731520" y="274320"/>
-            <a:ext cx="9272016" cy="868680"/>
+            <a:ext cx="9582912" cy="868680"/>
           </a:xfrm>
           <a:prstGeom prst="rect">
             <a:avLst/>
@@ -10535,7 +11021,7 @@
                 </a:solidFill>
                 <a:latin typeface="Calibri"/>
               </a:rPr>
-              <a:t>Ngữ văn 11 · Bài 2: Cấu Tứ Và Hình Ảnh Trong Thơ Trữ Tình          25</a:t>
+              <a:t>Ngữ văn 11 · Bài 2: Cấu Tứ Và Hình Ảnh Trong Thơ Trữ Tình          26</a:t>
             </a:r>
           </a:p>
         </p:txBody>
@@ -10549,7 +11035,7 @@
         <p:spPr>
           <a:xfrm>
             <a:off x="731520" y="1463040"/>
-            <a:ext cx="10789920" cy="3474720"/>
+            <a:ext cx="10789920" cy="3566160"/>
           </a:xfrm>
           <a:prstGeom prst="rect">
             <a:avLst/>
@@ -10562,66 +11048,19 @@
           </a:bodyPr>
           <a:lstStyle/>
           <a:p>
-            <a:pPr algn="l" marL="365760" indent="-365760">
+            <a:pPr algn="l">
               <a:spcAft>
                 <a:spcPts val="800"/>
               </a:spcAft>
-              <a:buClr>
-                <a:srgbClr val="1E40AF"/>
-              </a:buClr>
-              <a:buFont typeface="Arial"/>
-              <a:buChar char="•"/>
             </a:pPr>
             <a:r>
-              <a:rPr sz="2300">
+              <a:rPr sz="2600" b="1">
                 <a:solidFill>
                   <a:srgbClr val="1E293B"/>
                 </a:solidFill>
                 <a:latin typeface="Calibri"/>
               </a:rPr>
-              <a:t>“trùng trùng điệp điệp” – chỉ sự vật; ghép với “buồn” → nỗi buồn chồng chất.</a:t>
-            </a:r>
-          </a:p>
-          <a:p>
-            <a:pPr algn="l" marL="365760" indent="-365760">
-              <a:spcAft>
-                <a:spcPts val="800"/>
-              </a:spcAft>
-              <a:buClr>
-                <a:srgbClr val="1E40AF"/>
-              </a:buClr>
-              <a:buFont typeface="Arial"/>
-              <a:buChar char="•"/>
-            </a:pPr>
-            <a:r>
-              <a:rPr sz="2300">
-                <a:solidFill>
-                  <a:srgbClr val="1E293B"/>
-                </a:solidFill>
-                <a:latin typeface="Calibri"/>
-              </a:rPr>
-              <a:t>“sâu” (chiều thẳm) + “chót vót” (chiều cao) → kết hợp lạ.</a:t>
-            </a:r>
-          </a:p>
-          <a:p>
-            <a:pPr algn="l" marL="365760" indent="-365760">
-              <a:spcAft>
-                <a:spcPts val="800"/>
-              </a:spcAft>
-              <a:buClr>
-                <a:srgbClr val="1E40AF"/>
-              </a:buClr>
-              <a:buFont typeface="Arial"/>
-              <a:buChar char="•"/>
-            </a:pPr>
-            <a:r>
-              <a:rPr sz="2300">
-                <a:solidFill>
-                  <a:srgbClr val="1E293B"/>
-                </a:solidFill>
-                <a:latin typeface="Calibri"/>
-              </a:rPr>
-              <a:t>Mở rộng không gian ba chiều, nỗi buồn thăm thẳm.</a:t>
+              <a:t>Chỉ ra nét độc đáo trong kết hợp từ “buồn điệp điệp” và cụm từ “sâu chót vót” trong Tràng giang.</a:t>
             </a:r>
           </a:p>
         </p:txBody>
@@ -10634,8 +11073,8 @@
         </p:nvSpPr>
         <p:spPr>
           <a:xfrm>
-            <a:off x="731520" y="5074920"/>
-            <a:ext cx="10789920" cy="731520"/>
+            <a:off x="731520" y="5120640"/>
+            <a:ext cx="10789920" cy="693420"/>
           </a:xfrm>
           <a:prstGeom prst="roundRect">
             <a:avLst>
@@ -10643,11 +11082,11 @@
             </a:avLst>
           </a:prstGeom>
           <a:solidFill>
-            <a:srgbClr val="FEF2F2"/>
+            <a:srgbClr val="EFF4FF"/>
           </a:solidFill>
           <a:ln w="19050">
             <a:solidFill>
-              <a:srgbClr val="991B1B"/>
+              <a:srgbClr val="1E40AF"/>
             </a:solidFill>
           </a:ln>
           <a:effectLst/>
@@ -10682,8 +11121,8 @@
         </p:nvSpPr>
         <p:spPr>
           <a:xfrm>
-            <a:off x="914400" y="5074920"/>
-            <a:ext cx="10424160" cy="731520"/>
+            <a:off x="914400" y="5120640"/>
+            <a:ext cx="10424160" cy="693420"/>
           </a:xfrm>
           <a:prstGeom prst="rect">
             <a:avLst/>
@@ -10702,122 +11141,13 @@
               </a:spcAft>
             </a:pPr>
             <a:r>
-              <a:rPr sz="2400" b="1">
-                <a:solidFill>
-                  <a:srgbClr val="991B1B"/>
+              <a:rPr sz="2200" b="1">
+                <a:solidFill>
+                  <a:srgbClr val="1E40AF"/>
                 </a:solidFill>
                 <a:latin typeface="Calibri"/>
               </a:rPr>
-              <a:t>Phá vỡ quy tắc để “lạ hoá”, tăng sức gợi.</a:t>
-            </a:r>
-          </a:p>
-        </p:txBody>
-      </p:sp>
-    </p:spTree>
-  </p:cSld>
-  <p:clrMapOvr>
-    <a:masterClrMapping/>
-  </p:clrMapOvr>
-</p:sld>
-</file>
-
-<file path=ppt/slides/slide26.xml><?xml version="1.0" encoding="utf-8"?>
-<p:sld xmlns:a="http://schemas.openxmlformats.org/drawingml/2006/main" xmlns:p="http://schemas.openxmlformats.org/presentationml/2006/main" xmlns:r="http://schemas.openxmlformats.org/officeDocument/2006/relationships">
-  <p:cSld>
-    <p:bg>
-      <p:bgPr>
-        <a:solidFill>
-          <a:srgbClr val="F8F9FA"/>
-        </a:solidFill>
-        <a:effectLst/>
-      </p:bgPr>
-    </p:bg>
-    <p:spTree>
-      <p:nvGrpSpPr>
-        <p:cNvPr id="1" name=""/>
-        <p:cNvGrpSpPr/>
-        <p:nvPr/>
-      </p:nvGrpSpPr>
-      <p:grpSpPr/>
-      <p:sp>
-        <p:nvSpPr>
-          <p:cNvPr id="2" name="Rectangle 1"/>
-          <p:cNvSpPr/>
-          <p:nvPr/>
-        </p:nvSpPr>
-        <p:spPr>
-          <a:xfrm>
-            <a:off x="548640" y="2926080"/>
-            <a:ext cx="164592" cy="1005840"/>
-          </a:xfrm>
-          <a:prstGeom prst="rect">
-            <a:avLst/>
-          </a:prstGeom>
-          <a:solidFill>
-            <a:srgbClr val="991B1B"/>
-          </a:solidFill>
-          <a:ln>
-            <a:noFill/>
-          </a:ln>
-          <a:effectLst/>
-        </p:spPr>
-        <p:style>
-          <a:lnRef idx="1">
-            <a:schemeClr val="accent1"/>
-          </a:lnRef>
-          <a:fillRef idx="3">
-            <a:schemeClr val="accent1"/>
-          </a:fillRef>
-          <a:effectRef idx="2">
-            <a:schemeClr val="accent1"/>
-          </a:effectRef>
-          <a:fontRef idx="minor">
-            <a:schemeClr val="lt1"/>
-          </a:fontRef>
-        </p:style>
-        <p:txBody>
-          <a:bodyPr rtlCol="0" anchor="ctr"/>
-          <a:lstStyle/>
-          <a:p>
-            <a:pPr algn="ctr"/>
-          </a:p>
-        </p:txBody>
-      </p:sp>
-      <p:sp>
-        <p:nvSpPr>
-          <p:cNvPr id="3" name="TextBox 2"/>
-          <p:cNvSpPr txBox="1"/>
-          <p:nvPr/>
-        </p:nvSpPr>
-        <p:spPr>
-          <a:xfrm>
-            <a:off x="914400" y="2743200"/>
-            <a:ext cx="10515600" cy="1371600"/>
-          </a:xfrm>
-          <a:prstGeom prst="rect">
-            <a:avLst/>
-          </a:prstGeom>
-          <a:noFill/>
-        </p:spPr>
-        <p:txBody>
-          <a:bodyPr wrap="square" anchor="ctr" lIns="45720" rIns="45720">
-            <a:spAutoFit/>
-          </a:bodyPr>
-          <a:lstStyle/>
-          <a:p>
-            <a:pPr algn="l">
-              <a:spcAft>
-                <a:spcPts val="800"/>
-              </a:spcAft>
-            </a:pPr>
-            <a:r>
-              <a:rPr sz="3600" b="1">
-                <a:solidFill>
-                  <a:srgbClr val="1E40AF"/>
-                </a:solidFill>
-                <a:latin typeface="Calibri"/>
-              </a:rPr>
-              <a:t>TIẾT 20 – 22: VIẾT – NÓI VÀ NGHE</a:t>
+              <a:t>💡 Thông thường “điệp điệp”, “chót vót” đi với từ nào?</a:t>
             </a:r>
           </a:p>
         </p:txBody>
@@ -10900,14 +11230,14 @@
         </p:nvSpPr>
         <p:spPr>
           <a:xfrm>
-            <a:off x="10097719" y="457200"/>
-            <a:ext cx="1545336" cy="457200"/>
+            <a:off x="9942271" y="457200"/>
+            <a:ext cx="1700784" cy="457200"/>
           </a:xfrm>
           <a:prstGeom prst="roundRect">
             <a:avLst/>
           </a:prstGeom>
           <a:solidFill>
-            <a:srgbClr val="166534"/>
+            <a:srgbClr val="991B1B"/>
           </a:solidFill>
           <a:ln>
             <a:noFill/>
@@ -10940,7 +11270,7 @@
                 </a:solidFill>
                 <a:latin typeface="Arial"/>
               </a:rPr>
-              <a:t>GHI NHỚ</a:t>
+              <a:t>LỜI GIẢI</a:t>
             </a:r>
           </a:p>
         </p:txBody>
@@ -10954,7 +11284,7 @@
         <p:spPr>
           <a:xfrm>
             <a:off x="731520" y="274320"/>
-            <a:ext cx="9427464" cy="868680"/>
+            <a:ext cx="9272016" cy="868680"/>
           </a:xfrm>
           <a:prstGeom prst="rect">
             <a:avLst/>
@@ -10974,7 +11304,7 @@
                 </a:solidFill>
                 <a:latin typeface="Arial"/>
               </a:rPr>
-              <a:t>YÊU CẦU BÀI VIẾT</a:t>
+              <a:t>PHÁ VỠ QUY TẮC NGÔN NGỮ</a:t>
             </a:r>
           </a:p>
         </p:txBody>
@@ -11067,7 +11397,7 @@
         <p:spPr>
           <a:xfrm>
             <a:off x="731520" y="1463040"/>
-            <a:ext cx="10789920" cy="4754880"/>
+            <a:ext cx="10789920" cy="3474720"/>
           </a:xfrm>
           <a:prstGeom prst="rect">
             <a:avLst/>
@@ -11091,13 +11421,13 @@
               <a:buChar char="•"/>
             </a:pPr>
             <a:r>
-              <a:rPr sz="2400">
+              <a:rPr sz="2300">
                 <a:solidFill>
                   <a:srgbClr val="1E293B"/>
                 </a:solidFill>
                 <a:latin typeface="Calibri"/>
               </a:rPr>
-              <a:t>Giới thiệu bài thơ, lí do chọn.</a:t>
+              <a:t>“trùng trùng điệp điệp” – chỉ sự vật; ghép với “buồn” → nỗi buồn chồng chất.</a:t>
             </a:r>
           </a:p>
           <a:p>
@@ -11112,13 +11442,13 @@
               <a:buChar char="•"/>
             </a:pPr>
             <a:r>
-              <a:rPr sz="2400">
+              <a:rPr sz="2300">
                 <a:solidFill>
                   <a:srgbClr val="1E293B"/>
                 </a:solidFill>
                 <a:latin typeface="Calibri"/>
               </a:rPr>
-              <a:t>Xác định trọng tâm: cấu tứ độc đáo, sự chi phối tới hệ thống hình ảnh.</a:t>
+              <a:t>“sâu” (chiều thẳm) + “chót vót” (chiều cao) → kết hợp lạ.</a:t>
             </a:r>
           </a:p>
           <a:p>
@@ -11133,34 +11463,100 @@
               <a:buChar char="•"/>
             </a:pPr>
             <a:r>
-              <a:rPr sz="2400">
+              <a:rPr sz="2300">
                 <a:solidFill>
                   <a:srgbClr val="1E293B"/>
                 </a:solidFill>
                 <a:latin typeface="Calibri"/>
               </a:rPr>
-              <a:t>Lí lẽ, bằng chứng xác đáng; nêu hàm nghĩa thận trọng.</a:t>
-            </a:r>
-          </a:p>
-          <a:p>
-            <a:pPr algn="l" marL="365760" indent="-365760">
+              <a:t>Mở rộng không gian ba chiều, nỗi buồn thăm thẳm.</a:t>
+            </a:r>
+          </a:p>
+        </p:txBody>
+      </p:sp>
+      <p:sp>
+        <p:nvSpPr>
+          <p:cNvPr id="8" name="Rounded Rectangle 7"/>
+          <p:cNvSpPr/>
+          <p:nvPr/>
+        </p:nvSpPr>
+        <p:spPr>
+          <a:xfrm>
+            <a:off x="731520" y="5074920"/>
+            <a:ext cx="10789920" cy="731520"/>
+          </a:xfrm>
+          <a:prstGeom prst="roundRect">
+            <a:avLst>
+              <a:gd name="adj" fmla="val 8000"/>
+            </a:avLst>
+          </a:prstGeom>
+          <a:solidFill>
+            <a:srgbClr val="FEF2F2"/>
+          </a:solidFill>
+          <a:ln w="19050">
+            <a:solidFill>
+              <a:srgbClr val="991B1B"/>
+            </a:solidFill>
+          </a:ln>
+          <a:effectLst/>
+        </p:spPr>
+        <p:style>
+          <a:lnRef idx="1">
+            <a:schemeClr val="accent1"/>
+          </a:lnRef>
+          <a:fillRef idx="3">
+            <a:schemeClr val="accent1"/>
+          </a:fillRef>
+          <a:effectRef idx="2">
+            <a:schemeClr val="accent1"/>
+          </a:effectRef>
+          <a:fontRef idx="minor">
+            <a:schemeClr val="lt1"/>
+          </a:fontRef>
+        </p:style>
+        <p:txBody>
+          <a:bodyPr rtlCol="0" anchor="ctr"/>
+          <a:lstStyle/>
+          <a:p>
+            <a:pPr algn="ctr"/>
+          </a:p>
+        </p:txBody>
+      </p:sp>
+      <p:sp>
+        <p:nvSpPr>
+          <p:cNvPr id="9" name="TextBox 8"/>
+          <p:cNvSpPr txBox="1"/>
+          <p:nvPr/>
+        </p:nvSpPr>
+        <p:spPr>
+          <a:xfrm>
+            <a:off x="914400" y="5074920"/>
+            <a:ext cx="10424160" cy="731520"/>
+          </a:xfrm>
+          <a:prstGeom prst="rect">
+            <a:avLst/>
+          </a:prstGeom>
+          <a:noFill/>
+        </p:spPr>
+        <p:txBody>
+          <a:bodyPr wrap="square" anchor="ctr" lIns="45720" rIns="45720">
+            <a:spAutoFit/>
+          </a:bodyPr>
+          <a:lstStyle/>
+          <a:p>
+            <a:pPr algn="l">
               <a:spcAft>
-                <a:spcPts val="800"/>
+                <a:spcPts val="400"/>
               </a:spcAft>
-              <a:buClr>
-                <a:srgbClr val="1E40AF"/>
-              </a:buClr>
-              <a:buFont typeface="Arial"/>
-              <a:buChar char="•"/>
             </a:pPr>
             <a:r>
-              <a:rPr sz="2400">
-                <a:solidFill>
-                  <a:srgbClr val="1E293B"/>
+              <a:rPr sz="2400" b="1">
+                <a:solidFill>
+                  <a:srgbClr val="991B1B"/>
                 </a:solidFill>
                 <a:latin typeface="Calibri"/>
               </a:rPr>
-              <a:t>Đánh giá giá trị cấu tứ, hình ảnh.</a:t>
+              <a:t>Phá vỡ quy tắc để “lạ hoá”, tăng sức gợi.</a:t>
             </a:r>
           </a:p>
         </p:txBody>
@@ -11179,7 +11575,7 @@
     <p:bg>
       <p:bgPr>
         <a:solidFill>
-          <a:srgbClr val="FFFFFF"/>
+          <a:srgbClr val="F8F9FA"/>
         </a:solidFill>
         <a:effectLst/>
       </p:bgPr>
@@ -11199,14 +11595,14 @@
         </p:nvSpPr>
         <p:spPr>
           <a:xfrm>
-            <a:off x="457200" y="384048"/>
-            <a:ext cx="109728" cy="658368"/>
+            <a:off x="548640" y="2926080"/>
+            <a:ext cx="164592" cy="1005840"/>
           </a:xfrm>
           <a:prstGeom prst="rect">
             <a:avLst/>
           </a:prstGeom>
           <a:solidFill>
-            <a:srgbClr val="1E40AF"/>
+            <a:srgbClr val="991B1B"/>
           </a:solidFill>
           <a:ln>
             <a:noFill/>
@@ -11237,67 +11633,14 @@
       </p:sp>
       <p:sp>
         <p:nvSpPr>
-          <p:cNvPr id="3" name="Rounded Rectangle 2"/>
-          <p:cNvSpPr/>
-          <p:nvPr/>
-        </p:nvSpPr>
-        <p:spPr>
-          <a:xfrm>
-            <a:off x="10253167" y="457200"/>
-            <a:ext cx="1389888" cy="457200"/>
-          </a:xfrm>
-          <a:prstGeom prst="roundRect">
-            <a:avLst/>
-          </a:prstGeom>
-          <a:solidFill>
-            <a:srgbClr val="1E40AF"/>
-          </a:solidFill>
-          <a:ln>
-            <a:noFill/>
-          </a:ln>
-          <a:effectLst/>
-        </p:spPr>
-        <p:style>
-          <a:lnRef idx="1">
-            <a:schemeClr val="accent1"/>
-          </a:lnRef>
-          <a:fillRef idx="3">
-            <a:schemeClr val="accent1"/>
-          </a:fillRef>
-          <a:effectRef idx="2">
-            <a:schemeClr val="accent1"/>
-          </a:effectRef>
-          <a:fontRef idx="minor">
-            <a:schemeClr val="lt1"/>
-          </a:fontRef>
-        </p:style>
-        <p:txBody>
-          <a:bodyPr rtlCol="0" anchor="ctr" wrap="none" tIns="0" bIns="0"/>
-          <a:lstStyle/>
-          <a:p>
-            <a:pPr algn="ctr"/>
-            <a:r>
-              <a:rPr sz="1400" b="1">
-                <a:solidFill>
-                  <a:srgbClr val="FFFFFF"/>
-                </a:solidFill>
-                <a:latin typeface="Arial"/>
-              </a:rPr>
-              <a:t>ĐỀ BÀI</a:t>
-            </a:r>
-          </a:p>
-        </p:txBody>
-      </p:sp>
-      <p:sp>
-        <p:nvSpPr>
-          <p:cNvPr id="4" name="TextBox 3"/>
+          <p:cNvPr id="3" name="TextBox 2"/>
           <p:cNvSpPr txBox="1"/>
           <p:nvPr/>
         </p:nvSpPr>
         <p:spPr>
           <a:xfrm>
-            <a:off x="731520" y="274320"/>
-            <a:ext cx="9582912" cy="868680"/>
+            <a:off x="914400" y="2743200"/>
+            <a:ext cx="10515600" cy="1371600"/>
           </a:xfrm>
           <a:prstGeom prst="rect">
             <a:avLst/>
@@ -11305,120 +11648,7 @@
           <a:noFill/>
         </p:spPr>
         <p:txBody>
-          <a:bodyPr wrap="square" anchor="ctr">
-            <a:spAutoFit/>
-          </a:bodyPr>
-          <a:lstStyle/>
-          <a:p>
-            <a:r>
-              <a:rPr sz="3600" b="1">
-                <a:solidFill>
-                  <a:srgbClr val="1E40AF"/>
-                </a:solidFill>
-                <a:latin typeface="Arial"/>
-              </a:rPr>
-              <a:t>ĐỀ THỰC HÀNH VIẾT</a:t>
-            </a:r>
-          </a:p>
-        </p:txBody>
-      </p:sp>
-      <p:sp>
-        <p:nvSpPr>
-          <p:cNvPr id="5" name="Rectangle 4"/>
-          <p:cNvSpPr/>
-          <p:nvPr/>
-        </p:nvSpPr>
-        <p:spPr>
-          <a:xfrm>
-            <a:off x="457200" y="1207008"/>
-            <a:ext cx="11274552" cy="22000"/>
-          </a:xfrm>
-          <a:prstGeom prst="rect">
-            <a:avLst/>
-          </a:prstGeom>
-          <a:solidFill>
-            <a:srgbClr val="E2E8F0"/>
-          </a:solidFill>
-          <a:ln>
-            <a:noFill/>
-          </a:ln>
-          <a:effectLst/>
-        </p:spPr>
-        <p:style>
-          <a:lnRef idx="1">
-            <a:schemeClr val="accent1"/>
-          </a:lnRef>
-          <a:fillRef idx="3">
-            <a:schemeClr val="accent1"/>
-          </a:fillRef>
-          <a:effectRef idx="2">
-            <a:schemeClr val="accent1"/>
-          </a:effectRef>
-          <a:fontRef idx="minor">
-            <a:schemeClr val="lt1"/>
-          </a:fontRef>
-        </p:style>
-        <p:txBody>
-          <a:bodyPr rtlCol="0" anchor="ctr"/>
-          <a:lstStyle/>
-          <a:p>
-            <a:pPr algn="ctr"/>
-          </a:p>
-        </p:txBody>
-      </p:sp>
-      <p:sp>
-        <p:nvSpPr>
-          <p:cNvPr id="6" name="TextBox 5"/>
-          <p:cNvSpPr txBox="1"/>
-          <p:nvPr/>
-        </p:nvSpPr>
-        <p:spPr>
-          <a:xfrm>
-            <a:off x="457200" y="6355080"/>
-            <a:ext cx="11274552" cy="365760"/>
-          </a:xfrm>
-          <a:prstGeom prst="rect">
-            <a:avLst/>
-          </a:prstGeom>
-          <a:noFill/>
-        </p:spPr>
-        <p:txBody>
-          <a:bodyPr wrap="none">
-            <a:spAutoFit/>
-          </a:bodyPr>
-          <a:lstStyle/>
-          <a:p>
-            <a:pPr algn="r"/>
-            <a:r>
-              <a:rPr sz="1200">
-                <a:solidFill>
-                  <a:srgbClr val="64748B"/>
-                </a:solidFill>
-                <a:latin typeface="Calibri"/>
-              </a:rPr>
-              <a:t>Ngữ văn 11 · Bài 2: Cấu Tứ Và Hình Ảnh Trong Thơ Trữ Tình          28</a:t>
-            </a:r>
-          </a:p>
-        </p:txBody>
-      </p:sp>
-      <p:sp>
-        <p:nvSpPr>
-          <p:cNvPr id="7" name="TextBox 6"/>
-          <p:cNvSpPr txBox="1"/>
-          <p:nvPr/>
-        </p:nvSpPr>
-        <p:spPr>
-          <a:xfrm>
-            <a:off x="731520" y="1463040"/>
-            <a:ext cx="10789920" cy="3566160"/>
-          </a:xfrm>
-          <a:prstGeom prst="rect">
-            <a:avLst/>
-          </a:prstGeom>
-          <a:noFill/>
-        </p:spPr>
-        <p:txBody>
-          <a:bodyPr wrap="square" anchor="t" lIns="45720" rIns="45720">
+          <a:bodyPr wrap="square" anchor="ctr" lIns="45720" rIns="45720">
             <a:spAutoFit/>
           </a:bodyPr>
           <a:lstStyle/>
@@ -11429,100 +11659,13 @@
               </a:spcAft>
             </a:pPr>
             <a:r>
-              <a:rPr sz="2600" b="1">
-                <a:solidFill>
-                  <a:srgbClr val="1E293B"/>
+              <a:rPr sz="3600" b="1">
+                <a:solidFill>
+                  <a:srgbClr val="1E40AF"/>
                 </a:solidFill>
                 <a:latin typeface="Calibri"/>
               </a:rPr>
-              <a:t>Phân tích cấu tứ và hình ảnh trong bài thơ Tràng giang (Huy Cận).</a:t>
-            </a:r>
-          </a:p>
-        </p:txBody>
-      </p:sp>
-      <p:sp>
-        <p:nvSpPr>
-          <p:cNvPr id="8" name="Rounded Rectangle 7"/>
-          <p:cNvSpPr/>
-          <p:nvPr/>
-        </p:nvSpPr>
-        <p:spPr>
-          <a:xfrm>
-            <a:off x="731520" y="5120640"/>
-            <a:ext cx="10789920" cy="693420"/>
-          </a:xfrm>
-          <a:prstGeom prst="roundRect">
-            <a:avLst>
-              <a:gd name="adj" fmla="val 8000"/>
-            </a:avLst>
-          </a:prstGeom>
-          <a:solidFill>
-            <a:srgbClr val="EFF4FF"/>
-          </a:solidFill>
-          <a:ln w="19050">
-            <a:solidFill>
-              <a:srgbClr val="1E40AF"/>
-            </a:solidFill>
-          </a:ln>
-          <a:effectLst/>
-        </p:spPr>
-        <p:style>
-          <a:lnRef idx="1">
-            <a:schemeClr val="accent1"/>
-          </a:lnRef>
-          <a:fillRef idx="3">
-            <a:schemeClr val="accent1"/>
-          </a:fillRef>
-          <a:effectRef idx="2">
-            <a:schemeClr val="accent1"/>
-          </a:effectRef>
-          <a:fontRef idx="minor">
-            <a:schemeClr val="lt1"/>
-          </a:fontRef>
-        </p:style>
-        <p:txBody>
-          <a:bodyPr rtlCol="0" anchor="ctr"/>
-          <a:lstStyle/>
-          <a:p>
-            <a:pPr algn="ctr"/>
-          </a:p>
-        </p:txBody>
-      </p:sp>
-      <p:sp>
-        <p:nvSpPr>
-          <p:cNvPr id="9" name="TextBox 8"/>
-          <p:cNvSpPr txBox="1"/>
-          <p:nvPr/>
-        </p:nvSpPr>
-        <p:spPr>
-          <a:xfrm>
-            <a:off x="914400" y="5120640"/>
-            <a:ext cx="10424160" cy="693420"/>
-          </a:xfrm>
-          <a:prstGeom prst="rect">
-            <a:avLst/>
-          </a:prstGeom>
-          <a:noFill/>
-        </p:spPr>
-        <p:txBody>
-          <a:bodyPr wrap="square" anchor="ctr" lIns="45720" rIns="45720">
-            <a:spAutoFit/>
-          </a:bodyPr>
-          <a:lstStyle/>
-          <a:p>
-            <a:pPr algn="l">
-              <a:spcAft>
-                <a:spcPts val="400"/>
-              </a:spcAft>
-            </a:pPr>
-            <a:r>
-              <a:rPr sz="2200" b="1">
-                <a:solidFill>
-                  <a:srgbClr val="1E40AF"/>
-                </a:solidFill>
-                <a:latin typeface="Calibri"/>
-              </a:rPr>
-              <a:t>💡 Vẽ sơ đồ cấu tứ trước khi viết.</a:t>
+              <a:t>TIẾT 20 – 22: VIẾT – NÓI VÀ NGHE</a:t>
             </a:r>
           </a:p>
         </p:txBody>
@@ -11605,14 +11748,14 @@
         </p:nvSpPr>
         <p:spPr>
           <a:xfrm>
-            <a:off x="9942271" y="457200"/>
-            <a:ext cx="1700784" cy="457200"/>
+            <a:off x="10097719" y="457200"/>
+            <a:ext cx="1545336" cy="457200"/>
           </a:xfrm>
           <a:prstGeom prst="roundRect">
             <a:avLst/>
           </a:prstGeom>
           <a:solidFill>
-            <a:srgbClr val="991B1B"/>
+            <a:srgbClr val="166534"/>
           </a:solidFill>
           <a:ln>
             <a:noFill/>
@@ -11645,7 +11788,7 @@
                 </a:solidFill>
                 <a:latin typeface="Arial"/>
               </a:rPr>
-              <a:t>LỜI GIẢI</a:t>
+              <a:t>GHI NHỚ</a:t>
             </a:r>
           </a:p>
         </p:txBody>
@@ -11659,7 +11802,7 @@
         <p:spPr>
           <a:xfrm>
             <a:off x="731520" y="274320"/>
-            <a:ext cx="9272016" cy="868680"/>
+            <a:ext cx="9427464" cy="868680"/>
           </a:xfrm>
           <a:prstGeom prst="rect">
             <a:avLst/>
@@ -11679,7 +11822,7 @@
                 </a:solidFill>
                 <a:latin typeface="Arial"/>
               </a:rPr>
-              <a:t>ĐỀ THỰC HÀNH VIẾT</a:t>
+              <a:t>YÊU CẦU BÀI VIẾT</a:t>
             </a:r>
           </a:p>
         </p:txBody>
@@ -11772,7 +11915,7 @@
         <p:spPr>
           <a:xfrm>
             <a:off x="731520" y="1463040"/>
-            <a:ext cx="10789920" cy="3474720"/>
+            <a:ext cx="10789920" cy="4754880"/>
           </a:xfrm>
           <a:prstGeom prst="rect">
             <a:avLst/>
@@ -11796,13 +11939,13 @@
               <a:buChar char="•"/>
             </a:pPr>
             <a:r>
-              <a:rPr sz="2300">
+              <a:rPr sz="2400">
                 <a:solidFill>
                   <a:srgbClr val="1E293B"/>
                 </a:solidFill>
                 <a:latin typeface="Calibri"/>
               </a:rPr>
-              <a:t>MB: giới thiệu, nêu vấn đề.</a:t>
+              <a:t>Giới thiệu bài thơ, lí do chọn.</a:t>
             </a:r>
           </a:p>
           <a:p>
@@ -11817,13 +11960,13 @@
               <a:buChar char="•"/>
             </a:pPr>
             <a:r>
-              <a:rPr sz="2300">
+              <a:rPr sz="2400">
                 <a:solidFill>
                   <a:srgbClr val="1E293B"/>
                 </a:solidFill>
                 <a:latin typeface="Calibri"/>
               </a:rPr>
-              <a:t>TB: nhan đề – đề từ; cấu tứ tương phản qua 4 khổ; hệ thống hình ảnh, thi liệu.</a:t>
+              <a:t>Xác định trọng tâm: cấu tứ độc đáo, sự chi phối tới hệ thống hình ảnh.</a:t>
             </a:r>
           </a:p>
           <a:p>
@@ -11838,13 +11981,13 @@
               <a:buChar char="•"/>
             </a:pPr>
             <a:r>
-              <a:rPr sz="2300">
+              <a:rPr sz="2400">
                 <a:solidFill>
                   <a:srgbClr val="1E293B"/>
                 </a:solidFill>
                 <a:latin typeface="Calibri"/>
               </a:rPr>
-              <a:t>Yếu tố tượng trưng, ngôn ngữ phá cách; đánh giá.</a:t>
+              <a:t>Lí lẽ, bằng chứng xác đáng; nêu hàm nghĩa thận trọng.</a:t>
             </a:r>
           </a:p>
           <a:p>
@@ -11859,100 +12002,13 @@
               <a:buChar char="•"/>
             </a:pPr>
             <a:r>
-              <a:rPr sz="2300">
+              <a:rPr sz="2400">
                 <a:solidFill>
                   <a:srgbClr val="1E293B"/>
                 </a:solidFill>
                 <a:latin typeface="Calibri"/>
               </a:rPr>
-              <a:t>KB: khẳng định giá trị.</a:t>
-            </a:r>
-          </a:p>
-        </p:txBody>
-      </p:sp>
-      <p:sp>
-        <p:nvSpPr>
-          <p:cNvPr id="8" name="Rounded Rectangle 7"/>
-          <p:cNvSpPr/>
-          <p:nvPr/>
-        </p:nvSpPr>
-        <p:spPr>
-          <a:xfrm>
-            <a:off x="731520" y="5074920"/>
-            <a:ext cx="10789920" cy="731520"/>
-          </a:xfrm>
-          <a:prstGeom prst="roundRect">
-            <a:avLst>
-              <a:gd name="adj" fmla="val 8000"/>
-            </a:avLst>
-          </a:prstGeom>
-          <a:solidFill>
-            <a:srgbClr val="FEF2F2"/>
-          </a:solidFill>
-          <a:ln w="19050">
-            <a:solidFill>
-              <a:srgbClr val="991B1B"/>
-            </a:solidFill>
-          </a:ln>
-          <a:effectLst/>
-        </p:spPr>
-        <p:style>
-          <a:lnRef idx="1">
-            <a:schemeClr val="accent1"/>
-          </a:lnRef>
-          <a:fillRef idx="3">
-            <a:schemeClr val="accent1"/>
-          </a:fillRef>
-          <a:effectRef idx="2">
-            <a:schemeClr val="accent1"/>
-          </a:effectRef>
-          <a:fontRef idx="minor">
-            <a:schemeClr val="lt1"/>
-          </a:fontRef>
-        </p:style>
-        <p:txBody>
-          <a:bodyPr rtlCol="0" anchor="ctr"/>
-          <a:lstStyle/>
-          <a:p>
-            <a:pPr algn="ctr"/>
-          </a:p>
-        </p:txBody>
-      </p:sp>
-      <p:sp>
-        <p:nvSpPr>
-          <p:cNvPr id="9" name="TextBox 8"/>
-          <p:cNvSpPr txBox="1"/>
-          <p:nvPr/>
-        </p:nvSpPr>
-        <p:spPr>
-          <a:xfrm>
-            <a:off x="914400" y="5074920"/>
-            <a:ext cx="10424160" cy="731520"/>
-          </a:xfrm>
-          <a:prstGeom prst="rect">
-            <a:avLst/>
-          </a:prstGeom>
-          <a:noFill/>
-        </p:spPr>
-        <p:txBody>
-          <a:bodyPr wrap="square" anchor="ctr" lIns="45720" rIns="45720">
-            <a:spAutoFit/>
-          </a:bodyPr>
-          <a:lstStyle/>
-          <a:p>
-            <a:pPr algn="l">
-              <a:spcAft>
-                <a:spcPts val="400"/>
-              </a:spcAft>
-            </a:pPr>
-            <a:r>
-              <a:rPr sz="2400" b="1">
-                <a:solidFill>
-                  <a:srgbClr val="991B1B"/>
-                </a:solidFill>
-                <a:latin typeface="Calibri"/>
-              </a:rPr>
-              <a:t>Gắn cấu tứ với hệ thống hình ảnh.</a:t>
+              <a:t>Đánh giá giá trị cấu tứ, hình ảnh.</a:t>
             </a:r>
           </a:p>
         </p:txBody>
@@ -12144,14 +12200,14 @@
         </p:nvSpPr>
         <p:spPr>
           <a:xfrm>
-            <a:off x="10097719" y="457200"/>
-            <a:ext cx="1545336" cy="457200"/>
+            <a:off x="10253167" y="457200"/>
+            <a:ext cx="1389888" cy="457200"/>
           </a:xfrm>
           <a:prstGeom prst="roundRect">
             <a:avLst/>
           </a:prstGeom>
           <a:solidFill>
-            <a:srgbClr val="166534"/>
+            <a:srgbClr val="1E40AF"/>
           </a:solidFill>
           <a:ln>
             <a:noFill/>
@@ -12184,7 +12240,7 @@
                 </a:solidFill>
                 <a:latin typeface="Arial"/>
               </a:rPr>
-              <a:t>CỦNG CỐ</a:t>
+              <a:t>ĐỀ BÀI</a:t>
             </a:r>
           </a:p>
         </p:txBody>
@@ -12198,7 +12254,7 @@
         <p:spPr>
           <a:xfrm>
             <a:off x="731520" y="274320"/>
-            <a:ext cx="9427464" cy="868680"/>
+            <a:ext cx="9582912" cy="868680"/>
           </a:xfrm>
           <a:prstGeom prst="rect">
             <a:avLst/>
@@ -12218,7 +12274,7 @@
                 </a:solidFill>
                 <a:latin typeface="Arial"/>
               </a:rPr>
-              <a:t>SƠ ĐỒ TƯ DUY</a:t>
+              <a:t>ĐỀ THỰC HÀNH VIẾT</a:t>
             </a:r>
           </a:p>
         </p:txBody>
@@ -12302,30 +12358,132 @@
           </a:p>
         </p:txBody>
       </p:sp>
-      <p:pic>
-        <p:nvPicPr>
-          <p:cNvPr id="7" name="Picture 6" descr="SoDoTuDuy_NGUVAN11_Bai2_CauTuVaHinhAnhTrongThoTruTinh_T12-22.png"/>
-          <p:cNvPicPr>
-            <a:picLocks noChangeAspect="1"/>
-          </p:cNvPicPr>
-          <p:nvPr/>
-        </p:nvPicPr>
-        <p:blipFill>
-          <a:blip r:embed="rId2"/>
-          <a:stretch>
-            <a:fillRect/>
-          </a:stretch>
-        </p:blipFill>
-        <p:spPr>
-          <a:xfrm>
-            <a:off x="1788855" y="1371600"/>
-            <a:ext cx="8675250" cy="4846320"/>
-          </a:xfrm>
-          <a:prstGeom prst="rect">
-            <a:avLst/>
-          </a:prstGeom>
-        </p:spPr>
-      </p:pic>
+      <p:sp>
+        <p:nvSpPr>
+          <p:cNvPr id="7" name="TextBox 6"/>
+          <p:cNvSpPr txBox="1"/>
+          <p:nvPr/>
+        </p:nvSpPr>
+        <p:spPr>
+          <a:xfrm>
+            <a:off x="731520" y="1463040"/>
+            <a:ext cx="10789920" cy="3566160"/>
+          </a:xfrm>
+          <a:prstGeom prst="rect">
+            <a:avLst/>
+          </a:prstGeom>
+          <a:noFill/>
+        </p:spPr>
+        <p:txBody>
+          <a:bodyPr wrap="square" anchor="t" lIns="45720" rIns="45720">
+            <a:spAutoFit/>
+          </a:bodyPr>
+          <a:lstStyle/>
+          <a:p>
+            <a:pPr algn="l">
+              <a:spcAft>
+                <a:spcPts val="800"/>
+              </a:spcAft>
+            </a:pPr>
+            <a:r>
+              <a:rPr sz="2600" b="1">
+                <a:solidFill>
+                  <a:srgbClr val="1E293B"/>
+                </a:solidFill>
+                <a:latin typeface="Calibri"/>
+              </a:rPr>
+              <a:t>Phân tích cấu tứ và hình ảnh trong bài thơ Tràng giang (Huy Cận).</a:t>
+            </a:r>
+          </a:p>
+        </p:txBody>
+      </p:sp>
+      <p:sp>
+        <p:nvSpPr>
+          <p:cNvPr id="8" name="Rounded Rectangle 7"/>
+          <p:cNvSpPr/>
+          <p:nvPr/>
+        </p:nvSpPr>
+        <p:spPr>
+          <a:xfrm>
+            <a:off x="731520" y="5120640"/>
+            <a:ext cx="10789920" cy="693420"/>
+          </a:xfrm>
+          <a:prstGeom prst="roundRect">
+            <a:avLst>
+              <a:gd name="adj" fmla="val 8000"/>
+            </a:avLst>
+          </a:prstGeom>
+          <a:solidFill>
+            <a:srgbClr val="EFF4FF"/>
+          </a:solidFill>
+          <a:ln w="19050">
+            <a:solidFill>
+              <a:srgbClr val="1E40AF"/>
+            </a:solidFill>
+          </a:ln>
+          <a:effectLst/>
+        </p:spPr>
+        <p:style>
+          <a:lnRef idx="1">
+            <a:schemeClr val="accent1"/>
+          </a:lnRef>
+          <a:fillRef idx="3">
+            <a:schemeClr val="accent1"/>
+          </a:fillRef>
+          <a:effectRef idx="2">
+            <a:schemeClr val="accent1"/>
+          </a:effectRef>
+          <a:fontRef idx="minor">
+            <a:schemeClr val="lt1"/>
+          </a:fontRef>
+        </p:style>
+        <p:txBody>
+          <a:bodyPr rtlCol="0" anchor="ctr"/>
+          <a:lstStyle/>
+          <a:p>
+            <a:pPr algn="ctr"/>
+          </a:p>
+        </p:txBody>
+      </p:sp>
+      <p:sp>
+        <p:nvSpPr>
+          <p:cNvPr id="9" name="TextBox 8"/>
+          <p:cNvSpPr txBox="1"/>
+          <p:nvPr/>
+        </p:nvSpPr>
+        <p:spPr>
+          <a:xfrm>
+            <a:off x="914400" y="5120640"/>
+            <a:ext cx="10424160" cy="693420"/>
+          </a:xfrm>
+          <a:prstGeom prst="rect">
+            <a:avLst/>
+          </a:prstGeom>
+          <a:noFill/>
+        </p:spPr>
+        <p:txBody>
+          <a:bodyPr wrap="square" anchor="ctr" lIns="45720" rIns="45720">
+            <a:spAutoFit/>
+          </a:bodyPr>
+          <a:lstStyle/>
+          <a:p>
+            <a:pPr algn="l">
+              <a:spcAft>
+                <a:spcPts val="400"/>
+              </a:spcAft>
+            </a:pPr>
+            <a:r>
+              <a:rPr sz="2200" b="1">
+                <a:solidFill>
+                  <a:srgbClr val="1E40AF"/>
+                </a:solidFill>
+                <a:latin typeface="Calibri"/>
+              </a:rPr>
+              <a:t>💡 Vẽ sơ đồ cấu tứ trước khi viết.</a:t>
+            </a:r>
+          </a:p>
+        </p:txBody>
+      </p:sp>
     </p:spTree>
   </p:cSld>
   <p:clrMapOvr>
@@ -12404,8 +12562,8 @@
         </p:nvSpPr>
         <p:spPr>
           <a:xfrm>
-            <a:off x="10097719" y="457200"/>
-            <a:ext cx="1545336" cy="457200"/>
+            <a:off x="9942271" y="457200"/>
+            <a:ext cx="1700784" cy="457200"/>
           </a:xfrm>
           <a:prstGeom prst="roundRect">
             <a:avLst/>
@@ -12444,7 +12602,7 @@
                 </a:solidFill>
                 <a:latin typeface="Arial"/>
               </a:rPr>
-              <a:t>CỦNG CỐ</a:t>
+              <a:t>LỜI GIẢI</a:t>
             </a:r>
           </a:p>
         </p:txBody>
@@ -12458,7 +12616,7 @@
         <p:spPr>
           <a:xfrm>
             <a:off x="731520" y="274320"/>
-            <a:ext cx="9427464" cy="868680"/>
+            <a:ext cx="9272016" cy="868680"/>
           </a:xfrm>
           <a:prstGeom prst="rect">
             <a:avLst/>
@@ -12478,7 +12636,7 @@
                 </a:solidFill>
                 <a:latin typeface="Arial"/>
               </a:rPr>
-              <a:t>BÀI TẬP CỦA BẠN</a:t>
+              <a:t>ĐỀ THỰC HÀNH VIẾT</a:t>
             </a:r>
           </a:p>
         </p:txBody>
@@ -12558,6 +12716,696 @@
                 <a:latin typeface="Calibri"/>
               </a:rPr>
               <a:t>Ngữ văn 11 · Bài 2: Cấu Tứ Và Hình Ảnh Trong Thơ Trữ Tình          31</a:t>
+            </a:r>
+          </a:p>
+        </p:txBody>
+      </p:sp>
+      <p:sp>
+        <p:nvSpPr>
+          <p:cNvPr id="7" name="TextBox 6"/>
+          <p:cNvSpPr txBox="1"/>
+          <p:nvPr/>
+        </p:nvSpPr>
+        <p:spPr>
+          <a:xfrm>
+            <a:off x="731520" y="1463040"/>
+            <a:ext cx="10789920" cy="3474720"/>
+          </a:xfrm>
+          <a:prstGeom prst="rect">
+            <a:avLst/>
+          </a:prstGeom>
+          <a:noFill/>
+        </p:spPr>
+        <p:txBody>
+          <a:bodyPr wrap="square" anchor="t" lIns="45720" rIns="45720">
+            <a:spAutoFit/>
+          </a:bodyPr>
+          <a:lstStyle/>
+          <a:p>
+            <a:pPr algn="l" marL="365760" indent="-365760">
+              <a:spcAft>
+                <a:spcPts val="800"/>
+              </a:spcAft>
+              <a:buClr>
+                <a:srgbClr val="1E40AF"/>
+              </a:buClr>
+              <a:buFont typeface="Arial"/>
+              <a:buChar char="•"/>
+            </a:pPr>
+            <a:r>
+              <a:rPr sz="2300">
+                <a:solidFill>
+                  <a:srgbClr val="1E293B"/>
+                </a:solidFill>
+                <a:latin typeface="Calibri"/>
+              </a:rPr>
+              <a:t>MB: giới thiệu, nêu vấn đề.</a:t>
+            </a:r>
+          </a:p>
+          <a:p>
+            <a:pPr algn="l" marL="365760" indent="-365760">
+              <a:spcAft>
+                <a:spcPts val="800"/>
+              </a:spcAft>
+              <a:buClr>
+                <a:srgbClr val="1E40AF"/>
+              </a:buClr>
+              <a:buFont typeface="Arial"/>
+              <a:buChar char="•"/>
+            </a:pPr>
+            <a:r>
+              <a:rPr sz="2300">
+                <a:solidFill>
+                  <a:srgbClr val="1E293B"/>
+                </a:solidFill>
+                <a:latin typeface="Calibri"/>
+              </a:rPr>
+              <a:t>TB: nhan đề – đề từ; cấu tứ tương phản qua 4 khổ; hệ thống hình ảnh, thi liệu.</a:t>
+            </a:r>
+          </a:p>
+          <a:p>
+            <a:pPr algn="l" marL="365760" indent="-365760">
+              <a:spcAft>
+                <a:spcPts val="800"/>
+              </a:spcAft>
+              <a:buClr>
+                <a:srgbClr val="1E40AF"/>
+              </a:buClr>
+              <a:buFont typeface="Arial"/>
+              <a:buChar char="•"/>
+            </a:pPr>
+            <a:r>
+              <a:rPr sz="2300">
+                <a:solidFill>
+                  <a:srgbClr val="1E293B"/>
+                </a:solidFill>
+                <a:latin typeface="Calibri"/>
+              </a:rPr>
+              <a:t>Yếu tố tượng trưng, ngôn ngữ phá cách; đánh giá.</a:t>
+            </a:r>
+          </a:p>
+          <a:p>
+            <a:pPr algn="l" marL="365760" indent="-365760">
+              <a:spcAft>
+                <a:spcPts val="800"/>
+              </a:spcAft>
+              <a:buClr>
+                <a:srgbClr val="1E40AF"/>
+              </a:buClr>
+              <a:buFont typeface="Arial"/>
+              <a:buChar char="•"/>
+            </a:pPr>
+            <a:r>
+              <a:rPr sz="2300">
+                <a:solidFill>
+                  <a:srgbClr val="1E293B"/>
+                </a:solidFill>
+                <a:latin typeface="Calibri"/>
+              </a:rPr>
+              <a:t>KB: khẳng định giá trị.</a:t>
+            </a:r>
+          </a:p>
+        </p:txBody>
+      </p:sp>
+      <p:sp>
+        <p:nvSpPr>
+          <p:cNvPr id="8" name="Rounded Rectangle 7"/>
+          <p:cNvSpPr/>
+          <p:nvPr/>
+        </p:nvSpPr>
+        <p:spPr>
+          <a:xfrm>
+            <a:off x="731520" y="5074920"/>
+            <a:ext cx="10789920" cy="731520"/>
+          </a:xfrm>
+          <a:prstGeom prst="roundRect">
+            <a:avLst>
+              <a:gd name="adj" fmla="val 8000"/>
+            </a:avLst>
+          </a:prstGeom>
+          <a:solidFill>
+            <a:srgbClr val="FEF2F2"/>
+          </a:solidFill>
+          <a:ln w="19050">
+            <a:solidFill>
+              <a:srgbClr val="991B1B"/>
+            </a:solidFill>
+          </a:ln>
+          <a:effectLst/>
+        </p:spPr>
+        <p:style>
+          <a:lnRef idx="1">
+            <a:schemeClr val="accent1"/>
+          </a:lnRef>
+          <a:fillRef idx="3">
+            <a:schemeClr val="accent1"/>
+          </a:fillRef>
+          <a:effectRef idx="2">
+            <a:schemeClr val="accent1"/>
+          </a:effectRef>
+          <a:fontRef idx="minor">
+            <a:schemeClr val="lt1"/>
+          </a:fontRef>
+        </p:style>
+        <p:txBody>
+          <a:bodyPr rtlCol="0" anchor="ctr"/>
+          <a:lstStyle/>
+          <a:p>
+            <a:pPr algn="ctr"/>
+          </a:p>
+        </p:txBody>
+      </p:sp>
+      <p:sp>
+        <p:nvSpPr>
+          <p:cNvPr id="9" name="TextBox 8"/>
+          <p:cNvSpPr txBox="1"/>
+          <p:nvPr/>
+        </p:nvSpPr>
+        <p:spPr>
+          <a:xfrm>
+            <a:off x="914400" y="5074920"/>
+            <a:ext cx="10424160" cy="731520"/>
+          </a:xfrm>
+          <a:prstGeom prst="rect">
+            <a:avLst/>
+          </a:prstGeom>
+          <a:noFill/>
+        </p:spPr>
+        <p:txBody>
+          <a:bodyPr wrap="square" anchor="ctr" lIns="45720" rIns="45720">
+            <a:spAutoFit/>
+          </a:bodyPr>
+          <a:lstStyle/>
+          <a:p>
+            <a:pPr algn="l">
+              <a:spcAft>
+                <a:spcPts val="400"/>
+              </a:spcAft>
+            </a:pPr>
+            <a:r>
+              <a:rPr sz="2400" b="1">
+                <a:solidFill>
+                  <a:srgbClr val="991B1B"/>
+                </a:solidFill>
+                <a:latin typeface="Calibri"/>
+              </a:rPr>
+              <a:t>Gắn cấu tứ với hệ thống hình ảnh.</a:t>
+            </a:r>
+          </a:p>
+        </p:txBody>
+      </p:sp>
+    </p:spTree>
+  </p:cSld>
+  <p:clrMapOvr>
+    <a:masterClrMapping/>
+  </p:clrMapOvr>
+</p:sld>
+</file>
+
+<file path=ppt/slides/slide32.xml><?xml version="1.0" encoding="utf-8"?>
+<p:sld xmlns:a="http://schemas.openxmlformats.org/drawingml/2006/main" xmlns:p="http://schemas.openxmlformats.org/presentationml/2006/main" xmlns:r="http://schemas.openxmlformats.org/officeDocument/2006/relationships">
+  <p:cSld>
+    <p:bg>
+      <p:bgPr>
+        <a:solidFill>
+          <a:srgbClr val="FFFFFF"/>
+        </a:solidFill>
+        <a:effectLst/>
+      </p:bgPr>
+    </p:bg>
+    <p:spTree>
+      <p:nvGrpSpPr>
+        <p:cNvPr id="1" name=""/>
+        <p:cNvGrpSpPr/>
+        <p:nvPr/>
+      </p:nvGrpSpPr>
+      <p:grpSpPr/>
+      <p:sp>
+        <p:nvSpPr>
+          <p:cNvPr id="2" name="Rectangle 1"/>
+          <p:cNvSpPr/>
+          <p:nvPr/>
+        </p:nvSpPr>
+        <p:spPr>
+          <a:xfrm>
+            <a:off x="457200" y="384048"/>
+            <a:ext cx="109728" cy="658368"/>
+          </a:xfrm>
+          <a:prstGeom prst="rect">
+            <a:avLst/>
+          </a:prstGeom>
+          <a:solidFill>
+            <a:srgbClr val="1E40AF"/>
+          </a:solidFill>
+          <a:ln>
+            <a:noFill/>
+          </a:ln>
+          <a:effectLst/>
+        </p:spPr>
+        <p:style>
+          <a:lnRef idx="1">
+            <a:schemeClr val="accent1"/>
+          </a:lnRef>
+          <a:fillRef idx="3">
+            <a:schemeClr val="accent1"/>
+          </a:fillRef>
+          <a:effectRef idx="2">
+            <a:schemeClr val="accent1"/>
+          </a:effectRef>
+          <a:fontRef idx="minor">
+            <a:schemeClr val="lt1"/>
+          </a:fontRef>
+        </p:style>
+        <p:txBody>
+          <a:bodyPr rtlCol="0" anchor="ctr"/>
+          <a:lstStyle/>
+          <a:p>
+            <a:pPr algn="ctr"/>
+          </a:p>
+        </p:txBody>
+      </p:sp>
+      <p:sp>
+        <p:nvSpPr>
+          <p:cNvPr id="3" name="Rounded Rectangle 2"/>
+          <p:cNvSpPr/>
+          <p:nvPr/>
+        </p:nvSpPr>
+        <p:spPr>
+          <a:xfrm>
+            <a:off x="10097719" y="457200"/>
+            <a:ext cx="1545336" cy="457200"/>
+          </a:xfrm>
+          <a:prstGeom prst="roundRect">
+            <a:avLst/>
+          </a:prstGeom>
+          <a:solidFill>
+            <a:srgbClr val="166534"/>
+          </a:solidFill>
+          <a:ln>
+            <a:noFill/>
+          </a:ln>
+          <a:effectLst/>
+        </p:spPr>
+        <p:style>
+          <a:lnRef idx="1">
+            <a:schemeClr val="accent1"/>
+          </a:lnRef>
+          <a:fillRef idx="3">
+            <a:schemeClr val="accent1"/>
+          </a:fillRef>
+          <a:effectRef idx="2">
+            <a:schemeClr val="accent1"/>
+          </a:effectRef>
+          <a:fontRef idx="minor">
+            <a:schemeClr val="lt1"/>
+          </a:fontRef>
+        </p:style>
+        <p:txBody>
+          <a:bodyPr rtlCol="0" anchor="ctr" wrap="none" tIns="0" bIns="0"/>
+          <a:lstStyle/>
+          <a:p>
+            <a:pPr algn="ctr"/>
+            <a:r>
+              <a:rPr sz="1400" b="1">
+                <a:solidFill>
+                  <a:srgbClr val="FFFFFF"/>
+                </a:solidFill>
+                <a:latin typeface="Arial"/>
+              </a:rPr>
+              <a:t>CỦNG CỐ</a:t>
+            </a:r>
+          </a:p>
+        </p:txBody>
+      </p:sp>
+      <p:sp>
+        <p:nvSpPr>
+          <p:cNvPr id="4" name="TextBox 3"/>
+          <p:cNvSpPr txBox="1"/>
+          <p:nvPr/>
+        </p:nvSpPr>
+        <p:spPr>
+          <a:xfrm>
+            <a:off x="731520" y="274320"/>
+            <a:ext cx="9427464" cy="868680"/>
+          </a:xfrm>
+          <a:prstGeom prst="rect">
+            <a:avLst/>
+          </a:prstGeom>
+          <a:noFill/>
+        </p:spPr>
+        <p:txBody>
+          <a:bodyPr wrap="square" anchor="ctr">
+            <a:spAutoFit/>
+          </a:bodyPr>
+          <a:lstStyle/>
+          <a:p>
+            <a:r>
+              <a:rPr sz="3600" b="1">
+                <a:solidFill>
+                  <a:srgbClr val="1E40AF"/>
+                </a:solidFill>
+                <a:latin typeface="Arial"/>
+              </a:rPr>
+              <a:t>SƠ ĐỒ TƯ DUY</a:t>
+            </a:r>
+          </a:p>
+        </p:txBody>
+      </p:sp>
+      <p:sp>
+        <p:nvSpPr>
+          <p:cNvPr id="5" name="Rectangle 4"/>
+          <p:cNvSpPr/>
+          <p:nvPr/>
+        </p:nvSpPr>
+        <p:spPr>
+          <a:xfrm>
+            <a:off x="457200" y="1207008"/>
+            <a:ext cx="11274552" cy="22000"/>
+          </a:xfrm>
+          <a:prstGeom prst="rect">
+            <a:avLst/>
+          </a:prstGeom>
+          <a:solidFill>
+            <a:srgbClr val="E2E8F0"/>
+          </a:solidFill>
+          <a:ln>
+            <a:noFill/>
+          </a:ln>
+          <a:effectLst/>
+        </p:spPr>
+        <p:style>
+          <a:lnRef idx="1">
+            <a:schemeClr val="accent1"/>
+          </a:lnRef>
+          <a:fillRef idx="3">
+            <a:schemeClr val="accent1"/>
+          </a:fillRef>
+          <a:effectRef idx="2">
+            <a:schemeClr val="accent1"/>
+          </a:effectRef>
+          <a:fontRef idx="minor">
+            <a:schemeClr val="lt1"/>
+          </a:fontRef>
+        </p:style>
+        <p:txBody>
+          <a:bodyPr rtlCol="0" anchor="ctr"/>
+          <a:lstStyle/>
+          <a:p>
+            <a:pPr algn="ctr"/>
+          </a:p>
+        </p:txBody>
+      </p:sp>
+      <p:sp>
+        <p:nvSpPr>
+          <p:cNvPr id="6" name="TextBox 5"/>
+          <p:cNvSpPr txBox="1"/>
+          <p:nvPr/>
+        </p:nvSpPr>
+        <p:spPr>
+          <a:xfrm>
+            <a:off x="457200" y="6355080"/>
+            <a:ext cx="11274552" cy="365760"/>
+          </a:xfrm>
+          <a:prstGeom prst="rect">
+            <a:avLst/>
+          </a:prstGeom>
+          <a:noFill/>
+        </p:spPr>
+        <p:txBody>
+          <a:bodyPr wrap="none">
+            <a:spAutoFit/>
+          </a:bodyPr>
+          <a:lstStyle/>
+          <a:p>
+            <a:pPr algn="r"/>
+            <a:r>
+              <a:rPr sz="1200">
+                <a:solidFill>
+                  <a:srgbClr val="64748B"/>
+                </a:solidFill>
+                <a:latin typeface="Calibri"/>
+              </a:rPr>
+              <a:t>Ngữ văn 11 · Bài 2: Cấu Tứ Và Hình Ảnh Trong Thơ Trữ Tình          32</a:t>
+            </a:r>
+          </a:p>
+        </p:txBody>
+      </p:sp>
+      <p:pic>
+        <p:nvPicPr>
+          <p:cNvPr id="7" name="Picture 6" descr="SoDoTuDuy_NGUVAN11_Bai2_CauTuVaHinhAnhTrongThoTruTinh_T12-22.png"/>
+          <p:cNvPicPr>
+            <a:picLocks noChangeAspect="1"/>
+          </p:cNvPicPr>
+          <p:nvPr/>
+        </p:nvPicPr>
+        <p:blipFill>
+          <a:blip r:embed="rId2"/>
+          <a:stretch>
+            <a:fillRect/>
+          </a:stretch>
+        </p:blipFill>
+        <p:spPr>
+          <a:xfrm>
+            <a:off x="1788855" y="1371600"/>
+            <a:ext cx="8675250" cy="4846320"/>
+          </a:xfrm>
+          <a:prstGeom prst="rect">
+            <a:avLst/>
+          </a:prstGeom>
+        </p:spPr>
+      </p:pic>
+    </p:spTree>
+  </p:cSld>
+  <p:clrMapOvr>
+    <a:masterClrMapping/>
+  </p:clrMapOvr>
+</p:sld>
+</file>
+
+<file path=ppt/slides/slide33.xml><?xml version="1.0" encoding="utf-8"?>
+<p:sld xmlns:a="http://schemas.openxmlformats.org/drawingml/2006/main" xmlns:p="http://schemas.openxmlformats.org/presentationml/2006/main" xmlns:r="http://schemas.openxmlformats.org/officeDocument/2006/relationships">
+  <p:cSld>
+    <p:bg>
+      <p:bgPr>
+        <a:solidFill>
+          <a:srgbClr val="FFFFFF"/>
+        </a:solidFill>
+        <a:effectLst/>
+      </p:bgPr>
+    </p:bg>
+    <p:spTree>
+      <p:nvGrpSpPr>
+        <p:cNvPr id="1" name=""/>
+        <p:cNvGrpSpPr/>
+        <p:nvPr/>
+      </p:nvGrpSpPr>
+      <p:grpSpPr/>
+      <p:sp>
+        <p:nvSpPr>
+          <p:cNvPr id="2" name="Rectangle 1"/>
+          <p:cNvSpPr/>
+          <p:nvPr/>
+        </p:nvSpPr>
+        <p:spPr>
+          <a:xfrm>
+            <a:off x="457200" y="384048"/>
+            <a:ext cx="109728" cy="658368"/>
+          </a:xfrm>
+          <a:prstGeom prst="rect">
+            <a:avLst/>
+          </a:prstGeom>
+          <a:solidFill>
+            <a:srgbClr val="1E40AF"/>
+          </a:solidFill>
+          <a:ln>
+            <a:noFill/>
+          </a:ln>
+          <a:effectLst/>
+        </p:spPr>
+        <p:style>
+          <a:lnRef idx="1">
+            <a:schemeClr val="accent1"/>
+          </a:lnRef>
+          <a:fillRef idx="3">
+            <a:schemeClr val="accent1"/>
+          </a:fillRef>
+          <a:effectRef idx="2">
+            <a:schemeClr val="accent1"/>
+          </a:effectRef>
+          <a:fontRef idx="minor">
+            <a:schemeClr val="lt1"/>
+          </a:fontRef>
+        </p:style>
+        <p:txBody>
+          <a:bodyPr rtlCol="0" anchor="ctr"/>
+          <a:lstStyle/>
+          <a:p>
+            <a:pPr algn="ctr"/>
+          </a:p>
+        </p:txBody>
+      </p:sp>
+      <p:sp>
+        <p:nvSpPr>
+          <p:cNvPr id="3" name="Rounded Rectangle 2"/>
+          <p:cNvSpPr/>
+          <p:nvPr/>
+        </p:nvSpPr>
+        <p:spPr>
+          <a:xfrm>
+            <a:off x="10097719" y="457200"/>
+            <a:ext cx="1545336" cy="457200"/>
+          </a:xfrm>
+          <a:prstGeom prst="roundRect">
+            <a:avLst/>
+          </a:prstGeom>
+          <a:solidFill>
+            <a:srgbClr val="991B1B"/>
+          </a:solidFill>
+          <a:ln>
+            <a:noFill/>
+          </a:ln>
+          <a:effectLst/>
+        </p:spPr>
+        <p:style>
+          <a:lnRef idx="1">
+            <a:schemeClr val="accent1"/>
+          </a:lnRef>
+          <a:fillRef idx="3">
+            <a:schemeClr val="accent1"/>
+          </a:fillRef>
+          <a:effectRef idx="2">
+            <a:schemeClr val="accent1"/>
+          </a:effectRef>
+          <a:fontRef idx="minor">
+            <a:schemeClr val="lt1"/>
+          </a:fontRef>
+        </p:style>
+        <p:txBody>
+          <a:bodyPr rtlCol="0" anchor="ctr" wrap="none" tIns="0" bIns="0"/>
+          <a:lstStyle/>
+          <a:p>
+            <a:pPr algn="ctr"/>
+            <a:r>
+              <a:rPr sz="1400" b="1">
+                <a:solidFill>
+                  <a:srgbClr val="FFFFFF"/>
+                </a:solidFill>
+                <a:latin typeface="Arial"/>
+              </a:rPr>
+              <a:t>CỦNG CỐ</a:t>
+            </a:r>
+          </a:p>
+        </p:txBody>
+      </p:sp>
+      <p:sp>
+        <p:nvSpPr>
+          <p:cNvPr id="4" name="TextBox 3"/>
+          <p:cNvSpPr txBox="1"/>
+          <p:nvPr/>
+        </p:nvSpPr>
+        <p:spPr>
+          <a:xfrm>
+            <a:off x="731520" y="274320"/>
+            <a:ext cx="9427464" cy="868680"/>
+          </a:xfrm>
+          <a:prstGeom prst="rect">
+            <a:avLst/>
+          </a:prstGeom>
+          <a:noFill/>
+        </p:spPr>
+        <p:txBody>
+          <a:bodyPr wrap="square" anchor="ctr">
+            <a:spAutoFit/>
+          </a:bodyPr>
+          <a:lstStyle/>
+          <a:p>
+            <a:r>
+              <a:rPr sz="3600" b="1">
+                <a:solidFill>
+                  <a:srgbClr val="1E40AF"/>
+                </a:solidFill>
+                <a:latin typeface="Arial"/>
+              </a:rPr>
+              <a:t>BÀI TẬP CỦA BẠN</a:t>
+            </a:r>
+          </a:p>
+        </p:txBody>
+      </p:sp>
+      <p:sp>
+        <p:nvSpPr>
+          <p:cNvPr id="5" name="Rectangle 4"/>
+          <p:cNvSpPr/>
+          <p:nvPr/>
+        </p:nvSpPr>
+        <p:spPr>
+          <a:xfrm>
+            <a:off x="457200" y="1207008"/>
+            <a:ext cx="11274552" cy="22000"/>
+          </a:xfrm>
+          <a:prstGeom prst="rect">
+            <a:avLst/>
+          </a:prstGeom>
+          <a:solidFill>
+            <a:srgbClr val="E2E8F0"/>
+          </a:solidFill>
+          <a:ln>
+            <a:noFill/>
+          </a:ln>
+          <a:effectLst/>
+        </p:spPr>
+        <p:style>
+          <a:lnRef idx="1">
+            <a:schemeClr val="accent1"/>
+          </a:lnRef>
+          <a:fillRef idx="3">
+            <a:schemeClr val="accent1"/>
+          </a:fillRef>
+          <a:effectRef idx="2">
+            <a:schemeClr val="accent1"/>
+          </a:effectRef>
+          <a:fontRef idx="minor">
+            <a:schemeClr val="lt1"/>
+          </a:fontRef>
+        </p:style>
+        <p:txBody>
+          <a:bodyPr rtlCol="0" anchor="ctr"/>
+          <a:lstStyle/>
+          <a:p>
+            <a:pPr algn="ctr"/>
+          </a:p>
+        </p:txBody>
+      </p:sp>
+      <p:sp>
+        <p:nvSpPr>
+          <p:cNvPr id="6" name="TextBox 5"/>
+          <p:cNvSpPr txBox="1"/>
+          <p:nvPr/>
+        </p:nvSpPr>
+        <p:spPr>
+          <a:xfrm>
+            <a:off x="457200" y="6355080"/>
+            <a:ext cx="11274552" cy="365760"/>
+          </a:xfrm>
+          <a:prstGeom prst="rect">
+            <a:avLst/>
+          </a:prstGeom>
+          <a:noFill/>
+        </p:spPr>
+        <p:txBody>
+          <a:bodyPr wrap="none">
+            <a:spAutoFit/>
+          </a:bodyPr>
+          <a:lstStyle/>
+          <a:p>
+            <a:pPr algn="r"/>
+            <a:r>
+              <a:rPr sz="1200">
+                <a:solidFill>
+                  <a:srgbClr val="64748B"/>
+                </a:solidFill>
+                <a:latin typeface="Calibri"/>
+              </a:rPr>
+              <a:t>Ngữ văn 11 · Bài 2: Cấu Tứ Và Hình Ảnh Trong Thơ Trữ Tình          33</a:t>
             </a:r>
           </a:p>
         </p:txBody>

--- a/mon/ngu_van/slide/lop11/Slide_NGUVAN11_Bai2_CauTuVaHinhAnhTrongThoTruTinh_T12-22.pptx
+++ b/mon/ngu_van/slide/lop11/Slide_NGUVAN11_Bai2_CauTuVaHinhAnhTrongThoTruTinh_T12-22.pptx
@@ -38,6 +38,7 @@
     <p:sldId id="286" r:id="rId38"/>
     <p:sldId id="287" r:id="rId39"/>
     <p:sldId id="288" r:id="rId40"/>
+    <p:sldId id="289" r:id="rId41"/>
   </p:sldIdLst>
   <p:sldSz cx="12191695" cy="6858000" type="screen4x3"/>
   <p:notesSz cx="6858000" cy="9144000"/>
@@ -604,7 +605,7 @@
           <a:lstStyle/>
           <a:p>
             <a:r>
-              <a:t>Bấm vào đường link hoặc quét mã QR để mở video (cần Internet). </a:t>
+              <a:t>Câu hỏi Trước khi đọc SGK tr.59.</a:t>
             </a:r>
           </a:p>
         </p:txBody>
@@ -674,7 +675,7 @@
           <a:lstStyle/>
           <a:p>
             <a:r>
-              <a:t>Slide ĐỀ BÀI – cho HS suy nghĩ, thảo luận (không chiếu lời giải). </a:t>
+              <a:t>Bấm vào đường link hoặc quét mã QR để mở video (cần Internet). </a:t>
             </a:r>
           </a:p>
         </p:txBody>
@@ -744,7 +745,7 @@
           <a:lstStyle/>
           <a:p>
             <a:r>
-              <a:t>Slide LỜI GIẢI – GV chốt sau khi HS trình bày. </a:t>
+              <a:t>Slide ĐỀ BÀI – cho HS suy nghĩ, thảo luận (không chiếu lời giải). </a:t>
             </a:r>
           </a:p>
         </p:txBody>
@@ -814,7 +815,7 @@
           <a:lstStyle/>
           <a:p>
             <a:r>
-              <a:t>Slide ĐỀ BÀI – cho HS suy nghĩ, thảo luận (không chiếu lời giải). </a:t>
+              <a:t>Slide LỜI GIẢI – GV chốt sau khi HS trình bày. </a:t>
             </a:r>
           </a:p>
         </p:txBody>
@@ -884,7 +885,7 @@
           <a:lstStyle/>
           <a:p>
             <a:r>
-              <a:t>Slide LỜI GIẢI – GV chốt sau khi HS trình bày. </a:t>
+              <a:t>Slide ĐỀ BÀI – cho HS suy nghĩ, thảo luận (không chiếu lời giải). </a:t>
             </a:r>
           </a:p>
         </p:txBody>
@@ -954,7 +955,7 @@
           <a:lstStyle/>
           <a:p>
             <a:r>
-              <a:t>Slide ĐỀ BÀI – cho HS suy nghĩ, thảo luận (không chiếu lời giải). </a:t>
+              <a:t>Slide LỜI GIẢI – GV chốt sau khi HS trình bày. </a:t>
             </a:r>
           </a:p>
         </p:txBody>
@@ -1024,7 +1025,7 @@
           <a:lstStyle/>
           <a:p>
             <a:r>
-              <a:t>Slide LỜI GIẢI – GV chốt sau khi HS trình bày. </a:t>
+              <a:t>Slide ĐỀ BÀI – cho HS suy nghĩ, thảo luận (không chiếu lời giải). </a:t>
             </a:r>
           </a:p>
         </p:txBody>
@@ -1094,7 +1095,7 @@
           <a:lstStyle/>
           <a:p>
             <a:r>
-              <a:t>Bấm vào đường link hoặc quét mã QR để mở video (cần Internet). </a:t>
+              <a:t>Slide LỜI GIẢI – GV chốt sau khi HS trình bày. </a:t>
             </a:r>
           </a:p>
         </p:txBody>
@@ -1164,7 +1165,7 @@
           <a:lstStyle/>
           <a:p>
             <a:r>
-              <a:t>Slide ĐỀ BÀI – cho HS suy nghĩ, thảo luận (không chiếu lời giải). </a:t>
+              <a:t>Bấm vào đường link hoặc quét mã QR để mở video (cần Internet). </a:t>
             </a:r>
           </a:p>
         </p:txBody>
@@ -1234,7 +1235,7 @@
           <a:lstStyle/>
           <a:p>
             <a:r>
-              <a:t>Slide LỜI GIẢI – GV chốt sau khi HS trình bày. </a:t>
+              <a:t>Slide ĐỀ BÀI – cho HS suy nghĩ, thảo luận (không chiếu lời giải). </a:t>
             </a:r>
           </a:p>
         </p:txBody>
@@ -1374,7 +1375,7 @@
           <a:lstStyle/>
           <a:p>
             <a:r>
-              <a:t>Slide ĐỀ BÀI – cho HS suy nghĩ, thảo luận (không chiếu lời giải). </a:t>
+              <a:t>Slide LỜI GIẢI – GV chốt sau khi HS trình bày. </a:t>
             </a:r>
           </a:p>
         </p:txBody>
@@ -1444,7 +1445,7 @@
           <a:lstStyle/>
           <a:p>
             <a:r>
-              <a:t>Slide LỜI GIẢI – GV chốt sau khi HS trình bày. </a:t>
+              <a:t>Slide ĐỀ BÀI – cho HS suy nghĩ, thảo luận (không chiếu lời giải). </a:t>
             </a:r>
           </a:p>
         </p:txBody>
@@ -1514,7 +1515,7 @@
           <a:lstStyle/>
           <a:p>
             <a:r>
-              <a:t>Slide ĐỀ BÀI – cho HS suy nghĩ, thảo luận (không chiếu lời giải). </a:t>
+              <a:t>Slide LỜI GIẢI – GV chốt sau khi HS trình bày. </a:t>
             </a:r>
           </a:p>
         </p:txBody>
@@ -1584,6 +1585,76 @@
           <a:lstStyle/>
           <a:p>
             <a:r>
+              <a:t>Slide ĐỀ BÀI – cho HS suy nghĩ, thảo luận (không chiếu lời giải). </a:t>
+            </a:r>
+          </a:p>
+        </p:txBody>
+      </p:sp>
+      <p:sp>
+        <p:nvSpPr>
+          <p:cNvPr id="4" name="Slide Number Placeholder 3"/>
+          <p:cNvSpPr>
+            <a:spLocks noGrp="1"/>
+          </p:cNvSpPr>
+          <p:nvPr>
+            <p:ph type="sldNum" idx="5" sz="quarter"/>
+          </p:nvPr>
+        </p:nvSpPr>
+        <p:spPr/>
+      </p:sp>
+    </p:spTree>
+  </p:cSld>
+  <p:clrMapOvr>
+    <a:masterClrMapping/>
+  </p:clrMapOvr>
+</p:notes>
+</file>
+
+<file path=ppt/notesSlides/notesSlide24.xml><?xml version="1.0" encoding="utf-8"?>
+<p:notes xmlns:a="http://schemas.openxmlformats.org/drawingml/2006/main" xmlns:p="http://schemas.openxmlformats.org/presentationml/2006/main" xmlns:r="http://schemas.openxmlformats.org/officeDocument/2006/relationships">
+  <p:cSld>
+    <p:spTree>
+      <p:nvGrpSpPr>
+        <p:cNvPr id="1" name=""/>
+        <p:cNvGrpSpPr/>
+        <p:nvPr/>
+      </p:nvGrpSpPr>
+      <p:grpSpPr>
+        <a:xfrm>
+          <a:off x="0" y="0"/>
+          <a:ext cx="0" cy="0"/>
+          <a:chOff x="0" y="0"/>
+          <a:chExt cx="0" cy="0"/>
+        </a:xfrm>
+      </p:grpSpPr>
+      <p:sp>
+        <p:nvSpPr>
+          <p:cNvPr id="2" name="Slide Image Placeholder 1"/>
+          <p:cNvSpPr>
+            <a:spLocks noGrp="1"/>
+          </p:cNvSpPr>
+          <p:nvPr>
+            <p:ph type="sldImg" idx="2"/>
+          </p:nvPr>
+        </p:nvSpPr>
+        <p:spPr/>
+      </p:sp>
+      <p:sp>
+        <p:nvSpPr>
+          <p:cNvPr id="3" name="Notes Placeholder 2"/>
+          <p:cNvSpPr>
+            <a:spLocks noGrp="1"/>
+          </p:cNvSpPr>
+          <p:nvPr>
+            <p:ph type="body" idx="3" sz="quarter"/>
+          </p:nvPr>
+        </p:nvSpPr>
+        <p:spPr/>
+        <p:txBody>
+          <a:bodyPr/>
+          <a:lstStyle/>
+          <a:p>
+            <a:r>
               <a:t>Slide LỜI GIẢI – GV chốt sau khi HS trình bày. </a:t>
             </a:r>
           </a:p>
@@ -1654,7 +1725,7 @@
           <a:lstStyle/>
           <a:p>
             <a:r>
-              <a:t>Slide ĐỀ BÀI – cho HS suy nghĩ, thảo luận (không chiếu lời giải). </a:t>
+              <a:t>Bấm vào đường link hoặc quét mã QR để mở video (cần Internet). </a:t>
             </a:r>
           </a:p>
         </p:txBody>
@@ -1724,7 +1795,7 @@
           <a:lstStyle/>
           <a:p>
             <a:r>
-              <a:t>Slide LỜI GIẢI – GV chốt sau khi HS trình bày. </a:t>
+              <a:t>Slide ĐỀ BÀI – cho HS suy nghĩ, thảo luận (không chiếu lời giải). </a:t>
             </a:r>
           </a:p>
         </p:txBody>
@@ -1794,7 +1865,7 @@
           <a:lstStyle/>
           <a:p>
             <a:r>
-              <a:t>Slide ĐỀ BÀI – cho HS suy nghĩ, thảo luận (không chiếu lời giải). </a:t>
+              <a:t>Slide LỜI GIẢI – GV chốt sau khi HS trình bày. </a:t>
             </a:r>
           </a:p>
         </p:txBody>
@@ -1864,7 +1935,7 @@
           <a:lstStyle/>
           <a:p>
             <a:r>
-              <a:t>Slide LỜI GIẢI – GV chốt sau khi HS trình bày. </a:t>
+              <a:t>Slide ĐỀ BÀI – cho HS suy nghĩ, thảo luận (không chiếu lời giải). </a:t>
             </a:r>
           </a:p>
         </p:txBody>
@@ -1934,7 +2005,7 @@
           <a:lstStyle/>
           <a:p>
             <a:r>
-              <a:t>Slide ĐỀ BÀI – cho HS suy nghĩ, thảo luận (không chiếu lời giải). </a:t>
+              <a:t>Slide LỜI GIẢI – GV chốt sau khi HS trình bày. </a:t>
             </a:r>
           </a:p>
         </p:txBody>
@@ -2004,7 +2075,7 @@
           <a:lstStyle/>
           <a:p>
             <a:r>
-              <a:t>Slide LỜI GIẢI – GV chốt sau khi HS trình bày. </a:t>
+              <a:t>Slide ĐỀ BÀI – cho HS suy nghĩ, thảo luận (không chiếu lời giải). </a:t>
             </a:r>
           </a:p>
         </p:txBody>
@@ -2074,7 +2145,7 @@
           <a:lstStyle/>
           <a:p>
             <a:r>
-              <a:t>Câu hỏi Trước khi đọc SGK tr.59.</a:t>
+              <a:t>Slide LỜI GIẢI – GV chốt sau khi HS trình bày. </a:t>
             </a:r>
           </a:p>
         </p:txBody>
@@ -5304,14 +5375,14 @@
         </p:nvSpPr>
         <p:spPr>
           <a:xfrm>
-            <a:off x="10253167" y="457200"/>
-            <a:ext cx="1389888" cy="457200"/>
+            <a:off x="9942271" y="457200"/>
+            <a:ext cx="1700784" cy="457200"/>
           </a:xfrm>
           <a:prstGeom prst="roundRect">
             <a:avLst/>
           </a:prstGeom>
           <a:solidFill>
-            <a:srgbClr val="1E40AF"/>
+            <a:srgbClr val="991B1B"/>
           </a:solidFill>
           <a:ln>
             <a:noFill/>
@@ -5344,7 +5415,7 @@
                 </a:solidFill>
                 <a:latin typeface="Arial"/>
               </a:rPr>
-              <a:t>ĐỀ BÀI</a:t>
+              <a:t>LỜI GIẢI</a:t>
             </a:r>
           </a:p>
         </p:txBody>
@@ -5358,7 +5429,7 @@
         <p:spPr>
           <a:xfrm>
             <a:off x="731520" y="274320"/>
-            <a:ext cx="9582912" cy="868680"/>
+            <a:ext cx="9272016" cy="868680"/>
           </a:xfrm>
           <a:prstGeom prst="rect">
             <a:avLst/>
@@ -5378,7 +5449,7 @@
                 </a:solidFill>
                 <a:latin typeface="Arial"/>
               </a:rPr>
-              <a:t>HÌNH ẢNH TƯỢNG TRƯNG</a:t>
+              <a:t>HỆ THỐNG HÌNH ẢNH VÀ TỪ “ĐÂU”</a:t>
             </a:r>
           </a:p>
         </p:txBody>
@@ -5471,7 +5542,7 @@
         <p:spPr>
           <a:xfrm>
             <a:off x="731520" y="1463040"/>
-            <a:ext cx="10789920" cy="3566160"/>
+            <a:ext cx="10789920" cy="3474720"/>
           </a:xfrm>
           <a:prstGeom prst="rect">
             <a:avLst/>
@@ -5484,19 +5555,87 @@
           </a:bodyPr>
           <a:lstStyle/>
           <a:p>
-            <a:pPr algn="l">
+            <a:pPr algn="l" marL="365760" indent="-365760">
               <a:spcAft>
                 <a:spcPts val="800"/>
               </a:spcAft>
+              <a:buClr>
+                <a:srgbClr val="1E40AF"/>
+              </a:buClr>
+              <a:buFont typeface="Arial"/>
+              <a:buChar char="•"/>
             </a:pPr>
             <a:r>
-              <a:rPr sz="2600" b="1">
+              <a:rPr sz="2300">
                 <a:solidFill>
                   <a:srgbClr val="1E293B"/>
                 </a:solidFill>
                 <a:latin typeface="Calibri"/>
               </a:rPr>
-              <a:t>Hình ảnh nào trong bài thơ mang tính tượng trưng rõ nét hơn cả? Làm rõ tính tượng trưng ấy.</a:t>
+              <a:t>Cảnh quê: gió, ruộng tre, ô mạ, nương khoai.</a:t>
+            </a:r>
+          </a:p>
+          <a:p>
+            <a:pPr algn="l" marL="365760" indent="-365760">
+              <a:spcAft>
+                <a:spcPts val="800"/>
+              </a:spcAft>
+              <a:buClr>
+                <a:srgbClr val="1E40AF"/>
+              </a:buClr>
+              <a:buFont typeface="Arial"/>
+              <a:buChar char="•"/>
+            </a:pPr>
+            <a:r>
+              <a:rPr sz="2300">
+                <a:solidFill>
+                  <a:srgbClr val="1E293B"/>
+                </a:solidFill>
+                <a:latin typeface="Calibri"/>
+              </a:rPr>
+              <a:t>Người quê: lưng cong xuống luống cày, bàn tay vãi giống, mẹ già.</a:t>
+            </a:r>
+          </a:p>
+          <a:p>
+            <a:pPr algn="l" marL="365760" indent="-365760">
+              <a:spcAft>
+                <a:spcPts val="800"/>
+              </a:spcAft>
+              <a:buClr>
+                <a:srgbClr val="1E40AF"/>
+              </a:buClr>
+              <a:buFont typeface="Arial"/>
+              <a:buChar char="•"/>
+            </a:pPr>
+            <a:r>
+              <a:rPr sz="2300">
+                <a:solidFill>
+                  <a:srgbClr val="1E293B"/>
+                </a:solidFill>
+                <a:latin typeface="Calibri"/>
+              </a:rPr>
+              <a:t>Cái tôi: băn khoăn → say đồng hương nắng → cánh chim nhớ gió mây.</a:t>
+            </a:r>
+          </a:p>
+          <a:p>
+            <a:pPr algn="l" marL="365760" indent="-365760">
+              <a:spcAft>
+                <a:spcPts val="800"/>
+              </a:spcAft>
+              <a:buClr>
+                <a:srgbClr val="1E40AF"/>
+              </a:buClr>
+              <a:buFont typeface="Arial"/>
+              <a:buChar char="•"/>
+            </a:pPr>
+            <a:r>
+              <a:rPr sz="2300">
+                <a:solidFill>
+                  <a:srgbClr val="1E293B"/>
+                </a:solidFill>
+                <a:latin typeface="Calibri"/>
+              </a:rPr>
+              <a:t>“Đâu” mở ra chuỗi hồi tưởng, liên kết mạch nhớ.</a:t>
             </a:r>
           </a:p>
         </p:txBody>
@@ -5509,8 +5648,8 @@
         </p:nvSpPr>
         <p:spPr>
           <a:xfrm>
-            <a:off x="731520" y="5120640"/>
-            <a:ext cx="10789920" cy="693420"/>
+            <a:off x="731520" y="5074920"/>
+            <a:ext cx="10789920" cy="731520"/>
           </a:xfrm>
           <a:prstGeom prst="roundRect">
             <a:avLst>
@@ -5518,11 +5657,11 @@
             </a:avLst>
           </a:prstGeom>
           <a:solidFill>
-            <a:srgbClr val="EFF4FF"/>
+            <a:srgbClr val="FEF2F2"/>
           </a:solidFill>
           <a:ln w="19050">
             <a:solidFill>
-              <a:srgbClr val="1E40AF"/>
+              <a:srgbClr val="991B1B"/>
             </a:solidFill>
           </a:ln>
           <a:effectLst/>
@@ -5557,8 +5696,8 @@
         </p:nvSpPr>
         <p:spPr>
           <a:xfrm>
-            <a:off x="914400" y="5120640"/>
-            <a:ext cx="10424160" cy="693420"/>
+            <a:off x="914400" y="5074920"/>
+            <a:ext cx="10424160" cy="731520"/>
           </a:xfrm>
           <a:prstGeom prst="rect">
             <a:avLst/>
@@ -5577,13 +5716,13 @@
               </a:spcAft>
             </a:pPr>
             <a:r>
-              <a:rPr sz="2200" b="1">
-                <a:solidFill>
-                  <a:srgbClr val="1E40AF"/>
+              <a:rPr sz="2400" b="1">
+                <a:solidFill>
+                  <a:srgbClr val="991B1B"/>
                 </a:solidFill>
                 <a:latin typeface="Calibri"/>
               </a:rPr>
-              <a:t>💡 Người tù tự so sánh mình với gì?</a:t>
+              <a:t>Cảnh – người – mình đan cài trong nỗi nhớ.</a:t>
             </a:r>
           </a:p>
         </p:txBody>
@@ -5666,6 +5805,368 @@
         </p:nvSpPr>
         <p:spPr>
           <a:xfrm>
+            <a:off x="10253167" y="457200"/>
+            <a:ext cx="1389888" cy="457200"/>
+          </a:xfrm>
+          <a:prstGeom prst="roundRect">
+            <a:avLst/>
+          </a:prstGeom>
+          <a:solidFill>
+            <a:srgbClr val="1E40AF"/>
+          </a:solidFill>
+          <a:ln>
+            <a:noFill/>
+          </a:ln>
+          <a:effectLst/>
+        </p:spPr>
+        <p:style>
+          <a:lnRef idx="1">
+            <a:schemeClr val="accent1"/>
+          </a:lnRef>
+          <a:fillRef idx="3">
+            <a:schemeClr val="accent1"/>
+          </a:fillRef>
+          <a:effectRef idx="2">
+            <a:schemeClr val="accent1"/>
+          </a:effectRef>
+          <a:fontRef idx="minor">
+            <a:schemeClr val="lt1"/>
+          </a:fontRef>
+        </p:style>
+        <p:txBody>
+          <a:bodyPr rtlCol="0" anchor="ctr" wrap="none" tIns="0" bIns="0"/>
+          <a:lstStyle/>
+          <a:p>
+            <a:pPr algn="ctr"/>
+            <a:r>
+              <a:rPr sz="1400" b="1">
+                <a:solidFill>
+                  <a:srgbClr val="FFFFFF"/>
+                </a:solidFill>
+                <a:latin typeface="Arial"/>
+              </a:rPr>
+              <a:t>ĐỀ BÀI</a:t>
+            </a:r>
+          </a:p>
+        </p:txBody>
+      </p:sp>
+      <p:sp>
+        <p:nvSpPr>
+          <p:cNvPr id="4" name="TextBox 3"/>
+          <p:cNvSpPr txBox="1"/>
+          <p:nvPr/>
+        </p:nvSpPr>
+        <p:spPr>
+          <a:xfrm>
+            <a:off x="731520" y="274320"/>
+            <a:ext cx="9582912" cy="868680"/>
+          </a:xfrm>
+          <a:prstGeom prst="rect">
+            <a:avLst/>
+          </a:prstGeom>
+          <a:noFill/>
+        </p:spPr>
+        <p:txBody>
+          <a:bodyPr wrap="square" anchor="ctr">
+            <a:spAutoFit/>
+          </a:bodyPr>
+          <a:lstStyle/>
+          <a:p>
+            <a:r>
+              <a:rPr sz="3600" b="1">
+                <a:solidFill>
+                  <a:srgbClr val="1E40AF"/>
+                </a:solidFill>
+                <a:latin typeface="Arial"/>
+              </a:rPr>
+              <a:t>HÌNH ẢNH TƯỢNG TRƯNG</a:t>
+            </a:r>
+          </a:p>
+        </p:txBody>
+      </p:sp>
+      <p:sp>
+        <p:nvSpPr>
+          <p:cNvPr id="5" name="Rectangle 4"/>
+          <p:cNvSpPr/>
+          <p:nvPr/>
+        </p:nvSpPr>
+        <p:spPr>
+          <a:xfrm>
+            <a:off x="457200" y="1207008"/>
+            <a:ext cx="11274552" cy="22000"/>
+          </a:xfrm>
+          <a:prstGeom prst="rect">
+            <a:avLst/>
+          </a:prstGeom>
+          <a:solidFill>
+            <a:srgbClr val="E2E8F0"/>
+          </a:solidFill>
+          <a:ln>
+            <a:noFill/>
+          </a:ln>
+          <a:effectLst/>
+        </p:spPr>
+        <p:style>
+          <a:lnRef idx="1">
+            <a:schemeClr val="accent1"/>
+          </a:lnRef>
+          <a:fillRef idx="3">
+            <a:schemeClr val="accent1"/>
+          </a:fillRef>
+          <a:effectRef idx="2">
+            <a:schemeClr val="accent1"/>
+          </a:effectRef>
+          <a:fontRef idx="minor">
+            <a:schemeClr val="lt1"/>
+          </a:fontRef>
+        </p:style>
+        <p:txBody>
+          <a:bodyPr rtlCol="0" anchor="ctr"/>
+          <a:lstStyle/>
+          <a:p>
+            <a:pPr algn="ctr"/>
+          </a:p>
+        </p:txBody>
+      </p:sp>
+      <p:sp>
+        <p:nvSpPr>
+          <p:cNvPr id="6" name="TextBox 5"/>
+          <p:cNvSpPr txBox="1"/>
+          <p:nvPr/>
+        </p:nvSpPr>
+        <p:spPr>
+          <a:xfrm>
+            <a:off x="457200" y="6355080"/>
+            <a:ext cx="11274552" cy="365760"/>
+          </a:xfrm>
+          <a:prstGeom prst="rect">
+            <a:avLst/>
+          </a:prstGeom>
+          <a:noFill/>
+        </p:spPr>
+        <p:txBody>
+          <a:bodyPr wrap="none">
+            <a:spAutoFit/>
+          </a:bodyPr>
+          <a:lstStyle/>
+          <a:p>
+            <a:pPr algn="r"/>
+            <a:r>
+              <a:rPr sz="1200">
+                <a:solidFill>
+                  <a:srgbClr val="64748B"/>
+                </a:solidFill>
+                <a:latin typeface="Calibri"/>
+              </a:rPr>
+              <a:t>Ngữ văn 11 · Bài 2: Cấu Tứ Và Hình Ảnh Trong Thơ Trữ Tình          11</a:t>
+            </a:r>
+          </a:p>
+        </p:txBody>
+      </p:sp>
+      <p:sp>
+        <p:nvSpPr>
+          <p:cNvPr id="7" name="TextBox 6"/>
+          <p:cNvSpPr txBox="1"/>
+          <p:nvPr/>
+        </p:nvSpPr>
+        <p:spPr>
+          <a:xfrm>
+            <a:off x="731520" y="1463040"/>
+            <a:ext cx="10789920" cy="3566160"/>
+          </a:xfrm>
+          <a:prstGeom prst="rect">
+            <a:avLst/>
+          </a:prstGeom>
+          <a:noFill/>
+        </p:spPr>
+        <p:txBody>
+          <a:bodyPr wrap="square" anchor="t" lIns="45720" rIns="45720">
+            <a:spAutoFit/>
+          </a:bodyPr>
+          <a:lstStyle/>
+          <a:p>
+            <a:pPr algn="l">
+              <a:spcAft>
+                <a:spcPts val="800"/>
+              </a:spcAft>
+            </a:pPr>
+            <a:r>
+              <a:rPr sz="2600" b="1">
+                <a:solidFill>
+                  <a:srgbClr val="1E293B"/>
+                </a:solidFill>
+                <a:latin typeface="Calibri"/>
+              </a:rPr>
+              <a:t>Hình ảnh nào trong bài thơ mang tính tượng trưng rõ nét hơn cả? Làm rõ tính tượng trưng ấy.</a:t>
+            </a:r>
+          </a:p>
+        </p:txBody>
+      </p:sp>
+      <p:sp>
+        <p:nvSpPr>
+          <p:cNvPr id="8" name="Rounded Rectangle 7"/>
+          <p:cNvSpPr/>
+          <p:nvPr/>
+        </p:nvSpPr>
+        <p:spPr>
+          <a:xfrm>
+            <a:off x="731520" y="5120640"/>
+            <a:ext cx="10789920" cy="693420"/>
+          </a:xfrm>
+          <a:prstGeom prst="roundRect">
+            <a:avLst>
+              <a:gd name="adj" fmla="val 8000"/>
+            </a:avLst>
+          </a:prstGeom>
+          <a:solidFill>
+            <a:srgbClr val="EFF4FF"/>
+          </a:solidFill>
+          <a:ln w="19050">
+            <a:solidFill>
+              <a:srgbClr val="1E40AF"/>
+            </a:solidFill>
+          </a:ln>
+          <a:effectLst/>
+        </p:spPr>
+        <p:style>
+          <a:lnRef idx="1">
+            <a:schemeClr val="accent1"/>
+          </a:lnRef>
+          <a:fillRef idx="3">
+            <a:schemeClr val="accent1"/>
+          </a:fillRef>
+          <a:effectRef idx="2">
+            <a:schemeClr val="accent1"/>
+          </a:effectRef>
+          <a:fontRef idx="minor">
+            <a:schemeClr val="lt1"/>
+          </a:fontRef>
+        </p:style>
+        <p:txBody>
+          <a:bodyPr rtlCol="0" anchor="ctr"/>
+          <a:lstStyle/>
+          <a:p>
+            <a:pPr algn="ctr"/>
+          </a:p>
+        </p:txBody>
+      </p:sp>
+      <p:sp>
+        <p:nvSpPr>
+          <p:cNvPr id="9" name="TextBox 8"/>
+          <p:cNvSpPr txBox="1"/>
+          <p:nvPr/>
+        </p:nvSpPr>
+        <p:spPr>
+          <a:xfrm>
+            <a:off x="914400" y="5120640"/>
+            <a:ext cx="10424160" cy="693420"/>
+          </a:xfrm>
+          <a:prstGeom prst="rect">
+            <a:avLst/>
+          </a:prstGeom>
+          <a:noFill/>
+        </p:spPr>
+        <p:txBody>
+          <a:bodyPr wrap="square" anchor="ctr" lIns="45720" rIns="45720">
+            <a:spAutoFit/>
+          </a:bodyPr>
+          <a:lstStyle/>
+          <a:p>
+            <a:pPr algn="l">
+              <a:spcAft>
+                <a:spcPts val="400"/>
+              </a:spcAft>
+            </a:pPr>
+            <a:r>
+              <a:rPr sz="2200" b="1">
+                <a:solidFill>
+                  <a:srgbClr val="1E40AF"/>
+                </a:solidFill>
+                <a:latin typeface="Calibri"/>
+              </a:rPr>
+              <a:t>💡 Người tù tự so sánh mình với gì?</a:t>
+            </a:r>
+          </a:p>
+        </p:txBody>
+      </p:sp>
+    </p:spTree>
+  </p:cSld>
+  <p:clrMapOvr>
+    <a:masterClrMapping/>
+  </p:clrMapOvr>
+</p:sld>
+</file>
+
+<file path=ppt/slides/slide12.xml><?xml version="1.0" encoding="utf-8"?>
+<p:sld xmlns:a="http://schemas.openxmlformats.org/drawingml/2006/main" xmlns:p="http://schemas.openxmlformats.org/presentationml/2006/main" xmlns:r="http://schemas.openxmlformats.org/officeDocument/2006/relationships">
+  <p:cSld>
+    <p:bg>
+      <p:bgPr>
+        <a:solidFill>
+          <a:srgbClr val="FFFFFF"/>
+        </a:solidFill>
+        <a:effectLst/>
+      </p:bgPr>
+    </p:bg>
+    <p:spTree>
+      <p:nvGrpSpPr>
+        <p:cNvPr id="1" name=""/>
+        <p:cNvGrpSpPr/>
+        <p:nvPr/>
+      </p:nvGrpSpPr>
+      <p:grpSpPr/>
+      <p:sp>
+        <p:nvSpPr>
+          <p:cNvPr id="2" name="Rectangle 1"/>
+          <p:cNvSpPr/>
+          <p:nvPr/>
+        </p:nvSpPr>
+        <p:spPr>
+          <a:xfrm>
+            <a:off x="457200" y="384048"/>
+            <a:ext cx="109728" cy="658368"/>
+          </a:xfrm>
+          <a:prstGeom prst="rect">
+            <a:avLst/>
+          </a:prstGeom>
+          <a:solidFill>
+            <a:srgbClr val="1E40AF"/>
+          </a:solidFill>
+          <a:ln>
+            <a:noFill/>
+          </a:ln>
+          <a:effectLst/>
+        </p:spPr>
+        <p:style>
+          <a:lnRef idx="1">
+            <a:schemeClr val="accent1"/>
+          </a:lnRef>
+          <a:fillRef idx="3">
+            <a:schemeClr val="accent1"/>
+          </a:fillRef>
+          <a:effectRef idx="2">
+            <a:schemeClr val="accent1"/>
+          </a:effectRef>
+          <a:fontRef idx="minor">
+            <a:schemeClr val="lt1"/>
+          </a:fontRef>
+        </p:style>
+        <p:txBody>
+          <a:bodyPr rtlCol="0" anchor="ctr"/>
+          <a:lstStyle/>
+          <a:p>
+            <a:pPr algn="ctr"/>
+          </a:p>
+        </p:txBody>
+      </p:sp>
+      <p:sp>
+        <p:nvSpPr>
+          <p:cNvPr id="3" name="Rounded Rectangle 2"/>
+          <p:cNvSpPr/>
+          <p:nvPr/>
+        </p:nvSpPr>
+        <p:spPr>
+          <a:xfrm>
             <a:off x="9942271" y="457200"/>
             <a:ext cx="1700784" cy="457200"/>
           </a:xfrm>
@@ -5819,7 +6320,7 @@
                 </a:solidFill>
                 <a:latin typeface="Calibri"/>
               </a:rPr>
-              <a:t>Ngữ văn 11 · Bài 2: Cấu Tứ Và Hình Ảnh Trong Thơ Trữ Tình          11</a:t>
+              <a:t>Ngữ văn 11 · Bài 2: Cấu Tứ Và Hình Ảnh Trong Thơ Trữ Tình          12</a:t>
             </a:r>
           </a:p>
         </p:txBody>
@@ -6005,7 +6506,7 @@
 </p:sld>
 </file>
 
-<file path=ppt/slides/slide12.xml><?xml version="1.0" encoding="utf-8"?>
+<file path=ppt/slides/slide13.xml><?xml version="1.0" encoding="utf-8"?>
 <p:sld xmlns:a="http://schemas.openxmlformats.org/drawingml/2006/main" xmlns:p="http://schemas.openxmlformats.org/presentationml/2006/main" xmlns:r="http://schemas.openxmlformats.org/officeDocument/2006/relationships">
   <p:cSld>
     <p:bg>
@@ -6102,297 +6603,6 @@
                 <a:latin typeface="Calibri"/>
               </a:rPr>
               <a:t>TIẾT 15 – 17: TRÀNG GIANG (Huy Cận)</a:t>
-            </a:r>
-          </a:p>
-        </p:txBody>
-      </p:sp>
-    </p:spTree>
-  </p:cSld>
-  <p:clrMapOvr>
-    <a:masterClrMapping/>
-  </p:clrMapOvr>
-</p:sld>
-</file>
-
-<file path=ppt/slides/slide13.xml><?xml version="1.0" encoding="utf-8"?>
-<p:sld xmlns:a="http://schemas.openxmlformats.org/drawingml/2006/main" xmlns:p="http://schemas.openxmlformats.org/presentationml/2006/main" xmlns:r="http://schemas.openxmlformats.org/officeDocument/2006/relationships">
-  <p:cSld>
-    <p:bg>
-      <p:bgPr>
-        <a:solidFill>
-          <a:srgbClr val="FFFFFF"/>
-        </a:solidFill>
-        <a:effectLst/>
-      </p:bgPr>
-    </p:bg>
-    <p:spTree>
-      <p:nvGrpSpPr>
-        <p:cNvPr id="1" name=""/>
-        <p:cNvGrpSpPr/>
-        <p:nvPr/>
-      </p:nvGrpSpPr>
-      <p:grpSpPr/>
-      <p:sp>
-        <p:nvSpPr>
-          <p:cNvPr id="2" name="Rectangle 1"/>
-          <p:cNvSpPr/>
-          <p:nvPr/>
-        </p:nvSpPr>
-        <p:spPr>
-          <a:xfrm>
-            <a:off x="457200" y="384048"/>
-            <a:ext cx="109728" cy="658368"/>
-          </a:xfrm>
-          <a:prstGeom prst="rect">
-            <a:avLst/>
-          </a:prstGeom>
-          <a:solidFill>
-            <a:srgbClr val="1E40AF"/>
-          </a:solidFill>
-          <a:ln>
-            <a:noFill/>
-          </a:ln>
-          <a:effectLst/>
-        </p:spPr>
-        <p:style>
-          <a:lnRef idx="1">
-            <a:schemeClr val="accent1"/>
-          </a:lnRef>
-          <a:fillRef idx="3">
-            <a:schemeClr val="accent1"/>
-          </a:fillRef>
-          <a:effectRef idx="2">
-            <a:schemeClr val="accent1"/>
-          </a:effectRef>
-          <a:fontRef idx="minor">
-            <a:schemeClr val="lt1"/>
-          </a:fontRef>
-        </p:style>
-        <p:txBody>
-          <a:bodyPr rtlCol="0" anchor="ctr"/>
-          <a:lstStyle/>
-          <a:p>
-            <a:pPr algn="ctr"/>
-          </a:p>
-        </p:txBody>
-      </p:sp>
-      <p:sp>
-        <p:nvSpPr>
-          <p:cNvPr id="3" name="Rounded Rectangle 2"/>
-          <p:cNvSpPr/>
-          <p:nvPr/>
-        </p:nvSpPr>
-        <p:spPr>
-          <a:xfrm>
-            <a:off x="9786823" y="457200"/>
-            <a:ext cx="1856232" cy="457200"/>
-          </a:xfrm>
-          <a:prstGeom prst="roundRect">
-            <a:avLst/>
-          </a:prstGeom>
-          <a:solidFill>
-            <a:srgbClr val="1E40AF"/>
-          </a:solidFill>
-          <a:ln>
-            <a:noFill/>
-          </a:ln>
-          <a:effectLst/>
-        </p:spPr>
-        <p:style>
-          <a:lnRef idx="1">
-            <a:schemeClr val="accent1"/>
-          </a:lnRef>
-          <a:fillRef idx="3">
-            <a:schemeClr val="accent1"/>
-          </a:fillRef>
-          <a:effectRef idx="2">
-            <a:schemeClr val="accent1"/>
-          </a:effectRef>
-          <a:fontRef idx="minor">
-            <a:schemeClr val="lt1"/>
-          </a:fontRef>
-        </p:style>
-        <p:txBody>
-          <a:bodyPr rtlCol="0" anchor="ctr" wrap="none" tIns="0" bIns="0"/>
-          <a:lstStyle/>
-          <a:p>
-            <a:pPr algn="ctr"/>
-            <a:r>
-              <a:rPr sz="1400" b="1">
-                <a:solidFill>
-                  <a:srgbClr val="FFFFFF"/>
-                </a:solidFill>
-                <a:latin typeface="Arial"/>
-              </a:rPr>
-              <a:t>KHỞI ĐỘNG</a:t>
-            </a:r>
-          </a:p>
-        </p:txBody>
-      </p:sp>
-      <p:sp>
-        <p:nvSpPr>
-          <p:cNvPr id="4" name="TextBox 3"/>
-          <p:cNvSpPr txBox="1"/>
-          <p:nvPr/>
-        </p:nvSpPr>
-        <p:spPr>
-          <a:xfrm>
-            <a:off x="731520" y="274320"/>
-            <a:ext cx="9116568" cy="868680"/>
-          </a:xfrm>
-          <a:prstGeom prst="rect">
-            <a:avLst/>
-          </a:prstGeom>
-          <a:noFill/>
-        </p:spPr>
-        <p:txBody>
-          <a:bodyPr wrap="square" anchor="ctr">
-            <a:spAutoFit/>
-          </a:bodyPr>
-          <a:lstStyle/>
-          <a:p>
-            <a:r>
-              <a:rPr sz="3600" b="1">
-                <a:solidFill>
-                  <a:srgbClr val="1E40AF"/>
-                </a:solidFill>
-                <a:latin typeface="Arial"/>
-              </a:rPr>
-              <a:t>TRƯỚC KHI ĐỌC</a:t>
-            </a:r>
-          </a:p>
-        </p:txBody>
-      </p:sp>
-      <p:sp>
-        <p:nvSpPr>
-          <p:cNvPr id="5" name="Rectangle 4"/>
-          <p:cNvSpPr/>
-          <p:nvPr/>
-        </p:nvSpPr>
-        <p:spPr>
-          <a:xfrm>
-            <a:off x="457200" y="1207008"/>
-            <a:ext cx="11274552" cy="22000"/>
-          </a:xfrm>
-          <a:prstGeom prst="rect">
-            <a:avLst/>
-          </a:prstGeom>
-          <a:solidFill>
-            <a:srgbClr val="E2E8F0"/>
-          </a:solidFill>
-          <a:ln>
-            <a:noFill/>
-          </a:ln>
-          <a:effectLst/>
-        </p:spPr>
-        <p:style>
-          <a:lnRef idx="1">
-            <a:schemeClr val="accent1"/>
-          </a:lnRef>
-          <a:fillRef idx="3">
-            <a:schemeClr val="accent1"/>
-          </a:fillRef>
-          <a:effectRef idx="2">
-            <a:schemeClr val="accent1"/>
-          </a:effectRef>
-          <a:fontRef idx="minor">
-            <a:schemeClr val="lt1"/>
-          </a:fontRef>
-        </p:style>
-        <p:txBody>
-          <a:bodyPr rtlCol="0" anchor="ctr"/>
-          <a:lstStyle/>
-          <a:p>
-            <a:pPr algn="ctr"/>
-          </a:p>
-        </p:txBody>
-      </p:sp>
-      <p:sp>
-        <p:nvSpPr>
-          <p:cNvPr id="6" name="TextBox 5"/>
-          <p:cNvSpPr txBox="1"/>
-          <p:nvPr/>
-        </p:nvSpPr>
-        <p:spPr>
-          <a:xfrm>
-            <a:off x="457200" y="6355080"/>
-            <a:ext cx="11274552" cy="365760"/>
-          </a:xfrm>
-          <a:prstGeom prst="rect">
-            <a:avLst/>
-          </a:prstGeom>
-          <a:noFill/>
-        </p:spPr>
-        <p:txBody>
-          <a:bodyPr wrap="none">
-            <a:spAutoFit/>
-          </a:bodyPr>
-          <a:lstStyle/>
-          <a:p>
-            <a:pPr algn="r"/>
-            <a:r>
-              <a:rPr sz="1200">
-                <a:solidFill>
-                  <a:srgbClr val="64748B"/>
-                </a:solidFill>
-                <a:latin typeface="Calibri"/>
-              </a:rPr>
-              <a:t>Ngữ văn 11 · Bài 2: Cấu Tứ Và Hình Ảnh Trong Thơ Trữ Tình          13</a:t>
-            </a:r>
-          </a:p>
-        </p:txBody>
-      </p:sp>
-      <p:sp>
-        <p:nvSpPr>
-          <p:cNvPr id="7" name="TextBox 6"/>
-          <p:cNvSpPr txBox="1"/>
-          <p:nvPr/>
-        </p:nvSpPr>
-        <p:spPr>
-          <a:xfrm>
-            <a:off x="731520" y="1463040"/>
-            <a:ext cx="10789920" cy="4572000"/>
-          </a:xfrm>
-          <a:prstGeom prst="rect">
-            <a:avLst/>
-          </a:prstGeom>
-          <a:noFill/>
-        </p:spPr>
-        <p:txBody>
-          <a:bodyPr wrap="square" anchor="t" lIns="45720" rIns="45720">
-            <a:spAutoFit/>
-          </a:bodyPr>
-          <a:lstStyle/>
-          <a:p>
-            <a:pPr algn="l">
-              <a:spcAft>
-                <a:spcPts val="800"/>
-              </a:spcAft>
-            </a:pPr>
-            <a:r>
-              <a:rPr sz="2600" b="1">
-                <a:solidFill>
-                  <a:srgbClr val="1E293B"/>
-                </a:solidFill>
-                <a:latin typeface="Calibri"/>
-              </a:rPr>
-              <a:t>Vì sao ta có thể rung động trước bài thơ của một người xa lạ?</a:t>
-            </a:r>
-          </a:p>
-          <a:p>
-            <a:pPr algn="l">
-              <a:spcAft>
-                <a:spcPts val="800"/>
-              </a:spcAft>
-            </a:pPr>
-            <a:r>
-              <a:rPr sz="2600" b="1">
-                <a:solidFill>
-                  <a:srgbClr val="1E293B"/>
-                </a:solidFill>
-                <a:latin typeface="Calibri"/>
-              </a:rPr>
-              <a:t>Cảnh trời đất mênh mông buổi chiều tà có ý nghĩa gì với tâm hồn mỗi người?</a:t>
             </a:r>
           </a:p>
         </p:txBody>
@@ -6475,14 +6685,14 @@
         </p:nvSpPr>
         <p:spPr>
           <a:xfrm>
-            <a:off x="10408615" y="457200"/>
-            <a:ext cx="1234440" cy="457200"/>
+            <a:off x="9786823" y="457200"/>
+            <a:ext cx="1856232" cy="457200"/>
           </a:xfrm>
           <a:prstGeom prst="roundRect">
             <a:avLst/>
           </a:prstGeom>
           <a:solidFill>
-            <a:srgbClr val="991B1B"/>
+            <a:srgbClr val="1E40AF"/>
           </a:solidFill>
           <a:ln>
             <a:noFill/>
@@ -6515,7 +6725,7 @@
                 </a:solidFill>
                 <a:latin typeface="Arial"/>
               </a:rPr>
-              <a:t>VIDEO</a:t>
+              <a:t>KHỞI ĐỘNG</a:t>
             </a:r>
           </a:p>
         </p:txBody>
@@ -6529,7 +6739,7 @@
         <p:spPr>
           <a:xfrm>
             <a:off x="731520" y="274320"/>
-            <a:ext cx="9738360" cy="868680"/>
+            <a:ext cx="9116568" cy="868680"/>
           </a:xfrm>
           <a:prstGeom prst="rect">
             <a:avLst/>
@@ -6549,7 +6759,7 @@
                 </a:solidFill>
                 <a:latin typeface="Arial"/>
               </a:rPr>
-              <a:t>VIDEO THAM KHẢO</a:t>
+              <a:t>TRƯỚC KHI ĐỌC</a:t>
             </a:r>
           </a:p>
         </p:txBody>
@@ -6633,40 +6843,16 @@
           </a:p>
         </p:txBody>
       </p:sp>
-      <p:pic>
-        <p:nvPicPr>
-          <p:cNvPr id="7" name="Picture 6" descr="QR_video_zdVP4hMfcmk.png"/>
-          <p:cNvPicPr>
-            <a:picLocks noChangeAspect="1"/>
-          </p:cNvPicPr>
-          <p:nvPr/>
-        </p:nvPicPr>
-        <p:blipFill>
-          <a:blip r:embed="rId2"/>
-          <a:stretch>
-            <a:fillRect/>
-          </a:stretch>
-        </p:blipFill>
-        <p:spPr>
-          <a:xfrm>
-            <a:off x="8412480" y="1554480"/>
-            <a:ext cx="3108960" cy="3108960"/>
-          </a:xfrm>
-          <a:prstGeom prst="rect">
-            <a:avLst/>
-          </a:prstGeom>
-        </p:spPr>
-      </p:pic>
-      <p:sp>
-        <p:nvSpPr>
-          <p:cNvPr id="8" name="TextBox 7"/>
+      <p:sp>
+        <p:nvSpPr>
+          <p:cNvPr id="7" name="TextBox 6"/>
           <p:cNvSpPr txBox="1"/>
           <p:nvPr/>
         </p:nvSpPr>
         <p:spPr>
           <a:xfrm>
-            <a:off x="731520" y="1554480"/>
-            <a:ext cx="7498079" cy="4206240"/>
+            <a:off x="731520" y="1463040"/>
+            <a:ext cx="10789920" cy="4572000"/>
           </a:xfrm>
           <a:prstGeom prst="rect">
             <a:avLst/>
@@ -6691,7 +6877,7 @@
                 </a:solidFill>
                 <a:latin typeface="Calibri"/>
               </a:rPr>
-              <a:t>🎬 Bài thơ Tràng giang – Huy Cận – Tô Kiều Ngân ngâm</a:t>
+              <a:t>Vì sao ta có thể rung động trước bài thơ của một người xa lạ?</a:t>
             </a:r>
           </a:p>
           <a:p>
@@ -6701,51 +6887,13 @@
               </a:spcAft>
             </a:pPr>
             <a:r>
-              <a:rPr sz="2000">
-                <a:solidFill>
-                  <a:srgbClr val="64748B"/>
+              <a:rPr sz="2600" b="1">
+                <a:solidFill>
+                  <a:srgbClr val="1E293B"/>
                 </a:solidFill>
                 <a:latin typeface="Calibri"/>
               </a:rPr>
-              <a:t>Kênh: Lê &amp; H</a:t>
-            </a:r>
-          </a:p>
-          <a:p>
-            <a:pPr algn="l" marL="365760" indent="-365760">
-              <a:spcAft>
-                <a:spcPts val="800"/>
-              </a:spcAft>
-              <a:buClr>
-                <a:srgbClr val="1E40AF"/>
-              </a:buClr>
-              <a:buFont typeface="Arial"/>
-              <a:buChar char="•"/>
-            </a:pPr>
-            <a:r>
-              <a:rPr sz="2000">
-                <a:solidFill>
-                  <a:srgbClr val="1E293B"/>
-                </a:solidFill>
-                <a:latin typeface="Calibri"/>
-              </a:rPr>
-              <a:t>Đọc diễn cảm Tràng giang</a:t>
-            </a:r>
-          </a:p>
-          <a:p>
-            <a:pPr algn="l">
-              <a:spcAft>
-                <a:spcPts val="800"/>
-              </a:spcAft>
-            </a:pPr>
-            <a:r>
-              <a:rPr sz="1600">
-                <a:solidFill>
-                  <a:srgbClr val="64748B"/>
-                </a:solidFill>
-                <a:latin typeface="Calibri"/>
-                <a:hlinkClick r:id="rId3"/>
-              </a:rPr>
-              <a:t>https://www.youtube.com/watch?v=zdVP4hMfcmk</a:t>
+              <a:t>Cảnh trời đất mênh mông buổi chiều tà có ý nghĩa gì với tâm hồn mỗi người?</a:t>
             </a:r>
           </a:p>
         </p:txBody>
@@ -6828,14 +6976,14 @@
         </p:nvSpPr>
         <p:spPr>
           <a:xfrm>
-            <a:off x="10253167" y="457200"/>
-            <a:ext cx="1389888" cy="457200"/>
+            <a:off x="10408615" y="457200"/>
+            <a:ext cx="1234440" cy="457200"/>
           </a:xfrm>
           <a:prstGeom prst="roundRect">
             <a:avLst/>
           </a:prstGeom>
           <a:solidFill>
-            <a:srgbClr val="1E40AF"/>
+            <a:srgbClr val="991B1B"/>
           </a:solidFill>
           <a:ln>
             <a:noFill/>
@@ -6868,7 +7016,7 @@
                 </a:solidFill>
                 <a:latin typeface="Arial"/>
               </a:rPr>
-              <a:t>ĐỀ BÀI</a:t>
+              <a:t>VIDEO</a:t>
             </a:r>
           </a:p>
         </p:txBody>
@@ -6882,7 +7030,7 @@
         <p:spPr>
           <a:xfrm>
             <a:off x="731520" y="274320"/>
-            <a:ext cx="9582912" cy="868680"/>
+            <a:ext cx="9738360" cy="868680"/>
           </a:xfrm>
           <a:prstGeom prst="rect">
             <a:avLst/>
@@ -6902,7 +7050,7 @@
                 </a:solidFill>
                 <a:latin typeface="Arial"/>
               </a:rPr>
-              <a:t>NHAN ĐỀ, ĐỀ TỪ VÀ KHUNG CẢNH</a:t>
+              <a:t>VIDEO THAM KHẢO</a:t>
             </a:r>
           </a:p>
         </p:txBody>
@@ -6986,16 +7134,40 @@
           </a:p>
         </p:txBody>
       </p:sp>
-      <p:sp>
-        <p:nvSpPr>
-          <p:cNvPr id="7" name="TextBox 6"/>
+      <p:pic>
+        <p:nvPicPr>
+          <p:cNvPr id="7" name="Picture 6" descr="QR_video_GjkqYB9E38U.png"/>
+          <p:cNvPicPr>
+            <a:picLocks noChangeAspect="1"/>
+          </p:cNvPicPr>
+          <p:nvPr/>
+        </p:nvPicPr>
+        <p:blipFill>
+          <a:blip r:embed="rId2"/>
+          <a:stretch>
+            <a:fillRect/>
+          </a:stretch>
+        </p:blipFill>
+        <p:spPr>
+          <a:xfrm>
+            <a:off x="8412480" y="1554480"/>
+            <a:ext cx="3108960" cy="3108960"/>
+          </a:xfrm>
+          <a:prstGeom prst="rect">
+            <a:avLst/>
+          </a:prstGeom>
+        </p:spPr>
+      </p:pic>
+      <p:sp>
+        <p:nvSpPr>
+          <p:cNvPr id="8" name="TextBox 7"/>
           <p:cNvSpPr txBox="1"/>
           <p:nvPr/>
         </p:nvSpPr>
         <p:spPr>
           <a:xfrm>
-            <a:off x="731520" y="1463040"/>
-            <a:ext cx="10789920" cy="3566160"/>
+            <a:off x="731520" y="1554480"/>
+            <a:ext cx="7498079" cy="4206240"/>
           </a:xfrm>
           <a:prstGeom prst="rect">
             <a:avLst/>
@@ -7020,94 +7192,61 @@
                 </a:solidFill>
                 <a:latin typeface="Calibri"/>
               </a:rPr>
-              <a:t>Cảm nhận về nhan đề Tràng giang? Nhan đề và đề từ liên quan thế nào với nội dung cảm xúc? Khung cảnh được “vẽ” ra có tính chất gì?</a:t>
-            </a:r>
-          </a:p>
-        </p:txBody>
-      </p:sp>
-      <p:sp>
-        <p:nvSpPr>
-          <p:cNvPr id="8" name="Rounded Rectangle 7"/>
-          <p:cNvSpPr/>
-          <p:nvPr/>
-        </p:nvSpPr>
-        <p:spPr>
-          <a:xfrm>
-            <a:off x="731520" y="5120640"/>
-            <a:ext cx="10789920" cy="693420"/>
-          </a:xfrm>
-          <a:prstGeom prst="roundRect">
-            <a:avLst>
-              <a:gd name="adj" fmla="val 8000"/>
-            </a:avLst>
-          </a:prstGeom>
-          <a:solidFill>
-            <a:srgbClr val="EFF4FF"/>
-          </a:solidFill>
-          <a:ln w="19050">
-            <a:solidFill>
-              <a:srgbClr val="1E40AF"/>
-            </a:solidFill>
-          </a:ln>
-          <a:effectLst/>
-        </p:spPr>
-        <p:style>
-          <a:lnRef idx="1">
-            <a:schemeClr val="accent1"/>
-          </a:lnRef>
-          <a:fillRef idx="3">
-            <a:schemeClr val="accent1"/>
-          </a:fillRef>
-          <a:effectRef idx="2">
-            <a:schemeClr val="accent1"/>
-          </a:effectRef>
-          <a:fontRef idx="minor">
-            <a:schemeClr val="lt1"/>
-          </a:fontRef>
-        </p:style>
-        <p:txBody>
-          <a:bodyPr rtlCol="0" anchor="ctr"/>
-          <a:lstStyle/>
-          <a:p>
-            <a:pPr algn="ctr"/>
-          </a:p>
-        </p:txBody>
-      </p:sp>
-      <p:sp>
-        <p:nvSpPr>
-          <p:cNvPr id="9" name="TextBox 8"/>
-          <p:cNvSpPr txBox="1"/>
-          <p:nvPr/>
-        </p:nvSpPr>
-        <p:spPr>
-          <a:xfrm>
-            <a:off x="914400" y="5120640"/>
-            <a:ext cx="10424160" cy="693420"/>
-          </a:xfrm>
-          <a:prstGeom prst="rect">
-            <a:avLst/>
-          </a:prstGeom>
-          <a:noFill/>
-        </p:spPr>
-        <p:txBody>
-          <a:bodyPr wrap="square" anchor="ctr" lIns="45720" rIns="45720">
-            <a:spAutoFit/>
-          </a:bodyPr>
-          <a:lstStyle/>
+              <a:t>🎬 Nhà thơ Cù Huy Cận: Người suốt đời gắn bó với cách mạng và thơ</a:t>
+            </a:r>
+          </a:p>
           <a:p>
             <a:pPr algn="l">
               <a:spcAft>
-                <a:spcPts val="400"/>
+                <a:spcPts val="800"/>
               </a:spcAft>
             </a:pPr>
             <a:r>
-              <a:rPr sz="2200" b="1">
-                <a:solidFill>
-                  <a:srgbClr val="1E40AF"/>
+              <a:rPr sz="2000">
+                <a:solidFill>
+                  <a:srgbClr val="64748B"/>
                 </a:solidFill>
                 <a:latin typeface="Calibri"/>
               </a:rPr>
-              <a:t>💡 Đề từ: “Bâng khuâng trời rộng nhớ sông dài”.</a:t>
+              <a:t>Kênh: Trung tâm Thư viện và Tri thức số</a:t>
+            </a:r>
+          </a:p>
+          <a:p>
+            <a:pPr algn="l" marL="365760" indent="-365760">
+              <a:spcAft>
+                <a:spcPts val="800"/>
+              </a:spcAft>
+              <a:buClr>
+                <a:srgbClr val="1E40AF"/>
+              </a:buClr>
+              <a:buFont typeface="Arial"/>
+              <a:buChar char="•"/>
+            </a:pPr>
+            <a:r>
+              <a:rPr sz="2000">
+                <a:solidFill>
+                  <a:srgbClr val="1E293B"/>
+                </a:solidFill>
+                <a:latin typeface="Calibri"/>
+              </a:rPr>
+              <a:t>Tìm hiểu tác giả Huy Cận (Tràng giang)</a:t>
+            </a:r>
+          </a:p>
+          <a:p>
+            <a:pPr algn="l">
+              <a:spcAft>
+                <a:spcPts val="800"/>
+              </a:spcAft>
+            </a:pPr>
+            <a:r>
+              <a:rPr sz="1600">
+                <a:solidFill>
+                  <a:srgbClr val="64748B"/>
+                </a:solidFill>
+                <a:latin typeface="Calibri"/>
+                <a:hlinkClick r:id="rId3"/>
+              </a:rPr>
+              <a:t>https://www.youtube.com/watch?v=GjkqYB9E38U</a:t>
             </a:r>
           </a:p>
         </p:txBody>
@@ -7190,14 +7329,14 @@
         </p:nvSpPr>
         <p:spPr>
           <a:xfrm>
-            <a:off x="9942271" y="457200"/>
-            <a:ext cx="1700784" cy="457200"/>
+            <a:off x="10253167" y="457200"/>
+            <a:ext cx="1389888" cy="457200"/>
           </a:xfrm>
           <a:prstGeom prst="roundRect">
             <a:avLst/>
           </a:prstGeom>
           <a:solidFill>
-            <a:srgbClr val="991B1B"/>
+            <a:srgbClr val="1E40AF"/>
           </a:solidFill>
           <a:ln>
             <a:noFill/>
@@ -7230,7 +7369,7 @@
                 </a:solidFill>
                 <a:latin typeface="Arial"/>
               </a:rPr>
-              <a:t>LỜI GIẢI</a:t>
+              <a:t>ĐỀ BÀI</a:t>
             </a:r>
           </a:p>
         </p:txBody>
@@ -7244,7 +7383,7 @@
         <p:spPr>
           <a:xfrm>
             <a:off x="731520" y="274320"/>
-            <a:ext cx="9272016" cy="868680"/>
+            <a:ext cx="9582912" cy="868680"/>
           </a:xfrm>
           <a:prstGeom prst="rect">
             <a:avLst/>
@@ -7357,7 +7496,7 @@
         <p:spPr>
           <a:xfrm>
             <a:off x="731520" y="1463040"/>
-            <a:ext cx="10789920" cy="3474720"/>
+            <a:ext cx="10789920" cy="3566160"/>
           </a:xfrm>
           <a:prstGeom prst="rect">
             <a:avLst/>
@@ -7370,66 +7509,19 @@
           </a:bodyPr>
           <a:lstStyle/>
           <a:p>
-            <a:pPr algn="l" marL="365760" indent="-365760">
+            <a:pPr algn="l">
               <a:spcAft>
                 <a:spcPts val="800"/>
               </a:spcAft>
-              <a:buClr>
-                <a:srgbClr val="1E40AF"/>
-              </a:buClr>
-              <a:buFont typeface="Arial"/>
-              <a:buChar char="•"/>
             </a:pPr>
             <a:r>
-              <a:rPr sz="2300">
+              <a:rPr sz="2600" b="1">
                 <a:solidFill>
                   <a:srgbClr val="1E293B"/>
                 </a:solidFill>
                 <a:latin typeface="Calibri"/>
               </a:rPr>
-              <a:t>“Tràng giang”: âm Hán Việt, vần “ang” vang mở – dòng sông mang tầm vũ trụ.</a:t>
-            </a:r>
-          </a:p>
-          <a:p>
-            <a:pPr algn="l" marL="365760" indent="-365760">
-              <a:spcAft>
-                <a:spcPts val="800"/>
-              </a:spcAft>
-              <a:buClr>
-                <a:srgbClr val="1E40AF"/>
-              </a:buClr>
-              <a:buFont typeface="Arial"/>
-              <a:buChar char="•"/>
-            </a:pPr>
-            <a:r>
-              <a:rPr sz="2300">
-                <a:solidFill>
-                  <a:srgbClr val="1E293B"/>
-                </a:solidFill>
-                <a:latin typeface="Calibri"/>
-              </a:rPr>
-              <a:t>Đề từ gợi cảm xúc chủ đạo: bâng khuâng, nhớ nhung.</a:t>
-            </a:r>
-          </a:p>
-          <a:p>
-            <a:pPr algn="l" marL="365760" indent="-365760">
-              <a:spcAft>
-                <a:spcPts val="800"/>
-              </a:spcAft>
-              <a:buClr>
-                <a:srgbClr val="1E40AF"/>
-              </a:buClr>
-              <a:buFont typeface="Arial"/>
-              <a:buChar char="•"/>
-            </a:pPr>
-            <a:r>
-              <a:rPr sz="2300">
-                <a:solidFill>
-                  <a:srgbClr val="1E293B"/>
-                </a:solidFill>
-                <a:latin typeface="Calibri"/>
-              </a:rPr>
-              <a:t>Khung cảnh: mênh mông, hiu quạnh, vắng lặng, cổ kính.</a:t>
+              <a:t>Cảm nhận về nhan đề Tràng giang? Nhan đề và đề từ liên quan thế nào với nội dung cảm xúc? Khung cảnh được “vẽ” ra có tính chất gì?</a:t>
             </a:r>
           </a:p>
         </p:txBody>
@@ -7442,8 +7534,8 @@
         </p:nvSpPr>
         <p:spPr>
           <a:xfrm>
-            <a:off x="731520" y="5074920"/>
-            <a:ext cx="10789920" cy="731520"/>
+            <a:off x="731520" y="5120640"/>
+            <a:ext cx="10789920" cy="693420"/>
           </a:xfrm>
           <a:prstGeom prst="roundRect">
             <a:avLst>
@@ -7451,11 +7543,11 @@
             </a:avLst>
           </a:prstGeom>
           <a:solidFill>
-            <a:srgbClr val="FEF2F2"/>
+            <a:srgbClr val="EFF4FF"/>
           </a:solidFill>
           <a:ln w="19050">
             <a:solidFill>
-              <a:srgbClr val="991B1B"/>
+              <a:srgbClr val="1E40AF"/>
             </a:solidFill>
           </a:ln>
           <a:effectLst/>
@@ -7490,8 +7582,8 @@
         </p:nvSpPr>
         <p:spPr>
           <a:xfrm>
-            <a:off x="914400" y="5074920"/>
-            <a:ext cx="10424160" cy="731520"/>
+            <a:off x="914400" y="5120640"/>
+            <a:ext cx="10424160" cy="693420"/>
           </a:xfrm>
           <a:prstGeom prst="rect">
             <a:avLst/>
@@ -7510,13 +7602,13 @@
               </a:spcAft>
             </a:pPr>
             <a:r>
-              <a:rPr sz="2400" b="1">
-                <a:solidFill>
-                  <a:srgbClr val="991B1B"/>
+              <a:rPr sz="2200" b="1">
+                <a:solidFill>
+                  <a:srgbClr val="1E40AF"/>
                 </a:solidFill>
                 <a:latin typeface="Calibri"/>
               </a:rPr>
-              <a:t>Nỗi buồn của cái tôi trước không gian vô tận.</a:t>
+              <a:t>💡 Đề từ: “Bâng khuâng trời rộng nhớ sông dài”.</a:t>
             </a:r>
           </a:p>
         </p:txBody>
@@ -7599,14 +7691,14 @@
         </p:nvSpPr>
         <p:spPr>
           <a:xfrm>
-            <a:off x="10253167" y="457200"/>
-            <a:ext cx="1389888" cy="457200"/>
+            <a:off x="9942271" y="457200"/>
+            <a:ext cx="1700784" cy="457200"/>
           </a:xfrm>
           <a:prstGeom prst="roundRect">
             <a:avLst/>
           </a:prstGeom>
           <a:solidFill>
-            <a:srgbClr val="1E40AF"/>
+            <a:srgbClr val="991B1B"/>
           </a:solidFill>
           <a:ln>
             <a:noFill/>
@@ -7639,7 +7731,7 @@
                 </a:solidFill>
                 <a:latin typeface="Arial"/>
               </a:rPr>
-              <a:t>ĐỀ BÀI</a:t>
+              <a:t>LỜI GIẢI</a:t>
             </a:r>
           </a:p>
         </p:txBody>
@@ -7653,7 +7745,7 @@
         <p:spPr>
           <a:xfrm>
             <a:off x="731520" y="274320"/>
-            <a:ext cx="9582912" cy="868680"/>
+            <a:ext cx="9272016" cy="868680"/>
           </a:xfrm>
           <a:prstGeom prst="rect">
             <a:avLst/>
@@ -7673,7 +7765,7 @@
                 </a:solidFill>
                 <a:latin typeface="Arial"/>
               </a:rPr>
-              <a:t>CẤU TỨ VÀ SỰ TƯƠNG PHẢN</a:t>
+              <a:t>NHAN ĐỀ, ĐỀ TỪ VÀ KHUNG CẢNH</a:t>
             </a:r>
           </a:p>
         </p:txBody>
@@ -7766,7 +7858,7 @@
         <p:spPr>
           <a:xfrm>
             <a:off x="731520" y="1463040"/>
-            <a:ext cx="10789920" cy="3566160"/>
+            <a:ext cx="10789920" cy="3474720"/>
           </a:xfrm>
           <a:prstGeom prst="rect">
             <a:avLst/>
@@ -7779,19 +7871,66 @@
           </a:bodyPr>
           <a:lstStyle/>
           <a:p>
-            <a:pPr algn="l">
+            <a:pPr algn="l" marL="365760" indent="-365760">
               <a:spcAft>
                 <a:spcPts val="800"/>
               </a:spcAft>
+              <a:buClr>
+                <a:srgbClr val="1E40AF"/>
+              </a:buClr>
+              <a:buFont typeface="Arial"/>
+              <a:buChar char="•"/>
             </a:pPr>
             <a:r>
-              <a:rPr sz="2600" b="1">
+              <a:rPr sz="2300">
                 <a:solidFill>
                   <a:srgbClr val="1E293B"/>
                 </a:solidFill>
                 <a:latin typeface="Calibri"/>
               </a:rPr>
-              <a:t>Bài thơ được cấu tứ như thế nào? Chỉ ra sự tương phản giữa các hình ảnh trong khổ thứ hai và sự triển khai ở các khổ sau.</a:t>
+              <a:t>“Tràng giang”: âm Hán Việt, vần “ang” vang mở – dòng sông mang tầm vũ trụ.</a:t>
+            </a:r>
+          </a:p>
+          <a:p>
+            <a:pPr algn="l" marL="365760" indent="-365760">
+              <a:spcAft>
+                <a:spcPts val="800"/>
+              </a:spcAft>
+              <a:buClr>
+                <a:srgbClr val="1E40AF"/>
+              </a:buClr>
+              <a:buFont typeface="Arial"/>
+              <a:buChar char="•"/>
+            </a:pPr>
+            <a:r>
+              <a:rPr sz="2300">
+                <a:solidFill>
+                  <a:srgbClr val="1E293B"/>
+                </a:solidFill>
+                <a:latin typeface="Calibri"/>
+              </a:rPr>
+              <a:t>Đề từ gợi cảm xúc chủ đạo: bâng khuâng, nhớ nhung.</a:t>
+            </a:r>
+          </a:p>
+          <a:p>
+            <a:pPr algn="l" marL="365760" indent="-365760">
+              <a:spcAft>
+                <a:spcPts val="800"/>
+              </a:spcAft>
+              <a:buClr>
+                <a:srgbClr val="1E40AF"/>
+              </a:buClr>
+              <a:buFont typeface="Arial"/>
+              <a:buChar char="•"/>
+            </a:pPr>
+            <a:r>
+              <a:rPr sz="2300">
+                <a:solidFill>
+                  <a:srgbClr val="1E293B"/>
+                </a:solidFill>
+                <a:latin typeface="Calibri"/>
+              </a:rPr>
+              <a:t>Khung cảnh: mênh mông, hiu quạnh, vắng lặng, cổ kính.</a:t>
             </a:r>
           </a:p>
         </p:txBody>
@@ -7804,8 +7943,8 @@
         </p:nvSpPr>
         <p:spPr>
           <a:xfrm>
-            <a:off x="731520" y="5120640"/>
-            <a:ext cx="10789920" cy="693420"/>
+            <a:off x="731520" y="5074920"/>
+            <a:ext cx="10789920" cy="731520"/>
           </a:xfrm>
           <a:prstGeom prst="roundRect">
             <a:avLst>
@@ -7813,11 +7952,11 @@
             </a:avLst>
           </a:prstGeom>
           <a:solidFill>
-            <a:srgbClr val="EFF4FF"/>
+            <a:srgbClr val="FEF2F2"/>
           </a:solidFill>
           <a:ln w="19050">
             <a:solidFill>
-              <a:srgbClr val="1E40AF"/>
+              <a:srgbClr val="991B1B"/>
             </a:solidFill>
           </a:ln>
           <a:effectLst/>
@@ -7852,8 +7991,8 @@
         </p:nvSpPr>
         <p:spPr>
           <a:xfrm>
-            <a:off x="914400" y="5120640"/>
-            <a:ext cx="10424160" cy="693420"/>
+            <a:off x="914400" y="5074920"/>
+            <a:ext cx="10424160" cy="731520"/>
           </a:xfrm>
           <a:prstGeom prst="rect">
             <a:avLst/>
@@ -7872,13 +8011,13 @@
               </a:spcAft>
             </a:pPr>
             <a:r>
-              <a:rPr sz="2200" b="1">
-                <a:solidFill>
-                  <a:srgbClr val="1E40AF"/>
+              <a:rPr sz="2400" b="1">
+                <a:solidFill>
+                  <a:srgbClr val="991B1B"/>
                 </a:solidFill>
                 <a:latin typeface="Calibri"/>
               </a:rPr>
-              <a:t>💡 Cái gì nhỏ bé, cái gì rộng lớn?</a:t>
+              <a:t>Nỗi buồn của cái tôi trước không gian vô tận.</a:t>
             </a:r>
           </a:p>
         </p:txBody>
@@ -7961,14 +8100,14 @@
         </p:nvSpPr>
         <p:spPr>
           <a:xfrm>
-            <a:off x="9942271" y="457200"/>
-            <a:ext cx="1700784" cy="457200"/>
+            <a:off x="10253167" y="457200"/>
+            <a:ext cx="1389888" cy="457200"/>
           </a:xfrm>
           <a:prstGeom prst="roundRect">
             <a:avLst/>
           </a:prstGeom>
           <a:solidFill>
-            <a:srgbClr val="991B1B"/>
+            <a:srgbClr val="1E40AF"/>
           </a:solidFill>
           <a:ln>
             <a:noFill/>
@@ -8001,7 +8140,7 @@
                 </a:solidFill>
                 <a:latin typeface="Arial"/>
               </a:rPr>
-              <a:t>LỜI GIẢI</a:t>
+              <a:t>ĐỀ BÀI</a:t>
             </a:r>
           </a:p>
         </p:txBody>
@@ -8015,7 +8154,7 @@
         <p:spPr>
           <a:xfrm>
             <a:off x="731520" y="274320"/>
-            <a:ext cx="9272016" cy="868680"/>
+            <a:ext cx="9582912" cy="868680"/>
           </a:xfrm>
           <a:prstGeom prst="rect">
             <a:avLst/>
@@ -8128,7 +8267,7 @@
         <p:spPr>
           <a:xfrm>
             <a:off x="731520" y="1463040"/>
-            <a:ext cx="10789920" cy="3474720"/>
+            <a:ext cx="10789920" cy="3566160"/>
           </a:xfrm>
           <a:prstGeom prst="rect">
             <a:avLst/>
@@ -8141,66 +8280,19 @@
           </a:bodyPr>
           <a:lstStyle/>
           <a:p>
-            <a:pPr algn="l" marL="365760" indent="-365760">
+            <a:pPr algn="l">
               <a:spcAft>
                 <a:spcPts val="800"/>
               </a:spcAft>
-              <a:buClr>
-                <a:srgbClr val="1E40AF"/>
-              </a:buClr>
-              <a:buFont typeface="Arial"/>
-              <a:buChar char="•"/>
             </a:pPr>
             <a:r>
-              <a:rPr sz="2300">
+              <a:rPr sz="2600" b="1">
                 <a:solidFill>
                   <a:srgbClr val="1E293B"/>
                 </a:solidFill>
                 <a:latin typeface="Calibri"/>
               </a:rPr>
-              <a:t>Cấu tứ: vô hạn của vũ trụ ↔ hữu hạn, nhỏ bé của con người.</a:t>
-            </a:r>
-          </a:p>
-          <a:p>
-            <a:pPr algn="l" marL="365760" indent="-365760">
-              <a:spcAft>
-                <a:spcPts val="800"/>
-              </a:spcAft>
-              <a:buClr>
-                <a:srgbClr val="1E40AF"/>
-              </a:buClr>
-              <a:buFont typeface="Arial"/>
-              <a:buChar char="•"/>
-            </a:pPr>
-            <a:r>
-              <a:rPr sz="2300">
-                <a:solidFill>
-                  <a:srgbClr val="1E293B"/>
-                </a:solidFill>
-                <a:latin typeface="Calibri"/>
-              </a:rPr>
-              <a:t>Khổ 2: “lơ thơ cồn nhỏ” ↔ “sông dài, trời rộng”.</a:t>
-            </a:r>
-          </a:p>
-          <a:p>
-            <a:pPr algn="l" marL="365760" indent="-365760">
-              <a:spcAft>
-                <a:spcPts val="800"/>
-              </a:spcAft>
-              <a:buClr>
-                <a:srgbClr val="1E40AF"/>
-              </a:buClr>
-              <a:buFont typeface="Arial"/>
-              <a:buChar char="•"/>
-            </a:pPr>
-            <a:r>
-              <a:rPr sz="2300">
-                <a:solidFill>
-                  <a:srgbClr val="1E293B"/>
-                </a:solidFill>
-                <a:latin typeface="Calibri"/>
-              </a:rPr>
-              <a:t>Khổ 3: bèo dạt – không đò, không cầu; khổ 4: mây núi bạc – cánh chim nhỏ.</a:t>
+              <a:t>Bài thơ được cấu tứ như thế nào? Chỉ ra sự tương phản giữa các hình ảnh trong khổ thứ hai và sự triển khai ở các khổ sau.</a:t>
             </a:r>
           </a:p>
         </p:txBody>
@@ -8213,8 +8305,8 @@
         </p:nvSpPr>
         <p:spPr>
           <a:xfrm>
-            <a:off x="731520" y="5074920"/>
-            <a:ext cx="10789920" cy="731520"/>
+            <a:off x="731520" y="5120640"/>
+            <a:ext cx="10789920" cy="693420"/>
           </a:xfrm>
           <a:prstGeom prst="roundRect">
             <a:avLst>
@@ -8222,11 +8314,11 @@
             </a:avLst>
           </a:prstGeom>
           <a:solidFill>
-            <a:srgbClr val="FEF2F2"/>
+            <a:srgbClr val="EFF4FF"/>
           </a:solidFill>
           <a:ln w="19050">
             <a:solidFill>
-              <a:srgbClr val="991B1B"/>
+              <a:srgbClr val="1E40AF"/>
             </a:solidFill>
           </a:ln>
           <a:effectLst/>
@@ -8261,8 +8353,8 @@
         </p:nvSpPr>
         <p:spPr>
           <a:xfrm>
-            <a:off x="914400" y="5074920"/>
-            <a:ext cx="10424160" cy="731520"/>
+            <a:off x="914400" y="5120640"/>
+            <a:ext cx="10424160" cy="693420"/>
           </a:xfrm>
           <a:prstGeom prst="rect">
             <a:avLst/>
@@ -8281,13 +8373,13 @@
               </a:spcAft>
             </a:pPr>
             <a:r>
-              <a:rPr sz="2400" b="1">
-                <a:solidFill>
-                  <a:srgbClr val="991B1B"/>
+              <a:rPr sz="2200" b="1">
+                <a:solidFill>
+                  <a:srgbClr val="1E40AF"/>
                 </a:solidFill>
                 <a:latin typeface="Calibri"/>
               </a:rPr>
-              <a:t>Tương phản làm nổi bật nỗi cô đơn.</a:t>
+              <a:t>💡 Cái gì nhỏ bé, cái gì rộng lớn?</a:t>
             </a:r>
           </a:p>
         </p:txBody>
@@ -8370,14 +8462,14 @@
         </p:nvSpPr>
         <p:spPr>
           <a:xfrm>
-            <a:off x="10253167" y="457200"/>
-            <a:ext cx="1389888" cy="457200"/>
+            <a:off x="9942271" y="457200"/>
+            <a:ext cx="1700784" cy="457200"/>
           </a:xfrm>
           <a:prstGeom prst="roundRect">
             <a:avLst/>
           </a:prstGeom>
           <a:solidFill>
-            <a:srgbClr val="1E40AF"/>
+            <a:srgbClr val="991B1B"/>
           </a:solidFill>
           <a:ln>
             <a:noFill/>
@@ -8410,7 +8502,7 @@
                 </a:solidFill>
                 <a:latin typeface="Arial"/>
               </a:rPr>
-              <a:t>ĐỀ BÀI</a:t>
+              <a:t>LỜI GIẢI</a:t>
             </a:r>
           </a:p>
         </p:txBody>
@@ -8424,7 +8516,7 @@
         <p:spPr>
           <a:xfrm>
             <a:off x="731520" y="274320"/>
-            <a:ext cx="9582912" cy="868680"/>
+            <a:ext cx="9272016" cy="868680"/>
           </a:xfrm>
           <a:prstGeom prst="rect">
             <a:avLst/>
@@ -8444,7 +8536,7 @@
                 </a:solidFill>
                 <a:latin typeface="Arial"/>
               </a:rPr>
-              <a:t>NGÔN NGỮ VÀ THI LIỆU</a:t>
+              <a:t>CẤU TỨ VÀ SỰ TƯƠNG PHẢN</a:t>
             </a:r>
           </a:p>
         </p:txBody>
@@ -8537,7 +8629,7 @@
         <p:spPr>
           <a:xfrm>
             <a:off x="731520" y="1463040"/>
-            <a:ext cx="10789920" cy="3566160"/>
+            <a:ext cx="10789920" cy="3474720"/>
           </a:xfrm>
           <a:prstGeom prst="rect">
             <a:avLst/>
@@ -8550,19 +8642,66 @@
           </a:bodyPr>
           <a:lstStyle/>
           <a:p>
-            <a:pPr algn="l">
+            <a:pPr algn="l" marL="365760" indent="-365760">
               <a:spcAft>
                 <a:spcPts val="800"/>
               </a:spcAft>
+              <a:buClr>
+                <a:srgbClr val="1E40AF"/>
+              </a:buClr>
+              <a:buFont typeface="Arial"/>
+              <a:buChar char="•"/>
             </a:pPr>
             <a:r>
-              <a:rPr sz="2600" b="1">
+              <a:rPr sz="2300">
                 <a:solidFill>
                   <a:srgbClr val="1E293B"/>
                 </a:solidFill>
                 <a:latin typeface="Calibri"/>
               </a:rPr>
-              <a:t>Bài thơ có những điểm khác lạ nào trong cách dùng ngôn ngữ? Nêu một số thi liệu truyền thống và ý nghĩa của chúng.</a:t>
+              <a:t>Cấu tứ: vô hạn của vũ trụ ↔ hữu hạn, nhỏ bé của con người.</a:t>
+            </a:r>
+          </a:p>
+          <a:p>
+            <a:pPr algn="l" marL="365760" indent="-365760">
+              <a:spcAft>
+                <a:spcPts val="800"/>
+              </a:spcAft>
+              <a:buClr>
+                <a:srgbClr val="1E40AF"/>
+              </a:buClr>
+              <a:buFont typeface="Arial"/>
+              <a:buChar char="•"/>
+            </a:pPr>
+            <a:r>
+              <a:rPr sz="2300">
+                <a:solidFill>
+                  <a:srgbClr val="1E293B"/>
+                </a:solidFill>
+                <a:latin typeface="Calibri"/>
+              </a:rPr>
+              <a:t>Khổ 2: “lơ thơ cồn nhỏ” ↔ “sông dài, trời rộng”.</a:t>
+            </a:r>
+          </a:p>
+          <a:p>
+            <a:pPr algn="l" marL="365760" indent="-365760">
+              <a:spcAft>
+                <a:spcPts val="800"/>
+              </a:spcAft>
+              <a:buClr>
+                <a:srgbClr val="1E40AF"/>
+              </a:buClr>
+              <a:buFont typeface="Arial"/>
+              <a:buChar char="•"/>
+            </a:pPr>
+            <a:r>
+              <a:rPr sz="2300">
+                <a:solidFill>
+                  <a:srgbClr val="1E293B"/>
+                </a:solidFill>
+                <a:latin typeface="Calibri"/>
+              </a:rPr>
+              <a:t>Khổ 3: bèo dạt – không đò, không cầu; khổ 4: mây núi bạc – cánh chim nhỏ.</a:t>
             </a:r>
           </a:p>
         </p:txBody>
@@ -8575,8 +8714,8 @@
         </p:nvSpPr>
         <p:spPr>
           <a:xfrm>
-            <a:off x="731520" y="5120640"/>
-            <a:ext cx="10789920" cy="693420"/>
+            <a:off x="731520" y="5074920"/>
+            <a:ext cx="10789920" cy="731520"/>
           </a:xfrm>
           <a:prstGeom prst="roundRect">
             <a:avLst>
@@ -8584,11 +8723,11 @@
             </a:avLst>
           </a:prstGeom>
           <a:solidFill>
-            <a:srgbClr val="EFF4FF"/>
+            <a:srgbClr val="FEF2F2"/>
           </a:solidFill>
           <a:ln w="19050">
             <a:solidFill>
-              <a:srgbClr val="1E40AF"/>
+              <a:srgbClr val="991B1B"/>
             </a:solidFill>
           </a:ln>
           <a:effectLst/>
@@ -8623,8 +8762,8 @@
         </p:nvSpPr>
         <p:spPr>
           <a:xfrm>
-            <a:off x="914400" y="5120640"/>
-            <a:ext cx="10424160" cy="693420"/>
+            <a:off x="914400" y="5074920"/>
+            <a:ext cx="10424160" cy="731520"/>
           </a:xfrm>
           <a:prstGeom prst="rect">
             <a:avLst/>
@@ -8643,13 +8782,13 @@
               </a:spcAft>
             </a:pPr>
             <a:r>
-              <a:rPr sz="2200" b="1">
-                <a:solidFill>
-                  <a:srgbClr val="1E40AF"/>
+              <a:rPr sz="2400" b="1">
+                <a:solidFill>
+                  <a:srgbClr val="991B1B"/>
                 </a:solidFill>
                 <a:latin typeface="Calibri"/>
               </a:rPr>
-              <a:t>💡 Chú ý “buồn điệp điệp”, “sâu chót vót”.</a:t>
+              <a:t>Tương phản làm nổi bật nỗi cô đơn.</a:t>
             </a:r>
           </a:p>
         </p:txBody>
@@ -9117,6 +9256,368 @@
         </p:nvSpPr>
         <p:spPr>
           <a:xfrm>
+            <a:off x="10253167" y="457200"/>
+            <a:ext cx="1389888" cy="457200"/>
+          </a:xfrm>
+          <a:prstGeom prst="roundRect">
+            <a:avLst/>
+          </a:prstGeom>
+          <a:solidFill>
+            <a:srgbClr val="1E40AF"/>
+          </a:solidFill>
+          <a:ln>
+            <a:noFill/>
+          </a:ln>
+          <a:effectLst/>
+        </p:spPr>
+        <p:style>
+          <a:lnRef idx="1">
+            <a:schemeClr val="accent1"/>
+          </a:lnRef>
+          <a:fillRef idx="3">
+            <a:schemeClr val="accent1"/>
+          </a:fillRef>
+          <a:effectRef idx="2">
+            <a:schemeClr val="accent1"/>
+          </a:effectRef>
+          <a:fontRef idx="minor">
+            <a:schemeClr val="lt1"/>
+          </a:fontRef>
+        </p:style>
+        <p:txBody>
+          <a:bodyPr rtlCol="0" anchor="ctr" wrap="none" tIns="0" bIns="0"/>
+          <a:lstStyle/>
+          <a:p>
+            <a:pPr algn="ctr"/>
+            <a:r>
+              <a:rPr sz="1400" b="1">
+                <a:solidFill>
+                  <a:srgbClr val="FFFFFF"/>
+                </a:solidFill>
+                <a:latin typeface="Arial"/>
+              </a:rPr>
+              <a:t>ĐỀ BÀI</a:t>
+            </a:r>
+          </a:p>
+        </p:txBody>
+      </p:sp>
+      <p:sp>
+        <p:nvSpPr>
+          <p:cNvPr id="4" name="TextBox 3"/>
+          <p:cNvSpPr txBox="1"/>
+          <p:nvPr/>
+        </p:nvSpPr>
+        <p:spPr>
+          <a:xfrm>
+            <a:off x="731520" y="274320"/>
+            <a:ext cx="9582912" cy="868680"/>
+          </a:xfrm>
+          <a:prstGeom prst="rect">
+            <a:avLst/>
+          </a:prstGeom>
+          <a:noFill/>
+        </p:spPr>
+        <p:txBody>
+          <a:bodyPr wrap="square" anchor="ctr">
+            <a:spAutoFit/>
+          </a:bodyPr>
+          <a:lstStyle/>
+          <a:p>
+            <a:r>
+              <a:rPr sz="3600" b="1">
+                <a:solidFill>
+                  <a:srgbClr val="1E40AF"/>
+                </a:solidFill>
+                <a:latin typeface="Arial"/>
+              </a:rPr>
+              <a:t>NGÔN NGỮ VÀ THI LIỆU</a:t>
+            </a:r>
+          </a:p>
+        </p:txBody>
+      </p:sp>
+      <p:sp>
+        <p:nvSpPr>
+          <p:cNvPr id="5" name="Rectangle 4"/>
+          <p:cNvSpPr/>
+          <p:nvPr/>
+        </p:nvSpPr>
+        <p:spPr>
+          <a:xfrm>
+            <a:off x="457200" y="1207008"/>
+            <a:ext cx="11274552" cy="22000"/>
+          </a:xfrm>
+          <a:prstGeom prst="rect">
+            <a:avLst/>
+          </a:prstGeom>
+          <a:solidFill>
+            <a:srgbClr val="E2E8F0"/>
+          </a:solidFill>
+          <a:ln>
+            <a:noFill/>
+          </a:ln>
+          <a:effectLst/>
+        </p:spPr>
+        <p:style>
+          <a:lnRef idx="1">
+            <a:schemeClr val="accent1"/>
+          </a:lnRef>
+          <a:fillRef idx="3">
+            <a:schemeClr val="accent1"/>
+          </a:fillRef>
+          <a:effectRef idx="2">
+            <a:schemeClr val="accent1"/>
+          </a:effectRef>
+          <a:fontRef idx="minor">
+            <a:schemeClr val="lt1"/>
+          </a:fontRef>
+        </p:style>
+        <p:txBody>
+          <a:bodyPr rtlCol="0" anchor="ctr"/>
+          <a:lstStyle/>
+          <a:p>
+            <a:pPr algn="ctr"/>
+          </a:p>
+        </p:txBody>
+      </p:sp>
+      <p:sp>
+        <p:nvSpPr>
+          <p:cNvPr id="6" name="TextBox 5"/>
+          <p:cNvSpPr txBox="1"/>
+          <p:nvPr/>
+        </p:nvSpPr>
+        <p:spPr>
+          <a:xfrm>
+            <a:off x="457200" y="6355080"/>
+            <a:ext cx="11274552" cy="365760"/>
+          </a:xfrm>
+          <a:prstGeom prst="rect">
+            <a:avLst/>
+          </a:prstGeom>
+          <a:noFill/>
+        </p:spPr>
+        <p:txBody>
+          <a:bodyPr wrap="none">
+            <a:spAutoFit/>
+          </a:bodyPr>
+          <a:lstStyle/>
+          <a:p>
+            <a:pPr algn="r"/>
+            <a:r>
+              <a:rPr sz="1200">
+                <a:solidFill>
+                  <a:srgbClr val="64748B"/>
+                </a:solidFill>
+                <a:latin typeface="Calibri"/>
+              </a:rPr>
+              <a:t>Ngữ văn 11 · Bài 2: Cấu Tứ Và Hình Ảnh Trong Thơ Trữ Tình          20</a:t>
+            </a:r>
+          </a:p>
+        </p:txBody>
+      </p:sp>
+      <p:sp>
+        <p:nvSpPr>
+          <p:cNvPr id="7" name="TextBox 6"/>
+          <p:cNvSpPr txBox="1"/>
+          <p:nvPr/>
+        </p:nvSpPr>
+        <p:spPr>
+          <a:xfrm>
+            <a:off x="731520" y="1463040"/>
+            <a:ext cx="10789920" cy="3566160"/>
+          </a:xfrm>
+          <a:prstGeom prst="rect">
+            <a:avLst/>
+          </a:prstGeom>
+          <a:noFill/>
+        </p:spPr>
+        <p:txBody>
+          <a:bodyPr wrap="square" anchor="t" lIns="45720" rIns="45720">
+            <a:spAutoFit/>
+          </a:bodyPr>
+          <a:lstStyle/>
+          <a:p>
+            <a:pPr algn="l">
+              <a:spcAft>
+                <a:spcPts val="800"/>
+              </a:spcAft>
+            </a:pPr>
+            <a:r>
+              <a:rPr sz="2600" b="1">
+                <a:solidFill>
+                  <a:srgbClr val="1E293B"/>
+                </a:solidFill>
+                <a:latin typeface="Calibri"/>
+              </a:rPr>
+              <a:t>Bài thơ có những điểm khác lạ nào trong cách dùng ngôn ngữ? Nêu một số thi liệu truyền thống và ý nghĩa của chúng.</a:t>
+            </a:r>
+          </a:p>
+        </p:txBody>
+      </p:sp>
+      <p:sp>
+        <p:nvSpPr>
+          <p:cNvPr id="8" name="Rounded Rectangle 7"/>
+          <p:cNvSpPr/>
+          <p:nvPr/>
+        </p:nvSpPr>
+        <p:spPr>
+          <a:xfrm>
+            <a:off x="731520" y="5120640"/>
+            <a:ext cx="10789920" cy="693420"/>
+          </a:xfrm>
+          <a:prstGeom prst="roundRect">
+            <a:avLst>
+              <a:gd name="adj" fmla="val 8000"/>
+            </a:avLst>
+          </a:prstGeom>
+          <a:solidFill>
+            <a:srgbClr val="EFF4FF"/>
+          </a:solidFill>
+          <a:ln w="19050">
+            <a:solidFill>
+              <a:srgbClr val="1E40AF"/>
+            </a:solidFill>
+          </a:ln>
+          <a:effectLst/>
+        </p:spPr>
+        <p:style>
+          <a:lnRef idx="1">
+            <a:schemeClr val="accent1"/>
+          </a:lnRef>
+          <a:fillRef idx="3">
+            <a:schemeClr val="accent1"/>
+          </a:fillRef>
+          <a:effectRef idx="2">
+            <a:schemeClr val="accent1"/>
+          </a:effectRef>
+          <a:fontRef idx="minor">
+            <a:schemeClr val="lt1"/>
+          </a:fontRef>
+        </p:style>
+        <p:txBody>
+          <a:bodyPr rtlCol="0" anchor="ctr"/>
+          <a:lstStyle/>
+          <a:p>
+            <a:pPr algn="ctr"/>
+          </a:p>
+        </p:txBody>
+      </p:sp>
+      <p:sp>
+        <p:nvSpPr>
+          <p:cNvPr id="9" name="TextBox 8"/>
+          <p:cNvSpPr txBox="1"/>
+          <p:nvPr/>
+        </p:nvSpPr>
+        <p:spPr>
+          <a:xfrm>
+            <a:off x="914400" y="5120640"/>
+            <a:ext cx="10424160" cy="693420"/>
+          </a:xfrm>
+          <a:prstGeom prst="rect">
+            <a:avLst/>
+          </a:prstGeom>
+          <a:noFill/>
+        </p:spPr>
+        <p:txBody>
+          <a:bodyPr wrap="square" anchor="ctr" lIns="45720" rIns="45720">
+            <a:spAutoFit/>
+          </a:bodyPr>
+          <a:lstStyle/>
+          <a:p>
+            <a:pPr algn="l">
+              <a:spcAft>
+                <a:spcPts val="400"/>
+              </a:spcAft>
+            </a:pPr>
+            <a:r>
+              <a:rPr sz="2200" b="1">
+                <a:solidFill>
+                  <a:srgbClr val="1E40AF"/>
+                </a:solidFill>
+                <a:latin typeface="Calibri"/>
+              </a:rPr>
+              <a:t>💡 Chú ý “buồn điệp điệp”, “sâu chót vót”.</a:t>
+            </a:r>
+          </a:p>
+        </p:txBody>
+      </p:sp>
+    </p:spTree>
+  </p:cSld>
+  <p:clrMapOvr>
+    <a:masterClrMapping/>
+  </p:clrMapOvr>
+</p:sld>
+</file>
+
+<file path=ppt/slides/slide21.xml><?xml version="1.0" encoding="utf-8"?>
+<p:sld xmlns:a="http://schemas.openxmlformats.org/drawingml/2006/main" xmlns:p="http://schemas.openxmlformats.org/presentationml/2006/main" xmlns:r="http://schemas.openxmlformats.org/officeDocument/2006/relationships">
+  <p:cSld>
+    <p:bg>
+      <p:bgPr>
+        <a:solidFill>
+          <a:srgbClr val="FFFFFF"/>
+        </a:solidFill>
+        <a:effectLst/>
+      </p:bgPr>
+    </p:bg>
+    <p:spTree>
+      <p:nvGrpSpPr>
+        <p:cNvPr id="1" name=""/>
+        <p:cNvGrpSpPr/>
+        <p:nvPr/>
+      </p:nvGrpSpPr>
+      <p:grpSpPr/>
+      <p:sp>
+        <p:nvSpPr>
+          <p:cNvPr id="2" name="Rectangle 1"/>
+          <p:cNvSpPr/>
+          <p:nvPr/>
+        </p:nvSpPr>
+        <p:spPr>
+          <a:xfrm>
+            <a:off x="457200" y="384048"/>
+            <a:ext cx="109728" cy="658368"/>
+          </a:xfrm>
+          <a:prstGeom prst="rect">
+            <a:avLst/>
+          </a:prstGeom>
+          <a:solidFill>
+            <a:srgbClr val="1E40AF"/>
+          </a:solidFill>
+          <a:ln>
+            <a:noFill/>
+          </a:ln>
+          <a:effectLst/>
+        </p:spPr>
+        <p:style>
+          <a:lnRef idx="1">
+            <a:schemeClr val="accent1"/>
+          </a:lnRef>
+          <a:fillRef idx="3">
+            <a:schemeClr val="accent1"/>
+          </a:fillRef>
+          <a:effectRef idx="2">
+            <a:schemeClr val="accent1"/>
+          </a:effectRef>
+          <a:fontRef idx="minor">
+            <a:schemeClr val="lt1"/>
+          </a:fontRef>
+        </p:style>
+        <p:txBody>
+          <a:bodyPr rtlCol="0" anchor="ctr"/>
+          <a:lstStyle/>
+          <a:p>
+            <a:pPr algn="ctr"/>
+          </a:p>
+        </p:txBody>
+      </p:sp>
+      <p:sp>
+        <p:nvSpPr>
+          <p:cNvPr id="3" name="Rounded Rectangle 2"/>
+          <p:cNvSpPr/>
+          <p:nvPr/>
+        </p:nvSpPr>
+        <p:spPr>
+          <a:xfrm>
             <a:off x="9942271" y="457200"/>
             <a:ext cx="1700784" cy="457200"/>
           </a:xfrm>
@@ -9270,7 +9771,7 @@
                 </a:solidFill>
                 <a:latin typeface="Calibri"/>
               </a:rPr>
-              <a:t>Ngữ văn 11 · Bài 2: Cấu Tứ Và Hình Ảnh Trong Thơ Trữ Tình          20</a:t>
+              <a:t>Ngữ văn 11 · Bài 2: Cấu Tứ Và Hình Ảnh Trong Thơ Trữ Tình          21</a:t>
             </a:r>
           </a:p>
         </p:txBody>
@@ -9456,7 +9957,7 @@
 </p:sld>
 </file>
 
-<file path=ppt/slides/slide21.xml><?xml version="1.0" encoding="utf-8"?>
+<file path=ppt/slides/slide22.xml><?xml version="1.0" encoding="utf-8"?>
 <p:sld xmlns:a="http://schemas.openxmlformats.org/drawingml/2006/main" xmlns:p="http://schemas.openxmlformats.org/presentationml/2006/main" xmlns:r="http://schemas.openxmlformats.org/officeDocument/2006/relationships">
   <p:cSld>
     <p:bg>
@@ -9553,359 +10054,6 @@
                 <a:latin typeface="Calibri"/>
               </a:rPr>
               <a:t>TIẾT 18: CON ĐƯỜNG MÙA ĐÔNG (Pu-skin)</a:t>
-            </a:r>
-          </a:p>
-        </p:txBody>
-      </p:sp>
-    </p:spTree>
-  </p:cSld>
-  <p:clrMapOvr>
-    <a:masterClrMapping/>
-  </p:clrMapOvr>
-</p:sld>
-</file>
-
-<file path=ppt/slides/slide22.xml><?xml version="1.0" encoding="utf-8"?>
-<p:sld xmlns:a="http://schemas.openxmlformats.org/drawingml/2006/main" xmlns:p="http://schemas.openxmlformats.org/presentationml/2006/main" xmlns:r="http://schemas.openxmlformats.org/officeDocument/2006/relationships">
-  <p:cSld>
-    <p:bg>
-      <p:bgPr>
-        <a:solidFill>
-          <a:srgbClr val="FFFFFF"/>
-        </a:solidFill>
-        <a:effectLst/>
-      </p:bgPr>
-    </p:bg>
-    <p:spTree>
-      <p:nvGrpSpPr>
-        <p:cNvPr id="1" name=""/>
-        <p:cNvGrpSpPr/>
-        <p:nvPr/>
-      </p:nvGrpSpPr>
-      <p:grpSpPr/>
-      <p:sp>
-        <p:nvSpPr>
-          <p:cNvPr id="2" name="Rectangle 1"/>
-          <p:cNvSpPr/>
-          <p:nvPr/>
-        </p:nvSpPr>
-        <p:spPr>
-          <a:xfrm>
-            <a:off x="457200" y="384048"/>
-            <a:ext cx="109728" cy="658368"/>
-          </a:xfrm>
-          <a:prstGeom prst="rect">
-            <a:avLst/>
-          </a:prstGeom>
-          <a:solidFill>
-            <a:srgbClr val="1E40AF"/>
-          </a:solidFill>
-          <a:ln>
-            <a:noFill/>
-          </a:ln>
-          <a:effectLst/>
-        </p:spPr>
-        <p:style>
-          <a:lnRef idx="1">
-            <a:schemeClr val="accent1"/>
-          </a:lnRef>
-          <a:fillRef idx="3">
-            <a:schemeClr val="accent1"/>
-          </a:fillRef>
-          <a:effectRef idx="2">
-            <a:schemeClr val="accent1"/>
-          </a:effectRef>
-          <a:fontRef idx="minor">
-            <a:schemeClr val="lt1"/>
-          </a:fontRef>
-        </p:style>
-        <p:txBody>
-          <a:bodyPr rtlCol="0" anchor="ctr"/>
-          <a:lstStyle/>
-          <a:p>
-            <a:pPr algn="ctr"/>
-          </a:p>
-        </p:txBody>
-      </p:sp>
-      <p:sp>
-        <p:nvSpPr>
-          <p:cNvPr id="3" name="Rounded Rectangle 2"/>
-          <p:cNvSpPr/>
-          <p:nvPr/>
-        </p:nvSpPr>
-        <p:spPr>
-          <a:xfrm>
-            <a:off x="10408615" y="457200"/>
-            <a:ext cx="1234440" cy="457200"/>
-          </a:xfrm>
-          <a:prstGeom prst="roundRect">
-            <a:avLst/>
-          </a:prstGeom>
-          <a:solidFill>
-            <a:srgbClr val="991B1B"/>
-          </a:solidFill>
-          <a:ln>
-            <a:noFill/>
-          </a:ln>
-          <a:effectLst/>
-        </p:spPr>
-        <p:style>
-          <a:lnRef idx="1">
-            <a:schemeClr val="accent1"/>
-          </a:lnRef>
-          <a:fillRef idx="3">
-            <a:schemeClr val="accent1"/>
-          </a:fillRef>
-          <a:effectRef idx="2">
-            <a:schemeClr val="accent1"/>
-          </a:effectRef>
-          <a:fontRef idx="minor">
-            <a:schemeClr val="lt1"/>
-          </a:fontRef>
-        </p:style>
-        <p:txBody>
-          <a:bodyPr rtlCol="0" anchor="ctr" wrap="none" tIns="0" bIns="0"/>
-          <a:lstStyle/>
-          <a:p>
-            <a:pPr algn="ctr"/>
-            <a:r>
-              <a:rPr sz="1400" b="1">
-                <a:solidFill>
-                  <a:srgbClr val="FFFFFF"/>
-                </a:solidFill>
-                <a:latin typeface="Arial"/>
-              </a:rPr>
-              <a:t>VIDEO</a:t>
-            </a:r>
-          </a:p>
-        </p:txBody>
-      </p:sp>
-      <p:sp>
-        <p:nvSpPr>
-          <p:cNvPr id="4" name="TextBox 3"/>
-          <p:cNvSpPr txBox="1"/>
-          <p:nvPr/>
-        </p:nvSpPr>
-        <p:spPr>
-          <a:xfrm>
-            <a:off x="731520" y="274320"/>
-            <a:ext cx="9738360" cy="868680"/>
-          </a:xfrm>
-          <a:prstGeom prst="rect">
-            <a:avLst/>
-          </a:prstGeom>
-          <a:noFill/>
-        </p:spPr>
-        <p:txBody>
-          <a:bodyPr wrap="square" anchor="ctr">
-            <a:spAutoFit/>
-          </a:bodyPr>
-          <a:lstStyle/>
-          <a:p>
-            <a:r>
-              <a:rPr sz="3600" b="1">
-                <a:solidFill>
-                  <a:srgbClr val="1E40AF"/>
-                </a:solidFill>
-                <a:latin typeface="Arial"/>
-              </a:rPr>
-              <a:t>VIDEO THAM KHẢO</a:t>
-            </a:r>
-          </a:p>
-        </p:txBody>
-      </p:sp>
-      <p:sp>
-        <p:nvSpPr>
-          <p:cNvPr id="5" name="Rectangle 4"/>
-          <p:cNvSpPr/>
-          <p:nvPr/>
-        </p:nvSpPr>
-        <p:spPr>
-          <a:xfrm>
-            <a:off x="457200" y="1207008"/>
-            <a:ext cx="11274552" cy="22000"/>
-          </a:xfrm>
-          <a:prstGeom prst="rect">
-            <a:avLst/>
-          </a:prstGeom>
-          <a:solidFill>
-            <a:srgbClr val="E2E8F0"/>
-          </a:solidFill>
-          <a:ln>
-            <a:noFill/>
-          </a:ln>
-          <a:effectLst/>
-        </p:spPr>
-        <p:style>
-          <a:lnRef idx="1">
-            <a:schemeClr val="accent1"/>
-          </a:lnRef>
-          <a:fillRef idx="3">
-            <a:schemeClr val="accent1"/>
-          </a:fillRef>
-          <a:effectRef idx="2">
-            <a:schemeClr val="accent1"/>
-          </a:effectRef>
-          <a:fontRef idx="minor">
-            <a:schemeClr val="lt1"/>
-          </a:fontRef>
-        </p:style>
-        <p:txBody>
-          <a:bodyPr rtlCol="0" anchor="ctr"/>
-          <a:lstStyle/>
-          <a:p>
-            <a:pPr algn="ctr"/>
-          </a:p>
-        </p:txBody>
-      </p:sp>
-      <p:sp>
-        <p:nvSpPr>
-          <p:cNvPr id="6" name="TextBox 5"/>
-          <p:cNvSpPr txBox="1"/>
-          <p:nvPr/>
-        </p:nvSpPr>
-        <p:spPr>
-          <a:xfrm>
-            <a:off x="457200" y="6355080"/>
-            <a:ext cx="11274552" cy="365760"/>
-          </a:xfrm>
-          <a:prstGeom prst="rect">
-            <a:avLst/>
-          </a:prstGeom>
-          <a:noFill/>
-        </p:spPr>
-        <p:txBody>
-          <a:bodyPr wrap="none">
-            <a:spAutoFit/>
-          </a:bodyPr>
-          <a:lstStyle/>
-          <a:p>
-            <a:pPr algn="r"/>
-            <a:r>
-              <a:rPr sz="1200">
-                <a:solidFill>
-                  <a:srgbClr val="64748B"/>
-                </a:solidFill>
-                <a:latin typeface="Calibri"/>
-              </a:rPr>
-              <a:t>Ngữ văn 11 · Bài 2: Cấu Tứ Và Hình Ảnh Trong Thơ Trữ Tình          22</a:t>
-            </a:r>
-          </a:p>
-        </p:txBody>
-      </p:sp>
-      <p:pic>
-        <p:nvPicPr>
-          <p:cNvPr id="7" name="Picture 6" descr="QR_video_n7mqfl4VM3c.png"/>
-          <p:cNvPicPr>
-            <a:picLocks noChangeAspect="1"/>
-          </p:cNvPicPr>
-          <p:nvPr/>
-        </p:nvPicPr>
-        <p:blipFill>
-          <a:blip r:embed="rId2"/>
-          <a:stretch>
-            <a:fillRect/>
-          </a:stretch>
-        </p:blipFill>
-        <p:spPr>
-          <a:xfrm>
-            <a:off x="8412480" y="1554480"/>
-            <a:ext cx="3108960" cy="3108960"/>
-          </a:xfrm>
-          <a:prstGeom prst="rect">
-            <a:avLst/>
-          </a:prstGeom>
-        </p:spPr>
-      </p:pic>
-      <p:sp>
-        <p:nvSpPr>
-          <p:cNvPr id="8" name="TextBox 7"/>
-          <p:cNvSpPr txBox="1"/>
-          <p:nvPr/>
-        </p:nvSpPr>
-        <p:spPr>
-          <a:xfrm>
-            <a:off x="731520" y="1554480"/>
-            <a:ext cx="7498079" cy="4206240"/>
-          </a:xfrm>
-          <a:prstGeom prst="rect">
-            <a:avLst/>
-          </a:prstGeom>
-          <a:noFill/>
-        </p:spPr>
-        <p:txBody>
-          <a:bodyPr wrap="square" anchor="t" lIns="45720" rIns="45720">
-            <a:spAutoFit/>
-          </a:bodyPr>
-          <a:lstStyle/>
-          <a:p>
-            <a:pPr algn="l">
-              <a:spcAft>
-                <a:spcPts val="800"/>
-              </a:spcAft>
-            </a:pPr>
-            <a:r>
-              <a:rPr sz="2600" b="1">
-                <a:solidFill>
-                  <a:srgbClr val="1E293B"/>
-                </a:solidFill>
-                <a:latin typeface="Calibri"/>
-              </a:rPr>
-              <a:t>🎬 Con đường mùa đông – Pu-skin (đọc thơ)</a:t>
-            </a:r>
-          </a:p>
-          <a:p>
-            <a:pPr algn="l">
-              <a:spcAft>
-                <a:spcPts val="800"/>
-              </a:spcAft>
-            </a:pPr>
-            <a:r>
-              <a:rPr sz="2000">
-                <a:solidFill>
-                  <a:srgbClr val="64748B"/>
-                </a:solidFill>
-                <a:latin typeface="Calibri"/>
-              </a:rPr>
-              <a:t>Kênh: MC Trần Thiện Tùng</a:t>
-            </a:r>
-          </a:p>
-          <a:p>
-            <a:pPr algn="l" marL="365760" indent="-365760">
-              <a:spcAft>
-                <a:spcPts val="800"/>
-              </a:spcAft>
-              <a:buClr>
-                <a:srgbClr val="1E40AF"/>
-              </a:buClr>
-              <a:buFont typeface="Arial"/>
-              <a:buChar char="•"/>
-            </a:pPr>
-            <a:r>
-              <a:rPr sz="2000">
-                <a:solidFill>
-                  <a:srgbClr val="1E293B"/>
-                </a:solidFill>
-                <a:latin typeface="Calibri"/>
-              </a:rPr>
-              <a:t>Đọc diễn cảm Con đường mùa đông</a:t>
-            </a:r>
-          </a:p>
-          <a:p>
-            <a:pPr algn="l">
-              <a:spcAft>
-                <a:spcPts val="800"/>
-              </a:spcAft>
-            </a:pPr>
-            <a:r>
-              <a:rPr sz="1600">
-                <a:solidFill>
-                  <a:srgbClr val="64748B"/>
-                </a:solidFill>
-                <a:latin typeface="Calibri"/>
-                <a:hlinkClick r:id="rId3"/>
-              </a:rPr>
-              <a:t>https://www.youtube.com/watch?v=n7mqfl4VM3c</a:t>
             </a:r>
           </a:p>
         </p:txBody>
@@ -9988,14 +10136,14 @@
         </p:nvSpPr>
         <p:spPr>
           <a:xfrm>
-            <a:off x="10253167" y="457200"/>
-            <a:ext cx="1389888" cy="457200"/>
+            <a:off x="10408615" y="457200"/>
+            <a:ext cx="1234440" cy="457200"/>
           </a:xfrm>
           <a:prstGeom prst="roundRect">
             <a:avLst/>
           </a:prstGeom>
           <a:solidFill>
-            <a:srgbClr val="1E40AF"/>
+            <a:srgbClr val="991B1B"/>
           </a:solidFill>
           <a:ln>
             <a:noFill/>
@@ -10028,7 +10176,7 @@
                 </a:solidFill>
                 <a:latin typeface="Arial"/>
               </a:rPr>
-              <a:t>ĐỀ BÀI</a:t>
+              <a:t>VIDEO</a:t>
             </a:r>
           </a:p>
         </p:txBody>
@@ -10042,7 +10190,7 @@
         <p:spPr>
           <a:xfrm>
             <a:off x="731520" y="274320"/>
-            <a:ext cx="9582912" cy="868680"/>
+            <a:ext cx="9738360" cy="868680"/>
           </a:xfrm>
           <a:prstGeom prst="rect">
             <a:avLst/>
@@ -10062,7 +10210,7 @@
                 </a:solidFill>
                 <a:latin typeface="Arial"/>
               </a:rPr>
-              <a:t>NỖI BUỒN VÀ Ý THỨC VƯỢT QUA</a:t>
+              <a:t>VIDEO THAM KHẢO</a:t>
             </a:r>
           </a:p>
         </p:txBody>
@@ -10146,16 +10294,40 @@
           </a:p>
         </p:txBody>
       </p:sp>
-      <p:sp>
-        <p:nvSpPr>
-          <p:cNvPr id="7" name="TextBox 6"/>
+      <p:pic>
+        <p:nvPicPr>
+          <p:cNvPr id="7" name="Picture 6" descr="QR_video_nV4ovO1sp74.png"/>
+          <p:cNvPicPr>
+            <a:picLocks noChangeAspect="1"/>
+          </p:cNvPicPr>
+          <p:nvPr/>
+        </p:nvPicPr>
+        <p:blipFill>
+          <a:blip r:embed="rId2"/>
+          <a:stretch>
+            <a:fillRect/>
+          </a:stretch>
+        </p:blipFill>
+        <p:spPr>
+          <a:xfrm>
+            <a:off x="8412480" y="1554480"/>
+            <a:ext cx="3108960" cy="3108960"/>
+          </a:xfrm>
+          <a:prstGeom prst="rect">
+            <a:avLst/>
+          </a:prstGeom>
+        </p:spPr>
+      </p:pic>
+      <p:sp>
+        <p:nvSpPr>
+          <p:cNvPr id="8" name="TextBox 7"/>
           <p:cNvSpPr txBox="1"/>
           <p:nvPr/>
         </p:nvSpPr>
         <p:spPr>
           <a:xfrm>
-            <a:off x="731520" y="1463040"/>
-            <a:ext cx="10789920" cy="3566160"/>
+            <a:off x="731520" y="1554480"/>
+            <a:ext cx="7498079" cy="4206240"/>
           </a:xfrm>
           <a:prstGeom prst="rect">
             <a:avLst/>
@@ -10180,94 +10352,61 @@
                 </a:solidFill>
                 <a:latin typeface="Calibri"/>
               </a:rPr>
-              <a:t>Những hình ảnh, âm thanh trong bài thơ diễn tả mâu thuẫn giữa nỗi buồn với ý thức vượt qua trở ngại của nhân vật trữ tình như thế nào?</a:t>
-            </a:r>
-          </a:p>
-        </p:txBody>
-      </p:sp>
-      <p:sp>
-        <p:nvSpPr>
-          <p:cNvPr id="8" name="Rounded Rectangle 7"/>
-          <p:cNvSpPr/>
-          <p:nvPr/>
-        </p:nvSpPr>
-        <p:spPr>
-          <a:xfrm>
-            <a:off x="731520" y="5120640"/>
-            <a:ext cx="10789920" cy="693420"/>
-          </a:xfrm>
-          <a:prstGeom prst="roundRect">
-            <a:avLst>
-              <a:gd name="adj" fmla="val 8000"/>
-            </a:avLst>
-          </a:prstGeom>
-          <a:solidFill>
-            <a:srgbClr val="EFF4FF"/>
-          </a:solidFill>
-          <a:ln w="19050">
-            <a:solidFill>
-              <a:srgbClr val="1E40AF"/>
-            </a:solidFill>
-          </a:ln>
-          <a:effectLst/>
-        </p:spPr>
-        <p:style>
-          <a:lnRef idx="1">
-            <a:schemeClr val="accent1"/>
-          </a:lnRef>
-          <a:fillRef idx="3">
-            <a:schemeClr val="accent1"/>
-          </a:fillRef>
-          <a:effectRef idx="2">
-            <a:schemeClr val="accent1"/>
-          </a:effectRef>
-          <a:fontRef idx="minor">
-            <a:schemeClr val="lt1"/>
-          </a:fontRef>
-        </p:style>
-        <p:txBody>
-          <a:bodyPr rtlCol="0" anchor="ctr"/>
-          <a:lstStyle/>
-          <a:p>
-            <a:pPr algn="ctr"/>
-          </a:p>
-        </p:txBody>
-      </p:sp>
-      <p:sp>
-        <p:nvSpPr>
-          <p:cNvPr id="9" name="TextBox 8"/>
-          <p:cNvSpPr txBox="1"/>
-          <p:nvPr/>
-        </p:nvSpPr>
-        <p:spPr>
-          <a:xfrm>
-            <a:off x="914400" y="5120640"/>
-            <a:ext cx="10424160" cy="693420"/>
-          </a:xfrm>
-          <a:prstGeom prst="rect">
-            <a:avLst/>
-          </a:prstGeom>
-          <a:noFill/>
-        </p:spPr>
-        <p:txBody>
-          <a:bodyPr wrap="square" anchor="ctr" lIns="45720" rIns="45720">
-            <a:spAutoFit/>
-          </a:bodyPr>
-          <a:lstStyle/>
+              <a:t>🎬 Phóng sự quốc tế: Aleksandr Sergeyevich Pushkin – Nhà thơ tình nổi tiếng</a:t>
+            </a:r>
+          </a:p>
           <a:p>
             <a:pPr algn="l">
               <a:spcAft>
-                <a:spcPts val="400"/>
+                <a:spcPts val="800"/>
               </a:spcAft>
             </a:pPr>
             <a:r>
-              <a:rPr sz="2200" b="1">
-                <a:solidFill>
-                  <a:srgbClr val="1E40AF"/>
+              <a:rPr sz="2000">
+                <a:solidFill>
+                  <a:srgbClr val="64748B"/>
                 </a:solidFill>
                 <a:latin typeface="Calibri"/>
               </a:rPr>
-              <a:t>💡 Trăng, cột sọc chỉ đường, tiếng lục lạc, kim đồng hồ…</a:t>
+              <a:t>Kênh: Báo Nhân Dân</a:t>
+            </a:r>
+          </a:p>
+          <a:p>
+            <a:pPr algn="l" marL="365760" indent="-365760">
+              <a:spcAft>
+                <a:spcPts val="800"/>
+              </a:spcAft>
+              <a:buClr>
+                <a:srgbClr val="1E40AF"/>
+              </a:buClr>
+              <a:buFont typeface="Arial"/>
+              <a:buChar char="•"/>
+            </a:pPr>
+            <a:r>
+              <a:rPr sz="2000">
+                <a:solidFill>
+                  <a:srgbClr val="1E293B"/>
+                </a:solidFill>
+                <a:latin typeface="Calibri"/>
+              </a:rPr>
+              <a:t>Tìm hiểu tác giả Pu-skin (Con đường mùa đông)</a:t>
+            </a:r>
+          </a:p>
+          <a:p>
+            <a:pPr algn="l">
+              <a:spcAft>
+                <a:spcPts val="800"/>
+              </a:spcAft>
+            </a:pPr>
+            <a:r>
+              <a:rPr sz="1600">
+                <a:solidFill>
+                  <a:srgbClr val="64748B"/>
+                </a:solidFill>
+                <a:latin typeface="Calibri"/>
+                <a:hlinkClick r:id="rId3"/>
+              </a:rPr>
+              <a:t>https://www.youtube.com/watch?v=nV4ovO1sp74</a:t>
             </a:r>
           </a:p>
         </p:txBody>
@@ -10350,6 +10489,368 @@
         </p:nvSpPr>
         <p:spPr>
           <a:xfrm>
+            <a:off x="10253167" y="457200"/>
+            <a:ext cx="1389888" cy="457200"/>
+          </a:xfrm>
+          <a:prstGeom prst="roundRect">
+            <a:avLst/>
+          </a:prstGeom>
+          <a:solidFill>
+            <a:srgbClr val="1E40AF"/>
+          </a:solidFill>
+          <a:ln>
+            <a:noFill/>
+          </a:ln>
+          <a:effectLst/>
+        </p:spPr>
+        <p:style>
+          <a:lnRef idx="1">
+            <a:schemeClr val="accent1"/>
+          </a:lnRef>
+          <a:fillRef idx="3">
+            <a:schemeClr val="accent1"/>
+          </a:fillRef>
+          <a:effectRef idx="2">
+            <a:schemeClr val="accent1"/>
+          </a:effectRef>
+          <a:fontRef idx="minor">
+            <a:schemeClr val="lt1"/>
+          </a:fontRef>
+        </p:style>
+        <p:txBody>
+          <a:bodyPr rtlCol="0" anchor="ctr" wrap="none" tIns="0" bIns="0"/>
+          <a:lstStyle/>
+          <a:p>
+            <a:pPr algn="ctr"/>
+            <a:r>
+              <a:rPr sz="1400" b="1">
+                <a:solidFill>
+                  <a:srgbClr val="FFFFFF"/>
+                </a:solidFill>
+                <a:latin typeface="Arial"/>
+              </a:rPr>
+              <a:t>ĐỀ BÀI</a:t>
+            </a:r>
+          </a:p>
+        </p:txBody>
+      </p:sp>
+      <p:sp>
+        <p:nvSpPr>
+          <p:cNvPr id="4" name="TextBox 3"/>
+          <p:cNvSpPr txBox="1"/>
+          <p:nvPr/>
+        </p:nvSpPr>
+        <p:spPr>
+          <a:xfrm>
+            <a:off x="731520" y="274320"/>
+            <a:ext cx="9582912" cy="868680"/>
+          </a:xfrm>
+          <a:prstGeom prst="rect">
+            <a:avLst/>
+          </a:prstGeom>
+          <a:noFill/>
+        </p:spPr>
+        <p:txBody>
+          <a:bodyPr wrap="square" anchor="ctr">
+            <a:spAutoFit/>
+          </a:bodyPr>
+          <a:lstStyle/>
+          <a:p>
+            <a:r>
+              <a:rPr sz="3600" b="1">
+                <a:solidFill>
+                  <a:srgbClr val="1E40AF"/>
+                </a:solidFill>
+                <a:latin typeface="Arial"/>
+              </a:rPr>
+              <a:t>NỖI BUỒN VÀ Ý THỨC VƯỢT QUA</a:t>
+            </a:r>
+          </a:p>
+        </p:txBody>
+      </p:sp>
+      <p:sp>
+        <p:nvSpPr>
+          <p:cNvPr id="5" name="Rectangle 4"/>
+          <p:cNvSpPr/>
+          <p:nvPr/>
+        </p:nvSpPr>
+        <p:spPr>
+          <a:xfrm>
+            <a:off x="457200" y="1207008"/>
+            <a:ext cx="11274552" cy="22000"/>
+          </a:xfrm>
+          <a:prstGeom prst="rect">
+            <a:avLst/>
+          </a:prstGeom>
+          <a:solidFill>
+            <a:srgbClr val="E2E8F0"/>
+          </a:solidFill>
+          <a:ln>
+            <a:noFill/>
+          </a:ln>
+          <a:effectLst/>
+        </p:spPr>
+        <p:style>
+          <a:lnRef idx="1">
+            <a:schemeClr val="accent1"/>
+          </a:lnRef>
+          <a:fillRef idx="3">
+            <a:schemeClr val="accent1"/>
+          </a:fillRef>
+          <a:effectRef idx="2">
+            <a:schemeClr val="accent1"/>
+          </a:effectRef>
+          <a:fontRef idx="minor">
+            <a:schemeClr val="lt1"/>
+          </a:fontRef>
+        </p:style>
+        <p:txBody>
+          <a:bodyPr rtlCol="0" anchor="ctr"/>
+          <a:lstStyle/>
+          <a:p>
+            <a:pPr algn="ctr"/>
+          </a:p>
+        </p:txBody>
+      </p:sp>
+      <p:sp>
+        <p:nvSpPr>
+          <p:cNvPr id="6" name="TextBox 5"/>
+          <p:cNvSpPr txBox="1"/>
+          <p:nvPr/>
+        </p:nvSpPr>
+        <p:spPr>
+          <a:xfrm>
+            <a:off x="457200" y="6355080"/>
+            <a:ext cx="11274552" cy="365760"/>
+          </a:xfrm>
+          <a:prstGeom prst="rect">
+            <a:avLst/>
+          </a:prstGeom>
+          <a:noFill/>
+        </p:spPr>
+        <p:txBody>
+          <a:bodyPr wrap="none">
+            <a:spAutoFit/>
+          </a:bodyPr>
+          <a:lstStyle/>
+          <a:p>
+            <a:pPr algn="r"/>
+            <a:r>
+              <a:rPr sz="1200">
+                <a:solidFill>
+                  <a:srgbClr val="64748B"/>
+                </a:solidFill>
+                <a:latin typeface="Calibri"/>
+              </a:rPr>
+              <a:t>Ngữ văn 11 · Bài 2: Cấu Tứ Và Hình Ảnh Trong Thơ Trữ Tình          24</a:t>
+            </a:r>
+          </a:p>
+        </p:txBody>
+      </p:sp>
+      <p:sp>
+        <p:nvSpPr>
+          <p:cNvPr id="7" name="TextBox 6"/>
+          <p:cNvSpPr txBox="1"/>
+          <p:nvPr/>
+        </p:nvSpPr>
+        <p:spPr>
+          <a:xfrm>
+            <a:off x="731520" y="1463040"/>
+            <a:ext cx="10789920" cy="3566160"/>
+          </a:xfrm>
+          <a:prstGeom prst="rect">
+            <a:avLst/>
+          </a:prstGeom>
+          <a:noFill/>
+        </p:spPr>
+        <p:txBody>
+          <a:bodyPr wrap="square" anchor="t" lIns="45720" rIns="45720">
+            <a:spAutoFit/>
+          </a:bodyPr>
+          <a:lstStyle/>
+          <a:p>
+            <a:pPr algn="l">
+              <a:spcAft>
+                <a:spcPts val="800"/>
+              </a:spcAft>
+            </a:pPr>
+            <a:r>
+              <a:rPr sz="2600" b="1">
+                <a:solidFill>
+                  <a:srgbClr val="1E293B"/>
+                </a:solidFill>
+                <a:latin typeface="Calibri"/>
+              </a:rPr>
+              <a:t>Những hình ảnh, âm thanh trong bài thơ diễn tả mâu thuẫn giữa nỗi buồn với ý thức vượt qua trở ngại của nhân vật trữ tình như thế nào?</a:t>
+            </a:r>
+          </a:p>
+        </p:txBody>
+      </p:sp>
+      <p:sp>
+        <p:nvSpPr>
+          <p:cNvPr id="8" name="Rounded Rectangle 7"/>
+          <p:cNvSpPr/>
+          <p:nvPr/>
+        </p:nvSpPr>
+        <p:spPr>
+          <a:xfrm>
+            <a:off x="731520" y="5120640"/>
+            <a:ext cx="10789920" cy="693420"/>
+          </a:xfrm>
+          <a:prstGeom prst="roundRect">
+            <a:avLst>
+              <a:gd name="adj" fmla="val 8000"/>
+            </a:avLst>
+          </a:prstGeom>
+          <a:solidFill>
+            <a:srgbClr val="EFF4FF"/>
+          </a:solidFill>
+          <a:ln w="19050">
+            <a:solidFill>
+              <a:srgbClr val="1E40AF"/>
+            </a:solidFill>
+          </a:ln>
+          <a:effectLst/>
+        </p:spPr>
+        <p:style>
+          <a:lnRef idx="1">
+            <a:schemeClr val="accent1"/>
+          </a:lnRef>
+          <a:fillRef idx="3">
+            <a:schemeClr val="accent1"/>
+          </a:fillRef>
+          <a:effectRef idx="2">
+            <a:schemeClr val="accent1"/>
+          </a:effectRef>
+          <a:fontRef idx="minor">
+            <a:schemeClr val="lt1"/>
+          </a:fontRef>
+        </p:style>
+        <p:txBody>
+          <a:bodyPr rtlCol="0" anchor="ctr"/>
+          <a:lstStyle/>
+          <a:p>
+            <a:pPr algn="ctr"/>
+          </a:p>
+        </p:txBody>
+      </p:sp>
+      <p:sp>
+        <p:nvSpPr>
+          <p:cNvPr id="9" name="TextBox 8"/>
+          <p:cNvSpPr txBox="1"/>
+          <p:nvPr/>
+        </p:nvSpPr>
+        <p:spPr>
+          <a:xfrm>
+            <a:off x="914400" y="5120640"/>
+            <a:ext cx="10424160" cy="693420"/>
+          </a:xfrm>
+          <a:prstGeom prst="rect">
+            <a:avLst/>
+          </a:prstGeom>
+          <a:noFill/>
+        </p:spPr>
+        <p:txBody>
+          <a:bodyPr wrap="square" anchor="ctr" lIns="45720" rIns="45720">
+            <a:spAutoFit/>
+          </a:bodyPr>
+          <a:lstStyle/>
+          <a:p>
+            <a:pPr algn="l">
+              <a:spcAft>
+                <a:spcPts val="400"/>
+              </a:spcAft>
+            </a:pPr>
+            <a:r>
+              <a:rPr sz="2200" b="1">
+                <a:solidFill>
+                  <a:srgbClr val="1E40AF"/>
+                </a:solidFill>
+                <a:latin typeface="Calibri"/>
+              </a:rPr>
+              <a:t>💡 Trăng, cột sọc chỉ đường, tiếng lục lạc, kim đồng hồ…</a:t>
+            </a:r>
+          </a:p>
+        </p:txBody>
+      </p:sp>
+    </p:spTree>
+  </p:cSld>
+  <p:clrMapOvr>
+    <a:masterClrMapping/>
+  </p:clrMapOvr>
+</p:sld>
+</file>
+
+<file path=ppt/slides/slide25.xml><?xml version="1.0" encoding="utf-8"?>
+<p:sld xmlns:a="http://schemas.openxmlformats.org/drawingml/2006/main" xmlns:p="http://schemas.openxmlformats.org/presentationml/2006/main" xmlns:r="http://schemas.openxmlformats.org/officeDocument/2006/relationships">
+  <p:cSld>
+    <p:bg>
+      <p:bgPr>
+        <a:solidFill>
+          <a:srgbClr val="FFFFFF"/>
+        </a:solidFill>
+        <a:effectLst/>
+      </p:bgPr>
+    </p:bg>
+    <p:spTree>
+      <p:nvGrpSpPr>
+        <p:cNvPr id="1" name=""/>
+        <p:cNvGrpSpPr/>
+        <p:nvPr/>
+      </p:nvGrpSpPr>
+      <p:grpSpPr/>
+      <p:sp>
+        <p:nvSpPr>
+          <p:cNvPr id="2" name="Rectangle 1"/>
+          <p:cNvSpPr/>
+          <p:nvPr/>
+        </p:nvSpPr>
+        <p:spPr>
+          <a:xfrm>
+            <a:off x="457200" y="384048"/>
+            <a:ext cx="109728" cy="658368"/>
+          </a:xfrm>
+          <a:prstGeom prst="rect">
+            <a:avLst/>
+          </a:prstGeom>
+          <a:solidFill>
+            <a:srgbClr val="1E40AF"/>
+          </a:solidFill>
+          <a:ln>
+            <a:noFill/>
+          </a:ln>
+          <a:effectLst/>
+        </p:spPr>
+        <p:style>
+          <a:lnRef idx="1">
+            <a:schemeClr val="accent1"/>
+          </a:lnRef>
+          <a:fillRef idx="3">
+            <a:schemeClr val="accent1"/>
+          </a:fillRef>
+          <a:effectRef idx="2">
+            <a:schemeClr val="accent1"/>
+          </a:effectRef>
+          <a:fontRef idx="minor">
+            <a:schemeClr val="lt1"/>
+          </a:fontRef>
+        </p:style>
+        <p:txBody>
+          <a:bodyPr rtlCol="0" anchor="ctr"/>
+          <a:lstStyle/>
+          <a:p>
+            <a:pPr algn="ctr"/>
+          </a:p>
+        </p:txBody>
+      </p:sp>
+      <p:sp>
+        <p:nvSpPr>
+          <p:cNvPr id="3" name="Rounded Rectangle 2"/>
+          <p:cNvSpPr/>
+          <p:nvPr/>
+        </p:nvSpPr>
+        <p:spPr>
+          <a:xfrm>
             <a:off x="9942271" y="457200"/>
             <a:ext cx="1700784" cy="457200"/>
           </a:xfrm>
@@ -10503,7 +11004,7 @@
                 </a:solidFill>
                 <a:latin typeface="Calibri"/>
               </a:rPr>
-              <a:t>Ngữ văn 11 · Bài 2: Cấu Tứ Và Hình Ảnh Trong Thơ Trữ Tình          24</a:t>
+              <a:t>Ngữ văn 11 · Bài 2: Cấu Tứ Và Hình Ảnh Trong Thơ Trữ Tình          25</a:t>
             </a:r>
           </a:p>
         </p:txBody>
@@ -10689,7 +11190,7 @@
 </p:sld>
 </file>
 
-<file path=ppt/slides/slide25.xml><?xml version="1.0" encoding="utf-8"?>
+<file path=ppt/slides/slide26.xml><?xml version="1.0" encoding="utf-8"?>
 <p:sld xmlns:a="http://schemas.openxmlformats.org/drawingml/2006/main" xmlns:p="http://schemas.openxmlformats.org/presentationml/2006/main" xmlns:r="http://schemas.openxmlformats.org/officeDocument/2006/relationships">
   <p:cSld>
     <p:bg>
@@ -10786,368 +11287,6 @@
                 <a:latin typeface="Calibri"/>
               </a:rPr>
               <a:t>TIẾT 19: THỰC HÀNH TIẾNG VIỆT</a:t>
-            </a:r>
-          </a:p>
-        </p:txBody>
-      </p:sp>
-    </p:spTree>
-  </p:cSld>
-  <p:clrMapOvr>
-    <a:masterClrMapping/>
-  </p:clrMapOvr>
-</p:sld>
-</file>
-
-<file path=ppt/slides/slide26.xml><?xml version="1.0" encoding="utf-8"?>
-<p:sld xmlns:a="http://schemas.openxmlformats.org/drawingml/2006/main" xmlns:p="http://schemas.openxmlformats.org/presentationml/2006/main" xmlns:r="http://schemas.openxmlformats.org/officeDocument/2006/relationships">
-  <p:cSld>
-    <p:bg>
-      <p:bgPr>
-        <a:solidFill>
-          <a:srgbClr val="FFFFFF"/>
-        </a:solidFill>
-        <a:effectLst/>
-      </p:bgPr>
-    </p:bg>
-    <p:spTree>
-      <p:nvGrpSpPr>
-        <p:cNvPr id="1" name=""/>
-        <p:cNvGrpSpPr/>
-        <p:nvPr/>
-      </p:nvGrpSpPr>
-      <p:grpSpPr/>
-      <p:sp>
-        <p:nvSpPr>
-          <p:cNvPr id="2" name="Rectangle 1"/>
-          <p:cNvSpPr/>
-          <p:nvPr/>
-        </p:nvSpPr>
-        <p:spPr>
-          <a:xfrm>
-            <a:off x="457200" y="384048"/>
-            <a:ext cx="109728" cy="658368"/>
-          </a:xfrm>
-          <a:prstGeom prst="rect">
-            <a:avLst/>
-          </a:prstGeom>
-          <a:solidFill>
-            <a:srgbClr val="1E40AF"/>
-          </a:solidFill>
-          <a:ln>
-            <a:noFill/>
-          </a:ln>
-          <a:effectLst/>
-        </p:spPr>
-        <p:style>
-          <a:lnRef idx="1">
-            <a:schemeClr val="accent1"/>
-          </a:lnRef>
-          <a:fillRef idx="3">
-            <a:schemeClr val="accent1"/>
-          </a:fillRef>
-          <a:effectRef idx="2">
-            <a:schemeClr val="accent1"/>
-          </a:effectRef>
-          <a:fontRef idx="minor">
-            <a:schemeClr val="lt1"/>
-          </a:fontRef>
-        </p:style>
-        <p:txBody>
-          <a:bodyPr rtlCol="0" anchor="ctr"/>
-          <a:lstStyle/>
-          <a:p>
-            <a:pPr algn="ctr"/>
-          </a:p>
-        </p:txBody>
-      </p:sp>
-      <p:sp>
-        <p:nvSpPr>
-          <p:cNvPr id="3" name="Rounded Rectangle 2"/>
-          <p:cNvSpPr/>
-          <p:nvPr/>
-        </p:nvSpPr>
-        <p:spPr>
-          <a:xfrm>
-            <a:off x="10253167" y="457200"/>
-            <a:ext cx="1389888" cy="457200"/>
-          </a:xfrm>
-          <a:prstGeom prst="roundRect">
-            <a:avLst/>
-          </a:prstGeom>
-          <a:solidFill>
-            <a:srgbClr val="1E40AF"/>
-          </a:solidFill>
-          <a:ln>
-            <a:noFill/>
-          </a:ln>
-          <a:effectLst/>
-        </p:spPr>
-        <p:style>
-          <a:lnRef idx="1">
-            <a:schemeClr val="accent1"/>
-          </a:lnRef>
-          <a:fillRef idx="3">
-            <a:schemeClr val="accent1"/>
-          </a:fillRef>
-          <a:effectRef idx="2">
-            <a:schemeClr val="accent1"/>
-          </a:effectRef>
-          <a:fontRef idx="minor">
-            <a:schemeClr val="lt1"/>
-          </a:fontRef>
-        </p:style>
-        <p:txBody>
-          <a:bodyPr rtlCol="0" anchor="ctr" wrap="none" tIns="0" bIns="0"/>
-          <a:lstStyle/>
-          <a:p>
-            <a:pPr algn="ctr"/>
-            <a:r>
-              <a:rPr sz="1400" b="1">
-                <a:solidFill>
-                  <a:srgbClr val="FFFFFF"/>
-                </a:solidFill>
-                <a:latin typeface="Arial"/>
-              </a:rPr>
-              <a:t>ĐỀ BÀI</a:t>
-            </a:r>
-          </a:p>
-        </p:txBody>
-      </p:sp>
-      <p:sp>
-        <p:nvSpPr>
-          <p:cNvPr id="4" name="TextBox 3"/>
-          <p:cNvSpPr txBox="1"/>
-          <p:nvPr/>
-        </p:nvSpPr>
-        <p:spPr>
-          <a:xfrm>
-            <a:off x="731520" y="274320"/>
-            <a:ext cx="9582912" cy="868680"/>
-          </a:xfrm>
-          <a:prstGeom prst="rect">
-            <a:avLst/>
-          </a:prstGeom>
-          <a:noFill/>
-        </p:spPr>
-        <p:txBody>
-          <a:bodyPr wrap="square" anchor="ctr">
-            <a:spAutoFit/>
-          </a:bodyPr>
-          <a:lstStyle/>
-          <a:p>
-            <a:r>
-              <a:rPr sz="3600" b="1">
-                <a:solidFill>
-                  <a:srgbClr val="1E40AF"/>
-                </a:solidFill>
-                <a:latin typeface="Arial"/>
-              </a:rPr>
-              <a:t>PHÁ VỠ QUY TẮC NGÔN NGỮ</a:t>
-            </a:r>
-          </a:p>
-        </p:txBody>
-      </p:sp>
-      <p:sp>
-        <p:nvSpPr>
-          <p:cNvPr id="5" name="Rectangle 4"/>
-          <p:cNvSpPr/>
-          <p:nvPr/>
-        </p:nvSpPr>
-        <p:spPr>
-          <a:xfrm>
-            <a:off x="457200" y="1207008"/>
-            <a:ext cx="11274552" cy="22000"/>
-          </a:xfrm>
-          <a:prstGeom prst="rect">
-            <a:avLst/>
-          </a:prstGeom>
-          <a:solidFill>
-            <a:srgbClr val="E2E8F0"/>
-          </a:solidFill>
-          <a:ln>
-            <a:noFill/>
-          </a:ln>
-          <a:effectLst/>
-        </p:spPr>
-        <p:style>
-          <a:lnRef idx="1">
-            <a:schemeClr val="accent1"/>
-          </a:lnRef>
-          <a:fillRef idx="3">
-            <a:schemeClr val="accent1"/>
-          </a:fillRef>
-          <a:effectRef idx="2">
-            <a:schemeClr val="accent1"/>
-          </a:effectRef>
-          <a:fontRef idx="minor">
-            <a:schemeClr val="lt1"/>
-          </a:fontRef>
-        </p:style>
-        <p:txBody>
-          <a:bodyPr rtlCol="0" anchor="ctr"/>
-          <a:lstStyle/>
-          <a:p>
-            <a:pPr algn="ctr"/>
-          </a:p>
-        </p:txBody>
-      </p:sp>
-      <p:sp>
-        <p:nvSpPr>
-          <p:cNvPr id="6" name="TextBox 5"/>
-          <p:cNvSpPr txBox="1"/>
-          <p:nvPr/>
-        </p:nvSpPr>
-        <p:spPr>
-          <a:xfrm>
-            <a:off x="457200" y="6355080"/>
-            <a:ext cx="11274552" cy="365760"/>
-          </a:xfrm>
-          <a:prstGeom prst="rect">
-            <a:avLst/>
-          </a:prstGeom>
-          <a:noFill/>
-        </p:spPr>
-        <p:txBody>
-          <a:bodyPr wrap="none">
-            <a:spAutoFit/>
-          </a:bodyPr>
-          <a:lstStyle/>
-          <a:p>
-            <a:pPr algn="r"/>
-            <a:r>
-              <a:rPr sz="1200">
-                <a:solidFill>
-                  <a:srgbClr val="64748B"/>
-                </a:solidFill>
-                <a:latin typeface="Calibri"/>
-              </a:rPr>
-              <a:t>Ngữ văn 11 · Bài 2: Cấu Tứ Và Hình Ảnh Trong Thơ Trữ Tình          26</a:t>
-            </a:r>
-          </a:p>
-        </p:txBody>
-      </p:sp>
-      <p:sp>
-        <p:nvSpPr>
-          <p:cNvPr id="7" name="TextBox 6"/>
-          <p:cNvSpPr txBox="1"/>
-          <p:nvPr/>
-        </p:nvSpPr>
-        <p:spPr>
-          <a:xfrm>
-            <a:off x="731520" y="1463040"/>
-            <a:ext cx="10789920" cy="3566160"/>
-          </a:xfrm>
-          <a:prstGeom prst="rect">
-            <a:avLst/>
-          </a:prstGeom>
-          <a:noFill/>
-        </p:spPr>
-        <p:txBody>
-          <a:bodyPr wrap="square" anchor="t" lIns="45720" rIns="45720">
-            <a:spAutoFit/>
-          </a:bodyPr>
-          <a:lstStyle/>
-          <a:p>
-            <a:pPr algn="l">
-              <a:spcAft>
-                <a:spcPts val="800"/>
-              </a:spcAft>
-            </a:pPr>
-            <a:r>
-              <a:rPr sz="2600" b="1">
-                <a:solidFill>
-                  <a:srgbClr val="1E293B"/>
-                </a:solidFill>
-                <a:latin typeface="Calibri"/>
-              </a:rPr>
-              <a:t>Chỉ ra nét độc đáo trong kết hợp từ “buồn điệp điệp” và cụm từ “sâu chót vót” trong Tràng giang.</a:t>
-            </a:r>
-          </a:p>
-        </p:txBody>
-      </p:sp>
-      <p:sp>
-        <p:nvSpPr>
-          <p:cNvPr id="8" name="Rounded Rectangle 7"/>
-          <p:cNvSpPr/>
-          <p:nvPr/>
-        </p:nvSpPr>
-        <p:spPr>
-          <a:xfrm>
-            <a:off x="731520" y="5120640"/>
-            <a:ext cx="10789920" cy="693420"/>
-          </a:xfrm>
-          <a:prstGeom prst="roundRect">
-            <a:avLst>
-              <a:gd name="adj" fmla="val 8000"/>
-            </a:avLst>
-          </a:prstGeom>
-          <a:solidFill>
-            <a:srgbClr val="EFF4FF"/>
-          </a:solidFill>
-          <a:ln w="19050">
-            <a:solidFill>
-              <a:srgbClr val="1E40AF"/>
-            </a:solidFill>
-          </a:ln>
-          <a:effectLst/>
-        </p:spPr>
-        <p:style>
-          <a:lnRef idx="1">
-            <a:schemeClr val="accent1"/>
-          </a:lnRef>
-          <a:fillRef idx="3">
-            <a:schemeClr val="accent1"/>
-          </a:fillRef>
-          <a:effectRef idx="2">
-            <a:schemeClr val="accent1"/>
-          </a:effectRef>
-          <a:fontRef idx="minor">
-            <a:schemeClr val="lt1"/>
-          </a:fontRef>
-        </p:style>
-        <p:txBody>
-          <a:bodyPr rtlCol="0" anchor="ctr"/>
-          <a:lstStyle/>
-          <a:p>
-            <a:pPr algn="ctr"/>
-          </a:p>
-        </p:txBody>
-      </p:sp>
-      <p:sp>
-        <p:nvSpPr>
-          <p:cNvPr id="9" name="TextBox 8"/>
-          <p:cNvSpPr txBox="1"/>
-          <p:nvPr/>
-        </p:nvSpPr>
-        <p:spPr>
-          <a:xfrm>
-            <a:off x="914400" y="5120640"/>
-            <a:ext cx="10424160" cy="693420"/>
-          </a:xfrm>
-          <a:prstGeom prst="rect">
-            <a:avLst/>
-          </a:prstGeom>
-          <a:noFill/>
-        </p:spPr>
-        <p:txBody>
-          <a:bodyPr wrap="square" anchor="ctr" lIns="45720" rIns="45720">
-            <a:spAutoFit/>
-          </a:bodyPr>
-          <a:lstStyle/>
-          <a:p>
-            <a:pPr algn="l">
-              <a:spcAft>
-                <a:spcPts val="400"/>
-              </a:spcAft>
-            </a:pPr>
-            <a:r>
-              <a:rPr sz="2200" b="1">
-                <a:solidFill>
-                  <a:srgbClr val="1E40AF"/>
-                </a:solidFill>
-                <a:latin typeface="Calibri"/>
-              </a:rPr>
-              <a:t>💡 Thông thường “điệp điệp”, “chót vót” đi với từ nào?</a:t>
             </a:r>
           </a:p>
         </p:txBody>
@@ -11230,6 +11369,368 @@
         </p:nvSpPr>
         <p:spPr>
           <a:xfrm>
+            <a:off x="10253167" y="457200"/>
+            <a:ext cx="1389888" cy="457200"/>
+          </a:xfrm>
+          <a:prstGeom prst="roundRect">
+            <a:avLst/>
+          </a:prstGeom>
+          <a:solidFill>
+            <a:srgbClr val="1E40AF"/>
+          </a:solidFill>
+          <a:ln>
+            <a:noFill/>
+          </a:ln>
+          <a:effectLst/>
+        </p:spPr>
+        <p:style>
+          <a:lnRef idx="1">
+            <a:schemeClr val="accent1"/>
+          </a:lnRef>
+          <a:fillRef idx="3">
+            <a:schemeClr val="accent1"/>
+          </a:fillRef>
+          <a:effectRef idx="2">
+            <a:schemeClr val="accent1"/>
+          </a:effectRef>
+          <a:fontRef idx="minor">
+            <a:schemeClr val="lt1"/>
+          </a:fontRef>
+        </p:style>
+        <p:txBody>
+          <a:bodyPr rtlCol="0" anchor="ctr" wrap="none" tIns="0" bIns="0"/>
+          <a:lstStyle/>
+          <a:p>
+            <a:pPr algn="ctr"/>
+            <a:r>
+              <a:rPr sz="1400" b="1">
+                <a:solidFill>
+                  <a:srgbClr val="FFFFFF"/>
+                </a:solidFill>
+                <a:latin typeface="Arial"/>
+              </a:rPr>
+              <a:t>ĐỀ BÀI</a:t>
+            </a:r>
+          </a:p>
+        </p:txBody>
+      </p:sp>
+      <p:sp>
+        <p:nvSpPr>
+          <p:cNvPr id="4" name="TextBox 3"/>
+          <p:cNvSpPr txBox="1"/>
+          <p:nvPr/>
+        </p:nvSpPr>
+        <p:spPr>
+          <a:xfrm>
+            <a:off x="731520" y="274320"/>
+            <a:ext cx="9582912" cy="868680"/>
+          </a:xfrm>
+          <a:prstGeom prst="rect">
+            <a:avLst/>
+          </a:prstGeom>
+          <a:noFill/>
+        </p:spPr>
+        <p:txBody>
+          <a:bodyPr wrap="square" anchor="ctr">
+            <a:spAutoFit/>
+          </a:bodyPr>
+          <a:lstStyle/>
+          <a:p>
+            <a:r>
+              <a:rPr sz="3600" b="1">
+                <a:solidFill>
+                  <a:srgbClr val="1E40AF"/>
+                </a:solidFill>
+                <a:latin typeface="Arial"/>
+              </a:rPr>
+              <a:t>PHÁ VỠ QUY TẮC NGÔN NGỮ</a:t>
+            </a:r>
+          </a:p>
+        </p:txBody>
+      </p:sp>
+      <p:sp>
+        <p:nvSpPr>
+          <p:cNvPr id="5" name="Rectangle 4"/>
+          <p:cNvSpPr/>
+          <p:nvPr/>
+        </p:nvSpPr>
+        <p:spPr>
+          <a:xfrm>
+            <a:off x="457200" y="1207008"/>
+            <a:ext cx="11274552" cy="22000"/>
+          </a:xfrm>
+          <a:prstGeom prst="rect">
+            <a:avLst/>
+          </a:prstGeom>
+          <a:solidFill>
+            <a:srgbClr val="E2E8F0"/>
+          </a:solidFill>
+          <a:ln>
+            <a:noFill/>
+          </a:ln>
+          <a:effectLst/>
+        </p:spPr>
+        <p:style>
+          <a:lnRef idx="1">
+            <a:schemeClr val="accent1"/>
+          </a:lnRef>
+          <a:fillRef idx="3">
+            <a:schemeClr val="accent1"/>
+          </a:fillRef>
+          <a:effectRef idx="2">
+            <a:schemeClr val="accent1"/>
+          </a:effectRef>
+          <a:fontRef idx="minor">
+            <a:schemeClr val="lt1"/>
+          </a:fontRef>
+        </p:style>
+        <p:txBody>
+          <a:bodyPr rtlCol="0" anchor="ctr"/>
+          <a:lstStyle/>
+          <a:p>
+            <a:pPr algn="ctr"/>
+          </a:p>
+        </p:txBody>
+      </p:sp>
+      <p:sp>
+        <p:nvSpPr>
+          <p:cNvPr id="6" name="TextBox 5"/>
+          <p:cNvSpPr txBox="1"/>
+          <p:nvPr/>
+        </p:nvSpPr>
+        <p:spPr>
+          <a:xfrm>
+            <a:off x="457200" y="6355080"/>
+            <a:ext cx="11274552" cy="365760"/>
+          </a:xfrm>
+          <a:prstGeom prst="rect">
+            <a:avLst/>
+          </a:prstGeom>
+          <a:noFill/>
+        </p:spPr>
+        <p:txBody>
+          <a:bodyPr wrap="none">
+            <a:spAutoFit/>
+          </a:bodyPr>
+          <a:lstStyle/>
+          <a:p>
+            <a:pPr algn="r"/>
+            <a:r>
+              <a:rPr sz="1200">
+                <a:solidFill>
+                  <a:srgbClr val="64748B"/>
+                </a:solidFill>
+                <a:latin typeface="Calibri"/>
+              </a:rPr>
+              <a:t>Ngữ văn 11 · Bài 2: Cấu Tứ Và Hình Ảnh Trong Thơ Trữ Tình          27</a:t>
+            </a:r>
+          </a:p>
+        </p:txBody>
+      </p:sp>
+      <p:sp>
+        <p:nvSpPr>
+          <p:cNvPr id="7" name="TextBox 6"/>
+          <p:cNvSpPr txBox="1"/>
+          <p:nvPr/>
+        </p:nvSpPr>
+        <p:spPr>
+          <a:xfrm>
+            <a:off x="731520" y="1463040"/>
+            <a:ext cx="10789920" cy="3566160"/>
+          </a:xfrm>
+          <a:prstGeom prst="rect">
+            <a:avLst/>
+          </a:prstGeom>
+          <a:noFill/>
+        </p:spPr>
+        <p:txBody>
+          <a:bodyPr wrap="square" anchor="t" lIns="45720" rIns="45720">
+            <a:spAutoFit/>
+          </a:bodyPr>
+          <a:lstStyle/>
+          <a:p>
+            <a:pPr algn="l">
+              <a:spcAft>
+                <a:spcPts val="800"/>
+              </a:spcAft>
+            </a:pPr>
+            <a:r>
+              <a:rPr sz="2600" b="1">
+                <a:solidFill>
+                  <a:srgbClr val="1E293B"/>
+                </a:solidFill>
+                <a:latin typeface="Calibri"/>
+              </a:rPr>
+              <a:t>Chỉ ra nét độc đáo trong kết hợp từ “buồn điệp điệp” và cụm từ “sâu chót vót” trong Tràng giang.</a:t>
+            </a:r>
+          </a:p>
+        </p:txBody>
+      </p:sp>
+      <p:sp>
+        <p:nvSpPr>
+          <p:cNvPr id="8" name="Rounded Rectangle 7"/>
+          <p:cNvSpPr/>
+          <p:nvPr/>
+        </p:nvSpPr>
+        <p:spPr>
+          <a:xfrm>
+            <a:off x="731520" y="5120640"/>
+            <a:ext cx="10789920" cy="693420"/>
+          </a:xfrm>
+          <a:prstGeom prst="roundRect">
+            <a:avLst>
+              <a:gd name="adj" fmla="val 8000"/>
+            </a:avLst>
+          </a:prstGeom>
+          <a:solidFill>
+            <a:srgbClr val="EFF4FF"/>
+          </a:solidFill>
+          <a:ln w="19050">
+            <a:solidFill>
+              <a:srgbClr val="1E40AF"/>
+            </a:solidFill>
+          </a:ln>
+          <a:effectLst/>
+        </p:spPr>
+        <p:style>
+          <a:lnRef idx="1">
+            <a:schemeClr val="accent1"/>
+          </a:lnRef>
+          <a:fillRef idx="3">
+            <a:schemeClr val="accent1"/>
+          </a:fillRef>
+          <a:effectRef idx="2">
+            <a:schemeClr val="accent1"/>
+          </a:effectRef>
+          <a:fontRef idx="minor">
+            <a:schemeClr val="lt1"/>
+          </a:fontRef>
+        </p:style>
+        <p:txBody>
+          <a:bodyPr rtlCol="0" anchor="ctr"/>
+          <a:lstStyle/>
+          <a:p>
+            <a:pPr algn="ctr"/>
+          </a:p>
+        </p:txBody>
+      </p:sp>
+      <p:sp>
+        <p:nvSpPr>
+          <p:cNvPr id="9" name="TextBox 8"/>
+          <p:cNvSpPr txBox="1"/>
+          <p:nvPr/>
+        </p:nvSpPr>
+        <p:spPr>
+          <a:xfrm>
+            <a:off x="914400" y="5120640"/>
+            <a:ext cx="10424160" cy="693420"/>
+          </a:xfrm>
+          <a:prstGeom prst="rect">
+            <a:avLst/>
+          </a:prstGeom>
+          <a:noFill/>
+        </p:spPr>
+        <p:txBody>
+          <a:bodyPr wrap="square" anchor="ctr" lIns="45720" rIns="45720">
+            <a:spAutoFit/>
+          </a:bodyPr>
+          <a:lstStyle/>
+          <a:p>
+            <a:pPr algn="l">
+              <a:spcAft>
+                <a:spcPts val="400"/>
+              </a:spcAft>
+            </a:pPr>
+            <a:r>
+              <a:rPr sz="2200" b="1">
+                <a:solidFill>
+                  <a:srgbClr val="1E40AF"/>
+                </a:solidFill>
+                <a:latin typeface="Calibri"/>
+              </a:rPr>
+              <a:t>💡 Thông thường “điệp điệp”, “chót vót” đi với từ nào?</a:t>
+            </a:r>
+          </a:p>
+        </p:txBody>
+      </p:sp>
+    </p:spTree>
+  </p:cSld>
+  <p:clrMapOvr>
+    <a:masterClrMapping/>
+  </p:clrMapOvr>
+</p:sld>
+</file>
+
+<file path=ppt/slides/slide28.xml><?xml version="1.0" encoding="utf-8"?>
+<p:sld xmlns:a="http://schemas.openxmlformats.org/drawingml/2006/main" xmlns:p="http://schemas.openxmlformats.org/presentationml/2006/main" xmlns:r="http://schemas.openxmlformats.org/officeDocument/2006/relationships">
+  <p:cSld>
+    <p:bg>
+      <p:bgPr>
+        <a:solidFill>
+          <a:srgbClr val="FFFFFF"/>
+        </a:solidFill>
+        <a:effectLst/>
+      </p:bgPr>
+    </p:bg>
+    <p:spTree>
+      <p:nvGrpSpPr>
+        <p:cNvPr id="1" name=""/>
+        <p:cNvGrpSpPr/>
+        <p:nvPr/>
+      </p:nvGrpSpPr>
+      <p:grpSpPr/>
+      <p:sp>
+        <p:nvSpPr>
+          <p:cNvPr id="2" name="Rectangle 1"/>
+          <p:cNvSpPr/>
+          <p:nvPr/>
+        </p:nvSpPr>
+        <p:spPr>
+          <a:xfrm>
+            <a:off x="457200" y="384048"/>
+            <a:ext cx="109728" cy="658368"/>
+          </a:xfrm>
+          <a:prstGeom prst="rect">
+            <a:avLst/>
+          </a:prstGeom>
+          <a:solidFill>
+            <a:srgbClr val="1E40AF"/>
+          </a:solidFill>
+          <a:ln>
+            <a:noFill/>
+          </a:ln>
+          <a:effectLst/>
+        </p:spPr>
+        <p:style>
+          <a:lnRef idx="1">
+            <a:schemeClr val="accent1"/>
+          </a:lnRef>
+          <a:fillRef idx="3">
+            <a:schemeClr val="accent1"/>
+          </a:fillRef>
+          <a:effectRef idx="2">
+            <a:schemeClr val="accent1"/>
+          </a:effectRef>
+          <a:fontRef idx="minor">
+            <a:schemeClr val="lt1"/>
+          </a:fontRef>
+        </p:style>
+        <p:txBody>
+          <a:bodyPr rtlCol="0" anchor="ctr"/>
+          <a:lstStyle/>
+          <a:p>
+            <a:pPr algn="ctr"/>
+          </a:p>
+        </p:txBody>
+      </p:sp>
+      <p:sp>
+        <p:nvSpPr>
+          <p:cNvPr id="3" name="Rounded Rectangle 2"/>
+          <p:cNvSpPr/>
+          <p:nvPr/>
+        </p:nvSpPr>
+        <p:spPr>
+          <a:xfrm>
             <a:off x="9942271" y="457200"/>
             <a:ext cx="1700784" cy="457200"/>
           </a:xfrm>
@@ -11383,7 +11884,7 @@
                 </a:solidFill>
                 <a:latin typeface="Calibri"/>
               </a:rPr>
-              <a:t>Ngữ văn 11 · Bài 2: Cấu Tứ Và Hình Ảnh Trong Thơ Trữ Tình          27</a:t>
+              <a:t>Ngữ văn 11 · Bài 2: Cấu Tứ Và Hình Ảnh Trong Thơ Trữ Tình          28</a:t>
             </a:r>
           </a:p>
         </p:txBody>
@@ -11569,7 +12070,7 @@
 </p:sld>
 </file>
 
-<file path=ppt/slides/slide28.xml><?xml version="1.0" encoding="utf-8"?>
+<file path=ppt/slides/slide29.xml><?xml version="1.0" encoding="utf-8"?>
 <p:sld xmlns:a="http://schemas.openxmlformats.org/drawingml/2006/main" xmlns:p="http://schemas.openxmlformats.org/presentationml/2006/main" xmlns:r="http://schemas.openxmlformats.org/officeDocument/2006/relationships">
   <p:cSld>
     <p:bg>
@@ -11666,349 +12167,6 @@
                 <a:latin typeface="Calibri"/>
               </a:rPr>
               <a:t>TIẾT 20 – 22: VIẾT – NÓI VÀ NGHE</a:t>
-            </a:r>
-          </a:p>
-        </p:txBody>
-      </p:sp>
-    </p:spTree>
-  </p:cSld>
-  <p:clrMapOvr>
-    <a:masterClrMapping/>
-  </p:clrMapOvr>
-</p:sld>
-</file>
-
-<file path=ppt/slides/slide29.xml><?xml version="1.0" encoding="utf-8"?>
-<p:sld xmlns:a="http://schemas.openxmlformats.org/drawingml/2006/main" xmlns:p="http://schemas.openxmlformats.org/presentationml/2006/main" xmlns:r="http://schemas.openxmlformats.org/officeDocument/2006/relationships">
-  <p:cSld>
-    <p:bg>
-      <p:bgPr>
-        <a:solidFill>
-          <a:srgbClr val="FFFFFF"/>
-        </a:solidFill>
-        <a:effectLst/>
-      </p:bgPr>
-    </p:bg>
-    <p:spTree>
-      <p:nvGrpSpPr>
-        <p:cNvPr id="1" name=""/>
-        <p:cNvGrpSpPr/>
-        <p:nvPr/>
-      </p:nvGrpSpPr>
-      <p:grpSpPr/>
-      <p:sp>
-        <p:nvSpPr>
-          <p:cNvPr id="2" name="Rectangle 1"/>
-          <p:cNvSpPr/>
-          <p:nvPr/>
-        </p:nvSpPr>
-        <p:spPr>
-          <a:xfrm>
-            <a:off x="457200" y="384048"/>
-            <a:ext cx="109728" cy="658368"/>
-          </a:xfrm>
-          <a:prstGeom prst="rect">
-            <a:avLst/>
-          </a:prstGeom>
-          <a:solidFill>
-            <a:srgbClr val="1E40AF"/>
-          </a:solidFill>
-          <a:ln>
-            <a:noFill/>
-          </a:ln>
-          <a:effectLst/>
-        </p:spPr>
-        <p:style>
-          <a:lnRef idx="1">
-            <a:schemeClr val="accent1"/>
-          </a:lnRef>
-          <a:fillRef idx="3">
-            <a:schemeClr val="accent1"/>
-          </a:fillRef>
-          <a:effectRef idx="2">
-            <a:schemeClr val="accent1"/>
-          </a:effectRef>
-          <a:fontRef idx="minor">
-            <a:schemeClr val="lt1"/>
-          </a:fontRef>
-        </p:style>
-        <p:txBody>
-          <a:bodyPr rtlCol="0" anchor="ctr"/>
-          <a:lstStyle/>
-          <a:p>
-            <a:pPr algn="ctr"/>
-          </a:p>
-        </p:txBody>
-      </p:sp>
-      <p:sp>
-        <p:nvSpPr>
-          <p:cNvPr id="3" name="Rounded Rectangle 2"/>
-          <p:cNvSpPr/>
-          <p:nvPr/>
-        </p:nvSpPr>
-        <p:spPr>
-          <a:xfrm>
-            <a:off x="10097719" y="457200"/>
-            <a:ext cx="1545336" cy="457200"/>
-          </a:xfrm>
-          <a:prstGeom prst="roundRect">
-            <a:avLst/>
-          </a:prstGeom>
-          <a:solidFill>
-            <a:srgbClr val="166534"/>
-          </a:solidFill>
-          <a:ln>
-            <a:noFill/>
-          </a:ln>
-          <a:effectLst/>
-        </p:spPr>
-        <p:style>
-          <a:lnRef idx="1">
-            <a:schemeClr val="accent1"/>
-          </a:lnRef>
-          <a:fillRef idx="3">
-            <a:schemeClr val="accent1"/>
-          </a:fillRef>
-          <a:effectRef idx="2">
-            <a:schemeClr val="accent1"/>
-          </a:effectRef>
-          <a:fontRef idx="minor">
-            <a:schemeClr val="lt1"/>
-          </a:fontRef>
-        </p:style>
-        <p:txBody>
-          <a:bodyPr rtlCol="0" anchor="ctr" wrap="none" tIns="0" bIns="0"/>
-          <a:lstStyle/>
-          <a:p>
-            <a:pPr algn="ctr"/>
-            <a:r>
-              <a:rPr sz="1400" b="1">
-                <a:solidFill>
-                  <a:srgbClr val="FFFFFF"/>
-                </a:solidFill>
-                <a:latin typeface="Arial"/>
-              </a:rPr>
-              <a:t>GHI NHỚ</a:t>
-            </a:r>
-          </a:p>
-        </p:txBody>
-      </p:sp>
-      <p:sp>
-        <p:nvSpPr>
-          <p:cNvPr id="4" name="TextBox 3"/>
-          <p:cNvSpPr txBox="1"/>
-          <p:nvPr/>
-        </p:nvSpPr>
-        <p:spPr>
-          <a:xfrm>
-            <a:off x="731520" y="274320"/>
-            <a:ext cx="9427464" cy="868680"/>
-          </a:xfrm>
-          <a:prstGeom prst="rect">
-            <a:avLst/>
-          </a:prstGeom>
-          <a:noFill/>
-        </p:spPr>
-        <p:txBody>
-          <a:bodyPr wrap="square" anchor="ctr">
-            <a:spAutoFit/>
-          </a:bodyPr>
-          <a:lstStyle/>
-          <a:p>
-            <a:r>
-              <a:rPr sz="3600" b="1">
-                <a:solidFill>
-                  <a:srgbClr val="1E40AF"/>
-                </a:solidFill>
-                <a:latin typeface="Arial"/>
-              </a:rPr>
-              <a:t>YÊU CẦU BÀI VIẾT</a:t>
-            </a:r>
-          </a:p>
-        </p:txBody>
-      </p:sp>
-      <p:sp>
-        <p:nvSpPr>
-          <p:cNvPr id="5" name="Rectangle 4"/>
-          <p:cNvSpPr/>
-          <p:nvPr/>
-        </p:nvSpPr>
-        <p:spPr>
-          <a:xfrm>
-            <a:off x="457200" y="1207008"/>
-            <a:ext cx="11274552" cy="22000"/>
-          </a:xfrm>
-          <a:prstGeom prst="rect">
-            <a:avLst/>
-          </a:prstGeom>
-          <a:solidFill>
-            <a:srgbClr val="E2E8F0"/>
-          </a:solidFill>
-          <a:ln>
-            <a:noFill/>
-          </a:ln>
-          <a:effectLst/>
-        </p:spPr>
-        <p:style>
-          <a:lnRef idx="1">
-            <a:schemeClr val="accent1"/>
-          </a:lnRef>
-          <a:fillRef idx="3">
-            <a:schemeClr val="accent1"/>
-          </a:fillRef>
-          <a:effectRef idx="2">
-            <a:schemeClr val="accent1"/>
-          </a:effectRef>
-          <a:fontRef idx="minor">
-            <a:schemeClr val="lt1"/>
-          </a:fontRef>
-        </p:style>
-        <p:txBody>
-          <a:bodyPr rtlCol="0" anchor="ctr"/>
-          <a:lstStyle/>
-          <a:p>
-            <a:pPr algn="ctr"/>
-          </a:p>
-        </p:txBody>
-      </p:sp>
-      <p:sp>
-        <p:nvSpPr>
-          <p:cNvPr id="6" name="TextBox 5"/>
-          <p:cNvSpPr txBox="1"/>
-          <p:nvPr/>
-        </p:nvSpPr>
-        <p:spPr>
-          <a:xfrm>
-            <a:off x="457200" y="6355080"/>
-            <a:ext cx="11274552" cy="365760"/>
-          </a:xfrm>
-          <a:prstGeom prst="rect">
-            <a:avLst/>
-          </a:prstGeom>
-          <a:noFill/>
-        </p:spPr>
-        <p:txBody>
-          <a:bodyPr wrap="none">
-            <a:spAutoFit/>
-          </a:bodyPr>
-          <a:lstStyle/>
-          <a:p>
-            <a:pPr algn="r"/>
-            <a:r>
-              <a:rPr sz="1200">
-                <a:solidFill>
-                  <a:srgbClr val="64748B"/>
-                </a:solidFill>
-                <a:latin typeface="Calibri"/>
-              </a:rPr>
-              <a:t>Ngữ văn 11 · Bài 2: Cấu Tứ Và Hình Ảnh Trong Thơ Trữ Tình          29</a:t>
-            </a:r>
-          </a:p>
-        </p:txBody>
-      </p:sp>
-      <p:sp>
-        <p:nvSpPr>
-          <p:cNvPr id="7" name="TextBox 6"/>
-          <p:cNvSpPr txBox="1"/>
-          <p:nvPr/>
-        </p:nvSpPr>
-        <p:spPr>
-          <a:xfrm>
-            <a:off x="731520" y="1463040"/>
-            <a:ext cx="10789920" cy="4754880"/>
-          </a:xfrm>
-          <a:prstGeom prst="rect">
-            <a:avLst/>
-          </a:prstGeom>
-          <a:noFill/>
-        </p:spPr>
-        <p:txBody>
-          <a:bodyPr wrap="square" anchor="t" lIns="45720" rIns="45720">
-            <a:spAutoFit/>
-          </a:bodyPr>
-          <a:lstStyle/>
-          <a:p>
-            <a:pPr algn="l" marL="365760" indent="-365760">
-              <a:spcAft>
-                <a:spcPts val="800"/>
-              </a:spcAft>
-              <a:buClr>
-                <a:srgbClr val="1E40AF"/>
-              </a:buClr>
-              <a:buFont typeface="Arial"/>
-              <a:buChar char="•"/>
-            </a:pPr>
-            <a:r>
-              <a:rPr sz="2400">
-                <a:solidFill>
-                  <a:srgbClr val="1E293B"/>
-                </a:solidFill>
-                <a:latin typeface="Calibri"/>
-              </a:rPr>
-              <a:t>Giới thiệu bài thơ, lí do chọn.</a:t>
-            </a:r>
-          </a:p>
-          <a:p>
-            <a:pPr algn="l" marL="365760" indent="-365760">
-              <a:spcAft>
-                <a:spcPts val="800"/>
-              </a:spcAft>
-              <a:buClr>
-                <a:srgbClr val="1E40AF"/>
-              </a:buClr>
-              <a:buFont typeface="Arial"/>
-              <a:buChar char="•"/>
-            </a:pPr>
-            <a:r>
-              <a:rPr sz="2400">
-                <a:solidFill>
-                  <a:srgbClr val="1E293B"/>
-                </a:solidFill>
-                <a:latin typeface="Calibri"/>
-              </a:rPr>
-              <a:t>Xác định trọng tâm: cấu tứ độc đáo, sự chi phối tới hệ thống hình ảnh.</a:t>
-            </a:r>
-          </a:p>
-          <a:p>
-            <a:pPr algn="l" marL="365760" indent="-365760">
-              <a:spcAft>
-                <a:spcPts val="800"/>
-              </a:spcAft>
-              <a:buClr>
-                <a:srgbClr val="1E40AF"/>
-              </a:buClr>
-              <a:buFont typeface="Arial"/>
-              <a:buChar char="•"/>
-            </a:pPr>
-            <a:r>
-              <a:rPr sz="2400">
-                <a:solidFill>
-                  <a:srgbClr val="1E293B"/>
-                </a:solidFill>
-                <a:latin typeface="Calibri"/>
-              </a:rPr>
-              <a:t>Lí lẽ, bằng chứng xác đáng; nêu hàm nghĩa thận trọng.</a:t>
-            </a:r>
-          </a:p>
-          <a:p>
-            <a:pPr algn="l" marL="365760" indent="-365760">
-              <a:spcAft>
-                <a:spcPts val="800"/>
-              </a:spcAft>
-              <a:buClr>
-                <a:srgbClr val="1E40AF"/>
-              </a:buClr>
-              <a:buFont typeface="Arial"/>
-              <a:buChar char="•"/>
-            </a:pPr>
-            <a:r>
-              <a:rPr sz="2400">
-                <a:solidFill>
-                  <a:srgbClr val="1E293B"/>
-                </a:solidFill>
-                <a:latin typeface="Calibri"/>
-              </a:rPr>
-              <a:t>Đánh giá giá trị cấu tứ, hình ảnh.</a:t>
             </a:r>
           </a:p>
         </p:txBody>
@@ -12200,14 +12358,14 @@
         </p:nvSpPr>
         <p:spPr>
           <a:xfrm>
-            <a:off x="10253167" y="457200"/>
-            <a:ext cx="1389888" cy="457200"/>
+            <a:off x="10097719" y="457200"/>
+            <a:ext cx="1545336" cy="457200"/>
           </a:xfrm>
           <a:prstGeom prst="roundRect">
             <a:avLst/>
           </a:prstGeom>
           <a:solidFill>
-            <a:srgbClr val="1E40AF"/>
+            <a:srgbClr val="166534"/>
           </a:solidFill>
           <a:ln>
             <a:noFill/>
@@ -12240,7 +12398,7 @@
                 </a:solidFill>
                 <a:latin typeface="Arial"/>
               </a:rPr>
-              <a:t>ĐỀ BÀI</a:t>
+              <a:t>GHI NHỚ</a:t>
             </a:r>
           </a:p>
         </p:txBody>
@@ -12254,7 +12412,7 @@
         <p:spPr>
           <a:xfrm>
             <a:off x="731520" y="274320"/>
-            <a:ext cx="9582912" cy="868680"/>
+            <a:ext cx="9427464" cy="868680"/>
           </a:xfrm>
           <a:prstGeom prst="rect">
             <a:avLst/>
@@ -12274,7 +12432,7 @@
                 </a:solidFill>
                 <a:latin typeface="Arial"/>
               </a:rPr>
-              <a:t>ĐỀ THỰC HÀNH VIẾT</a:t>
+              <a:t>YÊU CẦU BÀI VIẾT</a:t>
             </a:r>
           </a:p>
         </p:txBody>
@@ -12367,7 +12525,7 @@
         <p:spPr>
           <a:xfrm>
             <a:off x="731520" y="1463040"/>
-            <a:ext cx="10789920" cy="3566160"/>
+            <a:ext cx="10789920" cy="4754880"/>
           </a:xfrm>
           <a:prstGeom prst="rect">
             <a:avLst/>
@@ -12380,106 +12538,87 @@
           </a:bodyPr>
           <a:lstStyle/>
           <a:p>
-            <a:pPr algn="l">
+            <a:pPr algn="l" marL="365760" indent="-365760">
               <a:spcAft>
                 <a:spcPts val="800"/>
               </a:spcAft>
+              <a:buClr>
+                <a:srgbClr val="1E40AF"/>
+              </a:buClr>
+              <a:buFont typeface="Arial"/>
+              <a:buChar char="•"/>
             </a:pPr>
             <a:r>
-              <a:rPr sz="2600" b="1">
+              <a:rPr sz="2400">
                 <a:solidFill>
                   <a:srgbClr val="1E293B"/>
                 </a:solidFill>
                 <a:latin typeface="Calibri"/>
               </a:rPr>
-              <a:t>Phân tích cấu tứ và hình ảnh trong bài thơ Tràng giang (Huy Cận).</a:t>
-            </a:r>
-          </a:p>
-        </p:txBody>
-      </p:sp>
-      <p:sp>
-        <p:nvSpPr>
-          <p:cNvPr id="8" name="Rounded Rectangle 7"/>
-          <p:cNvSpPr/>
-          <p:nvPr/>
-        </p:nvSpPr>
-        <p:spPr>
-          <a:xfrm>
-            <a:off x="731520" y="5120640"/>
-            <a:ext cx="10789920" cy="693420"/>
-          </a:xfrm>
-          <a:prstGeom prst="roundRect">
-            <a:avLst>
-              <a:gd name="adj" fmla="val 8000"/>
-            </a:avLst>
-          </a:prstGeom>
-          <a:solidFill>
-            <a:srgbClr val="EFF4FF"/>
-          </a:solidFill>
-          <a:ln w="19050">
-            <a:solidFill>
-              <a:srgbClr val="1E40AF"/>
-            </a:solidFill>
-          </a:ln>
-          <a:effectLst/>
-        </p:spPr>
-        <p:style>
-          <a:lnRef idx="1">
-            <a:schemeClr val="accent1"/>
-          </a:lnRef>
-          <a:fillRef idx="3">
-            <a:schemeClr val="accent1"/>
-          </a:fillRef>
-          <a:effectRef idx="2">
-            <a:schemeClr val="accent1"/>
-          </a:effectRef>
-          <a:fontRef idx="minor">
-            <a:schemeClr val="lt1"/>
-          </a:fontRef>
-        </p:style>
-        <p:txBody>
-          <a:bodyPr rtlCol="0" anchor="ctr"/>
-          <a:lstStyle/>
-          <a:p>
-            <a:pPr algn="ctr"/>
-          </a:p>
-        </p:txBody>
-      </p:sp>
-      <p:sp>
-        <p:nvSpPr>
-          <p:cNvPr id="9" name="TextBox 8"/>
-          <p:cNvSpPr txBox="1"/>
-          <p:nvPr/>
-        </p:nvSpPr>
-        <p:spPr>
-          <a:xfrm>
-            <a:off x="914400" y="5120640"/>
-            <a:ext cx="10424160" cy="693420"/>
-          </a:xfrm>
-          <a:prstGeom prst="rect">
-            <a:avLst/>
-          </a:prstGeom>
-          <a:noFill/>
-        </p:spPr>
-        <p:txBody>
-          <a:bodyPr wrap="square" anchor="ctr" lIns="45720" rIns="45720">
-            <a:spAutoFit/>
-          </a:bodyPr>
-          <a:lstStyle/>
-          <a:p>
-            <a:pPr algn="l">
+              <a:t>Giới thiệu bài thơ, lí do chọn.</a:t>
+            </a:r>
+          </a:p>
+          <a:p>
+            <a:pPr algn="l" marL="365760" indent="-365760">
               <a:spcAft>
-                <a:spcPts val="400"/>
+                <a:spcPts val="800"/>
               </a:spcAft>
+              <a:buClr>
+                <a:srgbClr val="1E40AF"/>
+              </a:buClr>
+              <a:buFont typeface="Arial"/>
+              <a:buChar char="•"/>
             </a:pPr>
             <a:r>
-              <a:rPr sz="2200" b="1">
-                <a:solidFill>
-                  <a:srgbClr val="1E40AF"/>
+              <a:rPr sz="2400">
+                <a:solidFill>
+                  <a:srgbClr val="1E293B"/>
                 </a:solidFill>
                 <a:latin typeface="Calibri"/>
               </a:rPr>
-              <a:t>💡 Vẽ sơ đồ cấu tứ trước khi viết.</a:t>
+              <a:t>Xác định trọng tâm: cấu tứ độc đáo, sự chi phối tới hệ thống hình ảnh.</a:t>
+            </a:r>
+          </a:p>
+          <a:p>
+            <a:pPr algn="l" marL="365760" indent="-365760">
+              <a:spcAft>
+                <a:spcPts val="800"/>
+              </a:spcAft>
+              <a:buClr>
+                <a:srgbClr val="1E40AF"/>
+              </a:buClr>
+              <a:buFont typeface="Arial"/>
+              <a:buChar char="•"/>
+            </a:pPr>
+            <a:r>
+              <a:rPr sz="2400">
+                <a:solidFill>
+                  <a:srgbClr val="1E293B"/>
+                </a:solidFill>
+                <a:latin typeface="Calibri"/>
+              </a:rPr>
+              <a:t>Lí lẽ, bằng chứng xác đáng; nêu hàm nghĩa thận trọng.</a:t>
+            </a:r>
+          </a:p>
+          <a:p>
+            <a:pPr algn="l" marL="365760" indent="-365760">
+              <a:spcAft>
+                <a:spcPts val="800"/>
+              </a:spcAft>
+              <a:buClr>
+                <a:srgbClr val="1E40AF"/>
+              </a:buClr>
+              <a:buFont typeface="Arial"/>
+              <a:buChar char="•"/>
+            </a:pPr>
+            <a:r>
+              <a:rPr sz="2400">
+                <a:solidFill>
+                  <a:srgbClr val="1E293B"/>
+                </a:solidFill>
+                <a:latin typeface="Calibri"/>
+              </a:rPr>
+              <a:t>Đánh giá giá trị cấu tứ, hình ảnh.</a:t>
             </a:r>
           </a:p>
         </p:txBody>
@@ -12562,14 +12701,14 @@
         </p:nvSpPr>
         <p:spPr>
           <a:xfrm>
-            <a:off x="9942271" y="457200"/>
-            <a:ext cx="1700784" cy="457200"/>
+            <a:off x="10253167" y="457200"/>
+            <a:ext cx="1389888" cy="457200"/>
           </a:xfrm>
           <a:prstGeom prst="roundRect">
             <a:avLst/>
           </a:prstGeom>
           <a:solidFill>
-            <a:srgbClr val="991B1B"/>
+            <a:srgbClr val="1E40AF"/>
           </a:solidFill>
           <a:ln>
             <a:noFill/>
@@ -12602,7 +12741,7 @@
                 </a:solidFill>
                 <a:latin typeface="Arial"/>
               </a:rPr>
-              <a:t>LỜI GIẢI</a:t>
+              <a:t>ĐỀ BÀI</a:t>
             </a:r>
           </a:p>
         </p:txBody>
@@ -12616,7 +12755,7 @@
         <p:spPr>
           <a:xfrm>
             <a:off x="731520" y="274320"/>
-            <a:ext cx="9272016" cy="868680"/>
+            <a:ext cx="9582912" cy="868680"/>
           </a:xfrm>
           <a:prstGeom prst="rect">
             <a:avLst/>
@@ -12729,7 +12868,7 @@
         <p:spPr>
           <a:xfrm>
             <a:off x="731520" y="1463040"/>
-            <a:ext cx="10789920" cy="3474720"/>
+            <a:ext cx="10789920" cy="3566160"/>
           </a:xfrm>
           <a:prstGeom prst="rect">
             <a:avLst/>
@@ -12742,87 +12881,19 @@
           </a:bodyPr>
           <a:lstStyle/>
           <a:p>
-            <a:pPr algn="l" marL="365760" indent="-365760">
+            <a:pPr algn="l">
               <a:spcAft>
                 <a:spcPts val="800"/>
               </a:spcAft>
-              <a:buClr>
-                <a:srgbClr val="1E40AF"/>
-              </a:buClr>
-              <a:buFont typeface="Arial"/>
-              <a:buChar char="•"/>
             </a:pPr>
             <a:r>
-              <a:rPr sz="2300">
+              <a:rPr sz="2600" b="1">
                 <a:solidFill>
                   <a:srgbClr val="1E293B"/>
                 </a:solidFill>
                 <a:latin typeface="Calibri"/>
               </a:rPr>
-              <a:t>MB: giới thiệu, nêu vấn đề.</a:t>
-            </a:r>
-          </a:p>
-          <a:p>
-            <a:pPr algn="l" marL="365760" indent="-365760">
-              <a:spcAft>
-                <a:spcPts val="800"/>
-              </a:spcAft>
-              <a:buClr>
-                <a:srgbClr val="1E40AF"/>
-              </a:buClr>
-              <a:buFont typeface="Arial"/>
-              <a:buChar char="•"/>
-            </a:pPr>
-            <a:r>
-              <a:rPr sz="2300">
-                <a:solidFill>
-                  <a:srgbClr val="1E293B"/>
-                </a:solidFill>
-                <a:latin typeface="Calibri"/>
-              </a:rPr>
-              <a:t>TB: nhan đề – đề từ; cấu tứ tương phản qua 4 khổ; hệ thống hình ảnh, thi liệu.</a:t>
-            </a:r>
-          </a:p>
-          <a:p>
-            <a:pPr algn="l" marL="365760" indent="-365760">
-              <a:spcAft>
-                <a:spcPts val="800"/>
-              </a:spcAft>
-              <a:buClr>
-                <a:srgbClr val="1E40AF"/>
-              </a:buClr>
-              <a:buFont typeface="Arial"/>
-              <a:buChar char="•"/>
-            </a:pPr>
-            <a:r>
-              <a:rPr sz="2300">
-                <a:solidFill>
-                  <a:srgbClr val="1E293B"/>
-                </a:solidFill>
-                <a:latin typeface="Calibri"/>
-              </a:rPr>
-              <a:t>Yếu tố tượng trưng, ngôn ngữ phá cách; đánh giá.</a:t>
-            </a:r>
-          </a:p>
-          <a:p>
-            <a:pPr algn="l" marL="365760" indent="-365760">
-              <a:spcAft>
-                <a:spcPts val="800"/>
-              </a:spcAft>
-              <a:buClr>
-                <a:srgbClr val="1E40AF"/>
-              </a:buClr>
-              <a:buFont typeface="Arial"/>
-              <a:buChar char="•"/>
-            </a:pPr>
-            <a:r>
-              <a:rPr sz="2300">
-                <a:solidFill>
-                  <a:srgbClr val="1E293B"/>
-                </a:solidFill>
-                <a:latin typeface="Calibri"/>
-              </a:rPr>
-              <a:t>KB: khẳng định giá trị.</a:t>
+              <a:t>Phân tích cấu tứ và hình ảnh trong bài thơ Tràng giang (Huy Cận).</a:t>
             </a:r>
           </a:p>
         </p:txBody>
@@ -12835,8 +12906,8 @@
         </p:nvSpPr>
         <p:spPr>
           <a:xfrm>
-            <a:off x="731520" y="5074920"/>
-            <a:ext cx="10789920" cy="731520"/>
+            <a:off x="731520" y="5120640"/>
+            <a:ext cx="10789920" cy="693420"/>
           </a:xfrm>
           <a:prstGeom prst="roundRect">
             <a:avLst>
@@ -12844,11 +12915,11 @@
             </a:avLst>
           </a:prstGeom>
           <a:solidFill>
-            <a:srgbClr val="FEF2F2"/>
+            <a:srgbClr val="EFF4FF"/>
           </a:solidFill>
           <a:ln w="19050">
             <a:solidFill>
-              <a:srgbClr val="991B1B"/>
+              <a:srgbClr val="1E40AF"/>
             </a:solidFill>
           </a:ln>
           <a:effectLst/>
@@ -12883,8 +12954,8 @@
         </p:nvSpPr>
         <p:spPr>
           <a:xfrm>
-            <a:off x="914400" y="5074920"/>
-            <a:ext cx="10424160" cy="731520"/>
+            <a:off x="914400" y="5120640"/>
+            <a:ext cx="10424160" cy="693420"/>
           </a:xfrm>
           <a:prstGeom prst="rect">
             <a:avLst/>
@@ -12903,13 +12974,13 @@
               </a:spcAft>
             </a:pPr>
             <a:r>
-              <a:rPr sz="2400" b="1">
-                <a:solidFill>
-                  <a:srgbClr val="991B1B"/>
+              <a:rPr sz="2200" b="1">
+                <a:solidFill>
+                  <a:srgbClr val="1E40AF"/>
                 </a:solidFill>
                 <a:latin typeface="Calibri"/>
               </a:rPr>
-              <a:t>Gắn cấu tứ với hệ thống hình ảnh.</a:t>
+              <a:t>💡 Vẽ sơ đồ cấu tứ trước khi viết.</a:t>
             </a:r>
           </a:p>
         </p:txBody>
@@ -12992,14 +13063,14 @@
         </p:nvSpPr>
         <p:spPr>
           <a:xfrm>
-            <a:off x="10097719" y="457200"/>
-            <a:ext cx="1545336" cy="457200"/>
+            <a:off x="9942271" y="457200"/>
+            <a:ext cx="1700784" cy="457200"/>
           </a:xfrm>
           <a:prstGeom prst="roundRect">
             <a:avLst/>
           </a:prstGeom>
           <a:solidFill>
-            <a:srgbClr val="166534"/>
+            <a:srgbClr val="991B1B"/>
           </a:solidFill>
           <a:ln>
             <a:noFill/>
@@ -13032,7 +13103,7 @@
                 </a:solidFill>
                 <a:latin typeface="Arial"/>
               </a:rPr>
-              <a:t>CỦNG CỐ</a:t>
+              <a:t>LỜI GIẢI</a:t>
             </a:r>
           </a:p>
         </p:txBody>
@@ -13046,7 +13117,7 @@
         <p:spPr>
           <a:xfrm>
             <a:off x="731520" y="274320"/>
-            <a:ext cx="9427464" cy="868680"/>
+            <a:ext cx="9272016" cy="868680"/>
           </a:xfrm>
           <a:prstGeom prst="rect">
             <a:avLst/>
@@ -13066,7 +13137,7 @@
                 </a:solidFill>
                 <a:latin typeface="Arial"/>
               </a:rPr>
-              <a:t>SƠ ĐỒ TƯ DUY</a:t>
+              <a:t>ĐỀ THỰC HÀNH VIẾT</a:t>
             </a:r>
           </a:p>
         </p:txBody>
@@ -13150,30 +13221,200 @@
           </a:p>
         </p:txBody>
       </p:sp>
-      <p:pic>
-        <p:nvPicPr>
-          <p:cNvPr id="7" name="Picture 6" descr="SoDoTuDuy_NGUVAN11_Bai2_CauTuVaHinhAnhTrongThoTruTinh_T12-22.png"/>
-          <p:cNvPicPr>
-            <a:picLocks noChangeAspect="1"/>
-          </p:cNvPicPr>
-          <p:nvPr/>
-        </p:nvPicPr>
-        <p:blipFill>
-          <a:blip r:embed="rId2"/>
-          <a:stretch>
-            <a:fillRect/>
-          </a:stretch>
-        </p:blipFill>
-        <p:spPr>
-          <a:xfrm>
-            <a:off x="1788855" y="1371600"/>
-            <a:ext cx="8675250" cy="4846320"/>
-          </a:xfrm>
-          <a:prstGeom prst="rect">
-            <a:avLst/>
-          </a:prstGeom>
-        </p:spPr>
-      </p:pic>
+      <p:sp>
+        <p:nvSpPr>
+          <p:cNvPr id="7" name="TextBox 6"/>
+          <p:cNvSpPr txBox="1"/>
+          <p:nvPr/>
+        </p:nvSpPr>
+        <p:spPr>
+          <a:xfrm>
+            <a:off x="731520" y="1463040"/>
+            <a:ext cx="10789920" cy="3474720"/>
+          </a:xfrm>
+          <a:prstGeom prst="rect">
+            <a:avLst/>
+          </a:prstGeom>
+          <a:noFill/>
+        </p:spPr>
+        <p:txBody>
+          <a:bodyPr wrap="square" anchor="t" lIns="45720" rIns="45720">
+            <a:spAutoFit/>
+          </a:bodyPr>
+          <a:lstStyle/>
+          <a:p>
+            <a:pPr algn="l" marL="365760" indent="-365760">
+              <a:spcAft>
+                <a:spcPts val="800"/>
+              </a:spcAft>
+              <a:buClr>
+                <a:srgbClr val="1E40AF"/>
+              </a:buClr>
+              <a:buFont typeface="Arial"/>
+              <a:buChar char="•"/>
+            </a:pPr>
+            <a:r>
+              <a:rPr sz="2300">
+                <a:solidFill>
+                  <a:srgbClr val="1E293B"/>
+                </a:solidFill>
+                <a:latin typeface="Calibri"/>
+              </a:rPr>
+              <a:t>MB: giới thiệu, nêu vấn đề.</a:t>
+            </a:r>
+          </a:p>
+          <a:p>
+            <a:pPr algn="l" marL="365760" indent="-365760">
+              <a:spcAft>
+                <a:spcPts val="800"/>
+              </a:spcAft>
+              <a:buClr>
+                <a:srgbClr val="1E40AF"/>
+              </a:buClr>
+              <a:buFont typeface="Arial"/>
+              <a:buChar char="•"/>
+            </a:pPr>
+            <a:r>
+              <a:rPr sz="2300">
+                <a:solidFill>
+                  <a:srgbClr val="1E293B"/>
+                </a:solidFill>
+                <a:latin typeface="Calibri"/>
+              </a:rPr>
+              <a:t>TB: nhan đề – đề từ; cấu tứ tương phản qua 4 khổ; hệ thống hình ảnh, thi liệu.</a:t>
+            </a:r>
+          </a:p>
+          <a:p>
+            <a:pPr algn="l" marL="365760" indent="-365760">
+              <a:spcAft>
+                <a:spcPts val="800"/>
+              </a:spcAft>
+              <a:buClr>
+                <a:srgbClr val="1E40AF"/>
+              </a:buClr>
+              <a:buFont typeface="Arial"/>
+              <a:buChar char="•"/>
+            </a:pPr>
+            <a:r>
+              <a:rPr sz="2300">
+                <a:solidFill>
+                  <a:srgbClr val="1E293B"/>
+                </a:solidFill>
+                <a:latin typeface="Calibri"/>
+              </a:rPr>
+              <a:t>Yếu tố tượng trưng, ngôn ngữ phá cách; đánh giá.</a:t>
+            </a:r>
+          </a:p>
+          <a:p>
+            <a:pPr algn="l" marL="365760" indent="-365760">
+              <a:spcAft>
+                <a:spcPts val="800"/>
+              </a:spcAft>
+              <a:buClr>
+                <a:srgbClr val="1E40AF"/>
+              </a:buClr>
+              <a:buFont typeface="Arial"/>
+              <a:buChar char="•"/>
+            </a:pPr>
+            <a:r>
+              <a:rPr sz="2300">
+                <a:solidFill>
+                  <a:srgbClr val="1E293B"/>
+                </a:solidFill>
+                <a:latin typeface="Calibri"/>
+              </a:rPr>
+              <a:t>KB: khẳng định giá trị.</a:t>
+            </a:r>
+          </a:p>
+        </p:txBody>
+      </p:sp>
+      <p:sp>
+        <p:nvSpPr>
+          <p:cNvPr id="8" name="Rounded Rectangle 7"/>
+          <p:cNvSpPr/>
+          <p:nvPr/>
+        </p:nvSpPr>
+        <p:spPr>
+          <a:xfrm>
+            <a:off x="731520" y="5074920"/>
+            <a:ext cx="10789920" cy="731520"/>
+          </a:xfrm>
+          <a:prstGeom prst="roundRect">
+            <a:avLst>
+              <a:gd name="adj" fmla="val 8000"/>
+            </a:avLst>
+          </a:prstGeom>
+          <a:solidFill>
+            <a:srgbClr val="FEF2F2"/>
+          </a:solidFill>
+          <a:ln w="19050">
+            <a:solidFill>
+              <a:srgbClr val="991B1B"/>
+            </a:solidFill>
+          </a:ln>
+          <a:effectLst/>
+        </p:spPr>
+        <p:style>
+          <a:lnRef idx="1">
+            <a:schemeClr val="accent1"/>
+          </a:lnRef>
+          <a:fillRef idx="3">
+            <a:schemeClr val="accent1"/>
+          </a:fillRef>
+          <a:effectRef idx="2">
+            <a:schemeClr val="accent1"/>
+          </a:effectRef>
+          <a:fontRef idx="minor">
+            <a:schemeClr val="lt1"/>
+          </a:fontRef>
+        </p:style>
+        <p:txBody>
+          <a:bodyPr rtlCol="0" anchor="ctr"/>
+          <a:lstStyle/>
+          <a:p>
+            <a:pPr algn="ctr"/>
+          </a:p>
+        </p:txBody>
+      </p:sp>
+      <p:sp>
+        <p:nvSpPr>
+          <p:cNvPr id="9" name="TextBox 8"/>
+          <p:cNvSpPr txBox="1"/>
+          <p:nvPr/>
+        </p:nvSpPr>
+        <p:spPr>
+          <a:xfrm>
+            <a:off x="914400" y="5074920"/>
+            <a:ext cx="10424160" cy="731520"/>
+          </a:xfrm>
+          <a:prstGeom prst="rect">
+            <a:avLst/>
+          </a:prstGeom>
+          <a:noFill/>
+        </p:spPr>
+        <p:txBody>
+          <a:bodyPr wrap="square" anchor="ctr" lIns="45720" rIns="45720">
+            <a:spAutoFit/>
+          </a:bodyPr>
+          <a:lstStyle/>
+          <a:p>
+            <a:pPr algn="l">
+              <a:spcAft>
+                <a:spcPts val="400"/>
+              </a:spcAft>
+            </a:pPr>
+            <a:r>
+              <a:rPr sz="2400" b="1">
+                <a:solidFill>
+                  <a:srgbClr val="991B1B"/>
+                </a:solidFill>
+                <a:latin typeface="Calibri"/>
+              </a:rPr>
+              <a:t>Gắn cấu tứ với hệ thống hình ảnh.</a:t>
+            </a:r>
+          </a:p>
+        </p:txBody>
+      </p:sp>
     </p:spTree>
   </p:cSld>
   <p:clrMapOvr>
@@ -13259,7 +13500,7 @@
             <a:avLst/>
           </a:prstGeom>
           <a:solidFill>
-            <a:srgbClr val="991B1B"/>
+            <a:srgbClr val="166534"/>
           </a:solidFill>
           <a:ln>
             <a:noFill/>
@@ -13326,7 +13567,7 @@
                 </a:solidFill>
                 <a:latin typeface="Arial"/>
               </a:rPr>
-              <a:t>BÀI TẬP CỦA BẠN</a:t>
+              <a:t>SƠ ĐỒ TƯ DUY</a:t>
             </a:r>
           </a:p>
         </p:txBody>
@@ -13406,6 +13647,266 @@
                 <a:latin typeface="Calibri"/>
               </a:rPr>
               <a:t>Ngữ văn 11 · Bài 2: Cấu Tứ Và Hình Ảnh Trong Thơ Trữ Tình          33</a:t>
+            </a:r>
+          </a:p>
+        </p:txBody>
+      </p:sp>
+      <p:pic>
+        <p:nvPicPr>
+          <p:cNvPr id="7" name="Picture 6" descr="SoDoTuDuy_NGUVAN11_Bai2_CauTuVaHinhAnhTrongThoTruTinh_T12-22.png"/>
+          <p:cNvPicPr>
+            <a:picLocks noChangeAspect="1"/>
+          </p:cNvPicPr>
+          <p:nvPr/>
+        </p:nvPicPr>
+        <p:blipFill>
+          <a:blip r:embed="rId2"/>
+          <a:stretch>
+            <a:fillRect/>
+          </a:stretch>
+        </p:blipFill>
+        <p:spPr>
+          <a:xfrm>
+            <a:off x="1788855" y="1371600"/>
+            <a:ext cx="8675250" cy="4846320"/>
+          </a:xfrm>
+          <a:prstGeom prst="rect">
+            <a:avLst/>
+          </a:prstGeom>
+        </p:spPr>
+      </p:pic>
+    </p:spTree>
+  </p:cSld>
+  <p:clrMapOvr>
+    <a:masterClrMapping/>
+  </p:clrMapOvr>
+</p:sld>
+</file>
+
+<file path=ppt/slides/slide34.xml><?xml version="1.0" encoding="utf-8"?>
+<p:sld xmlns:a="http://schemas.openxmlformats.org/drawingml/2006/main" xmlns:p="http://schemas.openxmlformats.org/presentationml/2006/main" xmlns:r="http://schemas.openxmlformats.org/officeDocument/2006/relationships">
+  <p:cSld>
+    <p:bg>
+      <p:bgPr>
+        <a:solidFill>
+          <a:srgbClr val="FFFFFF"/>
+        </a:solidFill>
+        <a:effectLst/>
+      </p:bgPr>
+    </p:bg>
+    <p:spTree>
+      <p:nvGrpSpPr>
+        <p:cNvPr id="1" name=""/>
+        <p:cNvGrpSpPr/>
+        <p:nvPr/>
+      </p:nvGrpSpPr>
+      <p:grpSpPr/>
+      <p:sp>
+        <p:nvSpPr>
+          <p:cNvPr id="2" name="Rectangle 1"/>
+          <p:cNvSpPr/>
+          <p:nvPr/>
+        </p:nvSpPr>
+        <p:spPr>
+          <a:xfrm>
+            <a:off x="457200" y="384048"/>
+            <a:ext cx="109728" cy="658368"/>
+          </a:xfrm>
+          <a:prstGeom prst="rect">
+            <a:avLst/>
+          </a:prstGeom>
+          <a:solidFill>
+            <a:srgbClr val="1E40AF"/>
+          </a:solidFill>
+          <a:ln>
+            <a:noFill/>
+          </a:ln>
+          <a:effectLst/>
+        </p:spPr>
+        <p:style>
+          <a:lnRef idx="1">
+            <a:schemeClr val="accent1"/>
+          </a:lnRef>
+          <a:fillRef idx="3">
+            <a:schemeClr val="accent1"/>
+          </a:fillRef>
+          <a:effectRef idx="2">
+            <a:schemeClr val="accent1"/>
+          </a:effectRef>
+          <a:fontRef idx="minor">
+            <a:schemeClr val="lt1"/>
+          </a:fontRef>
+        </p:style>
+        <p:txBody>
+          <a:bodyPr rtlCol="0" anchor="ctr"/>
+          <a:lstStyle/>
+          <a:p>
+            <a:pPr algn="ctr"/>
+          </a:p>
+        </p:txBody>
+      </p:sp>
+      <p:sp>
+        <p:nvSpPr>
+          <p:cNvPr id="3" name="Rounded Rectangle 2"/>
+          <p:cNvSpPr/>
+          <p:nvPr/>
+        </p:nvSpPr>
+        <p:spPr>
+          <a:xfrm>
+            <a:off x="10097719" y="457200"/>
+            <a:ext cx="1545336" cy="457200"/>
+          </a:xfrm>
+          <a:prstGeom prst="roundRect">
+            <a:avLst/>
+          </a:prstGeom>
+          <a:solidFill>
+            <a:srgbClr val="991B1B"/>
+          </a:solidFill>
+          <a:ln>
+            <a:noFill/>
+          </a:ln>
+          <a:effectLst/>
+        </p:spPr>
+        <p:style>
+          <a:lnRef idx="1">
+            <a:schemeClr val="accent1"/>
+          </a:lnRef>
+          <a:fillRef idx="3">
+            <a:schemeClr val="accent1"/>
+          </a:fillRef>
+          <a:effectRef idx="2">
+            <a:schemeClr val="accent1"/>
+          </a:effectRef>
+          <a:fontRef idx="minor">
+            <a:schemeClr val="lt1"/>
+          </a:fontRef>
+        </p:style>
+        <p:txBody>
+          <a:bodyPr rtlCol="0" anchor="ctr" wrap="none" tIns="0" bIns="0"/>
+          <a:lstStyle/>
+          <a:p>
+            <a:pPr algn="ctr"/>
+            <a:r>
+              <a:rPr sz="1400" b="1">
+                <a:solidFill>
+                  <a:srgbClr val="FFFFFF"/>
+                </a:solidFill>
+                <a:latin typeface="Arial"/>
+              </a:rPr>
+              <a:t>CỦNG CỐ</a:t>
+            </a:r>
+          </a:p>
+        </p:txBody>
+      </p:sp>
+      <p:sp>
+        <p:nvSpPr>
+          <p:cNvPr id="4" name="TextBox 3"/>
+          <p:cNvSpPr txBox="1"/>
+          <p:nvPr/>
+        </p:nvSpPr>
+        <p:spPr>
+          <a:xfrm>
+            <a:off x="731520" y="274320"/>
+            <a:ext cx="9427464" cy="868680"/>
+          </a:xfrm>
+          <a:prstGeom prst="rect">
+            <a:avLst/>
+          </a:prstGeom>
+          <a:noFill/>
+        </p:spPr>
+        <p:txBody>
+          <a:bodyPr wrap="square" anchor="ctr">
+            <a:spAutoFit/>
+          </a:bodyPr>
+          <a:lstStyle/>
+          <a:p>
+            <a:r>
+              <a:rPr sz="3600" b="1">
+                <a:solidFill>
+                  <a:srgbClr val="1E40AF"/>
+                </a:solidFill>
+                <a:latin typeface="Arial"/>
+              </a:rPr>
+              <a:t>BÀI TẬP CỦA BẠN</a:t>
+            </a:r>
+          </a:p>
+        </p:txBody>
+      </p:sp>
+      <p:sp>
+        <p:nvSpPr>
+          <p:cNvPr id="5" name="Rectangle 4"/>
+          <p:cNvSpPr/>
+          <p:nvPr/>
+        </p:nvSpPr>
+        <p:spPr>
+          <a:xfrm>
+            <a:off x="457200" y="1207008"/>
+            <a:ext cx="11274552" cy="22000"/>
+          </a:xfrm>
+          <a:prstGeom prst="rect">
+            <a:avLst/>
+          </a:prstGeom>
+          <a:solidFill>
+            <a:srgbClr val="E2E8F0"/>
+          </a:solidFill>
+          <a:ln>
+            <a:noFill/>
+          </a:ln>
+          <a:effectLst/>
+        </p:spPr>
+        <p:style>
+          <a:lnRef idx="1">
+            <a:schemeClr val="accent1"/>
+          </a:lnRef>
+          <a:fillRef idx="3">
+            <a:schemeClr val="accent1"/>
+          </a:fillRef>
+          <a:effectRef idx="2">
+            <a:schemeClr val="accent1"/>
+          </a:effectRef>
+          <a:fontRef idx="minor">
+            <a:schemeClr val="lt1"/>
+          </a:fontRef>
+        </p:style>
+        <p:txBody>
+          <a:bodyPr rtlCol="0" anchor="ctr"/>
+          <a:lstStyle/>
+          <a:p>
+            <a:pPr algn="ctr"/>
+          </a:p>
+        </p:txBody>
+      </p:sp>
+      <p:sp>
+        <p:nvSpPr>
+          <p:cNvPr id="6" name="TextBox 5"/>
+          <p:cNvSpPr txBox="1"/>
+          <p:nvPr/>
+        </p:nvSpPr>
+        <p:spPr>
+          <a:xfrm>
+            <a:off x="457200" y="6355080"/>
+            <a:ext cx="11274552" cy="365760"/>
+          </a:xfrm>
+          <a:prstGeom prst="rect">
+            <a:avLst/>
+          </a:prstGeom>
+          <a:noFill/>
+        </p:spPr>
+        <p:txBody>
+          <a:bodyPr wrap="none">
+            <a:spAutoFit/>
+          </a:bodyPr>
+          <a:lstStyle/>
+          <a:p>
+            <a:pPr algn="r"/>
+            <a:r>
+              <a:rPr sz="1200">
+                <a:solidFill>
+                  <a:srgbClr val="64748B"/>
+                </a:solidFill>
+                <a:latin typeface="Calibri"/>
+              </a:rPr>
+              <a:t>Ngữ văn 11 · Bài 2: Cấu Tứ Và Hình Ảnh Trong Thơ Trữ Tình          34</a:t>
             </a:r>
           </a:p>
         </p:txBody>
@@ -13937,14 +14438,14 @@
         </p:nvSpPr>
         <p:spPr>
           <a:xfrm>
-            <a:off x="10097719" y="457200"/>
-            <a:ext cx="1545336" cy="457200"/>
+            <a:off x="10408615" y="457200"/>
+            <a:ext cx="1234440" cy="457200"/>
           </a:xfrm>
           <a:prstGeom prst="roundRect">
             <a:avLst/>
           </a:prstGeom>
           <a:solidFill>
-            <a:srgbClr val="166534"/>
+            <a:srgbClr val="991B1B"/>
           </a:solidFill>
           <a:ln>
             <a:noFill/>
@@ -13977,7 +14478,7 @@
                 </a:solidFill>
                 <a:latin typeface="Arial"/>
               </a:rPr>
-              <a:t>GHI NHỚ</a:t>
+              <a:t>VIDEO</a:t>
             </a:r>
           </a:p>
         </p:txBody>
@@ -13991,7 +14492,7 @@
         <p:spPr>
           <a:xfrm>
             <a:off x="731520" y="274320"/>
-            <a:ext cx="9427464" cy="868680"/>
+            <a:ext cx="9738360" cy="868680"/>
           </a:xfrm>
           <a:prstGeom prst="rect">
             <a:avLst/>
@@ -14011,7 +14512,7 @@
                 </a:solidFill>
                 <a:latin typeface="Arial"/>
               </a:rPr>
-              <a:t>TRI THỨC NGỮ VĂN</a:t>
+              <a:t>VIDEO THAM KHẢO</a:t>
             </a:r>
           </a:p>
         </p:txBody>
@@ -14095,16 +14596,40 @@
           </a:p>
         </p:txBody>
       </p:sp>
-      <p:sp>
-        <p:nvSpPr>
-          <p:cNvPr id="7" name="TextBox 6"/>
+      <p:pic>
+        <p:nvPicPr>
+          <p:cNvPr id="7" name="Picture 6" descr="QR_video_PaS9osKcC4E.png"/>
+          <p:cNvPicPr>
+            <a:picLocks noChangeAspect="1"/>
+          </p:cNvPicPr>
+          <p:nvPr/>
+        </p:nvPicPr>
+        <p:blipFill>
+          <a:blip r:embed="rId2"/>
+          <a:stretch>
+            <a:fillRect/>
+          </a:stretch>
+        </p:blipFill>
+        <p:spPr>
+          <a:xfrm>
+            <a:off x="8412480" y="1554480"/>
+            <a:ext cx="3108960" cy="3108960"/>
+          </a:xfrm>
+          <a:prstGeom prst="rect">
+            <a:avLst/>
+          </a:prstGeom>
+        </p:spPr>
+      </p:pic>
+      <p:sp>
+        <p:nvSpPr>
+          <p:cNvPr id="8" name="TextBox 7"/>
           <p:cNvSpPr txBox="1"/>
           <p:nvPr/>
         </p:nvSpPr>
         <p:spPr>
           <a:xfrm>
-            <a:off x="731520" y="1463040"/>
-            <a:ext cx="10789920" cy="4754880"/>
+            <a:off x="731520" y="1554480"/>
+            <a:ext cx="7498079" cy="4206240"/>
           </a:xfrm>
           <a:prstGeom prst="rect">
             <a:avLst/>
@@ -14116,6 +14641,38 @@
             <a:spAutoFit/>
           </a:bodyPr>
           <a:lstStyle/>
+          <a:p>
+            <a:pPr algn="l">
+              <a:spcAft>
+                <a:spcPts val="800"/>
+              </a:spcAft>
+            </a:pPr>
+            <a:r>
+              <a:rPr sz="2600" b="1">
+                <a:solidFill>
+                  <a:srgbClr val="1E293B"/>
+                </a:solidFill>
+                <a:latin typeface="Calibri"/>
+              </a:rPr>
+              <a:t>🎬 Tố Hữu – Nhà thơ lớn của cách mạng Việt Nam (Danh nhân Thăng Long – Hà Nội)</a:t>
+            </a:r>
+          </a:p>
+          <a:p>
+            <a:pPr algn="l">
+              <a:spcAft>
+                <a:spcPts val="800"/>
+              </a:spcAft>
+            </a:pPr>
+            <a:r>
+              <a:rPr sz="2000">
+                <a:solidFill>
+                  <a:srgbClr val="64748B"/>
+                </a:solidFill>
+                <a:latin typeface="Calibri"/>
+              </a:rPr>
+              <a:t>Kênh: HTV – Đài Hà Nội</a:t>
+            </a:r>
+          </a:p>
           <a:p>
             <a:pPr algn="l" marL="365760" indent="-365760">
               <a:spcAft>
@@ -14128,112 +14685,30 @@
               <a:buChar char="•"/>
             </a:pPr>
             <a:r>
-              <a:rPr sz="2400" b="1">
+              <a:rPr sz="2000">
                 <a:solidFill>
                   <a:srgbClr val="1E293B"/>
                 </a:solidFill>
                 <a:latin typeface="Calibri"/>
               </a:rPr>
-              <a:t>Cấu tứ</a:t>
-            </a:r>
-            <a:r>
-              <a:rPr sz="2400">
-                <a:solidFill>
-                  <a:srgbClr val="1E293B"/>
-                </a:solidFill>
-                <a:latin typeface="Calibri"/>
-              </a:rPr>
-              <a:t>: hình dung hướng phát triển hình tượng, cách triển khai bài thơ.</a:t>
-            </a:r>
-          </a:p>
-          <a:p>
-            <a:pPr algn="l" marL="365760" indent="-365760">
+              <a:t>Tìm hiểu tác giả Tố Hữu (Nhớ đồng)</a:t>
+            </a:r>
+          </a:p>
+          <a:p>
+            <a:pPr algn="l">
               <a:spcAft>
                 <a:spcPts val="800"/>
               </a:spcAft>
-              <a:buClr>
-                <a:srgbClr val="1E40AF"/>
-              </a:buClr>
-              <a:buFont typeface="Arial"/>
-              <a:buChar char="•"/>
             </a:pPr>
             <a:r>
-              <a:rPr sz="2400" b="1">
-                <a:solidFill>
-                  <a:srgbClr val="1E293B"/>
+              <a:rPr sz="1600">
+                <a:solidFill>
+                  <a:srgbClr val="64748B"/>
                 </a:solidFill>
                 <a:latin typeface="Calibri"/>
-              </a:rPr>
-              <a:t>Tứ thơ</a:t>
-            </a:r>
-            <a:r>
-              <a:rPr sz="2400">
-                <a:solidFill>
-                  <a:srgbClr val="1E293B"/>
-                </a:solidFill>
-                <a:latin typeface="Calibri"/>
-              </a:rPr>
-              <a:t>: sản phẩm của cấu tứ – mọi yếu tố hướng về hình ảnh trung tâm.</a:t>
-            </a:r>
-          </a:p>
-          <a:p>
-            <a:pPr algn="l" marL="365760" indent="-365760">
-              <a:spcAft>
-                <a:spcPts val="800"/>
-              </a:spcAft>
-              <a:buClr>
-                <a:srgbClr val="1E40AF"/>
-              </a:buClr>
-              <a:buFont typeface="Arial"/>
-              <a:buChar char="•"/>
-            </a:pPr>
-            <a:r>
-              <a:rPr sz="2400" b="1">
-                <a:solidFill>
-                  <a:srgbClr val="1E293B"/>
-                </a:solidFill>
-                <a:latin typeface="Calibri"/>
-              </a:rPr>
-              <a:t>Yếu tố tượng trưng</a:t>
-            </a:r>
-            <a:r>
-              <a:rPr sz="2400">
-                <a:solidFill>
-                  <a:srgbClr val="1E293B"/>
-                </a:solidFill>
-                <a:latin typeface="Calibri"/>
-              </a:rPr>
-              <a:t>: hình ảnh nhiều tầng nghĩa, gợi cảm nhận đa chiều.</a:t>
-            </a:r>
-          </a:p>
-          <a:p>
-            <a:pPr algn="l" marL="365760" indent="-365760">
-              <a:spcAft>
-                <a:spcPts val="800"/>
-              </a:spcAft>
-              <a:buClr>
-                <a:srgbClr val="1E40AF"/>
-              </a:buClr>
-              <a:buFont typeface="Arial"/>
-              <a:buChar char="•"/>
-            </a:pPr>
-            <a:r>
-              <a:rPr sz="2400" b="1">
-                <a:solidFill>
-                  <a:srgbClr val="1E293B"/>
-                </a:solidFill>
-                <a:latin typeface="Calibri"/>
-              </a:rPr>
-              <a:t>Ngôn ngữ văn học</a:t>
-            </a:r>
-            <a:r>
-              <a:rPr sz="2400">
-                <a:solidFill>
-                  <a:srgbClr val="1E293B"/>
-                </a:solidFill>
-                <a:latin typeface="Calibri"/>
-              </a:rPr>
-              <a:t>: tính hình tượng, thẩm mĩ, đa nghĩa.</a:t>
+                <a:hlinkClick r:id="rId3"/>
+              </a:rPr>
+              <a:t>https://www.youtube.com/watch?v=PaS9osKcC4E</a:t>
             </a:r>
           </a:p>
         </p:txBody>
@@ -14316,14 +14791,14 @@
         </p:nvSpPr>
         <p:spPr>
           <a:xfrm>
-            <a:off x="10253167" y="457200"/>
-            <a:ext cx="1389888" cy="457200"/>
+            <a:off x="10097719" y="457200"/>
+            <a:ext cx="1545336" cy="457200"/>
           </a:xfrm>
           <a:prstGeom prst="roundRect">
             <a:avLst/>
           </a:prstGeom>
           <a:solidFill>
-            <a:srgbClr val="1E40AF"/>
+            <a:srgbClr val="166534"/>
           </a:solidFill>
           <a:ln>
             <a:noFill/>
@@ -14356,7 +14831,7 @@
                 </a:solidFill>
                 <a:latin typeface="Arial"/>
               </a:rPr>
-              <a:t>ĐỀ BÀI</a:t>
+              <a:t>GHI NHỚ</a:t>
             </a:r>
           </a:p>
         </p:txBody>
@@ -14370,7 +14845,7 @@
         <p:spPr>
           <a:xfrm>
             <a:off x="731520" y="274320"/>
-            <a:ext cx="9582912" cy="868680"/>
+            <a:ext cx="9427464" cy="868680"/>
           </a:xfrm>
           <a:prstGeom prst="rect">
             <a:avLst/>
@@ -14390,7 +14865,7 @@
                 </a:solidFill>
                 <a:latin typeface="Arial"/>
               </a:rPr>
-              <a:t>NHAN ĐỀ VÀ CÁC KHỔ LẶP</a:t>
+              <a:t>TRI THỨC NGỮ VĂN</a:t>
             </a:r>
           </a:p>
         </p:txBody>
@@ -14483,7 +14958,7 @@
         <p:spPr>
           <a:xfrm>
             <a:off x="731520" y="1463040"/>
-            <a:ext cx="10789920" cy="3566160"/>
+            <a:ext cx="10789920" cy="4754880"/>
           </a:xfrm>
           <a:prstGeom prst="rect">
             <a:avLst/>
@@ -14496,106 +14971,123 @@
           </a:bodyPr>
           <a:lstStyle/>
           <a:p>
-            <a:pPr algn="l">
+            <a:pPr algn="l" marL="365760" indent="-365760">
               <a:spcAft>
                 <a:spcPts val="800"/>
               </a:spcAft>
+              <a:buClr>
+                <a:srgbClr val="1E40AF"/>
+              </a:buClr>
+              <a:buFont typeface="Arial"/>
+              <a:buChar char="•"/>
             </a:pPr>
             <a:r>
-              <a:rPr sz="2600" b="1">
+              <a:rPr sz="2400" b="1">
                 <a:solidFill>
                   <a:srgbClr val="1E293B"/>
                 </a:solidFill>
                 <a:latin typeface="Calibri"/>
               </a:rPr>
-              <a:t>Nhan đề Nhớ đồng đã bao quát toàn bộ cảm xúc chưa? Nhận xét các khổ 1, 4, 7, 13 và “quy luật” phân bố của chúng.</a:t>
-            </a:r>
-          </a:p>
-        </p:txBody>
-      </p:sp>
-      <p:sp>
-        <p:nvSpPr>
-          <p:cNvPr id="8" name="Rounded Rectangle 7"/>
-          <p:cNvSpPr/>
-          <p:nvPr/>
-        </p:nvSpPr>
-        <p:spPr>
-          <a:xfrm>
-            <a:off x="731520" y="5120640"/>
-            <a:ext cx="10789920" cy="693420"/>
-          </a:xfrm>
-          <a:prstGeom prst="roundRect">
-            <a:avLst>
-              <a:gd name="adj" fmla="val 8000"/>
-            </a:avLst>
-          </a:prstGeom>
-          <a:solidFill>
-            <a:srgbClr val="EFF4FF"/>
-          </a:solidFill>
-          <a:ln w="19050">
-            <a:solidFill>
-              <a:srgbClr val="1E40AF"/>
-            </a:solidFill>
-          </a:ln>
-          <a:effectLst/>
-        </p:spPr>
-        <p:style>
-          <a:lnRef idx="1">
-            <a:schemeClr val="accent1"/>
-          </a:lnRef>
-          <a:fillRef idx="3">
-            <a:schemeClr val="accent1"/>
-          </a:fillRef>
-          <a:effectRef idx="2">
-            <a:schemeClr val="accent1"/>
-          </a:effectRef>
-          <a:fontRef idx="minor">
-            <a:schemeClr val="lt1"/>
-          </a:fontRef>
-        </p:style>
-        <p:txBody>
-          <a:bodyPr rtlCol="0" anchor="ctr"/>
-          <a:lstStyle/>
-          <a:p>
-            <a:pPr algn="ctr"/>
-          </a:p>
-        </p:txBody>
-      </p:sp>
-      <p:sp>
-        <p:nvSpPr>
-          <p:cNvPr id="9" name="TextBox 8"/>
-          <p:cNvSpPr txBox="1"/>
-          <p:nvPr/>
-        </p:nvSpPr>
-        <p:spPr>
-          <a:xfrm>
-            <a:off x="914400" y="5120640"/>
-            <a:ext cx="10424160" cy="693420"/>
-          </a:xfrm>
-          <a:prstGeom prst="rect">
-            <a:avLst/>
-          </a:prstGeom>
-          <a:noFill/>
-        </p:spPr>
-        <p:txBody>
-          <a:bodyPr wrap="square" anchor="ctr" lIns="45720" rIns="45720">
-            <a:spAutoFit/>
-          </a:bodyPr>
-          <a:lstStyle/>
-          <a:p>
-            <a:pPr algn="l">
+              <a:t>Cấu tứ</a:t>
+            </a:r>
+            <a:r>
+              <a:rPr sz="2400">
+                <a:solidFill>
+                  <a:srgbClr val="1E293B"/>
+                </a:solidFill>
+                <a:latin typeface="Calibri"/>
+              </a:rPr>
+              <a:t>: hình dung hướng phát triển hình tượng, cách triển khai bài thơ.</a:t>
+            </a:r>
+          </a:p>
+          <a:p>
+            <a:pPr algn="l" marL="365760" indent="-365760">
               <a:spcAft>
-                <a:spcPts val="400"/>
+                <a:spcPts val="800"/>
               </a:spcAft>
+              <a:buClr>
+                <a:srgbClr val="1E40AF"/>
+              </a:buClr>
+              <a:buFont typeface="Arial"/>
+              <a:buChar char="•"/>
             </a:pPr>
             <a:r>
-              <a:rPr sz="2200" b="1">
-                <a:solidFill>
-                  <a:srgbClr val="1E40AF"/>
+              <a:rPr sz="2400" b="1">
+                <a:solidFill>
+                  <a:srgbClr val="1E293B"/>
                 </a:solidFill>
                 <a:latin typeface="Calibri"/>
               </a:rPr>
-              <a:t>💡 Nghĩa của từ “đồng” có thể mở rộng thế nào?</a:t>
+              <a:t>Tứ thơ</a:t>
+            </a:r>
+            <a:r>
+              <a:rPr sz="2400">
+                <a:solidFill>
+                  <a:srgbClr val="1E293B"/>
+                </a:solidFill>
+                <a:latin typeface="Calibri"/>
+              </a:rPr>
+              <a:t>: sản phẩm của cấu tứ – mọi yếu tố hướng về hình ảnh trung tâm.</a:t>
+            </a:r>
+          </a:p>
+          <a:p>
+            <a:pPr algn="l" marL="365760" indent="-365760">
+              <a:spcAft>
+                <a:spcPts val="800"/>
+              </a:spcAft>
+              <a:buClr>
+                <a:srgbClr val="1E40AF"/>
+              </a:buClr>
+              <a:buFont typeface="Arial"/>
+              <a:buChar char="•"/>
+            </a:pPr>
+            <a:r>
+              <a:rPr sz="2400" b="1">
+                <a:solidFill>
+                  <a:srgbClr val="1E293B"/>
+                </a:solidFill>
+                <a:latin typeface="Calibri"/>
+              </a:rPr>
+              <a:t>Yếu tố tượng trưng</a:t>
+            </a:r>
+            <a:r>
+              <a:rPr sz="2400">
+                <a:solidFill>
+                  <a:srgbClr val="1E293B"/>
+                </a:solidFill>
+                <a:latin typeface="Calibri"/>
+              </a:rPr>
+              <a:t>: hình ảnh nhiều tầng nghĩa, gợi cảm nhận đa chiều.</a:t>
+            </a:r>
+          </a:p>
+          <a:p>
+            <a:pPr algn="l" marL="365760" indent="-365760">
+              <a:spcAft>
+                <a:spcPts val="800"/>
+              </a:spcAft>
+              <a:buClr>
+                <a:srgbClr val="1E40AF"/>
+              </a:buClr>
+              <a:buFont typeface="Arial"/>
+              <a:buChar char="•"/>
+            </a:pPr>
+            <a:r>
+              <a:rPr sz="2400" b="1">
+                <a:solidFill>
+                  <a:srgbClr val="1E293B"/>
+                </a:solidFill>
+                <a:latin typeface="Calibri"/>
+              </a:rPr>
+              <a:t>Ngôn ngữ văn học</a:t>
+            </a:r>
+            <a:r>
+              <a:rPr sz="2400">
+                <a:solidFill>
+                  <a:srgbClr val="1E293B"/>
+                </a:solidFill>
+                <a:latin typeface="Calibri"/>
+              </a:rPr>
+              <a:t>: tính hình tượng, thẩm mĩ, đa nghĩa.</a:t>
             </a:r>
           </a:p>
         </p:txBody>
@@ -14678,14 +15170,14 @@
         </p:nvSpPr>
         <p:spPr>
           <a:xfrm>
-            <a:off x="9942271" y="457200"/>
-            <a:ext cx="1700784" cy="457200"/>
+            <a:off x="10253167" y="457200"/>
+            <a:ext cx="1389888" cy="457200"/>
           </a:xfrm>
           <a:prstGeom prst="roundRect">
             <a:avLst/>
           </a:prstGeom>
           <a:solidFill>
-            <a:srgbClr val="991B1B"/>
+            <a:srgbClr val="1E40AF"/>
           </a:solidFill>
           <a:ln>
             <a:noFill/>
@@ -14718,7 +15210,7 @@
                 </a:solidFill>
                 <a:latin typeface="Arial"/>
               </a:rPr>
-              <a:t>LỜI GIẢI</a:t>
+              <a:t>ĐỀ BÀI</a:t>
             </a:r>
           </a:p>
         </p:txBody>
@@ -14732,7 +15224,7 @@
         <p:spPr>
           <a:xfrm>
             <a:off x="731520" y="274320"/>
-            <a:ext cx="9272016" cy="868680"/>
+            <a:ext cx="9582912" cy="868680"/>
           </a:xfrm>
           <a:prstGeom prst="rect">
             <a:avLst/>
@@ -14845,7 +15337,7 @@
         <p:spPr>
           <a:xfrm>
             <a:off x="731520" y="1463040"/>
-            <a:ext cx="10789920" cy="3474720"/>
+            <a:ext cx="10789920" cy="3566160"/>
           </a:xfrm>
           <a:prstGeom prst="rect">
             <a:avLst/>
@@ -14858,66 +15350,19 @@
           </a:bodyPr>
           <a:lstStyle/>
           <a:p>
-            <a:pPr algn="l" marL="365760" indent="-365760">
+            <a:pPr algn="l">
               <a:spcAft>
                 <a:spcPts val="800"/>
               </a:spcAft>
-              <a:buClr>
-                <a:srgbClr val="1E40AF"/>
-              </a:buClr>
-              <a:buFont typeface="Arial"/>
-              <a:buChar char="•"/>
             </a:pPr>
             <a:r>
-              <a:rPr sz="2300">
+              <a:rPr sz="2600" b="1">
                 <a:solidFill>
                   <a:srgbClr val="1E293B"/>
                 </a:solidFill>
                 <a:latin typeface="Calibri"/>
               </a:rPr>
-              <a:t>“Đồng”: ruộng đồng → quê hương, đồng bào, đồng chí, cuộc đời tự do.</a:t>
-            </a:r>
-          </a:p>
-          <a:p>
-            <a:pPr algn="l" marL="365760" indent="-365760">
-              <a:spcAft>
-                <a:spcPts val="800"/>
-              </a:spcAft>
-              <a:buClr>
-                <a:srgbClr val="1E40AF"/>
-              </a:buClr>
-              <a:buFont typeface="Arial"/>
-              <a:buChar char="•"/>
-            </a:pPr>
-            <a:r>
-              <a:rPr sz="2300">
-                <a:solidFill>
-                  <a:srgbClr val="1E293B"/>
-                </a:solidFill>
-                <a:latin typeface="Calibri"/>
-              </a:rPr>
-              <a:t>Khổ 1, 4, 7, 13 lặp lại, biến đổi: “trưa thương nhớ” → “trưa hiu quạnh”.</a:t>
-            </a:r>
-          </a:p>
-          <a:p>
-            <a:pPr algn="l" marL="365760" indent="-365760">
-              <a:spcAft>
-                <a:spcPts val="800"/>
-              </a:spcAft>
-              <a:buClr>
-                <a:srgbClr val="1E40AF"/>
-              </a:buClr>
-              <a:buFont typeface="Arial"/>
-              <a:buChar char="•"/>
-            </a:pPr>
-            <a:r>
-              <a:rPr sz="2300">
-                <a:solidFill>
-                  <a:srgbClr val="1E293B"/>
-                </a:solidFill>
-                <a:latin typeface="Calibri"/>
-              </a:rPr>
-              <a:t>Là điểm tựa, nhịp “trở về” của mạch nhớ.</a:t>
+              <a:t>Nhan đề Nhớ đồng đã bao quát toàn bộ cảm xúc chưa? Nhận xét các khổ 1, 4, 7, 13 và “quy luật” phân bố của chúng.</a:t>
             </a:r>
           </a:p>
         </p:txBody>
@@ -14930,8 +15375,8 @@
         </p:nvSpPr>
         <p:spPr>
           <a:xfrm>
-            <a:off x="731520" y="5074920"/>
-            <a:ext cx="10789920" cy="731520"/>
+            <a:off x="731520" y="5120640"/>
+            <a:ext cx="10789920" cy="693420"/>
           </a:xfrm>
           <a:prstGeom prst="roundRect">
             <a:avLst>
@@ -14939,11 +15384,11 @@
             </a:avLst>
           </a:prstGeom>
           <a:solidFill>
-            <a:srgbClr val="FEF2F2"/>
+            <a:srgbClr val="EFF4FF"/>
           </a:solidFill>
           <a:ln w="19050">
             <a:solidFill>
-              <a:srgbClr val="991B1B"/>
+              <a:srgbClr val="1E40AF"/>
             </a:solidFill>
           </a:ln>
           <a:effectLst/>
@@ -14978,8 +15423,8 @@
         </p:nvSpPr>
         <p:spPr>
           <a:xfrm>
-            <a:off x="914400" y="5074920"/>
-            <a:ext cx="10424160" cy="731520"/>
+            <a:off x="914400" y="5120640"/>
+            <a:ext cx="10424160" cy="693420"/>
           </a:xfrm>
           <a:prstGeom prst="rect">
             <a:avLst/>
@@ -14998,13 +15443,13 @@
               </a:spcAft>
             </a:pPr>
             <a:r>
-              <a:rPr sz="2400" b="1">
-                <a:solidFill>
-                  <a:srgbClr val="991B1B"/>
+              <a:rPr sz="2200" b="1">
+                <a:solidFill>
+                  <a:srgbClr val="1E40AF"/>
                 </a:solidFill>
                 <a:latin typeface="Calibri"/>
               </a:rPr>
-              <a:t>Cấu tứ theo mạch nhớ có điểm tựa lặp lại.</a:t>
+              <a:t>💡 Nghĩa của từ “đồng” có thể mở rộng thế nào?</a:t>
             </a:r>
           </a:p>
         </p:txBody>
@@ -15087,14 +15532,14 @@
         </p:nvSpPr>
         <p:spPr>
           <a:xfrm>
-            <a:off x="10253167" y="457200"/>
-            <a:ext cx="1389888" cy="457200"/>
+            <a:off x="9942271" y="457200"/>
+            <a:ext cx="1700784" cy="457200"/>
           </a:xfrm>
           <a:prstGeom prst="roundRect">
             <a:avLst/>
           </a:prstGeom>
           <a:solidFill>
-            <a:srgbClr val="1E40AF"/>
+            <a:srgbClr val="991B1B"/>
           </a:solidFill>
           <a:ln>
             <a:noFill/>
@@ -15127,7 +15572,7 @@
                 </a:solidFill>
                 <a:latin typeface="Arial"/>
               </a:rPr>
-              <a:t>ĐỀ BÀI</a:t>
+              <a:t>LỜI GIẢI</a:t>
             </a:r>
           </a:p>
         </p:txBody>
@@ -15141,7 +15586,7 @@
         <p:spPr>
           <a:xfrm>
             <a:off x="731520" y="274320"/>
-            <a:ext cx="9582912" cy="868680"/>
+            <a:ext cx="9272016" cy="868680"/>
           </a:xfrm>
           <a:prstGeom prst="rect">
             <a:avLst/>
@@ -15161,7 +15606,7 @@
                 </a:solidFill>
                 <a:latin typeface="Arial"/>
               </a:rPr>
-              <a:t>HỆ THỐNG HÌNH ẢNH VÀ TỪ “ĐÂU”</a:t>
+              <a:t>NHAN ĐỀ VÀ CÁC KHỔ LẶP</a:t>
             </a:r>
           </a:p>
         </p:txBody>
@@ -15254,7 +15699,7 @@
         <p:spPr>
           <a:xfrm>
             <a:off x="731520" y="1463040"/>
-            <a:ext cx="10789920" cy="3566160"/>
+            <a:ext cx="10789920" cy="3474720"/>
           </a:xfrm>
           <a:prstGeom prst="rect">
             <a:avLst/>
@@ -15267,19 +15712,66 @@
           </a:bodyPr>
           <a:lstStyle/>
           <a:p>
-            <a:pPr algn="l">
+            <a:pPr algn="l" marL="365760" indent="-365760">
               <a:spcAft>
                 <a:spcPts val="800"/>
               </a:spcAft>
+              <a:buClr>
+                <a:srgbClr val="1E40AF"/>
+              </a:buClr>
+              <a:buFont typeface="Arial"/>
+              <a:buChar char="•"/>
             </a:pPr>
             <a:r>
-              <a:rPr sz="2600" b="1">
+              <a:rPr sz="2300">
                 <a:solidFill>
                   <a:srgbClr val="1E293B"/>
                 </a:solidFill>
                 <a:latin typeface="Calibri"/>
               </a:rPr>
-              <a:t>Hệ thống hình ảnh biểu đạt nội dung gì? Từ “đâu” xuất hiện nhiều lần đóng vai trò gì trong cấu tứ?</a:t>
+              <a:t>“Đồng”: ruộng đồng → quê hương, đồng bào, đồng chí, cuộc đời tự do.</a:t>
+            </a:r>
+          </a:p>
+          <a:p>
+            <a:pPr algn="l" marL="365760" indent="-365760">
+              <a:spcAft>
+                <a:spcPts val="800"/>
+              </a:spcAft>
+              <a:buClr>
+                <a:srgbClr val="1E40AF"/>
+              </a:buClr>
+              <a:buFont typeface="Arial"/>
+              <a:buChar char="•"/>
+            </a:pPr>
+            <a:r>
+              <a:rPr sz="2300">
+                <a:solidFill>
+                  <a:srgbClr val="1E293B"/>
+                </a:solidFill>
+                <a:latin typeface="Calibri"/>
+              </a:rPr>
+              <a:t>Khổ 1, 4, 7, 13 lặp lại, biến đổi: “trưa thương nhớ” → “trưa hiu quạnh”.</a:t>
+            </a:r>
+          </a:p>
+          <a:p>
+            <a:pPr algn="l" marL="365760" indent="-365760">
+              <a:spcAft>
+                <a:spcPts val="800"/>
+              </a:spcAft>
+              <a:buClr>
+                <a:srgbClr val="1E40AF"/>
+              </a:buClr>
+              <a:buFont typeface="Arial"/>
+              <a:buChar char="•"/>
+            </a:pPr>
+            <a:r>
+              <a:rPr sz="2300">
+                <a:solidFill>
+                  <a:srgbClr val="1E293B"/>
+                </a:solidFill>
+                <a:latin typeface="Calibri"/>
+              </a:rPr>
+              <a:t>Là điểm tựa, nhịp “trở về” của mạch nhớ.</a:t>
             </a:r>
           </a:p>
         </p:txBody>
@@ -15292,8 +15784,8 @@
         </p:nvSpPr>
         <p:spPr>
           <a:xfrm>
-            <a:off x="731520" y="5120640"/>
-            <a:ext cx="10789920" cy="693420"/>
+            <a:off x="731520" y="5074920"/>
+            <a:ext cx="10789920" cy="731520"/>
           </a:xfrm>
           <a:prstGeom prst="roundRect">
             <a:avLst>
@@ -15301,11 +15793,11 @@
             </a:avLst>
           </a:prstGeom>
           <a:solidFill>
-            <a:srgbClr val="EFF4FF"/>
+            <a:srgbClr val="FEF2F2"/>
           </a:solidFill>
           <a:ln w="19050">
             <a:solidFill>
-              <a:srgbClr val="1E40AF"/>
+              <a:srgbClr val="991B1B"/>
             </a:solidFill>
           </a:ln>
           <a:effectLst/>
@@ -15340,8 +15832,8 @@
         </p:nvSpPr>
         <p:spPr>
           <a:xfrm>
-            <a:off x="914400" y="5120640"/>
-            <a:ext cx="10424160" cy="693420"/>
+            <a:off x="914400" y="5074920"/>
+            <a:ext cx="10424160" cy="731520"/>
           </a:xfrm>
           <a:prstGeom prst="rect">
             <a:avLst/>
@@ -15360,13 +15852,13 @@
               </a:spcAft>
             </a:pPr>
             <a:r>
-              <a:rPr sz="2200" b="1">
-                <a:solidFill>
-                  <a:srgbClr val="1E40AF"/>
+              <a:rPr sz="2400" b="1">
+                <a:solidFill>
+                  <a:srgbClr val="991B1B"/>
                 </a:solidFill>
                 <a:latin typeface="Calibri"/>
               </a:rPr>
-              <a:t>💡 Phân loại: cảnh quê – người quê – cái tôi.</a:t>
+              <a:t>Cấu tứ theo mạch nhớ có điểm tựa lặp lại.</a:t>
             </a:r>
           </a:p>
         </p:txBody>
@@ -15449,14 +15941,14 @@
         </p:nvSpPr>
         <p:spPr>
           <a:xfrm>
-            <a:off x="9942271" y="457200"/>
-            <a:ext cx="1700784" cy="457200"/>
+            <a:off x="10253167" y="457200"/>
+            <a:ext cx="1389888" cy="457200"/>
           </a:xfrm>
           <a:prstGeom prst="roundRect">
             <a:avLst/>
           </a:prstGeom>
           <a:solidFill>
-            <a:srgbClr val="991B1B"/>
+            <a:srgbClr val="1E40AF"/>
           </a:solidFill>
           <a:ln>
             <a:noFill/>
@@ -15489,7 +15981,7 @@
                 </a:solidFill>
                 <a:latin typeface="Arial"/>
               </a:rPr>
-              <a:t>LỜI GIẢI</a:t>
+              <a:t>ĐỀ BÀI</a:t>
             </a:r>
           </a:p>
         </p:txBody>
@@ -15503,7 +15995,7 @@
         <p:spPr>
           <a:xfrm>
             <a:off x="731520" y="274320"/>
-            <a:ext cx="9272016" cy="868680"/>
+            <a:ext cx="9582912" cy="868680"/>
           </a:xfrm>
           <a:prstGeom prst="rect">
             <a:avLst/>
@@ -15616,7 +16108,7 @@
         <p:spPr>
           <a:xfrm>
             <a:off x="731520" y="1463040"/>
-            <a:ext cx="10789920" cy="3474720"/>
+            <a:ext cx="10789920" cy="3566160"/>
           </a:xfrm>
           <a:prstGeom prst="rect">
             <a:avLst/>
@@ -15629,87 +16121,19 @@
           </a:bodyPr>
           <a:lstStyle/>
           <a:p>
-            <a:pPr algn="l" marL="365760" indent="-365760">
+            <a:pPr algn="l">
               <a:spcAft>
                 <a:spcPts val="800"/>
               </a:spcAft>
-              <a:buClr>
-                <a:srgbClr val="1E40AF"/>
-              </a:buClr>
-              <a:buFont typeface="Arial"/>
-              <a:buChar char="•"/>
             </a:pPr>
             <a:r>
-              <a:rPr sz="2300">
+              <a:rPr sz="2600" b="1">
                 <a:solidFill>
                   <a:srgbClr val="1E293B"/>
                 </a:solidFill>
                 <a:latin typeface="Calibri"/>
               </a:rPr>
-              <a:t>Cảnh quê: gió, ruộng tre, ô mạ, nương khoai.</a:t>
-            </a:r>
-          </a:p>
-          <a:p>
-            <a:pPr algn="l" marL="365760" indent="-365760">
-              <a:spcAft>
-                <a:spcPts val="800"/>
-              </a:spcAft>
-              <a:buClr>
-                <a:srgbClr val="1E40AF"/>
-              </a:buClr>
-              <a:buFont typeface="Arial"/>
-              <a:buChar char="•"/>
-            </a:pPr>
-            <a:r>
-              <a:rPr sz="2300">
-                <a:solidFill>
-                  <a:srgbClr val="1E293B"/>
-                </a:solidFill>
-                <a:latin typeface="Calibri"/>
-              </a:rPr>
-              <a:t>Người quê: lưng cong xuống luống cày, bàn tay vãi giống, mẹ già.</a:t>
-            </a:r>
-          </a:p>
-          <a:p>
-            <a:pPr algn="l" marL="365760" indent="-365760">
-              <a:spcAft>
-                <a:spcPts val="800"/>
-              </a:spcAft>
-              <a:buClr>
-                <a:srgbClr val="1E40AF"/>
-              </a:buClr>
-              <a:buFont typeface="Arial"/>
-              <a:buChar char="•"/>
-            </a:pPr>
-            <a:r>
-              <a:rPr sz="2300">
-                <a:solidFill>
-                  <a:srgbClr val="1E293B"/>
-                </a:solidFill>
-                <a:latin typeface="Calibri"/>
-              </a:rPr>
-              <a:t>Cái tôi: băn khoăn → say đồng hương nắng → cánh chim nhớ gió mây.</a:t>
-            </a:r>
-          </a:p>
-          <a:p>
-            <a:pPr algn="l" marL="365760" indent="-365760">
-              <a:spcAft>
-                <a:spcPts val="800"/>
-              </a:spcAft>
-              <a:buClr>
-                <a:srgbClr val="1E40AF"/>
-              </a:buClr>
-              <a:buFont typeface="Arial"/>
-              <a:buChar char="•"/>
-            </a:pPr>
-            <a:r>
-              <a:rPr sz="2300">
-                <a:solidFill>
-                  <a:srgbClr val="1E293B"/>
-                </a:solidFill>
-                <a:latin typeface="Calibri"/>
-              </a:rPr>
-              <a:t>“Đâu” mở ra chuỗi hồi tưởng, liên kết mạch nhớ.</a:t>
+              <a:t>Hệ thống hình ảnh biểu đạt nội dung gì? Từ “đâu” xuất hiện nhiều lần đóng vai trò gì trong cấu tứ?</a:t>
             </a:r>
           </a:p>
         </p:txBody>
@@ -15722,8 +16146,8 @@
         </p:nvSpPr>
         <p:spPr>
           <a:xfrm>
-            <a:off x="731520" y="5074920"/>
-            <a:ext cx="10789920" cy="731520"/>
+            <a:off x="731520" y="5120640"/>
+            <a:ext cx="10789920" cy="693420"/>
           </a:xfrm>
           <a:prstGeom prst="roundRect">
             <a:avLst>
@@ -15731,11 +16155,11 @@
             </a:avLst>
           </a:prstGeom>
           <a:solidFill>
-            <a:srgbClr val="FEF2F2"/>
+            <a:srgbClr val="EFF4FF"/>
           </a:solidFill>
           <a:ln w="19050">
             <a:solidFill>
-              <a:srgbClr val="991B1B"/>
+              <a:srgbClr val="1E40AF"/>
             </a:solidFill>
           </a:ln>
           <a:effectLst/>
@@ -15770,8 +16194,8 @@
         </p:nvSpPr>
         <p:spPr>
           <a:xfrm>
-            <a:off x="914400" y="5074920"/>
-            <a:ext cx="10424160" cy="731520"/>
+            <a:off x="914400" y="5120640"/>
+            <a:ext cx="10424160" cy="693420"/>
           </a:xfrm>
           <a:prstGeom prst="rect">
             <a:avLst/>
@@ -15790,13 +16214,13 @@
               </a:spcAft>
             </a:pPr>
             <a:r>
-              <a:rPr sz="2400" b="1">
-                <a:solidFill>
-                  <a:srgbClr val="991B1B"/>
+              <a:rPr sz="2200" b="1">
+                <a:solidFill>
+                  <a:srgbClr val="1E40AF"/>
                 </a:solidFill>
                 <a:latin typeface="Calibri"/>
               </a:rPr>
-              <a:t>Cảnh – người – mình đan cài trong nỗi nhớ.</a:t>
+              <a:t>💡 Phân loại: cảnh quê – người quê – cái tôi.</a:t>
             </a:r>
           </a:p>
         </p:txBody>

--- a/mon/ngu_van/slide/lop11/Slide_NGUVAN11_Bai2_CauTuVaHinhAnhTrongThoTruTinh_T12-22.pptx
+++ b/mon/ngu_van/slide/lop11/Slide_NGUVAN11_Bai2_CauTuVaHinhAnhTrongThoTruTinh_T12-22.pptx
@@ -5292,7 +5292,7 @@
                 </a:solidFill>
                 <a:latin typeface="Calibri"/>
               </a:rPr>
-              <a:t>Trường THPT Vĩnh Thạnh – Tổ Ngữ văn – Tiếng Anh</a:t>
+              <a:t>Trường THPT – Tổ Ngữ văn – Tiếng Anh</a:t>
             </a:r>
           </a:p>
         </p:txBody>
@@ -13443,103 +13443,6 @@
       <p:grpSpPr/>
       <p:sp>
         <p:nvSpPr>
-          <p:cNvPr id="2" name="Rectangle 1"/>
-          <p:cNvSpPr/>
-          <p:nvPr/>
-        </p:nvSpPr>
-        <p:spPr>
-          <a:xfrm>
-            <a:off x="457200" y="384048"/>
-            <a:ext cx="109728" cy="658368"/>
-          </a:xfrm>
-          <a:prstGeom prst="rect">
-            <a:avLst/>
-          </a:prstGeom>
-          <a:solidFill>
-            <a:srgbClr val="1E40AF"/>
-          </a:solidFill>
-          <a:ln>
-            <a:noFill/>
-          </a:ln>
-          <a:effectLst/>
-        </p:spPr>
-        <p:style>
-          <a:lnRef idx="1">
-            <a:schemeClr val="accent1"/>
-          </a:lnRef>
-          <a:fillRef idx="3">
-            <a:schemeClr val="accent1"/>
-          </a:fillRef>
-          <a:effectRef idx="2">
-            <a:schemeClr val="accent1"/>
-          </a:effectRef>
-          <a:fontRef idx="minor">
-            <a:schemeClr val="lt1"/>
-          </a:fontRef>
-        </p:style>
-        <p:txBody>
-          <a:bodyPr rtlCol="0" anchor="ctr"/>
-          <a:lstStyle/>
-          <a:p>
-            <a:pPr algn="ctr"/>
-          </a:p>
-        </p:txBody>
-      </p:sp>
-      <p:sp>
-        <p:nvSpPr>
-          <p:cNvPr id="3" name="Rounded Rectangle 2"/>
-          <p:cNvSpPr/>
-          <p:nvPr/>
-        </p:nvSpPr>
-        <p:spPr>
-          <a:xfrm>
-            <a:off x="10097719" y="457200"/>
-            <a:ext cx="1545336" cy="457200"/>
-          </a:xfrm>
-          <a:prstGeom prst="roundRect">
-            <a:avLst/>
-          </a:prstGeom>
-          <a:solidFill>
-            <a:srgbClr val="166534"/>
-          </a:solidFill>
-          <a:ln>
-            <a:noFill/>
-          </a:ln>
-          <a:effectLst/>
-        </p:spPr>
-        <p:style>
-          <a:lnRef idx="1">
-            <a:schemeClr val="accent1"/>
-          </a:lnRef>
-          <a:fillRef idx="3">
-            <a:schemeClr val="accent1"/>
-          </a:fillRef>
-          <a:effectRef idx="2">
-            <a:schemeClr val="accent1"/>
-          </a:effectRef>
-          <a:fontRef idx="minor">
-            <a:schemeClr val="lt1"/>
-          </a:fontRef>
-        </p:style>
-        <p:txBody>
-          <a:bodyPr rtlCol="0" anchor="ctr" wrap="none" tIns="0" bIns="0"/>
-          <a:lstStyle/>
-          <a:p>
-            <a:pPr algn="ctr"/>
-            <a:r>
-              <a:rPr sz="1400" b="1">
-                <a:solidFill>
-                  <a:srgbClr val="FFFFFF"/>
-                </a:solidFill>
-                <a:latin typeface="Arial"/>
-              </a:rPr>
-              <a:t>CỦNG CỐ</a:t>
-            </a:r>
-          </a:p>
-        </p:txBody>
-      </p:sp>
-      <p:sp>
-        <p:nvSpPr>
           <p:cNvPr id="4" name="TextBox 3"/>
           <p:cNvSpPr txBox="1"/>
           <p:nvPr/>
@@ -13651,30 +13554,2073 @@
           </a:p>
         </p:txBody>
       </p:sp>
-      <p:pic>
-        <p:nvPicPr>
-          <p:cNvPr id="7" name="Picture 6" descr="SoDoTuDuy_NGUVAN11_Bai2_CauTuVaHinhAnhTrongThoTruTinh_T12-22.png"/>
-          <p:cNvPicPr>
-            <a:picLocks noChangeAspect="1"/>
-          </p:cNvPicPr>
-          <p:nvPr/>
-        </p:nvPicPr>
-        <p:blipFill>
-          <a:blip r:embed="rId2"/>
-          <a:stretch>
-            <a:fillRect/>
-          </a:stretch>
-        </p:blipFill>
-        <p:spPr>
-          <a:xfrm>
-            <a:off x="1788855" y="1371600"/>
-            <a:ext cx="8675250" cy="4846320"/>
-          </a:xfrm>
-          <a:prstGeom prst="rect">
-            <a:avLst/>
-          </a:prstGeom>
-        </p:spPr>
-      </p:pic>
+      <p:cxnSp>
+        <p:nvCxnSpPr>
+          <p:cNvPr id="7" name="Connector 6"/>
+          <p:cNvCxnSpPr/>
+          <p:nvPr/>
+        </p:nvCxnSpPr>
+        <p:spPr>
+          <a:xfrm flipH="1" flipV="1">
+            <a:off x="4338888" y="2670962"/>
+            <a:ext cx="1688379" cy="1283818"/>
+          </a:xfrm>
+          <a:prstGeom prst="line">
+            <a:avLst/>
+          </a:prstGeom>
+          <a:ln w="44450">
+            <a:solidFill>
+              <a:srgbClr val="548235"/>
+            </a:solidFill>
+          </a:ln>
+        </p:spPr>
+        <p:style>
+          <a:lnRef idx="2">
+            <a:schemeClr val="accent1"/>
+          </a:lnRef>
+          <a:fillRef idx="0">
+            <a:schemeClr val="accent1"/>
+          </a:fillRef>
+          <a:effectRef idx="1">
+            <a:schemeClr val="accent1"/>
+          </a:effectRef>
+          <a:fontRef idx="minor">
+            <a:schemeClr val="tx1"/>
+          </a:fontRef>
+        </p:style>
+      </p:cxnSp>
+      <p:cxnSp>
+        <p:nvCxnSpPr>
+          <p:cNvPr id="8" name="Connector 7"/>
+          <p:cNvCxnSpPr/>
+          <p:nvPr/>
+        </p:nvCxnSpPr>
+        <p:spPr>
+          <a:xfrm flipH="1" flipV="1">
+            <a:off x="2457691" y="2031827"/>
+            <a:ext cx="1881197" cy="639135"/>
+          </a:xfrm>
+          <a:prstGeom prst="line">
+            <a:avLst/>
+          </a:prstGeom>
+          <a:ln w="15875">
+            <a:solidFill>
+              <a:srgbClr val="548235"/>
+            </a:solidFill>
+          </a:ln>
+        </p:spPr>
+        <p:style>
+          <a:lnRef idx="2">
+            <a:schemeClr val="accent1"/>
+          </a:lnRef>
+          <a:fillRef idx="0">
+            <a:schemeClr val="accent1"/>
+          </a:fillRef>
+          <a:effectRef idx="1">
+            <a:schemeClr val="accent1"/>
+          </a:effectRef>
+          <a:fontRef idx="minor">
+            <a:schemeClr val="tx1"/>
+          </a:fontRef>
+        </p:style>
+      </p:cxnSp>
+      <p:sp>
+        <p:nvSpPr>
+          <p:cNvPr id="9" name="Rounded Rectangle 8"/>
+          <p:cNvSpPr/>
+          <p:nvPr/>
+        </p:nvSpPr>
+        <p:spPr>
+          <a:xfrm>
+            <a:off x="1154950" y="1755515"/>
+            <a:ext cx="1302741" cy="552622"/>
+          </a:xfrm>
+          <a:prstGeom prst="roundRect">
+            <a:avLst>
+              <a:gd name="adj" fmla="val 50000"/>
+            </a:avLst>
+          </a:prstGeom>
+          <a:solidFill>
+            <a:srgbClr val="EDF5E8"/>
+          </a:solidFill>
+          <a:ln w="15875">
+            <a:solidFill>
+              <a:srgbClr val="548235"/>
+            </a:solidFill>
+          </a:ln>
+          <a:effectLst/>
+        </p:spPr>
+        <p:style>
+          <a:lnRef idx="1">
+            <a:schemeClr val="accent1"/>
+          </a:lnRef>
+          <a:fillRef idx="3">
+            <a:schemeClr val="accent1"/>
+          </a:fillRef>
+          <a:effectRef idx="2">
+            <a:schemeClr val="accent1"/>
+          </a:effectRef>
+          <a:fontRef idx="minor">
+            <a:schemeClr val="lt1"/>
+          </a:fontRef>
+        </p:style>
+        <p:txBody>
+          <a:bodyPr rtlCol="0" anchor="ctr" wrap="none" lIns="64000" rIns="64000" tIns="25400" bIns="25400"/>
+          <a:lstStyle/>
+          <a:p>
+            <a:pPr algn="ctr"/>
+            <a:r>
+              <a:rPr sz="1300" b="1">
+                <a:solidFill>
+                  <a:srgbClr val="8B0000"/>
+                </a:solidFill>
+                <a:latin typeface="Calibri"/>
+              </a:rPr>
+              <a:t>Cấu tứ – tứ</a:t>
+            </a:r>
+          </a:p>
+          <a:p>
+            <a:pPr algn="ctr"/>
+            <a:r>
+              <a:rPr sz="1300" b="1">
+                <a:solidFill>
+                  <a:srgbClr val="8B0000"/>
+                </a:solidFill>
+                <a:latin typeface="Calibri"/>
+              </a:rPr>
+              <a:t>thơ</a:t>
+            </a:r>
+          </a:p>
+        </p:txBody>
+      </p:sp>
+      <p:cxnSp>
+        <p:nvCxnSpPr>
+          <p:cNvPr id="10" name="Connector 9"/>
+          <p:cNvCxnSpPr/>
+          <p:nvPr/>
+        </p:nvCxnSpPr>
+        <p:spPr>
+          <a:xfrm flipH="1" flipV="1">
+            <a:off x="2721851" y="2558628"/>
+            <a:ext cx="1617037" cy="112334"/>
+          </a:xfrm>
+          <a:prstGeom prst="line">
+            <a:avLst/>
+          </a:prstGeom>
+          <a:ln w="15875">
+            <a:solidFill>
+              <a:srgbClr val="548235"/>
+            </a:solidFill>
+          </a:ln>
+        </p:spPr>
+        <p:style>
+          <a:lnRef idx="2">
+            <a:schemeClr val="accent1"/>
+          </a:lnRef>
+          <a:fillRef idx="0">
+            <a:schemeClr val="accent1"/>
+          </a:fillRef>
+          <a:effectRef idx="1">
+            <a:schemeClr val="accent1"/>
+          </a:effectRef>
+          <a:fontRef idx="minor">
+            <a:schemeClr val="tx1"/>
+          </a:fontRef>
+        </p:style>
+      </p:cxnSp>
+      <p:sp>
+        <p:nvSpPr>
+          <p:cNvPr id="11" name="Rounded Rectangle 10"/>
+          <p:cNvSpPr/>
+          <p:nvPr/>
+        </p:nvSpPr>
+        <p:spPr>
+          <a:xfrm>
+            <a:off x="890790" y="2383028"/>
+            <a:ext cx="1831061" cy="351200"/>
+          </a:xfrm>
+          <a:prstGeom prst="roundRect">
+            <a:avLst>
+              <a:gd name="adj" fmla="val 50000"/>
+            </a:avLst>
+          </a:prstGeom>
+          <a:solidFill>
+            <a:srgbClr val="EDF5E8"/>
+          </a:solidFill>
+          <a:ln w="15875">
+            <a:solidFill>
+              <a:srgbClr val="548235"/>
+            </a:solidFill>
+          </a:ln>
+          <a:effectLst/>
+        </p:spPr>
+        <p:style>
+          <a:lnRef idx="1">
+            <a:schemeClr val="accent1"/>
+          </a:lnRef>
+          <a:fillRef idx="3">
+            <a:schemeClr val="accent1"/>
+          </a:fillRef>
+          <a:effectRef idx="2">
+            <a:schemeClr val="accent1"/>
+          </a:effectRef>
+          <a:fontRef idx="minor">
+            <a:schemeClr val="lt1"/>
+          </a:fontRef>
+        </p:style>
+        <p:txBody>
+          <a:bodyPr rtlCol="0" anchor="ctr" wrap="none" lIns="64000" rIns="64000" tIns="25400" bIns="25400"/>
+          <a:lstStyle/>
+          <a:p>
+            <a:pPr algn="ctr"/>
+            <a:r>
+              <a:rPr sz="1300" b="0">
+                <a:solidFill>
+                  <a:srgbClr val="000000"/>
+                </a:solidFill>
+                <a:latin typeface="Calibri"/>
+              </a:rPr>
+              <a:t>Yếu tố tượng trưng</a:t>
+            </a:r>
+          </a:p>
+        </p:txBody>
+      </p:sp>
+      <p:cxnSp>
+        <p:nvCxnSpPr>
+          <p:cNvPr id="12" name="Connector 11"/>
+          <p:cNvCxnSpPr/>
+          <p:nvPr/>
+        </p:nvCxnSpPr>
+        <p:spPr>
+          <a:xfrm flipH="1">
+            <a:off x="2635999" y="2670962"/>
+            <a:ext cx="1702889" cy="313756"/>
+          </a:xfrm>
+          <a:prstGeom prst="line">
+            <a:avLst/>
+          </a:prstGeom>
+          <a:ln w="15875">
+            <a:solidFill>
+              <a:srgbClr val="548235"/>
+            </a:solidFill>
+          </a:ln>
+        </p:spPr>
+        <p:style>
+          <a:lnRef idx="2">
+            <a:schemeClr val="accent1"/>
+          </a:lnRef>
+          <a:fillRef idx="0">
+            <a:schemeClr val="accent1"/>
+          </a:fillRef>
+          <a:effectRef idx="1">
+            <a:schemeClr val="accent1"/>
+          </a:effectRef>
+          <a:fontRef idx="minor">
+            <a:schemeClr val="tx1"/>
+          </a:fontRef>
+        </p:style>
+      </p:cxnSp>
+      <p:sp>
+        <p:nvSpPr>
+          <p:cNvPr id="13" name="Rounded Rectangle 12"/>
+          <p:cNvSpPr/>
+          <p:nvPr/>
+        </p:nvSpPr>
+        <p:spPr>
+          <a:xfrm>
+            <a:off x="976642" y="2809118"/>
+            <a:ext cx="1659357" cy="351200"/>
+          </a:xfrm>
+          <a:prstGeom prst="roundRect">
+            <a:avLst>
+              <a:gd name="adj" fmla="val 50000"/>
+            </a:avLst>
+          </a:prstGeom>
+          <a:solidFill>
+            <a:srgbClr val="EDF5E8"/>
+          </a:solidFill>
+          <a:ln w="15875">
+            <a:solidFill>
+              <a:srgbClr val="548235"/>
+            </a:solidFill>
+          </a:ln>
+          <a:effectLst/>
+        </p:spPr>
+        <p:style>
+          <a:lnRef idx="1">
+            <a:schemeClr val="accent1"/>
+          </a:lnRef>
+          <a:fillRef idx="3">
+            <a:schemeClr val="accent1"/>
+          </a:fillRef>
+          <a:effectRef idx="2">
+            <a:schemeClr val="accent1"/>
+          </a:effectRef>
+          <a:fontRef idx="minor">
+            <a:schemeClr val="lt1"/>
+          </a:fontRef>
+        </p:style>
+        <p:txBody>
+          <a:bodyPr rtlCol="0" anchor="ctr" wrap="none" lIns="64000" rIns="64000" tIns="25400" bIns="25400"/>
+          <a:lstStyle/>
+          <a:p>
+            <a:pPr algn="ctr"/>
+            <a:r>
+              <a:rPr sz="1300" b="0">
+                <a:solidFill>
+                  <a:srgbClr val="000000"/>
+                </a:solidFill>
+                <a:latin typeface="Calibri"/>
+              </a:rPr>
+              <a:t>Ngôn ngữ văn học</a:t>
+            </a:r>
+          </a:p>
+        </p:txBody>
+      </p:sp>
+      <p:cxnSp>
+        <p:nvCxnSpPr>
+          <p:cNvPr id="14" name="Connector 13"/>
+          <p:cNvCxnSpPr/>
+          <p:nvPr/>
+        </p:nvCxnSpPr>
+        <p:spPr>
+          <a:xfrm flipH="1">
+            <a:off x="2507221" y="2670962"/>
+            <a:ext cx="1831667" cy="739846"/>
+          </a:xfrm>
+          <a:prstGeom prst="line">
+            <a:avLst/>
+          </a:prstGeom>
+          <a:ln w="15875">
+            <a:solidFill>
+              <a:srgbClr val="548235"/>
+            </a:solidFill>
+          </a:ln>
+        </p:spPr>
+        <p:style>
+          <a:lnRef idx="2">
+            <a:schemeClr val="accent1"/>
+          </a:lnRef>
+          <a:fillRef idx="0">
+            <a:schemeClr val="accent1"/>
+          </a:fillRef>
+          <a:effectRef idx="1">
+            <a:schemeClr val="accent1"/>
+          </a:effectRef>
+          <a:fontRef idx="minor">
+            <a:schemeClr val="tx1"/>
+          </a:fontRef>
+        </p:style>
+      </p:cxnSp>
+      <p:sp>
+        <p:nvSpPr>
+          <p:cNvPr id="15" name="Rounded Rectangle 14"/>
+          <p:cNvSpPr/>
+          <p:nvPr/>
+        </p:nvSpPr>
+        <p:spPr>
+          <a:xfrm>
+            <a:off x="1105420" y="3235208"/>
+            <a:ext cx="1401801" cy="351200"/>
+          </a:xfrm>
+          <a:prstGeom prst="roundRect">
+            <a:avLst>
+              <a:gd name="adj" fmla="val 50000"/>
+            </a:avLst>
+          </a:prstGeom>
+          <a:solidFill>
+            <a:srgbClr val="EDF5E8"/>
+          </a:solidFill>
+          <a:ln w="15875">
+            <a:solidFill>
+              <a:srgbClr val="548235"/>
+            </a:solidFill>
+          </a:ln>
+          <a:effectLst/>
+        </p:spPr>
+        <p:style>
+          <a:lnRef idx="1">
+            <a:schemeClr val="accent1"/>
+          </a:lnRef>
+          <a:fillRef idx="3">
+            <a:schemeClr val="accent1"/>
+          </a:fillRef>
+          <a:effectRef idx="2">
+            <a:schemeClr val="accent1"/>
+          </a:effectRef>
+          <a:fontRef idx="minor">
+            <a:schemeClr val="lt1"/>
+          </a:fontRef>
+        </p:style>
+        <p:txBody>
+          <a:bodyPr rtlCol="0" anchor="ctr" wrap="none" lIns="64000" rIns="64000" tIns="25400" bIns="25400"/>
+          <a:lstStyle/>
+          <a:p>
+            <a:pPr algn="ctr"/>
+            <a:r>
+              <a:rPr sz="1300" b="0">
+                <a:solidFill>
+                  <a:srgbClr val="000000"/>
+                </a:solidFill>
+                <a:latin typeface="Calibri"/>
+              </a:rPr>
+              <a:t>Tính đa nghĩa</a:t>
+            </a:r>
+          </a:p>
+        </p:txBody>
+      </p:sp>
+      <p:sp>
+        <p:nvSpPr>
+          <p:cNvPr id="16" name="Oval 15"/>
+          <p:cNvSpPr/>
+          <p:nvPr/>
+        </p:nvSpPr>
+        <p:spPr>
+          <a:xfrm>
+            <a:off x="3502606" y="2259078"/>
+            <a:ext cx="1672565" cy="823767"/>
+          </a:xfrm>
+          <a:prstGeom prst="ellipse">
+            <a:avLst/>
+          </a:prstGeom>
+          <a:solidFill>
+            <a:srgbClr val="E2EFDA"/>
+          </a:solidFill>
+          <a:ln w="31750">
+            <a:solidFill>
+              <a:srgbClr val="375623"/>
+            </a:solidFill>
+          </a:ln>
+          <a:effectLst/>
+        </p:spPr>
+        <p:style>
+          <a:lnRef idx="1">
+            <a:schemeClr val="accent1"/>
+          </a:lnRef>
+          <a:fillRef idx="3">
+            <a:schemeClr val="accent1"/>
+          </a:fillRef>
+          <a:effectRef idx="2">
+            <a:schemeClr val="accent1"/>
+          </a:effectRef>
+          <a:fontRef idx="minor">
+            <a:schemeClr val="lt1"/>
+          </a:fontRef>
+        </p:style>
+        <p:txBody>
+          <a:bodyPr rtlCol="0" anchor="ctr" wrap="none" lIns="64000" rIns="64000" tIns="25400" bIns="25400"/>
+          <a:lstStyle/>
+          <a:p>
+            <a:pPr algn="ctr"/>
+            <a:r>
+              <a:rPr sz="1500" b="1">
+                <a:solidFill>
+                  <a:srgbClr val="000000"/>
+                </a:solidFill>
+                <a:latin typeface="Calibri"/>
+              </a:rPr>
+              <a:t>① Tri thức</a:t>
+            </a:r>
+          </a:p>
+          <a:p>
+            <a:pPr algn="ctr"/>
+            <a:r>
+              <a:rPr sz="1500" b="1">
+                <a:solidFill>
+                  <a:srgbClr val="000000"/>
+                </a:solidFill>
+                <a:latin typeface="Calibri"/>
+              </a:rPr>
+              <a:t>ngữ văn</a:t>
+            </a:r>
+          </a:p>
+        </p:txBody>
+      </p:sp>
+      <p:cxnSp>
+        <p:nvCxnSpPr>
+          <p:cNvPr id="17" name="Connector 16"/>
+          <p:cNvCxnSpPr/>
+          <p:nvPr/>
+        </p:nvCxnSpPr>
+        <p:spPr>
+          <a:xfrm flipV="1">
+            <a:off x="6027267" y="2670962"/>
+            <a:ext cx="1688379" cy="1283818"/>
+          </a:xfrm>
+          <a:prstGeom prst="line">
+            <a:avLst/>
+          </a:prstGeom>
+          <a:ln w="44450">
+            <a:solidFill>
+              <a:srgbClr val="BF8F00"/>
+            </a:solidFill>
+          </a:ln>
+        </p:spPr>
+        <p:style>
+          <a:lnRef idx="2">
+            <a:schemeClr val="accent1"/>
+          </a:lnRef>
+          <a:fillRef idx="0">
+            <a:schemeClr val="accent1"/>
+          </a:fillRef>
+          <a:effectRef idx="1">
+            <a:schemeClr val="accent1"/>
+          </a:effectRef>
+          <a:fontRef idx="minor">
+            <a:schemeClr val="tx1"/>
+          </a:fontRef>
+        </p:style>
+      </p:cxnSp>
+      <p:cxnSp>
+        <p:nvCxnSpPr>
+          <p:cNvPr id="18" name="Connector 17"/>
+          <p:cNvCxnSpPr/>
+          <p:nvPr/>
+        </p:nvCxnSpPr>
+        <p:spPr>
+          <a:xfrm flipV="1">
+            <a:off x="7715646" y="1830405"/>
+            <a:ext cx="1650057" cy="840557"/>
+          </a:xfrm>
+          <a:prstGeom prst="line">
+            <a:avLst/>
+          </a:prstGeom>
+          <a:ln w="15875">
+            <a:solidFill>
+              <a:srgbClr val="BF8F00"/>
+            </a:solidFill>
+          </a:ln>
+        </p:spPr>
+        <p:style>
+          <a:lnRef idx="2">
+            <a:schemeClr val="accent1"/>
+          </a:lnRef>
+          <a:fillRef idx="0">
+            <a:schemeClr val="accent1"/>
+          </a:fillRef>
+          <a:effectRef idx="1">
+            <a:schemeClr val="accent1"/>
+          </a:effectRef>
+          <a:fontRef idx="minor">
+            <a:schemeClr val="tx1"/>
+          </a:fontRef>
+        </p:style>
+      </p:cxnSp>
+      <p:sp>
+        <p:nvSpPr>
+          <p:cNvPr id="19" name="Rounded Rectangle 18"/>
+          <p:cNvSpPr/>
+          <p:nvPr/>
+        </p:nvSpPr>
+        <p:spPr>
+          <a:xfrm>
+            <a:off x="9365703" y="1654804"/>
+            <a:ext cx="1765021" cy="351200"/>
+          </a:xfrm>
+          <a:prstGeom prst="roundRect">
+            <a:avLst>
+              <a:gd name="adj" fmla="val 50000"/>
+            </a:avLst>
+          </a:prstGeom>
+          <a:solidFill>
+            <a:srgbClr val="FFF8E1"/>
+          </a:solidFill>
+          <a:ln w="15875">
+            <a:solidFill>
+              <a:srgbClr val="BF8F00"/>
+            </a:solidFill>
+          </a:ln>
+          <a:effectLst/>
+        </p:spPr>
+        <p:style>
+          <a:lnRef idx="1">
+            <a:schemeClr val="accent1"/>
+          </a:lnRef>
+          <a:fillRef idx="3">
+            <a:schemeClr val="accent1"/>
+          </a:fillRef>
+          <a:effectRef idx="2">
+            <a:schemeClr val="accent1"/>
+          </a:effectRef>
+          <a:fontRef idx="minor">
+            <a:schemeClr val="lt1"/>
+          </a:fontRef>
+        </p:style>
+        <p:txBody>
+          <a:bodyPr rtlCol="0" anchor="ctr" wrap="none" lIns="64000" rIns="64000" tIns="25400" bIns="25400"/>
+          <a:lstStyle/>
+          <a:p>
+            <a:pPr algn="ctr"/>
+            <a:r>
+              <a:rPr sz="1300" b="1">
+                <a:solidFill>
+                  <a:srgbClr val="8B0000"/>
+                </a:solidFill>
+                <a:latin typeface="Calibri"/>
+              </a:rPr>
+              <a:t>Mạch nhớ: “đâu…”</a:t>
+            </a:r>
+          </a:p>
+        </p:txBody>
+      </p:sp>
+      <p:cxnSp>
+        <p:nvCxnSpPr>
+          <p:cNvPr id="20" name="Connector 19"/>
+          <p:cNvCxnSpPr/>
+          <p:nvPr/>
+        </p:nvCxnSpPr>
+        <p:spPr>
+          <a:xfrm flipV="1">
+            <a:off x="7715646" y="2357206"/>
+            <a:ext cx="1659963" cy="313756"/>
+          </a:xfrm>
+          <a:prstGeom prst="line">
+            <a:avLst/>
+          </a:prstGeom>
+          <a:ln w="15875">
+            <a:solidFill>
+              <a:srgbClr val="BF8F00"/>
+            </a:solidFill>
+          </a:ln>
+        </p:spPr>
+        <p:style>
+          <a:lnRef idx="2">
+            <a:schemeClr val="accent1"/>
+          </a:lnRef>
+          <a:fillRef idx="0">
+            <a:schemeClr val="accent1"/>
+          </a:fillRef>
+          <a:effectRef idx="1">
+            <a:schemeClr val="accent1"/>
+          </a:effectRef>
+          <a:fontRef idx="minor">
+            <a:schemeClr val="tx1"/>
+          </a:fontRef>
+        </p:style>
+      </p:cxnSp>
+      <p:sp>
+        <p:nvSpPr>
+          <p:cNvPr id="21" name="Rounded Rectangle 20"/>
+          <p:cNvSpPr/>
+          <p:nvPr/>
+        </p:nvSpPr>
+        <p:spPr>
+          <a:xfrm>
+            <a:off x="9375609" y="2080894"/>
+            <a:ext cx="1745209" cy="552622"/>
+          </a:xfrm>
+          <a:prstGeom prst="roundRect">
+            <a:avLst>
+              <a:gd name="adj" fmla="val 50000"/>
+            </a:avLst>
+          </a:prstGeom>
+          <a:solidFill>
+            <a:srgbClr val="FFF8E1"/>
+          </a:solidFill>
+          <a:ln w="15875">
+            <a:solidFill>
+              <a:srgbClr val="BF8F00"/>
+            </a:solidFill>
+          </a:ln>
+          <a:effectLst/>
+        </p:spPr>
+        <p:style>
+          <a:lnRef idx="1">
+            <a:schemeClr val="accent1"/>
+          </a:lnRef>
+          <a:fillRef idx="3">
+            <a:schemeClr val="accent1"/>
+          </a:fillRef>
+          <a:effectRef idx="2">
+            <a:schemeClr val="accent1"/>
+          </a:effectRef>
+          <a:fontRef idx="minor">
+            <a:schemeClr val="lt1"/>
+          </a:fontRef>
+        </p:style>
+        <p:txBody>
+          <a:bodyPr rtlCol="0" anchor="ctr" wrap="none" lIns="64000" rIns="64000" tIns="25400" bIns="25400"/>
+          <a:lstStyle/>
+          <a:p>
+            <a:pPr algn="ctr"/>
+            <a:r>
+              <a:rPr sz="1300" b="0">
+                <a:solidFill>
+                  <a:srgbClr val="000000"/>
+                </a:solidFill>
+                <a:latin typeface="Calibri"/>
+              </a:rPr>
+              <a:t>Khổ lặp: trưa hiu</a:t>
+            </a:r>
+          </a:p>
+          <a:p>
+            <a:pPr algn="ctr"/>
+            <a:r>
+              <a:rPr sz="1300" b="0">
+                <a:solidFill>
+                  <a:srgbClr val="000000"/>
+                </a:solidFill>
+                <a:latin typeface="Calibri"/>
+              </a:rPr>
+              <a:t>quạnh</a:t>
+            </a:r>
+          </a:p>
+        </p:txBody>
+      </p:sp>
+      <p:cxnSp>
+        <p:nvCxnSpPr>
+          <p:cNvPr id="22" name="Connector 21"/>
+          <p:cNvCxnSpPr/>
+          <p:nvPr/>
+        </p:nvCxnSpPr>
+        <p:spPr>
+          <a:xfrm>
+            <a:off x="7715646" y="2670962"/>
+            <a:ext cx="1659963" cy="313756"/>
+          </a:xfrm>
+          <a:prstGeom prst="line">
+            <a:avLst/>
+          </a:prstGeom>
+          <a:ln w="15875">
+            <a:solidFill>
+              <a:srgbClr val="BF8F00"/>
+            </a:solidFill>
+          </a:ln>
+        </p:spPr>
+        <p:style>
+          <a:lnRef idx="2">
+            <a:schemeClr val="accent1"/>
+          </a:lnRef>
+          <a:fillRef idx="0">
+            <a:schemeClr val="accent1"/>
+          </a:fillRef>
+          <a:effectRef idx="1">
+            <a:schemeClr val="accent1"/>
+          </a:effectRef>
+          <a:fontRef idx="minor">
+            <a:schemeClr val="tx1"/>
+          </a:fontRef>
+        </p:style>
+      </p:cxnSp>
+      <p:sp>
+        <p:nvSpPr>
+          <p:cNvPr id="23" name="Rounded Rectangle 22"/>
+          <p:cNvSpPr/>
+          <p:nvPr/>
+        </p:nvSpPr>
+        <p:spPr>
+          <a:xfrm>
+            <a:off x="9375609" y="2708407"/>
+            <a:ext cx="1745209" cy="552622"/>
+          </a:xfrm>
+          <a:prstGeom prst="roundRect">
+            <a:avLst>
+              <a:gd name="adj" fmla="val 50000"/>
+            </a:avLst>
+          </a:prstGeom>
+          <a:solidFill>
+            <a:srgbClr val="FFF8E1"/>
+          </a:solidFill>
+          <a:ln w="15875">
+            <a:solidFill>
+              <a:srgbClr val="BF8F00"/>
+            </a:solidFill>
+          </a:ln>
+          <a:effectLst/>
+        </p:spPr>
+        <p:style>
+          <a:lnRef idx="1">
+            <a:schemeClr val="accent1"/>
+          </a:lnRef>
+          <a:fillRef idx="3">
+            <a:schemeClr val="accent1"/>
+          </a:fillRef>
+          <a:effectRef idx="2">
+            <a:schemeClr val="accent1"/>
+          </a:effectRef>
+          <a:fontRef idx="minor">
+            <a:schemeClr val="lt1"/>
+          </a:fontRef>
+        </p:style>
+        <p:txBody>
+          <a:bodyPr rtlCol="0" anchor="ctr" wrap="none" lIns="64000" rIns="64000" tIns="25400" bIns="25400"/>
+          <a:lstStyle/>
+          <a:p>
+            <a:pPr algn="ctr"/>
+            <a:r>
+              <a:rPr sz="1300" b="0">
+                <a:solidFill>
+                  <a:srgbClr val="000000"/>
+                </a:solidFill>
+                <a:latin typeface="Calibri"/>
+              </a:rPr>
+              <a:t>Cánh chim nhớ gió</a:t>
+            </a:r>
+          </a:p>
+          <a:p>
+            <a:pPr algn="ctr"/>
+            <a:r>
+              <a:rPr sz="1300" b="0">
+                <a:solidFill>
+                  <a:srgbClr val="000000"/>
+                </a:solidFill>
+                <a:latin typeface="Calibri"/>
+              </a:rPr>
+              <a:t>mây</a:t>
+            </a:r>
+          </a:p>
+        </p:txBody>
+      </p:sp>
+      <p:cxnSp>
+        <p:nvCxnSpPr>
+          <p:cNvPr id="24" name="Connector 23"/>
+          <p:cNvCxnSpPr/>
+          <p:nvPr/>
+        </p:nvCxnSpPr>
+        <p:spPr>
+          <a:xfrm>
+            <a:off x="7715646" y="2670962"/>
+            <a:ext cx="1745815" cy="840557"/>
+          </a:xfrm>
+          <a:prstGeom prst="line">
+            <a:avLst/>
+          </a:prstGeom>
+          <a:ln w="15875">
+            <a:solidFill>
+              <a:srgbClr val="BF8F00"/>
+            </a:solidFill>
+          </a:ln>
+        </p:spPr>
+        <p:style>
+          <a:lnRef idx="2">
+            <a:schemeClr val="accent1"/>
+          </a:lnRef>
+          <a:fillRef idx="0">
+            <a:schemeClr val="accent1"/>
+          </a:fillRef>
+          <a:effectRef idx="1">
+            <a:schemeClr val="accent1"/>
+          </a:effectRef>
+          <a:fontRef idx="minor">
+            <a:schemeClr val="tx1"/>
+          </a:fontRef>
+        </p:style>
+      </p:cxnSp>
+      <p:sp>
+        <p:nvSpPr>
+          <p:cNvPr id="25" name="Rounded Rectangle 24"/>
+          <p:cNvSpPr/>
+          <p:nvPr/>
+        </p:nvSpPr>
+        <p:spPr>
+          <a:xfrm>
+            <a:off x="9461461" y="3335919"/>
+            <a:ext cx="1573505" cy="351200"/>
+          </a:xfrm>
+          <a:prstGeom prst="roundRect">
+            <a:avLst>
+              <a:gd name="adj" fmla="val 50000"/>
+            </a:avLst>
+          </a:prstGeom>
+          <a:solidFill>
+            <a:srgbClr val="FFF8E1"/>
+          </a:solidFill>
+          <a:ln w="15875">
+            <a:solidFill>
+              <a:srgbClr val="BF8F00"/>
+            </a:solidFill>
+          </a:ln>
+          <a:effectLst/>
+        </p:spPr>
+        <p:style>
+          <a:lnRef idx="1">
+            <a:schemeClr val="accent1"/>
+          </a:lnRef>
+          <a:fillRef idx="3">
+            <a:schemeClr val="accent1"/>
+          </a:fillRef>
+          <a:effectRef idx="2">
+            <a:schemeClr val="accent1"/>
+          </a:effectRef>
+          <a:fontRef idx="minor">
+            <a:schemeClr val="lt1"/>
+          </a:fontRef>
+        </p:style>
+        <p:txBody>
+          <a:bodyPr rtlCol="0" anchor="ctr" wrap="none" lIns="64000" rIns="64000" tIns="25400" bIns="25400"/>
+          <a:lstStyle/>
+          <a:p>
+            <a:pPr algn="ctr"/>
+            <a:r>
+              <a:rPr sz="1300" b="0">
+                <a:solidFill>
+                  <a:srgbClr val="000000"/>
+                </a:solidFill>
+                <a:latin typeface="Calibri"/>
+              </a:rPr>
+              <a:t>Khát vọng tự do</a:t>
+            </a:r>
+          </a:p>
+        </p:txBody>
+      </p:sp>
+      <p:sp>
+        <p:nvSpPr>
+          <p:cNvPr id="26" name="Oval 25"/>
+          <p:cNvSpPr/>
+          <p:nvPr/>
+        </p:nvSpPr>
+        <p:spPr>
+          <a:xfrm>
+            <a:off x="6879363" y="2259078"/>
+            <a:ext cx="1672565" cy="823767"/>
+          </a:xfrm>
+          <a:prstGeom prst="ellipse">
+            <a:avLst/>
+          </a:prstGeom>
+          <a:solidFill>
+            <a:srgbClr val="FFF2CC"/>
+          </a:solidFill>
+          <a:ln w="31750">
+            <a:solidFill>
+              <a:srgbClr val="BF8F00"/>
+            </a:solidFill>
+          </a:ln>
+          <a:effectLst/>
+        </p:spPr>
+        <p:style>
+          <a:lnRef idx="1">
+            <a:schemeClr val="accent1"/>
+          </a:lnRef>
+          <a:fillRef idx="3">
+            <a:schemeClr val="accent1"/>
+          </a:fillRef>
+          <a:effectRef idx="2">
+            <a:schemeClr val="accent1"/>
+          </a:effectRef>
+          <a:fontRef idx="minor">
+            <a:schemeClr val="lt1"/>
+          </a:fontRef>
+        </p:style>
+        <p:txBody>
+          <a:bodyPr rtlCol="0" anchor="ctr" wrap="none" lIns="64000" rIns="64000" tIns="25400" bIns="25400"/>
+          <a:lstStyle/>
+          <a:p>
+            <a:pPr algn="ctr"/>
+            <a:r>
+              <a:rPr sz="1500" b="1">
+                <a:solidFill>
+                  <a:srgbClr val="000000"/>
+                </a:solidFill>
+                <a:latin typeface="Calibri"/>
+              </a:rPr>
+              <a:t>② Nhớ đồng</a:t>
+            </a:r>
+          </a:p>
+          <a:p>
+            <a:pPr algn="ctr"/>
+            <a:r>
+              <a:rPr sz="1500" b="1">
+                <a:solidFill>
+                  <a:srgbClr val="000000"/>
+                </a:solidFill>
+                <a:latin typeface="Calibri"/>
+              </a:rPr>
+              <a:t>– Tố Hữu</a:t>
+            </a:r>
+          </a:p>
+        </p:txBody>
+      </p:sp>
+      <p:cxnSp>
+        <p:nvCxnSpPr>
+          <p:cNvPr id="27" name="Connector 26"/>
+          <p:cNvCxnSpPr/>
+          <p:nvPr/>
+        </p:nvCxnSpPr>
+        <p:spPr>
+          <a:xfrm flipH="1">
+            <a:off x="4338888" y="3954780"/>
+            <a:ext cx="1688379" cy="1283817"/>
+          </a:xfrm>
+          <a:prstGeom prst="line">
+            <a:avLst/>
+          </a:prstGeom>
+          <a:ln w="44450">
+            <a:solidFill>
+              <a:srgbClr val="2F5597"/>
+            </a:solidFill>
+          </a:ln>
+        </p:spPr>
+        <p:style>
+          <a:lnRef idx="2">
+            <a:schemeClr val="accent1"/>
+          </a:lnRef>
+          <a:fillRef idx="0">
+            <a:schemeClr val="accent1"/>
+          </a:fillRef>
+          <a:effectRef idx="1">
+            <a:schemeClr val="accent1"/>
+          </a:effectRef>
+          <a:fontRef idx="minor">
+            <a:schemeClr val="tx1"/>
+          </a:fontRef>
+        </p:style>
+      </p:cxnSp>
+      <p:cxnSp>
+        <p:nvCxnSpPr>
+          <p:cNvPr id="28" name="Connector 27"/>
+          <p:cNvCxnSpPr/>
+          <p:nvPr/>
+        </p:nvCxnSpPr>
+        <p:spPr>
+          <a:xfrm flipH="1" flipV="1">
+            <a:off x="2503919" y="4498751"/>
+            <a:ext cx="1834969" cy="739846"/>
+          </a:xfrm>
+          <a:prstGeom prst="line">
+            <a:avLst/>
+          </a:prstGeom>
+          <a:ln w="15875">
+            <a:solidFill>
+              <a:srgbClr val="2F5597"/>
+            </a:solidFill>
+          </a:ln>
+        </p:spPr>
+        <p:style>
+          <a:lnRef idx="2">
+            <a:schemeClr val="accent1"/>
+          </a:lnRef>
+          <a:fillRef idx="0">
+            <a:schemeClr val="accent1"/>
+          </a:fillRef>
+          <a:effectRef idx="1">
+            <a:schemeClr val="accent1"/>
+          </a:effectRef>
+          <a:fontRef idx="minor">
+            <a:schemeClr val="tx1"/>
+          </a:fontRef>
+        </p:style>
+      </p:cxnSp>
+      <p:sp>
+        <p:nvSpPr>
+          <p:cNvPr id="29" name="Rounded Rectangle 28"/>
+          <p:cNvSpPr/>
+          <p:nvPr/>
+        </p:nvSpPr>
+        <p:spPr>
+          <a:xfrm>
+            <a:off x="1108722" y="4222440"/>
+            <a:ext cx="1395197" cy="552622"/>
+          </a:xfrm>
+          <a:prstGeom prst="roundRect">
+            <a:avLst>
+              <a:gd name="adj" fmla="val 50000"/>
+            </a:avLst>
+          </a:prstGeom>
+          <a:solidFill>
+            <a:srgbClr val="E3EEF9"/>
+          </a:solidFill>
+          <a:ln w="15875">
+            <a:solidFill>
+              <a:srgbClr val="2F5597"/>
+            </a:solidFill>
+          </a:ln>
+          <a:effectLst/>
+        </p:spPr>
+        <p:style>
+          <a:lnRef idx="1">
+            <a:schemeClr val="accent1"/>
+          </a:lnRef>
+          <a:fillRef idx="3">
+            <a:schemeClr val="accent1"/>
+          </a:fillRef>
+          <a:effectRef idx="2">
+            <a:schemeClr val="accent1"/>
+          </a:effectRef>
+          <a:fontRef idx="minor">
+            <a:schemeClr val="lt1"/>
+          </a:fontRef>
+        </p:style>
+        <p:txBody>
+          <a:bodyPr rtlCol="0" anchor="ctr" wrap="none" lIns="64000" rIns="64000" tIns="25400" bIns="25400"/>
+          <a:lstStyle/>
+          <a:p>
+            <a:pPr algn="ctr"/>
+            <a:r>
+              <a:rPr sz="1300" b="1">
+                <a:solidFill>
+                  <a:srgbClr val="8B0000"/>
+                </a:solidFill>
+                <a:latin typeface="Calibri"/>
+              </a:rPr>
+              <a:t>Vô hạn ↔ hữu</a:t>
+            </a:r>
+          </a:p>
+          <a:p>
+            <a:pPr algn="ctr"/>
+            <a:r>
+              <a:rPr sz="1300" b="1">
+                <a:solidFill>
+                  <a:srgbClr val="8B0000"/>
+                </a:solidFill>
+                <a:latin typeface="Calibri"/>
+              </a:rPr>
+              <a:t>hạn</a:t>
+            </a:r>
+          </a:p>
+        </p:txBody>
+      </p:sp>
+      <p:cxnSp>
+        <p:nvCxnSpPr>
+          <p:cNvPr id="30" name="Connector 29"/>
+          <p:cNvCxnSpPr/>
+          <p:nvPr/>
+        </p:nvCxnSpPr>
+        <p:spPr>
+          <a:xfrm flipH="1" flipV="1">
+            <a:off x="2721851" y="5025552"/>
+            <a:ext cx="1617037" cy="213045"/>
+          </a:xfrm>
+          <a:prstGeom prst="line">
+            <a:avLst/>
+          </a:prstGeom>
+          <a:ln w="15875">
+            <a:solidFill>
+              <a:srgbClr val="2F5597"/>
+            </a:solidFill>
+          </a:ln>
+        </p:spPr>
+        <p:style>
+          <a:lnRef idx="2">
+            <a:schemeClr val="accent1"/>
+          </a:lnRef>
+          <a:fillRef idx="0">
+            <a:schemeClr val="accent1"/>
+          </a:fillRef>
+          <a:effectRef idx="1">
+            <a:schemeClr val="accent1"/>
+          </a:effectRef>
+          <a:fontRef idx="minor">
+            <a:schemeClr val="tx1"/>
+          </a:fontRef>
+        </p:style>
+      </p:cxnSp>
+      <p:sp>
+        <p:nvSpPr>
+          <p:cNvPr id="31" name="Rounded Rectangle 30"/>
+          <p:cNvSpPr/>
+          <p:nvPr/>
+        </p:nvSpPr>
+        <p:spPr>
+          <a:xfrm>
+            <a:off x="890790" y="4849952"/>
+            <a:ext cx="1831061" cy="351200"/>
+          </a:xfrm>
+          <a:prstGeom prst="roundRect">
+            <a:avLst>
+              <a:gd name="adj" fmla="val 50000"/>
+            </a:avLst>
+          </a:prstGeom>
+          <a:solidFill>
+            <a:srgbClr val="E3EEF9"/>
+          </a:solidFill>
+          <a:ln w="15875">
+            <a:solidFill>
+              <a:srgbClr val="2F5597"/>
+            </a:solidFill>
+          </a:ln>
+          <a:effectLst/>
+        </p:spPr>
+        <p:style>
+          <a:lnRef idx="1">
+            <a:schemeClr val="accent1"/>
+          </a:lnRef>
+          <a:fillRef idx="3">
+            <a:schemeClr val="accent1"/>
+          </a:fillRef>
+          <a:effectRef idx="2">
+            <a:schemeClr val="accent1"/>
+          </a:effectRef>
+          <a:fontRef idx="minor">
+            <a:schemeClr val="lt1"/>
+          </a:fontRef>
+        </p:style>
+        <p:txBody>
+          <a:bodyPr rtlCol="0" anchor="ctr" wrap="none" lIns="64000" rIns="64000" tIns="25400" bIns="25400"/>
+          <a:lstStyle/>
+          <a:p>
+            <a:pPr algn="ctr"/>
+            <a:r>
+              <a:rPr sz="1300" b="0">
+                <a:solidFill>
+                  <a:srgbClr val="000000"/>
+                </a:solidFill>
+                <a:latin typeface="Calibri"/>
+              </a:rPr>
+              <a:t>“Củi một cành khô”</a:t>
+            </a:r>
+          </a:p>
+        </p:txBody>
+      </p:sp>
+      <p:cxnSp>
+        <p:nvCxnSpPr>
+          <p:cNvPr id="32" name="Connector 31"/>
+          <p:cNvCxnSpPr/>
+          <p:nvPr/>
+        </p:nvCxnSpPr>
+        <p:spPr>
+          <a:xfrm flipH="1">
+            <a:off x="2550147" y="5238597"/>
+            <a:ext cx="1788741" cy="313756"/>
+          </a:xfrm>
+          <a:prstGeom prst="line">
+            <a:avLst/>
+          </a:prstGeom>
+          <a:ln w="15875">
+            <a:solidFill>
+              <a:srgbClr val="2F5597"/>
+            </a:solidFill>
+          </a:ln>
+        </p:spPr>
+        <p:style>
+          <a:lnRef idx="2">
+            <a:schemeClr val="accent1"/>
+          </a:lnRef>
+          <a:fillRef idx="0">
+            <a:schemeClr val="accent1"/>
+          </a:fillRef>
+          <a:effectRef idx="1">
+            <a:schemeClr val="accent1"/>
+          </a:effectRef>
+          <a:fontRef idx="minor">
+            <a:schemeClr val="tx1"/>
+          </a:fontRef>
+        </p:style>
+      </p:cxnSp>
+      <p:sp>
+        <p:nvSpPr>
+          <p:cNvPr id="33" name="Rounded Rectangle 32"/>
+          <p:cNvSpPr/>
+          <p:nvPr/>
+        </p:nvSpPr>
+        <p:spPr>
+          <a:xfrm>
+            <a:off x="1062494" y="5276042"/>
+            <a:ext cx="1487653" cy="552622"/>
+          </a:xfrm>
+          <a:prstGeom prst="roundRect">
+            <a:avLst>
+              <a:gd name="adj" fmla="val 50000"/>
+            </a:avLst>
+          </a:prstGeom>
+          <a:solidFill>
+            <a:srgbClr val="E3EEF9"/>
+          </a:solidFill>
+          <a:ln w="15875">
+            <a:solidFill>
+              <a:srgbClr val="2F5597"/>
+            </a:solidFill>
+          </a:ln>
+          <a:effectLst/>
+        </p:spPr>
+        <p:style>
+          <a:lnRef idx="1">
+            <a:schemeClr val="accent1"/>
+          </a:lnRef>
+          <a:fillRef idx="3">
+            <a:schemeClr val="accent1"/>
+          </a:fillRef>
+          <a:effectRef idx="2">
+            <a:schemeClr val="accent1"/>
+          </a:effectRef>
+          <a:fontRef idx="minor">
+            <a:schemeClr val="lt1"/>
+          </a:fontRef>
+        </p:style>
+        <p:txBody>
+          <a:bodyPr rtlCol="0" anchor="ctr" wrap="none" lIns="64000" rIns="64000" tIns="25400" bIns="25400"/>
+          <a:lstStyle/>
+          <a:p>
+            <a:pPr algn="ctr"/>
+            <a:r>
+              <a:rPr sz="1300" b="0">
+                <a:solidFill>
+                  <a:srgbClr val="000000"/>
+                </a:solidFill>
+                <a:latin typeface="Calibri"/>
+              </a:rPr>
+              <a:t>Cổ điển + hiện</a:t>
+            </a:r>
+          </a:p>
+          <a:p>
+            <a:pPr algn="ctr"/>
+            <a:r>
+              <a:rPr sz="1300" b="0">
+                <a:solidFill>
+                  <a:srgbClr val="000000"/>
+                </a:solidFill>
+                <a:latin typeface="Calibri"/>
+              </a:rPr>
+              <a:t>đại</a:t>
+            </a:r>
+          </a:p>
+        </p:txBody>
+      </p:sp>
+      <p:cxnSp>
+        <p:nvCxnSpPr>
+          <p:cNvPr id="34" name="Connector 33"/>
+          <p:cNvCxnSpPr/>
+          <p:nvPr/>
+        </p:nvCxnSpPr>
+        <p:spPr>
+          <a:xfrm flipH="1">
+            <a:off x="2893555" y="5238597"/>
+            <a:ext cx="1445333" cy="840557"/>
+          </a:xfrm>
+          <a:prstGeom prst="line">
+            <a:avLst/>
+          </a:prstGeom>
+          <a:ln w="15875">
+            <a:solidFill>
+              <a:srgbClr val="2F5597"/>
+            </a:solidFill>
+          </a:ln>
+        </p:spPr>
+        <p:style>
+          <a:lnRef idx="2">
+            <a:schemeClr val="accent1"/>
+          </a:lnRef>
+          <a:fillRef idx="0">
+            <a:schemeClr val="accent1"/>
+          </a:fillRef>
+          <a:effectRef idx="1">
+            <a:schemeClr val="accent1"/>
+          </a:effectRef>
+          <a:fontRef idx="minor">
+            <a:schemeClr val="tx1"/>
+          </a:fontRef>
+        </p:style>
+      </p:cxnSp>
+      <p:sp>
+        <p:nvSpPr>
+          <p:cNvPr id="35" name="Rounded Rectangle 34"/>
+          <p:cNvSpPr/>
+          <p:nvPr/>
+        </p:nvSpPr>
+        <p:spPr>
+          <a:xfrm>
+            <a:off x="719086" y="5903554"/>
+            <a:ext cx="2174469" cy="351200"/>
+          </a:xfrm>
+          <a:prstGeom prst="roundRect">
+            <a:avLst>
+              <a:gd name="adj" fmla="val 50000"/>
+            </a:avLst>
+          </a:prstGeom>
+          <a:solidFill>
+            <a:srgbClr val="E3EEF9"/>
+          </a:solidFill>
+          <a:ln w="15875">
+            <a:solidFill>
+              <a:srgbClr val="2F5597"/>
+            </a:solidFill>
+          </a:ln>
+          <a:effectLst/>
+        </p:spPr>
+        <p:style>
+          <a:lnRef idx="1">
+            <a:schemeClr val="accent1"/>
+          </a:lnRef>
+          <a:fillRef idx="3">
+            <a:schemeClr val="accent1"/>
+          </a:fillRef>
+          <a:effectRef idx="2">
+            <a:schemeClr val="accent1"/>
+          </a:effectRef>
+          <a:fontRef idx="minor">
+            <a:schemeClr val="lt1"/>
+          </a:fontRef>
+        </p:style>
+        <p:txBody>
+          <a:bodyPr rtlCol="0" anchor="ctr" wrap="none" lIns="64000" rIns="64000" tIns="25400" bIns="25400"/>
+          <a:lstStyle/>
+          <a:p>
+            <a:pPr algn="ctr"/>
+            <a:r>
+              <a:rPr sz="1300" b="0">
+                <a:solidFill>
+                  <a:srgbClr val="000000"/>
+                </a:solidFill>
+                <a:latin typeface="Calibri"/>
+              </a:rPr>
+              <a:t>Pu-skin: vượt nỗi buồn</a:t>
+            </a:r>
+          </a:p>
+        </p:txBody>
+      </p:sp>
+      <p:sp>
+        <p:nvSpPr>
+          <p:cNvPr id="36" name="Oval 35"/>
+          <p:cNvSpPr/>
+          <p:nvPr/>
+        </p:nvSpPr>
+        <p:spPr>
+          <a:xfrm>
+            <a:off x="3294580" y="4826713"/>
+            <a:ext cx="2088617" cy="823767"/>
+          </a:xfrm>
+          <a:prstGeom prst="ellipse">
+            <a:avLst/>
+          </a:prstGeom>
+          <a:solidFill>
+            <a:srgbClr val="E2EFDA"/>
+          </a:solidFill>
+          <a:ln w="31750">
+            <a:solidFill>
+              <a:srgbClr val="375623"/>
+            </a:solidFill>
+          </a:ln>
+          <a:effectLst/>
+        </p:spPr>
+        <p:style>
+          <a:lnRef idx="1">
+            <a:schemeClr val="accent1"/>
+          </a:lnRef>
+          <a:fillRef idx="3">
+            <a:schemeClr val="accent1"/>
+          </a:fillRef>
+          <a:effectRef idx="2">
+            <a:schemeClr val="accent1"/>
+          </a:effectRef>
+          <a:fontRef idx="minor">
+            <a:schemeClr val="lt1"/>
+          </a:fontRef>
+        </p:style>
+        <p:txBody>
+          <a:bodyPr rtlCol="0" anchor="ctr" wrap="none" lIns="64000" rIns="64000" tIns="25400" bIns="25400"/>
+          <a:lstStyle/>
+          <a:p>
+            <a:pPr algn="ctr"/>
+            <a:r>
+              <a:rPr sz="1500" b="1">
+                <a:solidFill>
+                  <a:srgbClr val="000000"/>
+                </a:solidFill>
+                <a:latin typeface="Calibri"/>
+              </a:rPr>
+              <a:t>③ Tràng giang</a:t>
+            </a:r>
+          </a:p>
+          <a:p>
+            <a:pPr algn="ctr"/>
+            <a:r>
+              <a:rPr sz="1500" b="1">
+                <a:solidFill>
+                  <a:srgbClr val="000000"/>
+                </a:solidFill>
+                <a:latin typeface="Calibri"/>
+              </a:rPr>
+              <a:t>– Đường đông</a:t>
+            </a:r>
+          </a:p>
+        </p:txBody>
+      </p:sp>
+      <p:cxnSp>
+        <p:nvCxnSpPr>
+          <p:cNvPr id="37" name="Connector 36"/>
+          <p:cNvCxnSpPr/>
+          <p:nvPr/>
+        </p:nvCxnSpPr>
+        <p:spPr>
+          <a:xfrm>
+            <a:off x="6027267" y="3954780"/>
+            <a:ext cx="1688379" cy="1283817"/>
+          </a:xfrm>
+          <a:prstGeom prst="line">
+            <a:avLst/>
+          </a:prstGeom>
+          <a:ln w="44450">
+            <a:solidFill>
+              <a:srgbClr val="7030A0"/>
+            </a:solidFill>
+          </a:ln>
+        </p:spPr>
+        <p:style>
+          <a:lnRef idx="2">
+            <a:schemeClr val="accent1"/>
+          </a:lnRef>
+          <a:fillRef idx="0">
+            <a:schemeClr val="accent1"/>
+          </a:fillRef>
+          <a:effectRef idx="1">
+            <a:schemeClr val="accent1"/>
+          </a:effectRef>
+          <a:fontRef idx="minor">
+            <a:schemeClr val="tx1"/>
+          </a:fontRef>
+        </p:style>
+      </p:cxnSp>
+      <p:cxnSp>
+        <p:nvCxnSpPr>
+          <p:cNvPr id="38" name="Connector 37"/>
+          <p:cNvCxnSpPr/>
+          <p:nvPr/>
+        </p:nvCxnSpPr>
+        <p:spPr>
+          <a:xfrm flipV="1">
+            <a:off x="7715646" y="4297329"/>
+            <a:ext cx="1788741" cy="941268"/>
+          </a:xfrm>
+          <a:prstGeom prst="line">
+            <a:avLst/>
+          </a:prstGeom>
+          <a:ln w="15875">
+            <a:solidFill>
+              <a:srgbClr val="7030A0"/>
+            </a:solidFill>
+          </a:ln>
+        </p:spPr>
+        <p:style>
+          <a:lnRef idx="2">
+            <a:schemeClr val="accent1"/>
+          </a:lnRef>
+          <a:fillRef idx="0">
+            <a:schemeClr val="accent1"/>
+          </a:fillRef>
+          <a:effectRef idx="1">
+            <a:schemeClr val="accent1"/>
+          </a:effectRef>
+          <a:fontRef idx="minor">
+            <a:schemeClr val="tx1"/>
+          </a:fontRef>
+        </p:style>
+      </p:cxnSp>
+      <p:sp>
+        <p:nvSpPr>
+          <p:cNvPr id="39" name="Rounded Rectangle 38"/>
+          <p:cNvSpPr/>
+          <p:nvPr/>
+        </p:nvSpPr>
+        <p:spPr>
+          <a:xfrm>
+            <a:off x="9504387" y="4021018"/>
+            <a:ext cx="1487653" cy="552622"/>
+          </a:xfrm>
+          <a:prstGeom prst="roundRect">
+            <a:avLst>
+              <a:gd name="adj" fmla="val 50000"/>
+            </a:avLst>
+          </a:prstGeom>
+          <a:solidFill>
+            <a:srgbClr val="F3E8F7"/>
+          </a:solidFill>
+          <a:ln w="15875">
+            <a:solidFill>
+              <a:srgbClr val="7030A0"/>
+            </a:solidFill>
+          </a:ln>
+          <a:effectLst/>
+        </p:spPr>
+        <p:style>
+          <a:lnRef idx="1">
+            <a:schemeClr val="accent1"/>
+          </a:lnRef>
+          <a:fillRef idx="3">
+            <a:schemeClr val="accent1"/>
+          </a:fillRef>
+          <a:effectRef idx="2">
+            <a:schemeClr val="accent1"/>
+          </a:effectRef>
+          <a:fontRef idx="minor">
+            <a:schemeClr val="lt1"/>
+          </a:fontRef>
+        </p:style>
+        <p:txBody>
+          <a:bodyPr rtlCol="0" anchor="ctr" wrap="none" lIns="64000" rIns="64000" tIns="25400" bIns="25400"/>
+          <a:lstStyle/>
+          <a:p>
+            <a:pPr algn="ctr"/>
+            <a:r>
+              <a:rPr sz="1300" b="0">
+                <a:solidFill>
+                  <a:srgbClr val="000000"/>
+                </a:solidFill>
+                <a:latin typeface="Calibri"/>
+              </a:rPr>
+              <a:t>Phá vỡ quy tắc</a:t>
+            </a:r>
+          </a:p>
+          <a:p>
+            <a:pPr algn="ctr"/>
+            <a:r>
+              <a:rPr sz="1300" b="0">
+                <a:solidFill>
+                  <a:srgbClr val="000000"/>
+                </a:solidFill>
+                <a:latin typeface="Calibri"/>
+              </a:rPr>
+              <a:t>ngôn ngữ</a:t>
+            </a:r>
+          </a:p>
+        </p:txBody>
+      </p:sp>
+      <p:cxnSp>
+        <p:nvCxnSpPr>
+          <p:cNvPr id="40" name="Connector 39"/>
+          <p:cNvCxnSpPr/>
+          <p:nvPr/>
+        </p:nvCxnSpPr>
+        <p:spPr>
+          <a:xfrm flipV="1">
+            <a:off x="7715646" y="4924841"/>
+            <a:ext cx="1696285" cy="313756"/>
+          </a:xfrm>
+          <a:prstGeom prst="line">
+            <a:avLst/>
+          </a:prstGeom>
+          <a:ln w="15875">
+            <a:solidFill>
+              <a:srgbClr val="7030A0"/>
+            </a:solidFill>
+          </a:ln>
+        </p:spPr>
+        <p:style>
+          <a:lnRef idx="2">
+            <a:schemeClr val="accent1"/>
+          </a:lnRef>
+          <a:fillRef idx="0">
+            <a:schemeClr val="accent1"/>
+          </a:fillRef>
+          <a:effectRef idx="1">
+            <a:schemeClr val="accent1"/>
+          </a:effectRef>
+          <a:fontRef idx="minor">
+            <a:schemeClr val="tx1"/>
+          </a:fontRef>
+        </p:style>
+      </p:cxnSp>
+      <p:sp>
+        <p:nvSpPr>
+          <p:cNvPr id="41" name="Rounded Rectangle 40"/>
+          <p:cNvSpPr/>
+          <p:nvPr/>
+        </p:nvSpPr>
+        <p:spPr>
+          <a:xfrm>
+            <a:off x="9411931" y="4648530"/>
+            <a:ext cx="1672565" cy="552622"/>
+          </a:xfrm>
+          <a:prstGeom prst="roundRect">
+            <a:avLst>
+              <a:gd name="adj" fmla="val 50000"/>
+            </a:avLst>
+          </a:prstGeom>
+          <a:solidFill>
+            <a:srgbClr val="F3E8F7"/>
+          </a:solidFill>
+          <a:ln w="15875">
+            <a:solidFill>
+              <a:srgbClr val="7030A0"/>
+            </a:solidFill>
+          </a:ln>
+          <a:effectLst/>
+        </p:spPr>
+        <p:style>
+          <a:lnRef idx="1">
+            <a:schemeClr val="accent1"/>
+          </a:lnRef>
+          <a:fillRef idx="3">
+            <a:schemeClr val="accent1"/>
+          </a:fillRef>
+          <a:effectRef idx="2">
+            <a:schemeClr val="accent1"/>
+          </a:effectRef>
+          <a:fontRef idx="minor">
+            <a:schemeClr val="lt1"/>
+          </a:fontRef>
+        </p:style>
+        <p:txBody>
+          <a:bodyPr rtlCol="0" anchor="ctr" wrap="none" lIns="64000" rIns="64000" tIns="25400" bIns="25400"/>
+          <a:lstStyle/>
+          <a:p>
+            <a:pPr algn="ctr"/>
+            <a:r>
+              <a:rPr sz="1300" b="1">
+                <a:solidFill>
+                  <a:srgbClr val="8B0000"/>
+                </a:solidFill>
+                <a:latin typeface="Calibri"/>
+              </a:rPr>
+              <a:t>NL cấu tứ, hình</a:t>
+            </a:r>
+          </a:p>
+          <a:p>
+            <a:pPr algn="ctr"/>
+            <a:r>
+              <a:rPr sz="1300" b="1">
+                <a:solidFill>
+                  <a:srgbClr val="8B0000"/>
+                </a:solidFill>
+                <a:latin typeface="Calibri"/>
+              </a:rPr>
+              <a:t>ảnh thơ</a:t>
+            </a:r>
+          </a:p>
+        </p:txBody>
+      </p:sp>
+      <p:cxnSp>
+        <p:nvCxnSpPr>
+          <p:cNvPr id="42" name="Connector 41"/>
+          <p:cNvCxnSpPr/>
+          <p:nvPr/>
+        </p:nvCxnSpPr>
+        <p:spPr>
+          <a:xfrm>
+            <a:off x="7715646" y="5238597"/>
+            <a:ext cx="1574111" cy="313756"/>
+          </a:xfrm>
+          <a:prstGeom prst="line">
+            <a:avLst/>
+          </a:prstGeom>
+          <a:ln w="15875">
+            <a:solidFill>
+              <a:srgbClr val="7030A0"/>
+            </a:solidFill>
+          </a:ln>
+        </p:spPr>
+        <p:style>
+          <a:lnRef idx="2">
+            <a:schemeClr val="accent1"/>
+          </a:lnRef>
+          <a:fillRef idx="0">
+            <a:schemeClr val="accent1"/>
+          </a:fillRef>
+          <a:effectRef idx="1">
+            <a:schemeClr val="accent1"/>
+          </a:effectRef>
+          <a:fontRef idx="minor">
+            <a:schemeClr val="tx1"/>
+          </a:fontRef>
+        </p:style>
+      </p:cxnSp>
+      <p:sp>
+        <p:nvSpPr>
+          <p:cNvPr id="43" name="Rounded Rectangle 42"/>
+          <p:cNvSpPr/>
+          <p:nvPr/>
+        </p:nvSpPr>
+        <p:spPr>
+          <a:xfrm>
+            <a:off x="9289757" y="5276042"/>
+            <a:ext cx="1916913" cy="552622"/>
+          </a:xfrm>
+          <a:prstGeom prst="roundRect">
+            <a:avLst>
+              <a:gd name="adj" fmla="val 50000"/>
+            </a:avLst>
+          </a:prstGeom>
+          <a:solidFill>
+            <a:srgbClr val="F3E8F7"/>
+          </a:solidFill>
+          <a:ln w="15875">
+            <a:solidFill>
+              <a:srgbClr val="7030A0"/>
+            </a:solidFill>
+          </a:ln>
+          <a:effectLst/>
+        </p:spPr>
+        <p:style>
+          <a:lnRef idx="1">
+            <a:schemeClr val="accent1"/>
+          </a:lnRef>
+          <a:fillRef idx="3">
+            <a:schemeClr val="accent1"/>
+          </a:fillRef>
+          <a:effectRef idx="2">
+            <a:schemeClr val="accent1"/>
+          </a:effectRef>
+          <a:fontRef idx="minor">
+            <a:schemeClr val="lt1"/>
+          </a:fontRef>
+        </p:style>
+        <p:txBody>
+          <a:bodyPr rtlCol="0" anchor="ctr" wrap="none" lIns="64000" rIns="64000" tIns="25400" bIns="25400"/>
+          <a:lstStyle/>
+          <a:p>
+            <a:pPr algn="ctr"/>
+            <a:r>
+              <a:rPr sz="1300" b="0">
+                <a:solidFill>
+                  <a:srgbClr val="000000"/>
+                </a:solidFill>
+                <a:latin typeface="Calibri"/>
+              </a:rPr>
+              <a:t>Giới thiệu tác phẩm</a:t>
+            </a:r>
+          </a:p>
+          <a:p>
+            <a:pPr algn="ctr"/>
+            <a:r>
+              <a:rPr sz="1300" b="0">
+                <a:solidFill>
+                  <a:srgbClr val="000000"/>
+                </a:solidFill>
+                <a:latin typeface="Calibri"/>
+              </a:rPr>
+              <a:t>nghệ thuật</a:t>
+            </a:r>
+          </a:p>
+        </p:txBody>
+      </p:sp>
+      <p:cxnSp>
+        <p:nvCxnSpPr>
+          <p:cNvPr id="44" name="Connector 43"/>
+          <p:cNvCxnSpPr/>
+          <p:nvPr/>
+        </p:nvCxnSpPr>
+        <p:spPr>
+          <a:xfrm>
+            <a:off x="7715646" y="5238597"/>
+            <a:ext cx="1617037" cy="941268"/>
+          </a:xfrm>
+          <a:prstGeom prst="line">
+            <a:avLst/>
+          </a:prstGeom>
+          <a:ln w="15875">
+            <a:solidFill>
+              <a:srgbClr val="7030A0"/>
+            </a:solidFill>
+          </a:ln>
+        </p:spPr>
+        <p:style>
+          <a:lnRef idx="2">
+            <a:schemeClr val="accent1"/>
+          </a:lnRef>
+          <a:fillRef idx="0">
+            <a:schemeClr val="accent1"/>
+          </a:fillRef>
+          <a:effectRef idx="1">
+            <a:schemeClr val="accent1"/>
+          </a:effectRef>
+          <a:fontRef idx="minor">
+            <a:schemeClr val="tx1"/>
+          </a:fontRef>
+        </p:style>
+      </p:cxnSp>
+      <p:sp>
+        <p:nvSpPr>
+          <p:cNvPr id="45" name="Rounded Rectangle 44"/>
+          <p:cNvSpPr/>
+          <p:nvPr/>
+        </p:nvSpPr>
+        <p:spPr>
+          <a:xfrm>
+            <a:off x="9332683" y="5903554"/>
+            <a:ext cx="1831061" cy="552622"/>
+          </a:xfrm>
+          <a:prstGeom prst="roundRect">
+            <a:avLst>
+              <a:gd name="adj" fmla="val 50000"/>
+            </a:avLst>
+          </a:prstGeom>
+          <a:solidFill>
+            <a:srgbClr val="F3E8F7"/>
+          </a:solidFill>
+          <a:ln w="15875">
+            <a:solidFill>
+              <a:srgbClr val="7030A0"/>
+            </a:solidFill>
+          </a:ln>
+          <a:effectLst/>
+        </p:spPr>
+        <p:style>
+          <a:lnRef idx="1">
+            <a:schemeClr val="accent1"/>
+          </a:lnRef>
+          <a:fillRef idx="3">
+            <a:schemeClr val="accent1"/>
+          </a:fillRef>
+          <a:effectRef idx="2">
+            <a:schemeClr val="accent1"/>
+          </a:effectRef>
+          <a:fontRef idx="minor">
+            <a:schemeClr val="lt1"/>
+          </a:fontRef>
+        </p:style>
+        <p:txBody>
+          <a:bodyPr rtlCol="0" anchor="ctr" wrap="none" lIns="64000" rIns="64000" tIns="25400" bIns="25400"/>
+          <a:lstStyle/>
+          <a:p>
+            <a:pPr algn="ctr"/>
+            <a:r>
+              <a:rPr sz="1300" b="0">
+                <a:solidFill>
+                  <a:srgbClr val="000000"/>
+                </a:solidFill>
+                <a:latin typeface="Calibri"/>
+              </a:rPr>
+              <a:t>Củng cố trực tuyến</a:t>
+            </a:r>
+          </a:p>
+          <a:p>
+            <a:pPr algn="ctr"/>
+            <a:r>
+              <a:rPr sz="1300" b="0">
+                <a:solidFill>
+                  <a:srgbClr val="000000"/>
+                </a:solidFill>
+                <a:latin typeface="Calibri"/>
+              </a:rPr>
+              <a:t>(QR)</a:t>
+            </a:r>
+          </a:p>
+        </p:txBody>
+      </p:sp>
+      <p:sp>
+        <p:nvSpPr>
+          <p:cNvPr id="46" name="Oval 45"/>
+          <p:cNvSpPr/>
+          <p:nvPr/>
+        </p:nvSpPr>
+        <p:spPr>
+          <a:xfrm>
+            <a:off x="6740679" y="4658216"/>
+            <a:ext cx="1949933" cy="1160762"/>
+          </a:xfrm>
+          <a:prstGeom prst="ellipse">
+            <a:avLst/>
+          </a:prstGeom>
+          <a:solidFill>
+            <a:srgbClr val="FFF2CC"/>
+          </a:solidFill>
+          <a:ln w="31750">
+            <a:solidFill>
+              <a:srgbClr val="BF8F00"/>
+            </a:solidFill>
+          </a:ln>
+          <a:effectLst/>
+        </p:spPr>
+        <p:style>
+          <a:lnRef idx="1">
+            <a:schemeClr val="accent1"/>
+          </a:lnRef>
+          <a:fillRef idx="3">
+            <a:schemeClr val="accent1"/>
+          </a:fillRef>
+          <a:effectRef idx="2">
+            <a:schemeClr val="accent1"/>
+          </a:effectRef>
+          <a:fontRef idx="minor">
+            <a:schemeClr val="lt1"/>
+          </a:fontRef>
+        </p:style>
+        <p:txBody>
+          <a:bodyPr rtlCol="0" anchor="ctr" wrap="none" lIns="64000" rIns="64000" tIns="25400" bIns="25400"/>
+          <a:lstStyle/>
+          <a:p>
+            <a:pPr algn="ctr"/>
+            <a:r>
+              <a:rPr sz="1500" b="1">
+                <a:solidFill>
+                  <a:srgbClr val="000000"/>
+                </a:solidFill>
+                <a:latin typeface="Calibri"/>
+              </a:rPr>
+              <a:t>④ Tiếng Việt</a:t>
+            </a:r>
+          </a:p>
+          <a:p>
+            <a:pPr algn="ctr"/>
+            <a:r>
+              <a:rPr sz="1500" b="1">
+                <a:solidFill>
+                  <a:srgbClr val="000000"/>
+                </a:solidFill>
+                <a:latin typeface="Calibri"/>
+              </a:rPr>
+              <a:t>– Viết –</a:t>
+            </a:r>
+          </a:p>
+          <a:p>
+            <a:pPr algn="ctr"/>
+            <a:r>
+              <a:rPr sz="1500" b="1">
+                <a:solidFill>
+                  <a:srgbClr val="000000"/>
+                </a:solidFill>
+                <a:latin typeface="Calibri"/>
+              </a:rPr>
+              <a:t>Nói</a:t>
+            </a:r>
+          </a:p>
+        </p:txBody>
+      </p:sp>
+      <p:sp>
+        <p:nvSpPr>
+          <p:cNvPr id="47" name="Oval 46"/>
+          <p:cNvSpPr/>
+          <p:nvPr/>
+        </p:nvSpPr>
+        <p:spPr>
+          <a:xfrm>
+            <a:off x="5177116" y="3484793"/>
+            <a:ext cx="1700302" cy="939972"/>
+          </a:xfrm>
+          <a:prstGeom prst="ellipse">
+            <a:avLst/>
+          </a:prstGeom>
+          <a:solidFill>
+            <a:srgbClr val="002060"/>
+          </a:solidFill>
+          <a:ln w="25400">
+            <a:solidFill>
+              <a:srgbClr val="000B1E"/>
+            </a:solidFill>
+          </a:ln>
+          <a:effectLst/>
+        </p:spPr>
+        <p:style>
+          <a:lnRef idx="1">
+            <a:schemeClr val="accent1"/>
+          </a:lnRef>
+          <a:fillRef idx="3">
+            <a:schemeClr val="accent1"/>
+          </a:fillRef>
+          <a:effectRef idx="2">
+            <a:schemeClr val="accent1"/>
+          </a:effectRef>
+          <a:fontRef idx="minor">
+            <a:schemeClr val="lt1"/>
+          </a:fontRef>
+        </p:style>
+        <p:txBody>
+          <a:bodyPr rtlCol="0" anchor="ctr" wrap="none" lIns="64000" rIns="64000" tIns="25400" bIns="25400"/>
+          <a:lstStyle/>
+          <a:p>
+            <a:pPr algn="ctr"/>
+            <a:r>
+              <a:rPr sz="1700" b="1">
+                <a:solidFill>
+                  <a:srgbClr val="FFFFFF"/>
+                </a:solidFill>
+                <a:latin typeface="Calibri"/>
+              </a:rPr>
+              <a:t>CẤU TỨ VÀ</a:t>
+            </a:r>
+          </a:p>
+          <a:p>
+            <a:pPr algn="ctr"/>
+            <a:r>
+              <a:rPr sz="1700" b="1">
+                <a:solidFill>
+                  <a:srgbClr val="FFFFFF"/>
+                </a:solidFill>
+                <a:latin typeface="Calibri"/>
+              </a:rPr>
+              <a:t>HÌNH ẢNH</a:t>
+            </a:r>
+          </a:p>
+        </p:txBody>
+      </p:sp>
     </p:spTree>
   </p:cSld>
   <p:clrMapOvr>
